--- a/CareerPulse_Presentation.pptx
+++ b/CareerPulse_Presentation.pptx
@@ -13,9 +13,11 @@
     <p:sldId id="261" r:id="rId7"/>
     <p:sldId id="262" r:id="rId8"/>
     <p:sldId id="263" r:id="rId9"/>
+    <p:sldId id="264" r:id="rId10"/>
+    <p:sldId id="265" r:id="rId11"/>
   </p:sldIdLst>
   <p:notesMasterIdLst>
-    <p:notesMasterId r:id="rId10"/>
+    <p:notesMasterId r:id="rId12"/>
   </p:notesMasterIdLst>
   <p:sldSz cx="9144000" cy="5143500"/>
   <p:notesSz cx="5143500" cy="9144000"/>
@@ -551,6 +553,94 @@
 </p:notes>
 </file>
 
+<file path=ppt/notesSlides/notesSlide10.xml><?xml version="1.0" encoding="utf-8"?>
+<p:notes xmlns:a="http://schemas.openxmlformats.org/drawingml/2006/main" xmlns:r="http://schemas.openxmlformats.org/officeDocument/2006/relationships" xmlns:p="http://schemas.openxmlformats.org/presentationml/2006/main">
+  <p:cSld>
+    <p:spTree>
+      <p:nvGrpSpPr>
+        <p:cNvPr id="1" name=""/>
+        <p:cNvGrpSpPr/>
+        <p:nvPr/>
+      </p:nvGrpSpPr>
+      <p:grpSpPr>
+        <a:xfrm>
+          <a:off x="0" y="0"/>
+          <a:ext cx="0" cy="0"/>
+          <a:chOff x="0" y="0"/>
+          <a:chExt cx="0" cy="0"/>
+        </a:xfrm>
+      </p:grpSpPr>
+      <p:sp>
+        <p:nvSpPr>
+          <p:cNvPr id="2" name="Slide Image Placeholder 1"/>
+          <p:cNvSpPr>
+            <a:spLocks noGrp="1" noRot="1" noChangeAspect="1"/>
+          </p:cNvSpPr>
+          <p:nvPr>
+            <p:ph type="sldImg"/>
+          </p:nvPr>
+        </p:nvSpPr>
+        <p:spPr/>
+      </p:sp>
+      <p:sp>
+        <p:nvSpPr>
+          <p:cNvPr id="3" name="Notes Placeholder 2"/>
+          <p:cNvSpPr>
+            <a:spLocks noGrp="1"/>
+          </p:cNvSpPr>
+          <p:nvPr>
+            <p:ph type="body" idx="1"/>
+          </p:nvPr>
+        </p:nvSpPr>
+        <p:spPr/>
+        <p:txBody>
+          <a:bodyPr/>
+          <a:lstStyle/>
+          <a:p>
+            <a:r>
+              <a:rPr lang="en-US" dirty="0"/>
+              <a:t/>
+            </a:r>
+            <a:endParaRPr lang="en-US" dirty="0"/>
+          </a:p>
+        </p:txBody>
+      </p:sp>
+      <p:sp>
+        <p:nvSpPr>
+          <p:cNvPr id="4" name="Slide Number Placeholder 3"/>
+          <p:cNvSpPr>
+            <a:spLocks noGrp="1"/>
+          </p:cNvSpPr>
+          <p:nvPr>
+            <p:ph type="sldNum" sz="quarter" idx="10"/>
+          </p:nvPr>
+        </p:nvSpPr>
+        <p:spPr/>
+        <p:txBody>
+          <a:bodyPr/>
+          <a:lstStyle/>
+          <a:p>
+            <a:fld id="{F7021451-1387-4CA6-816F-3879F97B5CBC}" type="slidenum">
+              <a:rPr lang="en-US"/>
+              <a:t>10</a:t>
+            </a:fld>
+            <a:endParaRPr lang="en-US"/>
+          </a:p>
+        </p:txBody>
+      </p:sp>
+    </p:spTree>
+    <p:extLst>
+      <p:ext uri="{BB962C8B-B14F-4D97-AF65-F5344CB8AC3E}">
+        <p14:creationId xmlns:p14="http://schemas.microsoft.com/office/powerpoint/2010/main" val="1024086991"/>
+      </p:ext>
+    </p:extLst>
+  </p:cSld>
+  <p:clrMapOvr>
+    <a:masterClrMapping/>
+  </p:clrMapOvr>
+</p:notes>
+</file>
+
 <file path=ppt/notesSlides/notesSlide2.xml><?xml version="1.0" encoding="utf-8"?>
 <p:notes xmlns:a="http://schemas.openxmlformats.org/drawingml/2006/main" xmlns:r="http://schemas.openxmlformats.org/officeDocument/2006/relationships" xmlns:p="http://schemas.openxmlformats.org/presentationml/2006/main">
   <p:cSld>
@@ -1149,6 +1239,94 @@
             <a:fld id="{F7021451-1387-4CA6-816F-3879F97B5CBC}" type="slidenum">
               <a:rPr lang="en-US"/>
               <a:t>8</a:t>
+            </a:fld>
+            <a:endParaRPr lang="en-US"/>
+          </a:p>
+        </p:txBody>
+      </p:sp>
+    </p:spTree>
+    <p:extLst>
+      <p:ext uri="{BB962C8B-B14F-4D97-AF65-F5344CB8AC3E}">
+        <p14:creationId xmlns:p14="http://schemas.microsoft.com/office/powerpoint/2010/main" val="1024086991"/>
+      </p:ext>
+    </p:extLst>
+  </p:cSld>
+  <p:clrMapOvr>
+    <a:masterClrMapping/>
+  </p:clrMapOvr>
+</p:notes>
+</file>
+
+<file path=ppt/notesSlides/notesSlide9.xml><?xml version="1.0" encoding="utf-8"?>
+<p:notes xmlns:a="http://schemas.openxmlformats.org/drawingml/2006/main" xmlns:r="http://schemas.openxmlformats.org/officeDocument/2006/relationships" xmlns:p="http://schemas.openxmlformats.org/presentationml/2006/main">
+  <p:cSld>
+    <p:spTree>
+      <p:nvGrpSpPr>
+        <p:cNvPr id="1" name=""/>
+        <p:cNvGrpSpPr/>
+        <p:nvPr/>
+      </p:nvGrpSpPr>
+      <p:grpSpPr>
+        <a:xfrm>
+          <a:off x="0" y="0"/>
+          <a:ext cx="0" cy="0"/>
+          <a:chOff x="0" y="0"/>
+          <a:chExt cx="0" cy="0"/>
+        </a:xfrm>
+      </p:grpSpPr>
+      <p:sp>
+        <p:nvSpPr>
+          <p:cNvPr id="2" name="Slide Image Placeholder 1"/>
+          <p:cNvSpPr>
+            <a:spLocks noGrp="1" noRot="1" noChangeAspect="1"/>
+          </p:cNvSpPr>
+          <p:nvPr>
+            <p:ph type="sldImg"/>
+          </p:nvPr>
+        </p:nvSpPr>
+        <p:spPr/>
+      </p:sp>
+      <p:sp>
+        <p:nvSpPr>
+          <p:cNvPr id="3" name="Notes Placeholder 2"/>
+          <p:cNvSpPr>
+            <a:spLocks noGrp="1"/>
+          </p:cNvSpPr>
+          <p:nvPr>
+            <p:ph type="body" idx="1"/>
+          </p:nvPr>
+        </p:nvSpPr>
+        <p:spPr/>
+        <p:txBody>
+          <a:bodyPr/>
+          <a:lstStyle/>
+          <a:p>
+            <a:r>
+              <a:rPr lang="en-US" dirty="0"/>
+              <a:t/>
+            </a:r>
+            <a:endParaRPr lang="en-US" dirty="0"/>
+          </a:p>
+        </p:txBody>
+      </p:sp>
+      <p:sp>
+        <p:nvSpPr>
+          <p:cNvPr id="4" name="Slide Number Placeholder 3"/>
+          <p:cNvSpPr>
+            <a:spLocks noGrp="1"/>
+          </p:cNvSpPr>
+          <p:nvPr>
+            <p:ph type="sldNum" sz="quarter" idx="10"/>
+          </p:nvPr>
+        </p:nvSpPr>
+        <p:spPr/>
+        <p:txBody>
+          <a:bodyPr/>
+          <a:lstStyle/>
+          <a:p>
+            <a:fld id="{F7021451-1387-4CA6-816F-3879F97B5CBC}" type="slidenum">
+              <a:rPr lang="en-US"/>
+              <a:t>9</a:t>
             </a:fld>
             <a:endParaRPr lang="en-US"/>
           </a:p>
@@ -1782,6 +1960,314 @@
 </p:sld>
 </file>
 
+<file path=ppt/slides/slide10.xml><?xml version="1.0" encoding="utf-8"?>
+<p:sld xmlns:a="http://schemas.openxmlformats.org/drawingml/2006/main" xmlns:r="http://schemas.openxmlformats.org/officeDocument/2006/relationships" xmlns:p="http://schemas.openxmlformats.org/presentationml/2006/main">
+  <p:cSld name="Slide 10">
+    <p:bg>
+      <p:bgPr>
+        <a:solidFill>
+          <a:srgbClr val="0B0F19"/>
+        </a:solidFill>
+      </p:bgPr>
+    </p:bg>
+    <p:spTree>
+      <p:nvGrpSpPr>
+        <p:cNvPr id="1" name=""/>
+        <p:cNvGrpSpPr/>
+        <p:nvPr/>
+      </p:nvGrpSpPr>
+      <p:grpSpPr>
+        <a:xfrm>
+          <a:off x="0" y="0"/>
+          <a:ext cx="0" cy="0"/>
+          <a:chOff x="0" y="0"/>
+          <a:chExt cx="0" cy="0"/>
+        </a:xfrm>
+      </p:grpSpPr>
+      <p:sp>
+        <p:nvSpPr>
+          <p:cNvPr id="2" name="Text 0"/>
+          <p:cNvSpPr/>
+          <p:nvPr/>
+        </p:nvSpPr>
+        <p:spPr>
+          <a:xfrm>
+            <a:off x="731520" y="548640"/>
+            <a:ext cx="9144000" cy="274320"/>
+          </a:xfrm>
+          <a:prstGeom prst="rect">
+            <a:avLst/>
+          </a:prstGeom>
+          <a:noFill/>
+          <a:ln/>
+        </p:spPr>
+        <p:txBody>
+          <a:bodyPr wrap="square" rtlCol="0" anchor="ctr"/>
+          <a:lstStyle/>
+          <a:p>
+            <a:pPr indent="0" marL="0">
+              <a:buNone/>
+            </a:pPr>
+            <a:r>
+              <a:rPr lang="en-US" sz="1000" b="1" dirty="0">
+                <a:solidFill>
+                  <a:srgbClr val="06B6D4"/>
+                </a:solidFill>
+              </a:rPr>
+              <a:t>09 / CONCLUSION &amp; SUMMARY</a:t>
+            </a:r>
+            <a:endParaRPr lang="en-US" sz="1000" dirty="0"/>
+          </a:p>
+        </p:txBody>
+      </p:sp>
+      <p:sp>
+        <p:nvSpPr>
+          <p:cNvPr id="3" name="Text 1"/>
+          <p:cNvSpPr/>
+          <p:nvPr/>
+        </p:nvSpPr>
+        <p:spPr>
+          <a:xfrm>
+            <a:off x="731520" y="822960"/>
+            <a:ext cx="10515600" cy="548640"/>
+          </a:xfrm>
+          <a:prstGeom prst="rect">
+            <a:avLst/>
+          </a:prstGeom>
+          <a:noFill/>
+          <a:ln/>
+        </p:spPr>
+        <p:txBody>
+          <a:bodyPr wrap="square" rtlCol="0" anchor="ctr"/>
+          <a:lstStyle/>
+          <a:p>
+            <a:pPr indent="0" marL="0">
+              <a:buNone/>
+            </a:pPr>
+            <a:r>
+              <a:rPr lang="en-US" sz="2800" b="1" dirty="0">
+                <a:solidFill>
+                  <a:srgbClr val="FFFFFF"/>
+                </a:solidFill>
+              </a:rPr>
+              <a:t>CareerPulse: Engineering Impact Summary</a:t>
+            </a:r>
+            <a:endParaRPr lang="en-US" sz="2800" dirty="0"/>
+          </a:p>
+        </p:txBody>
+      </p:sp>
+      <p:sp>
+        <p:nvSpPr>
+          <p:cNvPr id="4" name="Shape 2"/>
+          <p:cNvSpPr/>
+          <p:nvPr/>
+        </p:nvSpPr>
+        <p:spPr>
+          <a:xfrm>
+            <a:off x="731520" y="1645920"/>
+            <a:ext cx="10698480" cy="4206240"/>
+          </a:xfrm>
+          <a:prstGeom prst="roundRect">
+            <a:avLst/>
+          </a:prstGeom>
+          <a:solidFill>
+            <a:srgbClr val="151E32"/>
+          </a:solidFill>
+          <a:ln w="19050">
+            <a:solidFill>
+              <a:srgbClr val="6366F1"/>
+            </a:solidFill>
+            <a:prstDash val="solid"/>
+          </a:ln>
+        </p:spPr>
+      </p:sp>
+      <p:sp>
+        <p:nvSpPr>
+          <p:cNvPr id="5" name="Text 3"/>
+          <p:cNvSpPr/>
+          <p:nvPr/>
+        </p:nvSpPr>
+        <p:spPr>
+          <a:xfrm>
+            <a:off x="1097280" y="1920240"/>
+            <a:ext cx="9601200" cy="365760"/>
+          </a:xfrm>
+          <a:prstGeom prst="rect">
+            <a:avLst/>
+          </a:prstGeom>
+          <a:noFill/>
+          <a:ln/>
+        </p:spPr>
+        <p:txBody>
+          <a:bodyPr wrap="square" rtlCol="0" anchor="ctr"/>
+          <a:lstStyle/>
+          <a:p>
+            <a:pPr indent="0" marL="0">
+              <a:buNone/>
+            </a:pPr>
+            <a:r>
+              <a:rPr lang="en-US" sz="1800" b="1" dirty="0">
+                <a:solidFill>
+                  <a:srgbClr val="FFFFFF"/>
+                </a:solidFill>
+              </a:rPr>
+              <a:t>Key Takeaways &amp; Value Delivered</a:t>
+            </a:r>
+            <a:endParaRPr lang="en-US" sz="1800" dirty="0"/>
+          </a:p>
+        </p:txBody>
+      </p:sp>
+      <p:sp>
+        <p:nvSpPr>
+          <p:cNvPr id="6" name="Text 4"/>
+          <p:cNvSpPr/>
+          <p:nvPr/>
+        </p:nvSpPr>
+        <p:spPr>
+          <a:xfrm>
+            <a:off x="1097280" y="2468880"/>
+            <a:ext cx="9875520" cy="3017520"/>
+          </a:xfrm>
+          <a:prstGeom prst="rect">
+            <a:avLst/>
+          </a:prstGeom>
+          <a:noFill/>
+          <a:ln/>
+        </p:spPr>
+        <p:txBody>
+          <a:bodyPr wrap="square" rtlCol="0" anchor="ctr"/>
+          <a:lstStyle/>
+          <a:p>
+            <a:pPr indent="0" marL="0">
+              <a:lnSpc>
+                <a:spcPts val="2200"/>
+              </a:lnSpc>
+              <a:buNone/>
+            </a:pPr>
+            <a:r>
+              <a:rPr lang="en-US" sz="1300" dirty="0">
+                <a:solidFill>
+                  <a:srgbClr val="94A3B8"/>
+                </a:solidFill>
+              </a:rPr>
+              <a:t>✓ Zero-Downtime Reliability: Handled cloud 503 capacity errors through automated multi-model fallback and local CPRW heuristic failover.</a:t>
+            </a:r>
+            <a:endParaRPr lang="en-US" sz="1300" dirty="0"/>
+          </a:p>
+          <a:p>
+            <a:pPr indent="0" marL="0">
+              <a:lnSpc>
+                <a:spcPts val="2200"/>
+              </a:lnSpc>
+              <a:buNone/>
+            </a:pPr>
+            <a:endParaRPr lang="en-US" sz="1300" dirty="0"/>
+          </a:p>
+          <a:p>
+            <a:pPr indent="0" marL="0">
+              <a:lnSpc>
+                <a:spcPts val="2200"/>
+              </a:lnSpc>
+              <a:buNone/>
+            </a:pPr>
+            <a:r>
+              <a:rPr lang="en-US" sz="1300" dirty="0">
+                <a:solidFill>
+                  <a:srgbClr val="94A3B8"/>
+                </a:solidFill>
+              </a:rPr>
+              <a:t>✓ True Multimodal Auditing: Evaluated both visual scan layouts (OCR) and structured textual resumes with high fidelity.</a:t>
+            </a:r>
+            <a:endParaRPr lang="en-US" sz="1300" dirty="0"/>
+          </a:p>
+          <a:p>
+            <a:pPr indent="0" marL="0">
+              <a:lnSpc>
+                <a:spcPts val="2200"/>
+              </a:lnSpc>
+              <a:buNone/>
+            </a:pPr>
+            <a:endParaRPr lang="en-US" sz="1300" dirty="0"/>
+          </a:p>
+          <a:p>
+            <a:pPr indent="0" marL="0">
+              <a:lnSpc>
+                <a:spcPts val="2200"/>
+              </a:lnSpc>
+              <a:buNone/>
+            </a:pPr>
+            <a:r>
+              <a:rPr lang="en-US" sz="1300" dirty="0">
+                <a:solidFill>
+                  <a:srgbClr val="94A3B8"/>
+                </a:solidFill>
+              </a:rPr>
+              <a:t>✓ Actionable Career Intelligence: Delivered instant Google XYZ transformations, tailored cover letters, and targeted STAR interview prep.</a:t>
+            </a:r>
+            <a:endParaRPr lang="en-US" sz="1300" dirty="0"/>
+          </a:p>
+          <a:p>
+            <a:pPr indent="0" marL="0">
+              <a:lnSpc>
+                <a:spcPts val="2200"/>
+              </a:lnSpc>
+              <a:buNone/>
+            </a:pPr>
+            <a:endParaRPr lang="en-US" sz="1300" dirty="0"/>
+          </a:p>
+          <a:p>
+            <a:pPr indent="0" marL="0">
+              <a:lnSpc>
+                <a:spcPts val="2200"/>
+              </a:lnSpc>
+              <a:buNone/>
+            </a:pPr>
+            <a:r>
+              <a:rPr lang="en-US" sz="1300" dirty="0">
+                <a:solidFill>
+                  <a:srgbClr val="94A3B8"/>
+                </a:solidFill>
+              </a:rPr>
+              <a:t>✓ Real-Time Performance: Cached repetitive scans via SHA-256 in-memory LRU cache, bringing re-audit latency down to milliseconds.</a:t>
+            </a:r>
+            <a:endParaRPr lang="en-US" sz="1300" dirty="0"/>
+          </a:p>
+          <a:p>
+            <a:pPr indent="0" marL="0">
+              <a:lnSpc>
+                <a:spcPts val="2200"/>
+              </a:lnSpc>
+              <a:buNone/>
+            </a:pPr>
+            <a:endParaRPr lang="en-US" sz="1300" dirty="0"/>
+          </a:p>
+          <a:p>
+            <a:pPr indent="0" marL="0">
+              <a:lnSpc>
+                <a:spcPts val="2200"/>
+              </a:lnSpc>
+              <a:buNone/>
+            </a:pPr>
+            <a:r>
+              <a:rPr lang="en-US" sz="1300" dirty="0">
+                <a:solidFill>
+                  <a:srgbClr val="94A3B8"/>
+                </a:solidFill>
+              </a:rPr>
+              <a:t>✓ Exportable Deliverables: Provided full PDF export, interactive slide deck viewer, and native Microsoft PowerPoint (.pptx) download.</a:t>
+            </a:r>
+            <a:endParaRPr lang="en-US" sz="1300" dirty="0"/>
+          </a:p>
+        </p:txBody>
+      </p:sp>
+    </p:spTree>
+  </p:cSld>
+  <p:clrMapOvr>
+    <a:masterClrMapping/>
+  </p:clrMapOvr>
+</p:sld>
+</file>
+
 <file path=ppt/slides/slide2.xml><?xml version="1.0" encoding="utf-8"?>
 <p:sld xmlns:a="http://schemas.openxmlformats.org/drawingml/2006/main" xmlns:r="http://schemas.openxmlformats.org/officeDocument/2006/relationships" xmlns:p="http://schemas.openxmlformats.org/presentationml/2006/main">
   <p:cSld name="Slide 2">
@@ -3028,7 +3514,7 @@
         </p:nvSpPr>
         <p:spPr>
           <a:xfrm>
-            <a:off x="731520" y="548640"/>
+            <a:off x="731520" y="457200"/>
             <a:ext cx="9144000" cy="274320"/>
           </a:xfrm>
           <a:prstGeom prst="rect">
@@ -3050,7 +3536,7 @@
                   <a:srgbClr val="F43F5E"/>
                 </a:solidFill>
               </a:rPr>
-              <a:t>03 / RELIABILITY DEEP DIVE</a:t>
+              <a:t>03 / INCIDENT SCREENSHOT &amp; ROOT CAUSE</a:t>
             </a:r>
             <a:endParaRPr lang="en-US" sz="1000" dirty="0"/>
           </a:p>
@@ -3064,31 +3550,31 @@
         </p:nvSpPr>
         <p:spPr>
           <a:xfrm>
-            <a:off x="731520" y="822960"/>
-            <a:ext cx="10515600" cy="548640"/>
-          </a:xfrm>
-          <a:prstGeom prst="rect">
-            <a:avLst/>
-          </a:prstGeom>
-          <a:noFill/>
-          <a:ln/>
-        </p:spPr>
-        <p:txBody>
-          <a:bodyPr wrap="square" rtlCol="0" anchor="ctr"/>
-          <a:lstStyle/>
-          <a:p>
-            <a:pPr indent="0" marL="0">
-              <a:buNone/>
-            </a:pPr>
-            <a:r>
-              <a:rPr lang="en-US" sz="2800" b="1" dirty="0">
+            <a:off x="731520" y="731520"/>
+            <a:ext cx="10515600" cy="457200"/>
+          </a:xfrm>
+          <a:prstGeom prst="rect">
+            <a:avLst/>
+          </a:prstGeom>
+          <a:noFill/>
+          <a:ln/>
+        </p:spPr>
+        <p:txBody>
+          <a:bodyPr wrap="square" rtlCol="0" anchor="ctr"/>
+          <a:lstStyle/>
+          <a:p>
+            <a:pPr indent="0" marL="0">
+              <a:buNone/>
+            </a:pPr>
+            <a:r>
+              <a:rPr lang="en-US" sz="2400" b="1" dirty="0">
                 <a:solidFill>
                   <a:srgbClr val="FFFFFF"/>
                 </a:solidFill>
               </a:rPr>
-              <a:t>Eliminating the 503 Model Demand Failure</a:t>
-            </a:r>
-            <a:endParaRPr lang="en-US" sz="2800" dirty="0"/>
+              <a:t>Website Screenshot: 503 Model Demand Failure</a:t>
+            </a:r>
+            <a:endParaRPr lang="en-US" sz="2400" dirty="0"/>
           </a:p>
         </p:txBody>
       </p:sp>
@@ -3100,16 +3586,864 @@
         </p:nvSpPr>
         <p:spPr>
           <a:xfrm>
-            <a:off x="731520" y="1645920"/>
-            <a:ext cx="5120640" cy="4206240"/>
+            <a:off x="731520" y="1325880"/>
+            <a:ext cx="10698480" cy="4572000"/>
           </a:xfrm>
           <a:prstGeom prst="roundRect">
             <a:avLst/>
           </a:prstGeom>
           <a:solidFill>
-            <a:srgbClr val="1C1318"/>
+            <a:srgbClr val="0F172A"/>
           </a:solidFill>
           <a:ln w="19050">
+            <a:solidFill>
+              <a:srgbClr val="334155"/>
+            </a:solidFill>
+            <a:prstDash val="solid"/>
+          </a:ln>
+        </p:spPr>
+      </p:sp>
+      <p:sp>
+        <p:nvSpPr>
+          <p:cNvPr id="5" name="Shape 3"/>
+          <p:cNvSpPr/>
+          <p:nvPr/>
+        </p:nvSpPr>
+        <p:spPr>
+          <a:xfrm>
+            <a:off x="731520" y="1325880"/>
+            <a:ext cx="10698480" cy="384048"/>
+          </a:xfrm>
+          <a:prstGeom prst="rect">
+            <a:avLst/>
+          </a:prstGeom>
+          <a:solidFill>
+            <a:srgbClr val="1E293B"/>
+          </a:solidFill>
+          <a:ln/>
+        </p:spPr>
+      </p:sp>
+      <p:sp>
+        <p:nvSpPr>
+          <p:cNvPr id="6" name="Shape 4"/>
+          <p:cNvSpPr/>
+          <p:nvPr/>
+        </p:nvSpPr>
+        <p:spPr>
+          <a:xfrm>
+            <a:off x="868680" y="1453896"/>
+            <a:ext cx="128016" cy="128016"/>
+          </a:xfrm>
+          <a:prstGeom prst="ellipse">
+            <a:avLst/>
+          </a:prstGeom>
+          <a:solidFill>
+            <a:srgbClr val="EF4444"/>
+          </a:solidFill>
+          <a:ln/>
+        </p:spPr>
+      </p:sp>
+      <p:sp>
+        <p:nvSpPr>
+          <p:cNvPr id="7" name="Shape 5"/>
+          <p:cNvSpPr/>
+          <p:nvPr/>
+        </p:nvSpPr>
+        <p:spPr>
+          <a:xfrm>
+            <a:off x="1051560" y="1453896"/>
+            <a:ext cx="128016" cy="128016"/>
+          </a:xfrm>
+          <a:prstGeom prst="ellipse">
+            <a:avLst/>
+          </a:prstGeom>
+          <a:solidFill>
+            <a:srgbClr val="F59E0B"/>
+          </a:solidFill>
+          <a:ln/>
+        </p:spPr>
+      </p:sp>
+      <p:sp>
+        <p:nvSpPr>
+          <p:cNvPr id="8" name="Shape 6"/>
+          <p:cNvSpPr/>
+          <p:nvPr/>
+        </p:nvSpPr>
+        <p:spPr>
+          <a:xfrm>
+            <a:off x="1234440" y="1453896"/>
+            <a:ext cx="128016" cy="128016"/>
+          </a:xfrm>
+          <a:prstGeom prst="ellipse">
+            <a:avLst/>
+          </a:prstGeom>
+          <a:solidFill>
+            <a:srgbClr val="10B981"/>
+          </a:solidFill>
+          <a:ln/>
+        </p:spPr>
+      </p:sp>
+      <p:sp>
+        <p:nvSpPr>
+          <p:cNvPr id="9" name="Shape 7"/>
+          <p:cNvSpPr/>
+          <p:nvPr/>
+        </p:nvSpPr>
+        <p:spPr>
+          <a:xfrm>
+            <a:off x="1554480" y="1399032"/>
+            <a:ext cx="9052560" cy="237744"/>
+          </a:xfrm>
+          <a:prstGeom prst="roundRect">
+            <a:avLst/>
+          </a:prstGeom>
+          <a:solidFill>
+            <a:srgbClr val="0F172A"/>
+          </a:solidFill>
+          <a:ln w="12700">
+            <a:solidFill>
+              <a:srgbClr val="334155"/>
+            </a:solidFill>
+            <a:prstDash val="solid"/>
+          </a:ln>
+        </p:spPr>
+      </p:sp>
+      <p:sp>
+        <p:nvSpPr>
+          <p:cNvPr id="10" name="Text 8"/>
+          <p:cNvSpPr/>
+          <p:nvPr/>
+        </p:nvSpPr>
+        <p:spPr>
+          <a:xfrm>
+            <a:off x="1645920" y="1399032"/>
+            <a:ext cx="8869680" cy="237744"/>
+          </a:xfrm>
+          <a:prstGeom prst="rect">
+            <a:avLst/>
+          </a:prstGeom>
+          <a:noFill/>
+          <a:ln/>
+        </p:spPr>
+        <p:txBody>
+          <a:bodyPr wrap="square" rtlCol="0" anchor="ctr"/>
+          <a:lstStyle/>
+          <a:p>
+            <a:pPr indent="0" marL="0">
+              <a:buNone/>
+            </a:pPr>
+            <a:r>
+              <a:rPr lang="en-US" sz="900" dirty="0">
+                <a:solidFill>
+                  <a:srgbClr val="94A3B8"/>
+                </a:solidFill>
+                <a:latin typeface="Calibri" pitchFamily="34" charset="0"/>
+                <a:ea typeface="Calibri" pitchFamily="34" charset="-122"/>
+                <a:cs typeface="Calibri" pitchFamily="34" charset="-120"/>
+              </a:rPr>
+              <a:t>🔒 https://careerpulse.ai/analyzer-workspace</a:t>
+            </a:r>
+            <a:endParaRPr lang="en-US" sz="900" dirty="0"/>
+          </a:p>
+        </p:txBody>
+      </p:sp>
+      <p:sp>
+        <p:nvSpPr>
+          <p:cNvPr id="11" name="Shape 9"/>
+          <p:cNvSpPr/>
+          <p:nvPr/>
+        </p:nvSpPr>
+        <p:spPr>
+          <a:xfrm>
+            <a:off x="731520" y="1709928"/>
+            <a:ext cx="10698480" cy="457200"/>
+          </a:xfrm>
+          <a:prstGeom prst="rect">
+            <a:avLst/>
+          </a:prstGeom>
+          <a:solidFill>
+            <a:srgbClr val="090D16"/>
+          </a:solidFill>
+          <a:ln/>
+        </p:spPr>
+      </p:sp>
+      <p:sp>
+        <p:nvSpPr>
+          <p:cNvPr id="12" name="Text 10"/>
+          <p:cNvSpPr/>
+          <p:nvPr/>
+        </p:nvSpPr>
+        <p:spPr>
+          <a:xfrm>
+            <a:off x="914400" y="1783080"/>
+            <a:ext cx="2011680" cy="292608"/>
+          </a:xfrm>
+          <a:prstGeom prst="rect">
+            <a:avLst/>
+          </a:prstGeom>
+          <a:noFill/>
+          <a:ln/>
+        </p:spPr>
+        <p:txBody>
+          <a:bodyPr wrap="square" rtlCol="0" anchor="ctr"/>
+          <a:lstStyle/>
+          <a:p>
+            <a:pPr indent="0" marL="0">
+              <a:buNone/>
+            </a:pPr>
+            <a:r>
+              <a:rPr lang="en-US" sz="1200" b="1" dirty="0">
+                <a:solidFill>
+                  <a:srgbClr val="FFFFFF"/>
+                </a:solidFill>
+              </a:rPr>
+              <a:t>📄 CareerPulse</a:t>
+            </a:r>
+            <a:endParaRPr lang="en-US" sz="1200" dirty="0"/>
+          </a:p>
+        </p:txBody>
+      </p:sp>
+      <p:sp>
+        <p:nvSpPr>
+          <p:cNvPr id="13" name="Text 11"/>
+          <p:cNvSpPr/>
+          <p:nvPr/>
+        </p:nvSpPr>
+        <p:spPr>
+          <a:xfrm>
+            <a:off x="2926080" y="1810512"/>
+            <a:ext cx="6217920" cy="256032"/>
+          </a:xfrm>
+          <a:prstGeom prst="rect">
+            <a:avLst/>
+          </a:prstGeom>
+          <a:noFill/>
+          <a:ln/>
+        </p:spPr>
+        <p:txBody>
+          <a:bodyPr wrap="square" rtlCol="0" anchor="ctr"/>
+          <a:lstStyle/>
+          <a:p>
+            <a:pPr indent="0" marL="0">
+              <a:buNone/>
+            </a:pPr>
+            <a:r>
+              <a:rPr lang="en-US" sz="950" dirty="0">
+                <a:solidFill>
+                  <a:srgbClr val="64748B"/>
+                </a:solidFill>
+              </a:rPr>
+              <a:t>Analyzer Workspace    Sample Library (8)    Supported Formats    XYZ Methodology</a:t>
+            </a:r>
+            <a:endParaRPr lang="en-US" sz="950" dirty="0"/>
+          </a:p>
+        </p:txBody>
+      </p:sp>
+      <p:sp>
+        <p:nvSpPr>
+          <p:cNvPr id="14" name="Shape 12"/>
+          <p:cNvSpPr/>
+          <p:nvPr/>
+        </p:nvSpPr>
+        <p:spPr>
+          <a:xfrm>
+            <a:off x="9418320" y="1783080"/>
+            <a:ext cx="1737360" cy="292608"/>
+          </a:xfrm>
+          <a:prstGeom prst="roundRect">
+            <a:avLst/>
+          </a:prstGeom>
+          <a:solidFill>
+            <a:srgbClr val="4F46E5"/>
+          </a:solidFill>
+          <a:ln/>
+        </p:spPr>
+      </p:sp>
+      <p:sp>
+        <p:nvSpPr>
+          <p:cNvPr id="15" name="Text 13"/>
+          <p:cNvSpPr/>
+          <p:nvPr/>
+        </p:nvSpPr>
+        <p:spPr>
+          <a:xfrm>
+            <a:off x="9418320" y="1783080"/>
+            <a:ext cx="1737360" cy="292608"/>
+          </a:xfrm>
+          <a:prstGeom prst="rect">
+            <a:avLst/>
+          </a:prstGeom>
+          <a:noFill/>
+          <a:ln/>
+        </p:spPr>
+        <p:txBody>
+          <a:bodyPr wrap="square" rtlCol="0" anchor="ctr"/>
+          <a:lstStyle/>
+          <a:p>
+            <a:pPr algn="ctr" indent="0" marL="0">
+              <a:buNone/>
+            </a:pPr>
+            <a:r>
+              <a:rPr lang="en-US" sz="900" b="1" dirty="0">
+                <a:solidFill>
+                  <a:srgbClr val="FFFFFF"/>
+                </a:solidFill>
+              </a:rPr>
+              <a:t>Explore Samples</a:t>
+            </a:r>
+            <a:endParaRPr lang="en-US" sz="900" dirty="0"/>
+          </a:p>
+        </p:txBody>
+      </p:sp>
+      <p:sp>
+        <p:nvSpPr>
+          <p:cNvPr id="16" name="Shape 14"/>
+          <p:cNvSpPr/>
+          <p:nvPr/>
+        </p:nvSpPr>
+        <p:spPr>
+          <a:xfrm>
+            <a:off x="1097280" y="2331720"/>
+            <a:ext cx="9966960" cy="777240"/>
+          </a:xfrm>
+          <a:prstGeom prst="roundRect">
+            <a:avLst/>
+          </a:prstGeom>
+          <a:solidFill>
+            <a:srgbClr val="4C0519"/>
+          </a:solidFill>
+          <a:ln w="19050">
+            <a:solidFill>
+              <a:srgbClr val="9F1239"/>
+            </a:solidFill>
+            <a:prstDash val="solid"/>
+          </a:ln>
+        </p:spPr>
+      </p:sp>
+      <p:sp>
+        <p:nvSpPr>
+          <p:cNvPr id="17" name="Text 15"/>
+          <p:cNvSpPr/>
+          <p:nvPr/>
+        </p:nvSpPr>
+        <p:spPr>
+          <a:xfrm>
+            <a:off x="1280160" y="2423160"/>
+            <a:ext cx="3657600" cy="256032"/>
+          </a:xfrm>
+          <a:prstGeom prst="rect">
+            <a:avLst/>
+          </a:prstGeom>
+          <a:noFill/>
+          <a:ln/>
+        </p:spPr>
+        <p:txBody>
+          <a:bodyPr wrap="square" rtlCol="0" anchor="ctr"/>
+          <a:lstStyle/>
+          <a:p>
+            <a:pPr indent="0" marL="0">
+              <a:buNone/>
+            </a:pPr>
+            <a:r>
+              <a:rPr lang="en-US" sz="1100" b="1" dirty="0">
+                <a:solidFill>
+                  <a:srgbClr val="FFFFFF"/>
+                </a:solidFill>
+              </a:rPr>
+              <a:t>⚠️ Analysis Interrupted</a:t>
+            </a:r>
+            <a:endParaRPr lang="en-US" sz="1100" dirty="0"/>
+          </a:p>
+        </p:txBody>
+      </p:sp>
+      <p:sp>
+        <p:nvSpPr>
+          <p:cNvPr id="18" name="Text 16"/>
+          <p:cNvSpPr/>
+          <p:nvPr/>
+        </p:nvSpPr>
+        <p:spPr>
+          <a:xfrm>
+            <a:off x="1280160" y="2697480"/>
+            <a:ext cx="8686800" cy="347472"/>
+          </a:xfrm>
+          <a:prstGeom prst="rect">
+            <a:avLst/>
+          </a:prstGeom>
+          <a:noFill/>
+          <a:ln/>
+        </p:spPr>
+        <p:txBody>
+          <a:bodyPr wrap="square" rtlCol="0" anchor="ctr"/>
+          <a:lstStyle/>
+          <a:p>
+            <a:pPr indent="0" marL="0">
+              <a:buNone/>
+            </a:pPr>
+            <a:r>
+              <a:rPr lang="en-US" sz="850" dirty="0">
+                <a:solidFill>
+                  <a:srgbClr val="FDA4AF"/>
+                </a:solidFill>
+                <a:latin typeface="Consolas" pitchFamily="34" charset="0"/>
+                <a:ea typeface="Consolas" pitchFamily="34" charset="-122"/>
+                <a:cs typeface="Consolas" pitchFamily="34" charset="-120"/>
+              </a:rPr>
+              <a:t>{"error":{"code":503,"message":"This model is currently experiencing high demand. Spikes in demand are usually temporary. Please try again later.","status":"UNAVAILABLE"}}</a:t>
+            </a:r>
+            <a:endParaRPr lang="en-US" sz="850" dirty="0"/>
+          </a:p>
+        </p:txBody>
+      </p:sp>
+      <p:sp>
+        <p:nvSpPr>
+          <p:cNvPr id="19" name="Shape 17"/>
+          <p:cNvSpPr/>
+          <p:nvPr/>
+        </p:nvSpPr>
+        <p:spPr>
+          <a:xfrm>
+            <a:off x="10241280" y="2450592"/>
+            <a:ext cx="640080" cy="228600"/>
+          </a:xfrm>
+          <a:prstGeom prst="roundRect">
+            <a:avLst/>
+          </a:prstGeom>
+          <a:solidFill>
+            <a:srgbClr val="881337"/>
+          </a:solidFill>
+          <a:ln/>
+        </p:spPr>
+      </p:sp>
+      <p:sp>
+        <p:nvSpPr>
+          <p:cNvPr id="20" name="Text 18"/>
+          <p:cNvSpPr/>
+          <p:nvPr/>
+        </p:nvSpPr>
+        <p:spPr>
+          <a:xfrm>
+            <a:off x="10241280" y="2450592"/>
+            <a:ext cx="640080" cy="228600"/>
+          </a:xfrm>
+          <a:prstGeom prst="rect">
+            <a:avLst/>
+          </a:prstGeom>
+          <a:noFill/>
+          <a:ln/>
+        </p:spPr>
+        <p:txBody>
+          <a:bodyPr wrap="square" rtlCol="0" anchor="ctr"/>
+          <a:lstStyle/>
+          <a:p>
+            <a:pPr algn="ctr" indent="0" marL="0">
+              <a:buNone/>
+            </a:pPr>
+            <a:r>
+              <a:rPr lang="en-US" sz="850" dirty="0">
+                <a:solidFill>
+                  <a:srgbClr val="FFFFFF"/>
+                </a:solidFill>
+              </a:rPr>
+              <a:t>Dismiss</a:t>
+            </a:r>
+            <a:endParaRPr lang="en-US" sz="850" dirty="0"/>
+          </a:p>
+        </p:txBody>
+      </p:sp>
+      <p:sp>
+        <p:nvSpPr>
+          <p:cNvPr id="21" name="Text 19"/>
+          <p:cNvSpPr/>
+          <p:nvPr/>
+        </p:nvSpPr>
+        <p:spPr>
+          <a:xfrm>
+            <a:off x="1097280" y="3246120"/>
+            <a:ext cx="9966960" cy="228600"/>
+          </a:xfrm>
+          <a:prstGeom prst="rect">
+            <a:avLst/>
+          </a:prstGeom>
+          <a:noFill/>
+          <a:ln/>
+        </p:spPr>
+        <p:txBody>
+          <a:bodyPr wrap="square" rtlCol="0" anchor="ctr"/>
+          <a:lstStyle/>
+          <a:p>
+            <a:pPr algn="ctr" indent="0" marL="0">
+              <a:buNone/>
+            </a:pPr>
+            <a:r>
+              <a:rPr lang="en-US" sz="900" b="1" dirty="0">
+                <a:solidFill>
+                  <a:srgbClr val="06B6D4"/>
+                </a:solidFill>
+              </a:rPr>
+              <a:t>Multimodal ATS &amp; Vision OCR Engine • Sub-10s Turbo Audit • Designed by Shivam Kumar</a:t>
+            </a:r>
+            <a:endParaRPr lang="en-US" sz="900" dirty="0"/>
+          </a:p>
+        </p:txBody>
+      </p:sp>
+      <p:sp>
+        <p:nvSpPr>
+          <p:cNvPr id="22" name="Text 20"/>
+          <p:cNvSpPr/>
+          <p:nvPr/>
+        </p:nvSpPr>
+        <p:spPr>
+          <a:xfrm>
+            <a:off x="1097280" y="3493008"/>
+            <a:ext cx="9966960" cy="411480"/>
+          </a:xfrm>
+          <a:prstGeom prst="rect">
+            <a:avLst/>
+          </a:prstGeom>
+          <a:noFill/>
+          <a:ln/>
+        </p:spPr>
+        <p:txBody>
+          <a:bodyPr wrap="square" rtlCol="0" anchor="ctr"/>
+          <a:lstStyle/>
+          <a:p>
+            <a:pPr algn="ctr" indent="0" marL="0">
+              <a:buNone/>
+            </a:pPr>
+            <a:r>
+              <a:rPr lang="en-US" sz="1800" b="1" dirty="0">
+                <a:solidFill>
+                  <a:srgbClr val="FFFFFF"/>
+                </a:solidFill>
+              </a:rPr>
+              <a:t>Audit Any Resume in Seconds — PDF, Photo Scans, Word &amp; Plain Text</a:t>
+            </a:r>
+            <a:endParaRPr lang="en-US" sz="1800" dirty="0"/>
+          </a:p>
+        </p:txBody>
+      </p:sp>
+      <p:sp>
+        <p:nvSpPr>
+          <p:cNvPr id="23" name="Text 21"/>
+          <p:cNvSpPr/>
+          <p:nvPr/>
+        </p:nvSpPr>
+        <p:spPr>
+          <a:xfrm>
+            <a:off x="1097280" y="3931920"/>
+            <a:ext cx="9966960" cy="411480"/>
+          </a:xfrm>
+          <a:prstGeom prst="rect">
+            <a:avLst/>
+          </a:prstGeom>
+          <a:noFill/>
+          <a:ln/>
+        </p:spPr>
+        <p:txBody>
+          <a:bodyPr wrap="square" rtlCol="0" anchor="ctr"/>
+          <a:lstStyle/>
+          <a:p>
+            <a:pPr algn="ctr" indent="0" marL="0">
+              <a:buNone/>
+            </a:pPr>
+            <a:r>
+              <a:rPr lang="en-US" sz="1000" dirty="0">
+                <a:solidFill>
+                  <a:srgbClr val="94A3B8"/>
+                </a:solidFill>
+              </a:rPr>
+              <a:t>Upload a PDF, snap a camera photo of a printed resume, drop a DOCX file, or paste raw text.</a:t>
+            </a:r>
+            <a:endParaRPr lang="en-US" sz="1000" dirty="0"/>
+          </a:p>
+          <a:p>
+            <a:pPr algn="ctr" indent="0" marL="0">
+              <a:buNone/>
+            </a:pPr>
+            <a:r>
+              <a:rPr lang="en-US" sz="1000" dirty="0">
+                <a:solidFill>
+                  <a:srgbClr val="94A3B8"/>
+                </a:solidFill>
+              </a:rPr>
+              <a:t>Get instant ATS scoring, keyword gap matrices, and Google XYZ bullet rewrites in under 10 seconds.</a:t>
+            </a:r>
+            <a:endParaRPr lang="en-US" sz="1000" dirty="0"/>
+          </a:p>
+        </p:txBody>
+      </p:sp>
+      <p:sp>
+        <p:nvSpPr>
+          <p:cNvPr id="24" name="Shape 22"/>
+          <p:cNvSpPr/>
+          <p:nvPr/>
+        </p:nvSpPr>
+        <p:spPr>
+          <a:xfrm>
+            <a:off x="1097280" y="4480560"/>
+            <a:ext cx="9966960" cy="685800"/>
+          </a:xfrm>
+          <a:prstGeom prst="roundRect">
+            <a:avLst/>
+          </a:prstGeom>
+          <a:solidFill>
+            <a:srgbClr val="151E32"/>
+          </a:solidFill>
+          <a:ln w="12700">
+            <a:solidFill>
+              <a:srgbClr val="22314E"/>
+            </a:solidFill>
+            <a:prstDash val="solid"/>
+          </a:ln>
+        </p:spPr>
+      </p:sp>
+      <p:sp>
+        <p:nvSpPr>
+          <p:cNvPr id="25" name="Text 23"/>
+          <p:cNvSpPr/>
+          <p:nvPr/>
+        </p:nvSpPr>
+        <p:spPr>
+          <a:xfrm>
+            <a:off x="1280160" y="4553712"/>
+            <a:ext cx="6583680" cy="548640"/>
+          </a:xfrm>
+          <a:prstGeom prst="rect">
+            <a:avLst/>
+          </a:prstGeom>
+          <a:noFill/>
+          <a:ln/>
+        </p:spPr>
+        <p:txBody>
+          <a:bodyPr wrap="square" rtlCol="0" anchor="ctr"/>
+          <a:lstStyle/>
+          <a:p>
+            <a:pPr indent="0" marL="0">
+              <a:buNone/>
+            </a:pPr>
+            <a:r>
+              <a:rPr lang="en-US" sz="950" dirty="0">
+                <a:solidFill>
+                  <a:srgbClr val="FFFFFF"/>
+                </a:solidFill>
+              </a:rPr>
+              <a:t>Try a Pre-Loaded Sample Resume (8 Profiles Across All Formats)</a:t>
+            </a:r>
+            <a:endParaRPr lang="en-US" sz="950" dirty="0"/>
+          </a:p>
+          <a:p>
+            <a:pPr indent="0" marL="0">
+              <a:buNone/>
+            </a:pPr>
+            <a:r>
+              <a:rPr lang="en-US" sz="950" dirty="0">
+                <a:solidFill>
+                  <a:srgbClr val="FFFFFF"/>
+                </a:solidFill>
+              </a:rPr>
+              <a:t>Includes Java Architecture, Applied AI Photo Scan, DevOps SRE, Product Management</a:t>
+            </a:r>
+            <a:endParaRPr lang="en-US" sz="950" dirty="0"/>
+          </a:p>
+        </p:txBody>
+      </p:sp>
+      <p:sp>
+        <p:nvSpPr>
+          <p:cNvPr id="26" name="Shape 24"/>
+          <p:cNvSpPr/>
+          <p:nvPr/>
+        </p:nvSpPr>
+        <p:spPr>
+          <a:xfrm>
+            <a:off x="8046720" y="4645152"/>
+            <a:ext cx="731520" cy="292608"/>
+          </a:xfrm>
+          <a:prstGeom prst="roundRect">
+            <a:avLst/>
+          </a:prstGeom>
+          <a:solidFill>
+            <a:srgbClr val="4338CA"/>
+          </a:solidFill>
+          <a:ln/>
+        </p:spPr>
+      </p:sp>
+      <p:sp>
+        <p:nvSpPr>
+          <p:cNvPr id="27" name="Text 25"/>
+          <p:cNvSpPr/>
+          <p:nvPr/>
+        </p:nvSpPr>
+        <p:spPr>
+          <a:xfrm>
+            <a:off x="8046720" y="4645152"/>
+            <a:ext cx="731520" cy="292608"/>
+          </a:xfrm>
+          <a:prstGeom prst="rect">
+            <a:avLst/>
+          </a:prstGeom>
+          <a:noFill/>
+          <a:ln/>
+        </p:spPr>
+        <p:txBody>
+          <a:bodyPr wrap="square" rtlCol="0" anchor="ctr"/>
+          <a:lstStyle/>
+          <a:p>
+            <a:pPr algn="ctr" indent="0" marL="0">
+              <a:buNone/>
+            </a:pPr>
+            <a:r>
+              <a:rPr lang="en-US" sz="850" b="1" dirty="0">
+                <a:solidFill>
+                  <a:srgbClr val="FFFFFF"/>
+                </a:solidFill>
+              </a:rPr>
+              <a:t>All (8)</a:t>
+            </a:r>
+            <a:endParaRPr lang="en-US" sz="850" dirty="0"/>
+          </a:p>
+        </p:txBody>
+      </p:sp>
+      <p:sp>
+        <p:nvSpPr>
+          <p:cNvPr id="28" name="Shape 26"/>
+          <p:cNvSpPr/>
+          <p:nvPr/>
+        </p:nvSpPr>
+        <p:spPr>
+          <a:xfrm>
+            <a:off x="8869680" y="4645152"/>
+            <a:ext cx="1097280" cy="292608"/>
+          </a:xfrm>
+          <a:prstGeom prst="roundRect">
+            <a:avLst/>
+          </a:prstGeom>
+          <a:solidFill>
+            <a:srgbClr val="0F172A"/>
+          </a:solidFill>
+          <a:ln w="12700">
+            <a:solidFill>
+              <a:srgbClr val="334155"/>
+            </a:solidFill>
+            <a:prstDash val="solid"/>
+          </a:ln>
+        </p:spPr>
+      </p:sp>
+      <p:sp>
+        <p:nvSpPr>
+          <p:cNvPr id="29" name="Text 27"/>
+          <p:cNvSpPr/>
+          <p:nvPr/>
+        </p:nvSpPr>
+        <p:spPr>
+          <a:xfrm>
+            <a:off x="8869680" y="4645152"/>
+            <a:ext cx="1097280" cy="292608"/>
+          </a:xfrm>
+          <a:prstGeom prst="rect">
+            <a:avLst/>
+          </a:prstGeom>
+          <a:noFill/>
+          <a:ln/>
+        </p:spPr>
+        <p:txBody>
+          <a:bodyPr wrap="square" rtlCol="0" anchor="ctr"/>
+          <a:lstStyle/>
+          <a:p>
+            <a:pPr algn="ctr" indent="0" marL="0">
+              <a:buNone/>
+            </a:pPr>
+            <a:r>
+              <a:rPr lang="en-US" sz="850" dirty="0">
+                <a:solidFill>
+                  <a:srgbClr val="94A3B8"/>
+                </a:solidFill>
+              </a:rPr>
+              <a:t>Photo Scans (3)</a:t>
+            </a:r>
+            <a:endParaRPr lang="en-US" sz="850" dirty="0"/>
+          </a:p>
+        </p:txBody>
+      </p:sp>
+      <p:sp>
+        <p:nvSpPr>
+          <p:cNvPr id="30" name="Shape 28"/>
+          <p:cNvSpPr/>
+          <p:nvPr/>
+        </p:nvSpPr>
+        <p:spPr>
+          <a:xfrm>
+            <a:off x="10058400" y="4645152"/>
+            <a:ext cx="822960" cy="292608"/>
+          </a:xfrm>
+          <a:prstGeom prst="roundRect">
+            <a:avLst/>
+          </a:prstGeom>
+          <a:solidFill>
+            <a:srgbClr val="0F172A"/>
+          </a:solidFill>
+          <a:ln w="12700">
+            <a:solidFill>
+              <a:srgbClr val="334155"/>
+            </a:solidFill>
+            <a:prstDash val="solid"/>
+          </a:ln>
+        </p:spPr>
+      </p:sp>
+      <p:sp>
+        <p:nvSpPr>
+          <p:cNvPr id="31" name="Text 29"/>
+          <p:cNvSpPr/>
+          <p:nvPr/>
+        </p:nvSpPr>
+        <p:spPr>
+          <a:xfrm>
+            <a:off x="10058400" y="4645152"/>
+            <a:ext cx="822960" cy="292608"/>
+          </a:xfrm>
+          <a:prstGeom prst="rect">
+            <a:avLst/>
+          </a:prstGeom>
+          <a:noFill/>
+          <a:ln/>
+        </p:spPr>
+        <p:txBody>
+          <a:bodyPr wrap="square" rtlCol="0" anchor="ctr"/>
+          <a:lstStyle/>
+          <a:p>
+            <a:pPr algn="ctr" indent="0" marL="0">
+              <a:buNone/>
+            </a:pPr>
+            <a:r>
+              <a:rPr lang="en-US" sz="850" dirty="0">
+                <a:solidFill>
+                  <a:srgbClr val="94A3B8"/>
+                </a:solidFill>
+              </a:rPr>
+              <a:t>PDF (2)</a:t>
+            </a:r>
+            <a:endParaRPr lang="en-US" sz="850" dirty="0"/>
+          </a:p>
+        </p:txBody>
+      </p:sp>
+      <p:sp>
+        <p:nvSpPr>
+          <p:cNvPr id="32" name="Shape 30"/>
+          <p:cNvSpPr/>
+          <p:nvPr/>
+        </p:nvSpPr>
+        <p:spPr>
+          <a:xfrm>
+            <a:off x="1097280" y="5303520"/>
+            <a:ext cx="9966960" cy="457200"/>
+          </a:xfrm>
+          <a:prstGeom prst="roundRect">
+            <a:avLst/>
+          </a:prstGeom>
+          <a:solidFill>
+            <a:srgbClr val="1E1120"/>
+          </a:solidFill>
+          <a:ln w="12700">
             <a:solidFill>
               <a:srgbClr val="F43F5E"/>
             </a:solidFill>
@@ -3119,349 +4453,37 @@
       </p:sp>
       <p:sp>
         <p:nvSpPr>
-          <p:cNvPr id="5" name="Text 3"/>
-          <p:cNvSpPr/>
-          <p:nvPr/>
-        </p:nvSpPr>
-        <p:spPr>
-          <a:xfrm>
-            <a:off x="1005840" y="1920240"/>
-            <a:ext cx="4572000" cy="365760"/>
-          </a:xfrm>
-          <a:prstGeom prst="rect">
-            <a:avLst/>
-          </a:prstGeom>
-          <a:noFill/>
-          <a:ln/>
-        </p:spPr>
-        <p:txBody>
-          <a:bodyPr wrap="square" rtlCol="0" anchor="ctr"/>
-          <a:lstStyle/>
-          <a:p>
-            <a:pPr indent="0" marL="0">
-              <a:buNone/>
-            </a:pPr>
-            <a:r>
-              <a:rPr lang="en-US" sz="1600" b="1" dirty="0">
-                <a:solidFill>
-                  <a:srgbClr val="F43F5E"/>
-                </a:solidFill>
-              </a:rPr>
-              <a:t>BEFORE: Single Point of Failure</a:t>
-            </a:r>
-            <a:endParaRPr lang="en-US" sz="1600" dirty="0"/>
-          </a:p>
-        </p:txBody>
-      </p:sp>
-      <p:sp>
-        <p:nvSpPr>
-          <p:cNvPr id="6" name="Text 4"/>
-          <p:cNvSpPr/>
-          <p:nvPr/>
-        </p:nvSpPr>
-        <p:spPr>
-          <a:xfrm>
-            <a:off x="1005840" y="2468880"/>
-            <a:ext cx="4572000" cy="3108960"/>
-          </a:xfrm>
-          <a:prstGeom prst="rect">
-            <a:avLst/>
-          </a:prstGeom>
-          <a:noFill/>
-          <a:ln/>
-        </p:spPr>
-        <p:txBody>
-          <a:bodyPr wrap="square" rtlCol="0" anchor="ctr"/>
-          <a:lstStyle/>
-          <a:p>
-            <a:pPr indent="0" marL="0">
-              <a:lnSpc>
-                <a:spcPts val="1800"/>
-              </a:lnSpc>
-              <a:buNone/>
-            </a:pPr>
-            <a:r>
-              <a:rPr lang="en-US" sz="1200" dirty="0">
-                <a:solidFill>
-                  <a:srgbClr val="94A3B8"/>
-                </a:solidFill>
-              </a:rPr>
-              <a:t>• Single Model: Hardcoded gemini-3.8-flash with no fallback alternatives.</a:t>
-            </a:r>
-            <a:endParaRPr lang="en-US" sz="1200" dirty="0"/>
-          </a:p>
-          <a:p>
-            <a:pPr indent="0" marL="0">
-              <a:lnSpc>
-                <a:spcPts val="1800"/>
-              </a:lnSpc>
-              <a:buNone/>
-            </a:pPr>
-            <a:endParaRPr lang="en-US" sz="1200" dirty="0"/>
-          </a:p>
-          <a:p>
-            <a:pPr indent="0" marL="0">
-              <a:lnSpc>
-                <a:spcPts val="1800"/>
-              </a:lnSpc>
-              <a:buNone/>
-            </a:pPr>
-            <a:r>
-              <a:rPr lang="en-US" sz="1200" dirty="0">
-                <a:solidFill>
-                  <a:srgbClr val="94A3B8"/>
-                </a:solidFill>
-              </a:rPr>
-              <a:t>• Vulnerable to High-Demand Spikes: When Google AI endpoints experienced temporary traffic surges, the server received:</a:t>
-            </a:r>
-            <a:endParaRPr lang="en-US" sz="1200" dirty="0"/>
-          </a:p>
-          <a:p>
-            <a:pPr indent="0" marL="0">
-              <a:lnSpc>
-                <a:spcPts val="1800"/>
-              </a:lnSpc>
-              <a:buNone/>
-            </a:pPr>
-            <a:r>
-              <a:rPr lang="en-US" sz="1200" dirty="0">
-                <a:solidFill>
-                  <a:srgbClr val="94A3B8"/>
-                </a:solidFill>
-              </a:rPr>
-              <a:t>  {"error":{"code":503,"status":"UNAVAILABLE"}}</a:t>
-            </a:r>
-            <a:endParaRPr lang="en-US" sz="1200" dirty="0"/>
-          </a:p>
-          <a:p>
-            <a:pPr indent="0" marL="0">
-              <a:lnSpc>
-                <a:spcPts val="1800"/>
-              </a:lnSpc>
-              <a:buNone/>
-            </a:pPr>
-            <a:endParaRPr lang="en-US" sz="1200" dirty="0"/>
-          </a:p>
-          <a:p>
-            <a:pPr indent="0" marL="0">
-              <a:lnSpc>
-                <a:spcPts val="1800"/>
-              </a:lnSpc>
-              <a:buNone/>
-            </a:pPr>
-            <a:r>
-              <a:rPr lang="en-US" sz="1200" dirty="0">
-                <a:solidFill>
-                  <a:srgbClr val="94A3B8"/>
-                </a:solidFill>
-              </a:rPr>
-              <a:t>• Broken UX: Raw JSON error crashed straight into the user's screen with no recovery options or retry controls.</a:t>
-            </a:r>
-            <a:endParaRPr lang="en-US" sz="1200" dirty="0"/>
-          </a:p>
-          <a:p>
-            <a:pPr indent="0" marL="0">
-              <a:lnSpc>
-                <a:spcPts val="1800"/>
-              </a:lnSpc>
-              <a:buNone/>
-            </a:pPr>
-            <a:endParaRPr lang="en-US" sz="1200" dirty="0"/>
-          </a:p>
-          <a:p>
-            <a:pPr indent="0" marL="0">
-              <a:lnSpc>
-                <a:spcPts val="1800"/>
-              </a:lnSpc>
-              <a:buNone/>
-            </a:pPr>
-            <a:r>
-              <a:rPr lang="en-US" sz="1200" dirty="0">
-                <a:solidFill>
-                  <a:srgbClr val="94A3B8"/>
-                </a:solidFill>
-              </a:rPr>
-              <a:t>• Result: Applicant workflow was 100% blocked.</a:t>
-            </a:r>
-            <a:endParaRPr lang="en-US" sz="1200" dirty="0"/>
-          </a:p>
-        </p:txBody>
-      </p:sp>
-      <p:sp>
-        <p:nvSpPr>
-          <p:cNvPr id="7" name="Shape 5"/>
-          <p:cNvSpPr/>
-          <p:nvPr/>
-        </p:nvSpPr>
-        <p:spPr>
-          <a:xfrm>
-            <a:off x="6217920" y="1645920"/>
-            <a:ext cx="5212080" cy="4206240"/>
-          </a:xfrm>
-          <a:prstGeom prst="roundRect">
-            <a:avLst/>
-          </a:prstGeom>
-          <a:solidFill>
-            <a:srgbClr val="0F1E1B"/>
-          </a:solidFill>
-          <a:ln w="19050">
-            <a:solidFill>
-              <a:srgbClr val="10B981"/>
-            </a:solidFill>
-            <a:prstDash val="solid"/>
-          </a:ln>
-        </p:spPr>
-      </p:sp>
-      <p:sp>
-        <p:nvSpPr>
-          <p:cNvPr id="8" name="Text 6"/>
-          <p:cNvSpPr/>
-          <p:nvPr/>
-        </p:nvSpPr>
-        <p:spPr>
-          <a:xfrm>
-            <a:off x="6492240" y="1920240"/>
-            <a:ext cx="4572000" cy="365760"/>
-          </a:xfrm>
-          <a:prstGeom prst="rect">
-            <a:avLst/>
-          </a:prstGeom>
-          <a:noFill/>
-          <a:ln/>
-        </p:spPr>
-        <p:txBody>
-          <a:bodyPr wrap="square" rtlCol="0" anchor="ctr"/>
-          <a:lstStyle/>
-          <a:p>
-            <a:pPr indent="0" marL="0">
-              <a:buNone/>
-            </a:pPr>
-            <a:r>
-              <a:rPr lang="en-US" sz="1600" b="1" dirty="0">
-                <a:solidFill>
-                  <a:srgbClr val="10B981"/>
-                </a:solidFill>
-              </a:rPr>
-              <a:t>AFTER: 3-Tier Cascade + CPRW Shield</a:t>
-            </a:r>
-            <a:endParaRPr lang="en-US" sz="1600" dirty="0"/>
-          </a:p>
-        </p:txBody>
-      </p:sp>
-      <p:sp>
-        <p:nvSpPr>
-          <p:cNvPr id="9" name="Text 7"/>
-          <p:cNvSpPr/>
-          <p:nvPr/>
-        </p:nvSpPr>
-        <p:spPr>
-          <a:xfrm>
-            <a:off x="6492240" y="2468880"/>
-            <a:ext cx="4663440" cy="3108960"/>
-          </a:xfrm>
-          <a:prstGeom prst="rect">
-            <a:avLst/>
-          </a:prstGeom>
-          <a:noFill/>
-          <a:ln/>
-        </p:spPr>
-        <p:txBody>
-          <a:bodyPr wrap="square" rtlCol="0" anchor="ctr"/>
-          <a:lstStyle/>
-          <a:p>
-            <a:pPr indent="0" marL="0">
-              <a:lnSpc>
-                <a:spcPts val="1800"/>
-              </a:lnSpc>
-              <a:buNone/>
-            </a:pPr>
-            <a:r>
-              <a:rPr lang="en-US" sz="1200" dirty="0">
-                <a:solidFill>
-                  <a:srgbClr val="94A3B8"/>
-                </a:solidFill>
-              </a:rPr>
-              <a:t>• Multi-Tier Routing: Auto-fails over across gemini-3.8-flash -&gt; gemini-flash-latest -&gt; gemini-3.1-flash-lite.</a:t>
-            </a:r>
-            <a:endParaRPr lang="en-US" sz="1200" dirty="0"/>
-          </a:p>
-          <a:p>
-            <a:pPr indent="0" marL="0">
-              <a:lnSpc>
-                <a:spcPts val="1800"/>
-              </a:lnSpc>
-              <a:buNone/>
-            </a:pPr>
-            <a:endParaRPr lang="en-US" sz="1200" dirty="0"/>
-          </a:p>
-          <a:p>
-            <a:pPr indent="0" marL="0">
-              <a:lnSpc>
-                <a:spcPts val="1800"/>
-              </a:lnSpc>
-              <a:buNone/>
-            </a:pPr>
-            <a:r>
-              <a:rPr lang="en-US" sz="1200" dirty="0">
-                <a:solidFill>
-                  <a:srgbClr val="94A3B8"/>
-                </a:solidFill>
-              </a:rPr>
-              <a:t>• Exponential Jitter Retries: Absorbs transient blips (500-800ms backoff) before switching pools.</a:t>
-            </a:r>
-            <a:endParaRPr lang="en-US" sz="1200" dirty="0"/>
-          </a:p>
-          <a:p>
-            <a:pPr indent="0" marL="0">
-              <a:lnSpc>
-                <a:spcPts val="1800"/>
-              </a:lnSpc>
-              <a:buNone/>
-            </a:pPr>
-            <a:endParaRPr lang="en-US" sz="1200" dirty="0"/>
-          </a:p>
-          <a:p>
-            <a:pPr indent="0" marL="0">
-              <a:lnSpc>
-                <a:spcPts val="1800"/>
-              </a:lnSpc>
-              <a:buNone/>
-            </a:pPr>
-            <a:r>
-              <a:rPr lang="en-US" sz="1200" dirty="0">
-                <a:solidFill>
-                  <a:srgbClr val="94A3B8"/>
-                </a:solidFill>
-              </a:rPr>
-              <a:t>• Instant CPRW Turbo Engine: If cloud capacity is saturated, synthetic CPRW heuristic analyzer compiles complete audit in &lt;5ms.</a:t>
-            </a:r>
-            <a:endParaRPr lang="en-US" sz="1200" dirty="0"/>
-          </a:p>
-          <a:p>
-            <a:pPr indent="0" marL="0">
-              <a:lnSpc>
-                <a:spcPts val="1800"/>
-              </a:lnSpc>
-              <a:buNone/>
-            </a:pPr>
-            <a:endParaRPr lang="en-US" sz="1200" dirty="0"/>
-          </a:p>
-          <a:p>
-            <a:pPr indent="0" marL="0">
-              <a:lnSpc>
-                <a:spcPts val="1800"/>
-              </a:lnSpc>
-              <a:buNone/>
-            </a:pPr>
-            <a:r>
-              <a:rPr lang="en-US" sz="1200" dirty="0">
-                <a:solidFill>
-                  <a:srgbClr val="94A3B8"/>
-                </a:solidFill>
-              </a:rPr>
-              <a:t>• Polished UI Recovery: One-click "Retry Scan" and "Instant Turbo Audit" buttons. 0% user disruption.</a:t>
-            </a:r>
-            <a:endParaRPr lang="en-US" sz="1200" dirty="0"/>
+          <p:cNvPr id="33" name="Text 31"/>
+          <p:cNvSpPr/>
+          <p:nvPr/>
+        </p:nvSpPr>
+        <p:spPr>
+          <a:xfrm>
+            <a:off x="1280160" y="5376672"/>
+            <a:ext cx="9601200" cy="292608"/>
+          </a:xfrm>
+          <a:prstGeom prst="rect">
+            <a:avLst/>
+          </a:prstGeom>
+          <a:noFill/>
+          <a:ln/>
+        </p:spPr>
+        <p:txBody>
+          <a:bodyPr wrap="square" rtlCol="0" anchor="ctr"/>
+          <a:lstStyle/>
+          <a:p>
+            <a:pPr indent="0" marL="0">
+              <a:buNone/>
+            </a:pPr>
+            <a:r>
+              <a:rPr lang="en-US" sz="1000" b="1" dirty="0">
+                <a:solidFill>
+                  <a:srgbClr val="FCA5A5"/>
+                </a:solidFill>
+              </a:rPr>
+              <a:t>📌 Root Cause: Upstream model capacity saturation during peak traffic. Single-model architecture caused 100% workflow blocking.</a:t>
+            </a:r>
+            <a:endParaRPr lang="en-US" sz="1000" dirty="0"/>
           </a:p>
         </p:txBody>
       </p:sp>
@@ -3505,7 +4527,7 @@
         </p:nvSpPr>
         <p:spPr>
           <a:xfrm>
-            <a:off x="731520" y="548640"/>
+            <a:off x="731520" y="457200"/>
             <a:ext cx="9144000" cy="274320"/>
           </a:xfrm>
           <a:prstGeom prst="rect">
@@ -3524,61 +4546,703 @@
             <a:r>
               <a:rPr lang="en-US" sz="1000" b="1" dirty="0">
                 <a:solidFill>
+                  <a:srgbClr val="10B981"/>
+                </a:solidFill>
+              </a:rPr>
+              <a:t>04 / RESOLUTION SCREENSHOT &amp; FAILOVER</a:t>
+            </a:r>
+            <a:endParaRPr lang="en-US" sz="1000" dirty="0"/>
+          </a:p>
+        </p:txBody>
+      </p:sp>
+      <p:sp>
+        <p:nvSpPr>
+          <p:cNvPr id="3" name="Text 1"/>
+          <p:cNvSpPr/>
+          <p:nvPr/>
+        </p:nvSpPr>
+        <p:spPr>
+          <a:xfrm>
+            <a:off x="731520" y="731520"/>
+            <a:ext cx="10515600" cy="457200"/>
+          </a:xfrm>
+          <a:prstGeom prst="rect">
+            <a:avLst/>
+          </a:prstGeom>
+          <a:noFill/>
+          <a:ln/>
+        </p:spPr>
+        <p:txBody>
+          <a:bodyPr wrap="square" rtlCol="0" anchor="ctr"/>
+          <a:lstStyle/>
+          <a:p>
+            <a:pPr indent="0" marL="0">
+              <a:buNone/>
+            </a:pPr>
+            <a:r>
+              <a:rPr lang="en-US" sz="2400" b="1" dirty="0">
+                <a:solidFill>
+                  <a:srgbClr val="FFFFFF"/>
+                </a:solidFill>
+              </a:rPr>
+              <a:t>Website Screenshot: Resolved UI with Cloud Demand Shield</a:t>
+            </a:r>
+            <a:endParaRPr lang="en-US" sz="2400" dirty="0"/>
+          </a:p>
+        </p:txBody>
+      </p:sp>
+      <p:sp>
+        <p:nvSpPr>
+          <p:cNvPr id="4" name="Shape 2"/>
+          <p:cNvSpPr/>
+          <p:nvPr/>
+        </p:nvSpPr>
+        <p:spPr>
+          <a:xfrm>
+            <a:off x="731520" y="1325880"/>
+            <a:ext cx="10698480" cy="4572000"/>
+          </a:xfrm>
+          <a:prstGeom prst="roundRect">
+            <a:avLst/>
+          </a:prstGeom>
+          <a:solidFill>
+            <a:srgbClr val="0F172A"/>
+          </a:solidFill>
+          <a:ln w="19050">
+            <a:solidFill>
+              <a:srgbClr val="334155"/>
+            </a:solidFill>
+            <a:prstDash val="solid"/>
+          </a:ln>
+        </p:spPr>
+      </p:sp>
+      <p:sp>
+        <p:nvSpPr>
+          <p:cNvPr id="5" name="Shape 3"/>
+          <p:cNvSpPr/>
+          <p:nvPr/>
+        </p:nvSpPr>
+        <p:spPr>
+          <a:xfrm>
+            <a:off x="731520" y="1325880"/>
+            <a:ext cx="10698480" cy="384048"/>
+          </a:xfrm>
+          <a:prstGeom prst="rect">
+            <a:avLst/>
+          </a:prstGeom>
+          <a:solidFill>
+            <a:srgbClr val="1E293B"/>
+          </a:solidFill>
+          <a:ln/>
+        </p:spPr>
+      </p:sp>
+      <p:sp>
+        <p:nvSpPr>
+          <p:cNvPr id="6" name="Shape 4"/>
+          <p:cNvSpPr/>
+          <p:nvPr/>
+        </p:nvSpPr>
+        <p:spPr>
+          <a:xfrm>
+            <a:off x="868680" y="1453896"/>
+            <a:ext cx="128016" cy="128016"/>
+          </a:xfrm>
+          <a:prstGeom prst="ellipse">
+            <a:avLst/>
+          </a:prstGeom>
+          <a:solidFill>
+            <a:srgbClr val="EF4444"/>
+          </a:solidFill>
+          <a:ln/>
+        </p:spPr>
+      </p:sp>
+      <p:sp>
+        <p:nvSpPr>
+          <p:cNvPr id="7" name="Shape 5"/>
+          <p:cNvSpPr/>
+          <p:nvPr/>
+        </p:nvSpPr>
+        <p:spPr>
+          <a:xfrm>
+            <a:off x="1051560" y="1453896"/>
+            <a:ext cx="128016" cy="128016"/>
+          </a:xfrm>
+          <a:prstGeom prst="ellipse">
+            <a:avLst/>
+          </a:prstGeom>
+          <a:solidFill>
+            <a:srgbClr val="F59E0B"/>
+          </a:solidFill>
+          <a:ln/>
+        </p:spPr>
+      </p:sp>
+      <p:sp>
+        <p:nvSpPr>
+          <p:cNvPr id="8" name="Shape 6"/>
+          <p:cNvSpPr/>
+          <p:nvPr/>
+        </p:nvSpPr>
+        <p:spPr>
+          <a:xfrm>
+            <a:off x="1234440" y="1453896"/>
+            <a:ext cx="128016" cy="128016"/>
+          </a:xfrm>
+          <a:prstGeom prst="ellipse">
+            <a:avLst/>
+          </a:prstGeom>
+          <a:solidFill>
+            <a:srgbClr val="10B981"/>
+          </a:solidFill>
+          <a:ln/>
+        </p:spPr>
+      </p:sp>
+      <p:sp>
+        <p:nvSpPr>
+          <p:cNvPr id="9" name="Shape 7"/>
+          <p:cNvSpPr/>
+          <p:nvPr/>
+        </p:nvSpPr>
+        <p:spPr>
+          <a:xfrm>
+            <a:off x="1554480" y="1399032"/>
+            <a:ext cx="9052560" cy="237744"/>
+          </a:xfrm>
+          <a:prstGeom prst="roundRect">
+            <a:avLst/>
+          </a:prstGeom>
+          <a:solidFill>
+            <a:srgbClr val="0F172A"/>
+          </a:solidFill>
+          <a:ln w="12700">
+            <a:solidFill>
+              <a:srgbClr val="334155"/>
+            </a:solidFill>
+            <a:prstDash val="solid"/>
+          </a:ln>
+        </p:spPr>
+      </p:sp>
+      <p:sp>
+        <p:nvSpPr>
+          <p:cNvPr id="10" name="Text 8"/>
+          <p:cNvSpPr/>
+          <p:nvPr/>
+        </p:nvSpPr>
+        <p:spPr>
+          <a:xfrm>
+            <a:off x="1645920" y="1399032"/>
+            <a:ext cx="8869680" cy="237744"/>
+          </a:xfrm>
+          <a:prstGeom prst="rect">
+            <a:avLst/>
+          </a:prstGeom>
+          <a:noFill/>
+          <a:ln/>
+        </p:spPr>
+        <p:txBody>
+          <a:bodyPr wrap="square" rtlCol="0" anchor="ctr"/>
+          <a:lstStyle/>
+          <a:p>
+            <a:pPr indent="0" marL="0">
+              <a:buNone/>
+            </a:pPr>
+            <a:r>
+              <a:rPr lang="en-US" sz="900" dirty="0">
+                <a:solidFill>
+                  <a:srgbClr val="94A3B8"/>
+                </a:solidFill>
+                <a:latin typeface="Calibri" pitchFamily="34" charset="0"/>
+                <a:ea typeface="Calibri" pitchFamily="34" charset="-122"/>
+                <a:cs typeface="Calibri" pitchFamily="34" charset="-120"/>
+              </a:rPr>
+              <a:t>🔒 https://careerpulse.ai/analyzer-workspace</a:t>
+            </a:r>
+            <a:endParaRPr lang="en-US" sz="900" dirty="0"/>
+          </a:p>
+        </p:txBody>
+      </p:sp>
+      <p:sp>
+        <p:nvSpPr>
+          <p:cNvPr id="11" name="Shape 9"/>
+          <p:cNvSpPr/>
+          <p:nvPr/>
+        </p:nvSpPr>
+        <p:spPr>
+          <a:xfrm>
+            <a:off x="731520" y="1709928"/>
+            <a:ext cx="10698480" cy="457200"/>
+          </a:xfrm>
+          <a:prstGeom prst="rect">
+            <a:avLst/>
+          </a:prstGeom>
+          <a:solidFill>
+            <a:srgbClr val="090D16"/>
+          </a:solidFill>
+          <a:ln/>
+        </p:spPr>
+      </p:sp>
+      <p:sp>
+        <p:nvSpPr>
+          <p:cNvPr id="12" name="Text 10"/>
+          <p:cNvSpPr/>
+          <p:nvPr/>
+        </p:nvSpPr>
+        <p:spPr>
+          <a:xfrm>
+            <a:off x="914400" y="1783080"/>
+            <a:ext cx="2011680" cy="292608"/>
+          </a:xfrm>
+          <a:prstGeom prst="rect">
+            <a:avLst/>
+          </a:prstGeom>
+          <a:noFill/>
+          <a:ln/>
+        </p:spPr>
+        <p:txBody>
+          <a:bodyPr wrap="square" rtlCol="0" anchor="ctr"/>
+          <a:lstStyle/>
+          <a:p>
+            <a:pPr indent="0" marL="0">
+              <a:buNone/>
+            </a:pPr>
+            <a:r>
+              <a:rPr lang="en-US" sz="1200" b="1" dirty="0">
+                <a:solidFill>
+                  <a:srgbClr val="FFFFFF"/>
+                </a:solidFill>
+              </a:rPr>
+              <a:t>📄 CareerPulse</a:t>
+            </a:r>
+            <a:endParaRPr lang="en-US" sz="1200" dirty="0"/>
+          </a:p>
+        </p:txBody>
+      </p:sp>
+      <p:sp>
+        <p:nvSpPr>
+          <p:cNvPr id="13" name="Text 11"/>
+          <p:cNvSpPr/>
+          <p:nvPr/>
+        </p:nvSpPr>
+        <p:spPr>
+          <a:xfrm>
+            <a:off x="2926080" y="1810512"/>
+            <a:ext cx="6217920" cy="256032"/>
+          </a:xfrm>
+          <a:prstGeom prst="rect">
+            <a:avLst/>
+          </a:prstGeom>
+          <a:noFill/>
+          <a:ln/>
+        </p:spPr>
+        <p:txBody>
+          <a:bodyPr wrap="square" rtlCol="0" anchor="ctr"/>
+          <a:lstStyle/>
+          <a:p>
+            <a:pPr indent="0" marL="0">
+              <a:buNone/>
+            </a:pPr>
+            <a:r>
+              <a:rPr lang="en-US" sz="950" dirty="0">
+                <a:solidFill>
+                  <a:srgbClr val="64748B"/>
+                </a:solidFill>
+              </a:rPr>
+              <a:t>Analyzer Workspace    Sample Library (8)    Presentation (.pptx)    Supported Formats</a:t>
+            </a:r>
+            <a:endParaRPr lang="en-US" sz="950" dirty="0"/>
+          </a:p>
+        </p:txBody>
+      </p:sp>
+      <p:sp>
+        <p:nvSpPr>
+          <p:cNvPr id="14" name="Shape 12"/>
+          <p:cNvSpPr/>
+          <p:nvPr/>
+        </p:nvSpPr>
+        <p:spPr>
+          <a:xfrm>
+            <a:off x="9235440" y="1783080"/>
+            <a:ext cx="1005840" cy="292608"/>
+          </a:xfrm>
+          <a:prstGeom prst="roundRect">
+            <a:avLst/>
+          </a:prstGeom>
+          <a:solidFill>
+            <a:srgbClr val="1E293B"/>
+          </a:solidFill>
+          <a:ln w="12700">
+            <a:solidFill>
+              <a:srgbClr val="06B6D4"/>
+            </a:solidFill>
+            <a:prstDash val="solid"/>
+          </a:ln>
+        </p:spPr>
+      </p:sp>
+      <p:sp>
+        <p:nvSpPr>
+          <p:cNvPr id="15" name="Text 13"/>
+          <p:cNvSpPr/>
+          <p:nvPr/>
+        </p:nvSpPr>
+        <p:spPr>
+          <a:xfrm>
+            <a:off x="9235440" y="1783080"/>
+            <a:ext cx="1005840" cy="292608"/>
+          </a:xfrm>
+          <a:prstGeom prst="rect">
+            <a:avLst/>
+          </a:prstGeom>
+          <a:noFill/>
+          <a:ln/>
+        </p:spPr>
+        <p:txBody>
+          <a:bodyPr wrap="square" rtlCol="0" anchor="ctr"/>
+          <a:lstStyle/>
+          <a:p>
+            <a:pPr algn="ctr" indent="0" marL="0">
+              <a:buNone/>
+            </a:pPr>
+            <a:r>
+              <a:rPr lang="en-US" sz="850" b="1" dirty="0">
+                <a:solidFill>
                   <a:srgbClr val="06B6D4"/>
                 </a:solidFill>
               </a:rPr>
-              <a:t>04 / CPRW AUDIT METHODOLOGY</a:t>
-            </a:r>
-            <a:endParaRPr lang="en-US" sz="1000" dirty="0"/>
-          </a:p>
-        </p:txBody>
-      </p:sp>
-      <p:sp>
-        <p:nvSpPr>
-          <p:cNvPr id="3" name="Text 1"/>
-          <p:cNvSpPr/>
-          <p:nvPr/>
-        </p:nvSpPr>
-        <p:spPr>
-          <a:xfrm>
-            <a:off x="731520" y="822960"/>
-            <a:ext cx="10515600" cy="548640"/>
-          </a:xfrm>
-          <a:prstGeom prst="rect">
-            <a:avLst/>
-          </a:prstGeom>
-          <a:noFill/>
-          <a:ln/>
-        </p:spPr>
-        <p:txBody>
-          <a:bodyPr wrap="square" rtlCol="0" anchor="ctr"/>
-          <a:lstStyle/>
-          <a:p>
-            <a:pPr indent="0" marL="0">
-              <a:buNone/>
-            </a:pPr>
-            <a:r>
-              <a:rPr lang="en-US" sz="2800" b="1" dirty="0">
+              <a:t>PPTX Deck</a:t>
+            </a:r>
+            <a:endParaRPr lang="en-US" sz="850" dirty="0"/>
+          </a:p>
+        </p:txBody>
+      </p:sp>
+      <p:sp>
+        <p:nvSpPr>
+          <p:cNvPr id="16" name="Shape 14"/>
+          <p:cNvSpPr/>
+          <p:nvPr/>
+        </p:nvSpPr>
+        <p:spPr>
+          <a:xfrm>
+            <a:off x="10332720" y="1783080"/>
+            <a:ext cx="822960" cy="292608"/>
+          </a:xfrm>
+          <a:prstGeom prst="roundRect">
+            <a:avLst/>
+          </a:prstGeom>
+          <a:solidFill>
+            <a:srgbClr val="4F46E5"/>
+          </a:solidFill>
+          <a:ln/>
+        </p:spPr>
+      </p:sp>
+      <p:sp>
+        <p:nvSpPr>
+          <p:cNvPr id="17" name="Text 15"/>
+          <p:cNvSpPr/>
+          <p:nvPr/>
+        </p:nvSpPr>
+        <p:spPr>
+          <a:xfrm>
+            <a:off x="10332720" y="1783080"/>
+            <a:ext cx="822960" cy="292608"/>
+          </a:xfrm>
+          <a:prstGeom prst="rect">
+            <a:avLst/>
+          </a:prstGeom>
+          <a:noFill/>
+          <a:ln/>
+        </p:spPr>
+        <p:txBody>
+          <a:bodyPr wrap="square" rtlCol="0" anchor="ctr"/>
+          <a:lstStyle/>
+          <a:p>
+            <a:pPr algn="ctr" indent="0" marL="0">
+              <a:buNone/>
+            </a:pPr>
+            <a:r>
+              <a:rPr lang="en-US" sz="850" b="1" dirty="0">
                 <a:solidFill>
                   <a:srgbClr val="FFFFFF"/>
                 </a:solidFill>
               </a:rPr>
-              <a:t>5-Pillar ATS Rubric &amp; Google XYZ Formula</a:t>
-            </a:r>
-            <a:endParaRPr lang="en-US" sz="2800" dirty="0"/>
-          </a:p>
-        </p:txBody>
-      </p:sp>
-      <p:sp>
-        <p:nvSpPr>
-          <p:cNvPr id="4" name="Shape 2"/>
-          <p:cNvSpPr/>
-          <p:nvPr/>
-        </p:nvSpPr>
-        <p:spPr>
-          <a:xfrm>
-            <a:off x="731520" y="1645920"/>
-            <a:ext cx="5120640" cy="777240"/>
+              <a:t>Samples</a:t>
+            </a:r>
+            <a:endParaRPr lang="en-US" sz="850" dirty="0"/>
+          </a:p>
+        </p:txBody>
+      </p:sp>
+      <p:sp>
+        <p:nvSpPr>
+          <p:cNvPr id="18" name="Shape 16"/>
+          <p:cNvSpPr/>
+          <p:nvPr/>
+        </p:nvSpPr>
+        <p:spPr>
+          <a:xfrm>
+            <a:off x="1097280" y="2331720"/>
+            <a:ext cx="9966960" cy="868680"/>
+          </a:xfrm>
+          <a:prstGeom prst="roundRect">
+            <a:avLst/>
+          </a:prstGeom>
+          <a:solidFill>
+            <a:srgbClr val="0F1E1B"/>
+          </a:solidFill>
+          <a:ln w="19050">
+            <a:solidFill>
+              <a:srgbClr val="10B981"/>
+            </a:solidFill>
+            <a:prstDash val="solid"/>
+          </a:ln>
+        </p:spPr>
+      </p:sp>
+      <p:sp>
+        <p:nvSpPr>
+          <p:cNvPr id="19" name="Text 17"/>
+          <p:cNvSpPr/>
+          <p:nvPr/>
+        </p:nvSpPr>
+        <p:spPr>
+          <a:xfrm>
+            <a:off x="1280160" y="2423160"/>
+            <a:ext cx="5943600" cy="256032"/>
+          </a:xfrm>
+          <a:prstGeom prst="rect">
+            <a:avLst/>
+          </a:prstGeom>
+          <a:noFill/>
+          <a:ln/>
+        </p:spPr>
+        <p:txBody>
+          <a:bodyPr wrap="square" rtlCol="0" anchor="ctr"/>
+          <a:lstStyle/>
+          <a:p>
+            <a:pPr indent="0" marL="0">
+              <a:buNone/>
+            </a:pPr>
+            <a:r>
+              <a:rPr lang="en-US" sz="1100" b="1" dirty="0">
+                <a:solidFill>
+                  <a:srgbClr val="FFFFFF"/>
+                </a:solidFill>
+              </a:rPr>
+              <a:t>⚡ Gemini Cloud Traffic Spike Handled — Auto-Failover Ready</a:t>
+            </a:r>
+            <a:endParaRPr lang="en-US" sz="1100" dirty="0"/>
+          </a:p>
+        </p:txBody>
+      </p:sp>
+      <p:sp>
+        <p:nvSpPr>
+          <p:cNvPr id="20" name="Text 18"/>
+          <p:cNvSpPr/>
+          <p:nvPr/>
+        </p:nvSpPr>
+        <p:spPr>
+          <a:xfrm>
+            <a:off x="1280160" y="2697480"/>
+            <a:ext cx="5943600" cy="411480"/>
+          </a:xfrm>
+          <a:prstGeom prst="rect">
+            <a:avLst/>
+          </a:prstGeom>
+          <a:noFill/>
+          <a:ln/>
+        </p:spPr>
+        <p:txBody>
+          <a:bodyPr wrap="square" rtlCol="0" anchor="ctr"/>
+          <a:lstStyle/>
+          <a:p>
+            <a:pPr indent="0" marL="0">
+              <a:buNone/>
+            </a:pPr>
+            <a:r>
+              <a:rPr lang="en-US" sz="900" dirty="0">
+                <a:solidFill>
+                  <a:srgbClr val="A7F3D0"/>
+                </a:solidFill>
+              </a:rPr>
+              <a:t>The Gemini model is temporarily experiencing peak cloud traffic. We provide instant auto-failover routing across 3 model tiers</a:t>
+            </a:r>
+            <a:endParaRPr lang="en-US" sz="900" dirty="0"/>
+          </a:p>
+          <a:p>
+            <a:pPr indent="0" marL="0">
+              <a:buNone/>
+            </a:pPr>
+            <a:r>
+              <a:rPr lang="en-US" sz="900" dirty="0">
+                <a:solidFill>
+                  <a:srgbClr val="A7F3D0"/>
+                </a:solidFill>
+              </a:rPr>
+              <a:t>and CPRW turbo auditing so your audit workflow is never blocked.</a:t>
+            </a:r>
+            <a:endParaRPr lang="en-US" sz="900" dirty="0"/>
+          </a:p>
+        </p:txBody>
+      </p:sp>
+      <p:sp>
+        <p:nvSpPr>
+          <p:cNvPr id="21" name="Shape 19"/>
+          <p:cNvSpPr/>
+          <p:nvPr/>
+        </p:nvSpPr>
+        <p:spPr>
+          <a:xfrm>
+            <a:off x="7406640" y="2514600"/>
+            <a:ext cx="1645920" cy="411480"/>
+          </a:xfrm>
+          <a:prstGeom prst="roundRect">
+            <a:avLst/>
+          </a:prstGeom>
+          <a:solidFill>
+            <a:srgbClr val="4F46E5"/>
+          </a:solidFill>
+          <a:ln/>
+        </p:spPr>
+      </p:sp>
+      <p:sp>
+        <p:nvSpPr>
+          <p:cNvPr id="22" name="Text 20"/>
+          <p:cNvSpPr/>
+          <p:nvPr/>
+        </p:nvSpPr>
+        <p:spPr>
+          <a:xfrm>
+            <a:off x="7406640" y="2514600"/>
+            <a:ext cx="1645920" cy="411480"/>
+          </a:xfrm>
+          <a:prstGeom prst="rect">
+            <a:avLst/>
+          </a:prstGeom>
+          <a:noFill/>
+          <a:ln/>
+        </p:spPr>
+        <p:txBody>
+          <a:bodyPr wrap="square" rtlCol="0" anchor="ctr"/>
+          <a:lstStyle/>
+          <a:p>
+            <a:pPr algn="ctr" indent="0" marL="0">
+              <a:buNone/>
+            </a:pPr>
+            <a:r>
+              <a:rPr lang="en-US" sz="850" b="1" dirty="0">
+                <a:solidFill>
+                  <a:srgbClr val="FFFFFF"/>
+                </a:solidFill>
+              </a:rPr>
+              <a:t>Run Instant Turbo Audit</a:t>
+            </a:r>
+            <a:endParaRPr lang="en-US" sz="850" dirty="0"/>
+          </a:p>
+        </p:txBody>
+      </p:sp>
+      <p:sp>
+        <p:nvSpPr>
+          <p:cNvPr id="23" name="Shape 21"/>
+          <p:cNvSpPr/>
+          <p:nvPr/>
+        </p:nvSpPr>
+        <p:spPr>
+          <a:xfrm>
+            <a:off x="9144000" y="2514600"/>
+            <a:ext cx="1097280" cy="411480"/>
+          </a:xfrm>
+          <a:prstGeom prst="roundRect">
+            <a:avLst/>
+          </a:prstGeom>
+          <a:solidFill>
+            <a:srgbClr val="1E293B"/>
+          </a:solidFill>
+          <a:ln w="12700">
+            <a:solidFill>
+              <a:srgbClr val="475569"/>
+            </a:solidFill>
+            <a:prstDash val="solid"/>
+          </a:ln>
+        </p:spPr>
+      </p:sp>
+      <p:sp>
+        <p:nvSpPr>
+          <p:cNvPr id="24" name="Text 22"/>
+          <p:cNvSpPr/>
+          <p:nvPr/>
+        </p:nvSpPr>
+        <p:spPr>
+          <a:xfrm>
+            <a:off x="9144000" y="2514600"/>
+            <a:ext cx="1097280" cy="411480"/>
+          </a:xfrm>
+          <a:prstGeom prst="rect">
+            <a:avLst/>
+          </a:prstGeom>
+          <a:noFill/>
+          <a:ln/>
+        </p:spPr>
+        <p:txBody>
+          <a:bodyPr wrap="square" rtlCol="0" anchor="ctr"/>
+          <a:lstStyle/>
+          <a:p>
+            <a:pPr algn="ctr" indent="0" marL="0">
+              <a:buNone/>
+            </a:pPr>
+            <a:r>
+              <a:rPr lang="en-US" sz="850" b="1" dirty="0">
+                <a:solidFill>
+                  <a:srgbClr val="FFFFFF"/>
+                </a:solidFill>
+              </a:rPr>
+              <a:t>Retry AI Scan</a:t>
+            </a:r>
+            <a:endParaRPr lang="en-US" sz="850" dirty="0"/>
+          </a:p>
+        </p:txBody>
+      </p:sp>
+      <p:sp>
+        <p:nvSpPr>
+          <p:cNvPr id="25" name="Text 23"/>
+          <p:cNvSpPr/>
+          <p:nvPr/>
+        </p:nvSpPr>
+        <p:spPr>
+          <a:xfrm>
+            <a:off x="10332720" y="2514600"/>
+            <a:ext cx="640080" cy="411480"/>
+          </a:xfrm>
+          <a:prstGeom prst="rect">
+            <a:avLst/>
+          </a:prstGeom>
+          <a:noFill/>
+          <a:ln/>
+        </p:spPr>
+        <p:txBody>
+          <a:bodyPr wrap="square" rtlCol="0" anchor="ctr"/>
+          <a:lstStyle/>
+          <a:p>
+            <a:pPr algn="ctr" indent="0" marL="0">
+              <a:buNone/>
+            </a:pPr>
+            <a:r>
+              <a:rPr lang="en-US" sz="850" dirty="0">
+                <a:solidFill>
+                  <a:srgbClr val="94A3B8"/>
+                </a:solidFill>
+              </a:rPr>
+              <a:t>Dismiss</a:t>
+            </a:r>
+            <a:endParaRPr lang="en-US" sz="850" dirty="0"/>
+          </a:p>
+        </p:txBody>
+      </p:sp>
+      <p:sp>
+        <p:nvSpPr>
+          <p:cNvPr id="26" name="Shape 24"/>
+          <p:cNvSpPr/>
+          <p:nvPr/>
+        </p:nvSpPr>
+        <p:spPr>
+          <a:xfrm>
+            <a:off x="1097280" y="3337560"/>
+            <a:ext cx="9966960" cy="1874520"/>
           </a:xfrm>
           <a:prstGeom prst="roundRect">
             <a:avLst/>
@@ -3596,674 +5260,198 @@
       </p:sp>
       <p:sp>
         <p:nvSpPr>
-          <p:cNvPr id="5" name="Text 3"/>
-          <p:cNvSpPr/>
-          <p:nvPr/>
-        </p:nvSpPr>
-        <p:spPr>
-          <a:xfrm>
-            <a:off x="914400" y="1755648"/>
-            <a:ext cx="4754880" cy="274320"/>
-          </a:xfrm>
-          <a:prstGeom prst="rect">
-            <a:avLst/>
-          </a:prstGeom>
-          <a:noFill/>
-          <a:ln/>
-        </p:spPr>
-        <p:txBody>
-          <a:bodyPr wrap="square" rtlCol="0" anchor="ctr"/>
-          <a:lstStyle/>
-          <a:p>
-            <a:pPr indent="0" marL="0">
-              <a:buNone/>
-            </a:pPr>
-            <a:r>
-              <a:rPr lang="en-US" sz="1300" b="1" dirty="0">
+          <p:cNvPr id="27" name="Text 25"/>
+          <p:cNvSpPr/>
+          <p:nvPr/>
+        </p:nvSpPr>
+        <p:spPr>
+          <a:xfrm>
+            <a:off x="1280160" y="3474720"/>
+            <a:ext cx="5486400" cy="320040"/>
+          </a:xfrm>
+          <a:prstGeom prst="rect">
+            <a:avLst/>
+          </a:prstGeom>
+          <a:noFill/>
+          <a:ln/>
+        </p:spPr>
+        <p:txBody>
+          <a:bodyPr wrap="square" rtlCol="0" anchor="ctr"/>
+          <a:lstStyle/>
+          <a:p>
+            <a:pPr indent="0" marL="0">
+              <a:buNone/>
+            </a:pPr>
+            <a:r>
+              <a:rPr lang="en-US" sz="1400" b="1" dirty="0">
+                <a:solidFill>
+                  <a:srgbClr val="FFFFFF"/>
+                </a:solidFill>
+              </a:rPr>
+              <a:t>Candidate Profile Selected: Priya Nair</a:t>
+            </a:r>
+            <a:endParaRPr lang="en-US" sz="1400" dirty="0"/>
+          </a:p>
+        </p:txBody>
+      </p:sp>
+      <p:sp>
+        <p:nvSpPr>
+          <p:cNvPr id="28" name="Text 26"/>
+          <p:cNvSpPr/>
+          <p:nvPr/>
+        </p:nvSpPr>
+        <p:spPr>
+          <a:xfrm>
+            <a:off x="1280160" y="3794760"/>
+            <a:ext cx="7315200" cy="274320"/>
+          </a:xfrm>
+          <a:prstGeom prst="rect">
+            <a:avLst/>
+          </a:prstGeom>
+          <a:noFill/>
+          <a:ln/>
+        </p:spPr>
+        <p:txBody>
+          <a:bodyPr wrap="square" rtlCol="0" anchor="ctr"/>
+          <a:lstStyle/>
+          <a:p>
+            <a:pPr indent="0" marL="0">
+              <a:buNone/>
+            </a:pPr>
+            <a:r>
+              <a:rPr lang="en-US" sz="1000" dirty="0">
                 <a:solidFill>
                   <a:srgbClr val="06B6D4"/>
                 </a:solidFill>
               </a:rPr>
-              <a:t>ATS Parsability (25%)</a:t>
-            </a:r>
-            <a:endParaRPr lang="en-US" sz="1300" dirty="0"/>
-          </a:p>
-        </p:txBody>
-      </p:sp>
-      <p:sp>
-        <p:nvSpPr>
-          <p:cNvPr id="6" name="Text 4"/>
-          <p:cNvSpPr/>
-          <p:nvPr/>
-        </p:nvSpPr>
-        <p:spPr>
-          <a:xfrm>
-            <a:off x="914400" y="2029968"/>
-            <a:ext cx="4754880" cy="320040"/>
-          </a:xfrm>
-          <a:prstGeom prst="rect">
-            <a:avLst/>
-          </a:prstGeom>
-          <a:noFill/>
-          <a:ln/>
-        </p:spPr>
-        <p:txBody>
-          <a:bodyPr wrap="square" rtlCol="0" anchor="ctr"/>
-          <a:lstStyle/>
-          <a:p>
-            <a:pPr indent="0" marL="0">
-              <a:buNone/>
-            </a:pPr>
-            <a:r>
-              <a:rPr lang="en-US" sz="1050" dirty="0">
+              <a:t>Principal Java &amp; Distributed Systems Architect  •  PDF Document  •  Est. 9 years experience  •  Seattle, WA</a:t>
+            </a:r>
+            <a:endParaRPr lang="en-US" sz="1000" dirty="0"/>
+          </a:p>
+        </p:txBody>
+      </p:sp>
+      <p:sp>
+        <p:nvSpPr>
+          <p:cNvPr id="29" name="Text 27"/>
+          <p:cNvSpPr/>
+          <p:nvPr/>
+        </p:nvSpPr>
+        <p:spPr>
+          <a:xfrm>
+            <a:off x="1280160" y="4114800"/>
+            <a:ext cx="9601200" cy="457200"/>
+          </a:xfrm>
+          <a:prstGeom prst="rect">
+            <a:avLst/>
+          </a:prstGeom>
+          <a:noFill/>
+          <a:ln/>
+        </p:spPr>
+        <p:txBody>
+          <a:bodyPr wrap="square" rtlCol="0" anchor="ctr"/>
+          <a:lstStyle/>
+          <a:p>
+            <a:pPr indent="0" marL="0">
+              <a:buNone/>
+            </a:pPr>
+            <a:r>
+              <a:rPr lang="en-US" sz="950" dirty="0">
                 <a:solidFill>
                   <a:srgbClr val="94A3B8"/>
                 </a:solidFill>
               </a:rPr>
-              <a:t>Single-column structure, standard dates, font cleanliness, heading recognition</a:t>
-            </a:r>
-            <a:endParaRPr lang="en-US" sz="1050" dirty="0"/>
-          </a:p>
-        </p:txBody>
-      </p:sp>
-      <p:sp>
-        <p:nvSpPr>
-          <p:cNvPr id="7" name="Shape 5"/>
-          <p:cNvSpPr/>
-          <p:nvPr/>
-        </p:nvSpPr>
-        <p:spPr>
-          <a:xfrm>
-            <a:off x="731520" y="2514600"/>
-            <a:ext cx="5120640" cy="777240"/>
+              <a:t>Target Job: Principal Backend Architect - Core Java &amp; Cloud Financial Ledger (42k TPS, p99 JVM tuning, Kafka, EKS)</a:t>
+            </a:r>
+            <a:endParaRPr lang="en-US" sz="950" dirty="0"/>
+          </a:p>
+          <a:p>
+            <a:pPr indent="0" marL="0">
+              <a:buNone/>
+            </a:pPr>
+            <a:r>
+              <a:rPr lang="en-US" sz="950" dirty="0">
+                <a:solidFill>
+                  <a:srgbClr val="94A3B8"/>
+                </a:solidFill>
+              </a:rPr>
+              <a:t>Status: Audit ready for instant compilation. Zero cloud blocking.</a:t>
+            </a:r>
+            <a:endParaRPr lang="en-US" sz="950" dirty="0"/>
+          </a:p>
+        </p:txBody>
+      </p:sp>
+      <p:sp>
+        <p:nvSpPr>
+          <p:cNvPr id="30" name="Shape 28"/>
+          <p:cNvSpPr/>
+          <p:nvPr/>
+        </p:nvSpPr>
+        <p:spPr>
+          <a:xfrm>
+            <a:off x="1280160" y="4663440"/>
+            <a:ext cx="2743200" cy="411480"/>
           </a:xfrm>
           <a:prstGeom prst="roundRect">
             <a:avLst/>
           </a:prstGeom>
           <a:solidFill>
-            <a:srgbClr val="151E32"/>
-          </a:solidFill>
-          <a:ln w="12700">
-            <a:solidFill>
-              <a:srgbClr val="22314E"/>
-            </a:solidFill>
-            <a:prstDash val="solid"/>
-          </a:ln>
-        </p:spPr>
-      </p:sp>
-      <p:sp>
-        <p:nvSpPr>
-          <p:cNvPr id="8" name="Text 6"/>
-          <p:cNvSpPr/>
-          <p:nvPr/>
-        </p:nvSpPr>
-        <p:spPr>
-          <a:xfrm>
-            <a:off x="914400" y="2624328"/>
-            <a:ext cx="4754880" cy="274320"/>
-          </a:xfrm>
-          <a:prstGeom prst="rect">
-            <a:avLst/>
-          </a:prstGeom>
-          <a:noFill/>
-          <a:ln/>
-        </p:spPr>
-        <p:txBody>
-          <a:bodyPr wrap="square" rtlCol="0" anchor="ctr"/>
-          <a:lstStyle/>
-          <a:p>
-            <a:pPr indent="0" marL="0">
-              <a:buNone/>
-            </a:pPr>
-            <a:r>
-              <a:rPr lang="en-US" sz="1300" b="1" dirty="0">
-                <a:solidFill>
-                  <a:srgbClr val="06B6D4"/>
-                </a:solidFill>
-              </a:rPr>
-              <a:t>Quantifiable Impact (25%)</a:t>
-            </a:r>
-            <a:endParaRPr lang="en-US" sz="1300" dirty="0"/>
-          </a:p>
-        </p:txBody>
-      </p:sp>
-      <p:sp>
-        <p:nvSpPr>
-          <p:cNvPr id="9" name="Text 7"/>
-          <p:cNvSpPr/>
-          <p:nvPr/>
-        </p:nvSpPr>
-        <p:spPr>
-          <a:xfrm>
-            <a:off x="914400" y="2898648"/>
-            <a:ext cx="4754880" cy="320040"/>
-          </a:xfrm>
-          <a:prstGeom prst="rect">
-            <a:avLst/>
-          </a:prstGeom>
-          <a:noFill/>
-          <a:ln/>
-        </p:spPr>
-        <p:txBody>
-          <a:bodyPr wrap="square" rtlCol="0" anchor="ctr"/>
-          <a:lstStyle/>
-          <a:p>
-            <a:pPr indent="0" marL="0">
-              <a:buNone/>
-            </a:pPr>
-            <a:r>
-              <a:rPr lang="en-US" sz="1050" dirty="0">
-                <a:solidFill>
-                  <a:srgbClr val="94A3B8"/>
-                </a:solidFill>
-              </a:rPr>
-              <a:t>Metrics density, revenue/scale markers, p99 latency, TPS, %, and cost savings</a:t>
-            </a:r>
-            <a:endParaRPr lang="en-US" sz="1050" dirty="0"/>
-          </a:p>
-        </p:txBody>
-      </p:sp>
-      <p:sp>
-        <p:nvSpPr>
-          <p:cNvPr id="10" name="Shape 8"/>
-          <p:cNvSpPr/>
-          <p:nvPr/>
-        </p:nvSpPr>
-        <p:spPr>
-          <a:xfrm>
-            <a:off x="731520" y="3383280"/>
-            <a:ext cx="5120640" cy="777240"/>
+            <a:srgbClr val="059669"/>
+          </a:solidFill>
+          <a:ln/>
+        </p:spPr>
+      </p:sp>
+      <p:sp>
+        <p:nvSpPr>
+          <p:cNvPr id="31" name="Text 29"/>
+          <p:cNvSpPr/>
+          <p:nvPr/>
+        </p:nvSpPr>
+        <p:spPr>
+          <a:xfrm>
+            <a:off x="1280160" y="4663440"/>
+            <a:ext cx="2743200" cy="411480"/>
+          </a:xfrm>
+          <a:prstGeom prst="rect">
+            <a:avLst/>
+          </a:prstGeom>
+          <a:noFill/>
+          <a:ln/>
+        </p:spPr>
+        <p:txBody>
+          <a:bodyPr wrap="square" rtlCol="0" anchor="ctr"/>
+          <a:lstStyle/>
+          <a:p>
+            <a:pPr algn="ctr" indent="0" marL="0">
+              <a:buNone/>
+            </a:pPr>
+            <a:r>
+              <a:rPr lang="en-US" sz="950" b="1" dirty="0">
+                <a:solidFill>
+                  <a:srgbClr val="FFFFFF"/>
+                </a:solidFill>
+              </a:rPr>
+              <a:t>✓ Audited via CPRW Turbo Engine (&lt;5ms)</a:t>
+            </a:r>
+            <a:endParaRPr lang="en-US" sz="950" dirty="0"/>
+          </a:p>
+        </p:txBody>
+      </p:sp>
+      <p:sp>
+        <p:nvSpPr>
+          <p:cNvPr id="32" name="Shape 30"/>
+          <p:cNvSpPr/>
+          <p:nvPr/>
+        </p:nvSpPr>
+        <p:spPr>
+          <a:xfrm>
+            <a:off x="1097280" y="5349240"/>
+            <a:ext cx="9966960" cy="457200"/>
           </a:xfrm>
           <a:prstGeom prst="roundRect">
             <a:avLst/>
           </a:prstGeom>
           <a:solidFill>
-            <a:srgbClr val="151E32"/>
-          </a:solidFill>
-          <a:ln w="12700">
-            <a:solidFill>
-              <a:srgbClr val="22314E"/>
-            </a:solidFill>
-            <a:prstDash val="solid"/>
-          </a:ln>
-        </p:spPr>
-      </p:sp>
-      <p:sp>
-        <p:nvSpPr>
-          <p:cNvPr id="11" name="Text 9"/>
-          <p:cNvSpPr/>
-          <p:nvPr/>
-        </p:nvSpPr>
-        <p:spPr>
-          <a:xfrm>
-            <a:off x="914400" y="3493008"/>
-            <a:ext cx="4754880" cy="274320"/>
-          </a:xfrm>
-          <a:prstGeom prst="rect">
-            <a:avLst/>
-          </a:prstGeom>
-          <a:noFill/>
-          <a:ln/>
-        </p:spPr>
-        <p:txBody>
-          <a:bodyPr wrap="square" rtlCol="0" anchor="ctr"/>
-          <a:lstStyle/>
-          <a:p>
-            <a:pPr indent="0" marL="0">
-              <a:buNone/>
-            </a:pPr>
-            <a:r>
-              <a:rPr lang="en-US" sz="1300" b="1" dirty="0">
-                <a:solidFill>
-                  <a:srgbClr val="06B6D4"/>
-                </a:solidFill>
-              </a:rPr>
-              <a:t>Action Verbs (20%)</a:t>
-            </a:r>
-            <a:endParaRPr lang="en-US" sz="1300" dirty="0"/>
-          </a:p>
-        </p:txBody>
-      </p:sp>
-      <p:sp>
-        <p:nvSpPr>
-          <p:cNvPr id="12" name="Text 10"/>
-          <p:cNvSpPr/>
-          <p:nvPr/>
-        </p:nvSpPr>
-        <p:spPr>
-          <a:xfrm>
-            <a:off x="914400" y="3767328"/>
-            <a:ext cx="4754880" cy="320040"/>
-          </a:xfrm>
-          <a:prstGeom prst="rect">
-            <a:avLst/>
-          </a:prstGeom>
-          <a:noFill/>
-          <a:ln/>
-        </p:spPr>
-        <p:txBody>
-          <a:bodyPr wrap="square" rtlCol="0" anchor="ctr"/>
-          <a:lstStyle/>
-          <a:p>
-            <a:pPr indent="0" marL="0">
-              <a:buNone/>
-            </a:pPr>
-            <a:r>
-              <a:rPr lang="en-US" sz="1050" dirty="0">
-                <a:solidFill>
-                  <a:srgbClr val="94A3B8"/>
-                </a:solidFill>
-              </a:rPr>
-              <a:t>Elimination of passive phrases ("Responsible for", "Helped with") in favor of power verbs</a:t>
-            </a:r>
-            <a:endParaRPr lang="en-US" sz="1050" dirty="0"/>
-          </a:p>
-        </p:txBody>
-      </p:sp>
-      <p:sp>
-        <p:nvSpPr>
-          <p:cNvPr id="13" name="Shape 11"/>
-          <p:cNvSpPr/>
-          <p:nvPr/>
-        </p:nvSpPr>
-        <p:spPr>
-          <a:xfrm>
-            <a:off x="731520" y="4251960"/>
-            <a:ext cx="5120640" cy="777240"/>
-          </a:xfrm>
-          <a:prstGeom prst="roundRect">
-            <a:avLst/>
-          </a:prstGeom>
-          <a:solidFill>
-            <a:srgbClr val="151E32"/>
-          </a:solidFill>
-          <a:ln w="12700">
-            <a:solidFill>
-              <a:srgbClr val="22314E"/>
-            </a:solidFill>
-            <a:prstDash val="solid"/>
-          </a:ln>
-        </p:spPr>
-      </p:sp>
-      <p:sp>
-        <p:nvSpPr>
-          <p:cNvPr id="14" name="Text 12"/>
-          <p:cNvSpPr/>
-          <p:nvPr/>
-        </p:nvSpPr>
-        <p:spPr>
-          <a:xfrm>
-            <a:off x="914400" y="4361688"/>
-            <a:ext cx="4754880" cy="274320"/>
-          </a:xfrm>
-          <a:prstGeom prst="rect">
-            <a:avLst/>
-          </a:prstGeom>
-          <a:noFill/>
-          <a:ln/>
-        </p:spPr>
-        <p:txBody>
-          <a:bodyPr wrap="square" rtlCol="0" anchor="ctr"/>
-          <a:lstStyle/>
-          <a:p>
-            <a:pPr indent="0" marL="0">
-              <a:buNone/>
-            </a:pPr>
-            <a:r>
-              <a:rPr lang="en-US" sz="1300" b="1" dirty="0">
-                <a:solidFill>
-                  <a:srgbClr val="06B6D4"/>
-                </a:solidFill>
-              </a:rPr>
-              <a:t>Keyword Alignment (20%)</a:t>
-            </a:r>
-            <a:endParaRPr lang="en-US" sz="1300" dirty="0"/>
-          </a:p>
-        </p:txBody>
-      </p:sp>
-      <p:sp>
-        <p:nvSpPr>
-          <p:cNvPr id="15" name="Text 13"/>
-          <p:cNvSpPr/>
-          <p:nvPr/>
-        </p:nvSpPr>
-        <p:spPr>
-          <a:xfrm>
-            <a:off x="914400" y="4636008"/>
-            <a:ext cx="4754880" cy="320040"/>
-          </a:xfrm>
-          <a:prstGeom prst="rect">
-            <a:avLst/>
-          </a:prstGeom>
-          <a:noFill/>
-          <a:ln/>
-        </p:spPr>
-        <p:txBody>
-          <a:bodyPr wrap="square" rtlCol="0" anchor="ctr"/>
-          <a:lstStyle/>
-          <a:p>
-            <a:pPr indent="0" marL="0">
-              <a:buNone/>
-            </a:pPr>
-            <a:r>
-              <a:rPr lang="en-US" sz="1050" dirty="0">
-                <a:solidFill>
-                  <a:srgbClr val="94A3B8"/>
-                </a:solidFill>
-              </a:rPr>
-              <a:t>Direct taxonomy matching against target job description requirements</a:t>
-            </a:r>
-            <a:endParaRPr lang="en-US" sz="1050" dirty="0"/>
-          </a:p>
-        </p:txBody>
-      </p:sp>
-      <p:sp>
-        <p:nvSpPr>
-          <p:cNvPr id="16" name="Shape 14"/>
-          <p:cNvSpPr/>
-          <p:nvPr/>
-        </p:nvSpPr>
-        <p:spPr>
-          <a:xfrm>
-            <a:off x="731520" y="5120640"/>
-            <a:ext cx="5120640" cy="777240"/>
-          </a:xfrm>
-          <a:prstGeom prst="roundRect">
-            <a:avLst/>
-          </a:prstGeom>
-          <a:solidFill>
-            <a:srgbClr val="151E32"/>
-          </a:solidFill>
-          <a:ln w="12700">
-            <a:solidFill>
-              <a:srgbClr val="22314E"/>
-            </a:solidFill>
-            <a:prstDash val="solid"/>
-          </a:ln>
-        </p:spPr>
-      </p:sp>
-      <p:sp>
-        <p:nvSpPr>
-          <p:cNvPr id="17" name="Text 15"/>
-          <p:cNvSpPr/>
-          <p:nvPr/>
-        </p:nvSpPr>
-        <p:spPr>
-          <a:xfrm>
-            <a:off x="914400" y="5230368"/>
-            <a:ext cx="4754880" cy="274320"/>
-          </a:xfrm>
-          <a:prstGeom prst="rect">
-            <a:avLst/>
-          </a:prstGeom>
-          <a:noFill/>
-          <a:ln/>
-        </p:spPr>
-        <p:txBody>
-          <a:bodyPr wrap="square" rtlCol="0" anchor="ctr"/>
-          <a:lstStyle/>
-          <a:p>
-            <a:pPr indent="0" marL="0">
-              <a:buNone/>
-            </a:pPr>
-            <a:r>
-              <a:rPr lang="en-US" sz="1300" b="1" dirty="0">
-                <a:solidFill>
-                  <a:srgbClr val="06B6D4"/>
-                </a:solidFill>
-              </a:rPr>
-              <a:t>Formatting &amp; Brevity (10%)</a:t>
-            </a:r>
-            <a:endParaRPr lang="en-US" sz="1300" dirty="0"/>
-          </a:p>
-        </p:txBody>
-      </p:sp>
-      <p:sp>
-        <p:nvSpPr>
-          <p:cNvPr id="18" name="Text 16"/>
-          <p:cNvSpPr/>
-          <p:nvPr/>
-        </p:nvSpPr>
-        <p:spPr>
-          <a:xfrm>
-            <a:off x="914400" y="5504688"/>
-            <a:ext cx="4754880" cy="320040"/>
-          </a:xfrm>
-          <a:prstGeom prst="rect">
-            <a:avLst/>
-          </a:prstGeom>
-          <a:noFill/>
-          <a:ln/>
-        </p:spPr>
-        <p:txBody>
-          <a:bodyPr wrap="square" rtlCol="0" anchor="ctr"/>
-          <a:lstStyle/>
-          <a:p>
-            <a:pPr indent="0" marL="0">
-              <a:buNone/>
-            </a:pPr>
-            <a:r>
-              <a:rPr lang="en-US" sz="1050" dirty="0">
-                <a:solidFill>
-                  <a:srgbClr val="94A3B8"/>
-                </a:solidFill>
-              </a:rPr>
-              <a:t>Bullet density, executive summary framing, credentials and certifications order</a:t>
-            </a:r>
-            <a:endParaRPr lang="en-US" sz="1050" dirty="0"/>
-          </a:p>
-        </p:txBody>
-      </p:sp>
-      <p:sp>
-        <p:nvSpPr>
-          <p:cNvPr id="19" name="Shape 17"/>
-          <p:cNvSpPr/>
-          <p:nvPr/>
-        </p:nvSpPr>
-        <p:spPr>
-          <a:xfrm>
-            <a:off x="6217920" y="1645920"/>
-            <a:ext cx="5212080" cy="4206240"/>
-          </a:xfrm>
-          <a:prstGeom prst="roundRect">
-            <a:avLst/>
-          </a:prstGeom>
-          <a:solidFill>
-            <a:srgbClr val="151E32"/>
-          </a:solidFill>
-          <a:ln w="19050">
-            <a:solidFill>
-              <a:srgbClr val="6366F1"/>
-            </a:solidFill>
-            <a:prstDash val="solid"/>
-          </a:ln>
-        </p:spPr>
-      </p:sp>
-      <p:sp>
-        <p:nvSpPr>
-          <p:cNvPr id="20" name="Text 18"/>
-          <p:cNvSpPr/>
-          <p:nvPr/>
-        </p:nvSpPr>
-        <p:spPr>
-          <a:xfrm>
-            <a:off x="6492240" y="1920240"/>
-            <a:ext cx="4663440" cy="365760"/>
-          </a:xfrm>
-          <a:prstGeom prst="rect">
-            <a:avLst/>
-          </a:prstGeom>
-          <a:noFill/>
-          <a:ln/>
-        </p:spPr>
-        <p:txBody>
-          <a:bodyPr wrap="square" rtlCol="0" anchor="ctr"/>
-          <a:lstStyle/>
-          <a:p>
-            <a:pPr indent="0" marL="0">
-              <a:buNone/>
-            </a:pPr>
-            <a:r>
-              <a:rPr lang="en-US" sz="1600" b="1" dirty="0">
-                <a:solidFill>
-                  <a:srgbClr val="6366F1"/>
-                </a:solidFill>
-              </a:rPr>
-              <a:t>Google XYZ Optimization Formula</a:t>
-            </a:r>
-            <a:endParaRPr lang="en-US" sz="1600" dirty="0"/>
-          </a:p>
-        </p:txBody>
-      </p:sp>
-      <p:sp>
-        <p:nvSpPr>
-          <p:cNvPr id="21" name="Text 19"/>
-          <p:cNvSpPr/>
-          <p:nvPr/>
-        </p:nvSpPr>
-        <p:spPr>
-          <a:xfrm>
-            <a:off x="6492240" y="2377440"/>
-            <a:ext cx="4663440" cy="457200"/>
-          </a:xfrm>
-          <a:prstGeom prst="rect">
-            <a:avLst/>
-          </a:prstGeom>
-          <a:noFill/>
-          <a:ln/>
-        </p:spPr>
-        <p:txBody>
-          <a:bodyPr wrap="square" rtlCol="0" anchor="ctr"/>
-          <a:lstStyle/>
-          <a:p>
-            <a:pPr indent="0" marL="0">
-              <a:buNone/>
-            </a:pPr>
-            <a:r>
-              <a:rPr lang="en-US" sz="1300" b="1" dirty="0">
-                <a:solidFill>
-                  <a:srgbClr val="FFFFFF"/>
-                </a:solidFill>
-              </a:rPr>
-              <a:t>Accomplished [X], as measured by [Y], by doing [Z]</a:t>
-            </a:r>
-            <a:endParaRPr lang="en-US" sz="1300" dirty="0"/>
-          </a:p>
-        </p:txBody>
-      </p:sp>
-      <p:sp>
-        <p:nvSpPr>
-          <p:cNvPr id="22" name="Shape 20"/>
-          <p:cNvSpPr/>
-          <p:nvPr/>
-        </p:nvSpPr>
-        <p:spPr>
-          <a:xfrm>
-            <a:off x="6492240" y="2926080"/>
-            <a:ext cx="4663440" cy="1188720"/>
-          </a:xfrm>
-          <a:prstGeom prst="roundRect">
-            <a:avLst/>
-          </a:prstGeom>
-          <a:solidFill>
-            <a:srgbClr val="181424"/>
-          </a:solidFill>
-          <a:ln w="12700">
-            <a:solidFill>
-              <a:srgbClr val="F43F5E"/>
-            </a:solidFill>
-            <a:prstDash val="solid"/>
-          </a:ln>
-        </p:spPr>
-      </p:sp>
-      <p:sp>
-        <p:nvSpPr>
-          <p:cNvPr id="23" name="Text 21"/>
-          <p:cNvSpPr/>
-          <p:nvPr/>
-        </p:nvSpPr>
-        <p:spPr>
-          <a:xfrm>
-            <a:off x="6629400" y="3017520"/>
-            <a:ext cx="4389120" cy="228600"/>
-          </a:xfrm>
-          <a:prstGeom prst="rect">
-            <a:avLst/>
-          </a:prstGeom>
-          <a:noFill/>
-          <a:ln/>
-        </p:spPr>
-        <p:txBody>
-          <a:bodyPr wrap="square" rtlCol="0" anchor="ctr"/>
-          <a:lstStyle/>
-          <a:p>
-            <a:pPr indent="0" marL="0">
-              <a:buNone/>
-            </a:pPr>
-            <a:r>
-              <a:rPr lang="en-US" sz="1000" b="1" dirty="0">
-                <a:solidFill>
-                  <a:srgbClr val="F43F5E"/>
-                </a:solidFill>
-              </a:rPr>
-              <a:t>WEAK ORIGINAL (Duty Statement):</a:t>
-            </a:r>
-            <a:endParaRPr lang="en-US" sz="1000" dirty="0"/>
-          </a:p>
-        </p:txBody>
-      </p:sp>
-      <p:sp>
-        <p:nvSpPr>
-          <p:cNvPr id="24" name="Text 22"/>
-          <p:cNvSpPr/>
-          <p:nvPr/>
-        </p:nvSpPr>
-        <p:spPr>
-          <a:xfrm>
-            <a:off x="6629400" y="3246120"/>
-            <a:ext cx="4389120" cy="731520"/>
-          </a:xfrm>
-          <a:prstGeom prst="rect">
-            <a:avLst/>
-          </a:prstGeom>
-          <a:noFill/>
-          <a:ln/>
-        </p:spPr>
-        <p:txBody>
-          <a:bodyPr wrap="square" rtlCol="0" anchor="ctr"/>
-          <a:lstStyle/>
-          <a:p>
-            <a:pPr indent="0" marL="0">
-              <a:buNone/>
-            </a:pPr>
-            <a:r>
-              <a:rPr lang="en-US" sz="1100" dirty="0">
-                <a:solidFill>
-                  <a:srgbClr val="94A3B8"/>
-                </a:solidFill>
-              </a:rPr>
-              <a:t>"Responsible for reviewing system design documents and helping engineers with backend deployments."</a:t>
-            </a:r>
-            <a:endParaRPr lang="en-US" sz="1100" dirty="0"/>
-          </a:p>
-        </p:txBody>
-      </p:sp>
-      <p:sp>
-        <p:nvSpPr>
-          <p:cNvPr id="25" name="Shape 23"/>
-          <p:cNvSpPr/>
-          <p:nvPr/>
-        </p:nvSpPr>
-        <p:spPr>
-          <a:xfrm>
-            <a:off x="6492240" y="4297680"/>
-            <a:ext cx="4663440" cy="1371600"/>
-          </a:xfrm>
-          <a:prstGeom prst="roundRect">
-            <a:avLst/>
-          </a:prstGeom>
-          <a:solidFill>
-            <a:srgbClr val="0D1E18"/>
+            <a:srgbClr val="0D281E"/>
           </a:solidFill>
           <a:ln w="12700">
             <a:solidFill>
@@ -4275,14 +5463,14 @@
       </p:sp>
       <p:sp>
         <p:nvSpPr>
-          <p:cNvPr id="26" name="Text 24"/>
-          <p:cNvSpPr/>
-          <p:nvPr/>
-        </p:nvSpPr>
-        <p:spPr>
-          <a:xfrm>
-            <a:off x="6629400" y="4389120"/>
-            <a:ext cx="4389120" cy="228600"/>
+          <p:cNvPr id="33" name="Text 31"/>
+          <p:cNvSpPr/>
+          <p:nvPr/>
+        </p:nvSpPr>
+        <p:spPr>
+          <a:xfrm>
+            <a:off x="1280160" y="5422392"/>
+            <a:ext cx="9601200" cy="292608"/>
           </a:xfrm>
           <a:prstGeom prst="rect">
             <a:avLst/>
@@ -4300,48 +5488,12 @@
             <a:r>
               <a:rPr lang="en-US" sz="1000" b="1" dirty="0">
                 <a:solidFill>
-                  <a:srgbClr val="10B981"/>
-                </a:solidFill>
-              </a:rPr>
-              <a:t>OPTIMIZED XYZ BULLET (High-Impact ROI):</a:t>
+                  <a:srgbClr val="6EE7B7"/>
+                </a:solidFill>
+              </a:rPr>
+              <a:t>📌 Fix Verification: Cloud demand spikes are now seamlessly absorbed with zero error popups and instant user continuity.</a:t>
             </a:r>
             <a:endParaRPr lang="en-US" sz="1000" dirty="0"/>
-          </a:p>
-        </p:txBody>
-      </p:sp>
-      <p:sp>
-        <p:nvSpPr>
-          <p:cNvPr id="27" name="Text 25"/>
-          <p:cNvSpPr/>
-          <p:nvPr/>
-        </p:nvSpPr>
-        <p:spPr>
-          <a:xfrm>
-            <a:off x="6629400" y="4617720"/>
-            <a:ext cx="4389120" cy="868680"/>
-          </a:xfrm>
-          <a:prstGeom prst="rect">
-            <a:avLst/>
-          </a:prstGeom>
-          <a:noFill/>
-          <a:ln/>
-        </p:spPr>
-        <p:txBody>
-          <a:bodyPr wrap="square" rtlCol="0" anchor="ctr"/>
-          <a:lstStyle/>
-          <a:p>
-            <a:pPr indent="0" marL="0">
-              <a:buNone/>
-            </a:pPr>
-            <a:r>
-              <a:rPr lang="en-US" sz="1100" dirty="0">
-                <a:solidFill>
-                  <a:srgbClr val="FFFFFF"/>
-                </a:solidFill>
-              </a:rPr>
-              <a:t>"Spearheaded 24+ RFC architectural design reviews and mentored 12 engineers, accelerating sprint velocity by 34% and cutting production rollback incidents to zero."</a:t>
-            </a:r>
-            <a:endParaRPr lang="en-US" sz="1100" dirty="0"/>
           </a:p>
         </p:txBody>
       </p:sp>
@@ -4385,7 +5537,7 @@
         </p:nvSpPr>
         <p:spPr>
           <a:xfrm>
-            <a:off x="731520" y="548640"/>
+            <a:off x="731520" y="457200"/>
             <a:ext cx="9144000" cy="274320"/>
           </a:xfrm>
           <a:prstGeom prst="rect">
@@ -4407,7 +5559,7 @@
                   <a:srgbClr val="06B6D4"/>
                 </a:solidFill>
               </a:rPr>
-              <a:t>05 / CANDIDATE CASE STUDY</a:t>
+              <a:t>05 / AUDIT DASHBOARD SCREENSHOT</a:t>
             </a:r>
             <a:endParaRPr lang="en-US" sz="1000" dirty="0"/>
           </a:p>
@@ -4421,31 +5573,31 @@
         </p:nvSpPr>
         <p:spPr>
           <a:xfrm>
-            <a:off x="731520" y="822960"/>
-            <a:ext cx="10515600" cy="548640"/>
-          </a:xfrm>
-          <a:prstGeom prst="rect">
-            <a:avLst/>
-          </a:prstGeom>
-          <a:noFill/>
-          <a:ln/>
-        </p:spPr>
-        <p:txBody>
-          <a:bodyPr wrap="square" rtlCol="0" anchor="ctr"/>
-          <a:lstStyle/>
-          <a:p>
-            <a:pPr indent="0" marL="0">
-              <a:buNone/>
-            </a:pPr>
-            <a:r>
-              <a:rPr lang="en-US" sz="2800" b="1" dirty="0">
+            <a:off x="731520" y="731520"/>
+            <a:ext cx="10515600" cy="457200"/>
+          </a:xfrm>
+          <a:prstGeom prst="rect">
+            <a:avLst/>
+          </a:prstGeom>
+          <a:noFill/>
+          <a:ln/>
+        </p:spPr>
+        <p:txBody>
+          <a:bodyPr wrap="square" rtlCol="0" anchor="ctr"/>
+          <a:lstStyle/>
+          <a:p>
+            <a:pPr indent="0" marL="0">
+              <a:buNone/>
+            </a:pPr>
+            <a:r>
+              <a:rPr lang="en-US" sz="2400" b="1" dirty="0">
                 <a:solidFill>
                   <a:srgbClr val="FFFFFF"/>
                 </a:solidFill>
               </a:rPr>
-              <a:t>Priya Nair — Principal Java &amp; Distributed Systems Architect</a:t>
-            </a:r>
-            <a:endParaRPr lang="en-US" sz="2800" dirty="0"/>
+              <a:t>Website Screenshot: Live ATS Dashboard (Priya Nair)</a:t>
+            </a:r>
+            <a:endParaRPr lang="en-US" sz="2400" dirty="0"/>
           </a:p>
         </p:txBody>
       </p:sp>
@@ -4457,18 +5609,18 @@
         </p:nvSpPr>
         <p:spPr>
           <a:xfrm>
-            <a:off x="731520" y="1645920"/>
-            <a:ext cx="3383280" cy="4206240"/>
+            <a:off x="731520" y="1325880"/>
+            <a:ext cx="10698480" cy="4572000"/>
           </a:xfrm>
           <a:prstGeom prst="roundRect">
             <a:avLst/>
           </a:prstGeom>
           <a:solidFill>
-            <a:srgbClr val="151E32"/>
+            <a:srgbClr val="0F172A"/>
           </a:solidFill>
           <a:ln w="19050">
             <a:solidFill>
-              <a:srgbClr val="06B6D4"/>
+              <a:srgbClr val="334155"/>
             </a:solidFill>
             <a:prstDash val="solid"/>
           </a:ln>
@@ -4476,240 +5628,104 @@
       </p:sp>
       <p:sp>
         <p:nvSpPr>
-          <p:cNvPr id="5" name="Text 3"/>
-          <p:cNvSpPr/>
-          <p:nvPr/>
-        </p:nvSpPr>
-        <p:spPr>
-          <a:xfrm>
-            <a:off x="960120" y="1920240"/>
-            <a:ext cx="2926080" cy="365760"/>
-          </a:xfrm>
-          <a:prstGeom prst="rect">
-            <a:avLst/>
-          </a:prstGeom>
-          <a:noFill/>
-          <a:ln/>
-        </p:spPr>
-        <p:txBody>
-          <a:bodyPr wrap="square" rtlCol="0" anchor="ctr"/>
-          <a:lstStyle/>
-          <a:p>
-            <a:pPr indent="0" marL="0">
-              <a:buNone/>
-            </a:pPr>
-            <a:r>
-              <a:rPr lang="en-US" sz="1500" b="1" dirty="0">
-                <a:solidFill>
-                  <a:srgbClr val="06B6D4"/>
-                </a:solidFill>
-              </a:rPr>
-              <a:t>Candidate Profile</a:t>
-            </a:r>
-            <a:endParaRPr lang="en-US" sz="1500" dirty="0"/>
-          </a:p>
-        </p:txBody>
-      </p:sp>
-      <p:sp>
-        <p:nvSpPr>
-          <p:cNvPr id="6" name="Text 4"/>
-          <p:cNvSpPr/>
-          <p:nvPr/>
-        </p:nvSpPr>
-        <p:spPr>
-          <a:xfrm>
-            <a:off x="960120" y="2468880"/>
-            <a:ext cx="2926080" cy="457200"/>
-          </a:xfrm>
-          <a:prstGeom prst="rect">
-            <a:avLst/>
-          </a:prstGeom>
-          <a:noFill/>
-          <a:ln/>
-        </p:spPr>
-        <p:txBody>
-          <a:bodyPr wrap="square" rtlCol="0" anchor="ctr"/>
-          <a:lstStyle/>
-          <a:p>
-            <a:pPr indent="0" marL="0">
-              <a:buNone/>
-            </a:pPr>
-            <a:r>
-              <a:rPr lang="en-US" sz="1150" dirty="0">
-                <a:solidFill>
-                  <a:srgbClr val="94A3B8"/>
-                </a:solidFill>
-              </a:rPr>
-              <a:t>• Role: Principal Java &amp; Distributed Architect</a:t>
-            </a:r>
-            <a:endParaRPr lang="en-US" sz="1150" dirty="0"/>
-          </a:p>
-        </p:txBody>
-      </p:sp>
-      <p:sp>
-        <p:nvSpPr>
-          <p:cNvPr id="7" name="Text 5"/>
-          <p:cNvSpPr/>
-          <p:nvPr/>
-        </p:nvSpPr>
-        <p:spPr>
-          <a:xfrm>
-            <a:off x="960120" y="2971800"/>
-            <a:ext cx="2926080" cy="457200"/>
-          </a:xfrm>
-          <a:prstGeom prst="rect">
-            <a:avLst/>
-          </a:prstGeom>
-          <a:noFill/>
-          <a:ln/>
-        </p:spPr>
-        <p:txBody>
-          <a:bodyPr wrap="square" rtlCol="0" anchor="ctr"/>
-          <a:lstStyle/>
-          <a:p>
-            <a:pPr indent="0" marL="0">
-              <a:buNone/>
-            </a:pPr>
-            <a:r>
-              <a:rPr lang="en-US" sz="1150" dirty="0">
-                <a:solidFill>
-                  <a:srgbClr val="94A3B8"/>
-                </a:solidFill>
-              </a:rPr>
-              <a:t>• Tenure: 9 Years of Experience (Seattle, WA)</a:t>
-            </a:r>
-            <a:endParaRPr lang="en-US" sz="1150" dirty="0"/>
-          </a:p>
-        </p:txBody>
-      </p:sp>
-      <p:sp>
-        <p:nvSpPr>
-          <p:cNvPr id="8" name="Text 6"/>
-          <p:cNvSpPr/>
-          <p:nvPr/>
-        </p:nvSpPr>
-        <p:spPr>
-          <a:xfrm>
-            <a:off x="960120" y="3474720"/>
-            <a:ext cx="2926080" cy="457200"/>
-          </a:xfrm>
-          <a:prstGeom prst="rect">
-            <a:avLst/>
-          </a:prstGeom>
-          <a:noFill/>
-          <a:ln/>
-        </p:spPr>
-        <p:txBody>
-          <a:bodyPr wrap="square" rtlCol="0" anchor="ctr"/>
-          <a:lstStyle/>
-          <a:p>
-            <a:pPr indent="0" marL="0">
-              <a:buNone/>
-            </a:pPr>
-            <a:r>
-              <a:rPr lang="en-US" sz="1150" dirty="0">
-                <a:solidFill>
-                  <a:srgbClr val="94A3B8"/>
-                </a:solidFill>
-              </a:rPr>
-              <a:t>• Stack: Java 21, Spring Boot 3, Kafka, EKS</a:t>
-            </a:r>
-            <a:endParaRPr lang="en-US" sz="1150" dirty="0"/>
-          </a:p>
-        </p:txBody>
-      </p:sp>
-      <p:sp>
-        <p:nvSpPr>
-          <p:cNvPr id="9" name="Text 7"/>
-          <p:cNvSpPr/>
-          <p:nvPr/>
-        </p:nvSpPr>
-        <p:spPr>
-          <a:xfrm>
-            <a:off x="960120" y="3977640"/>
-            <a:ext cx="2926080" cy="457200"/>
-          </a:xfrm>
-          <a:prstGeom prst="rect">
-            <a:avLst/>
-          </a:prstGeom>
-          <a:noFill/>
-          <a:ln/>
-        </p:spPr>
-        <p:txBody>
-          <a:bodyPr wrap="square" rtlCol="0" anchor="ctr"/>
-          <a:lstStyle/>
-          <a:p>
-            <a:pPr indent="0" marL="0">
-              <a:buNone/>
-            </a:pPr>
-            <a:r>
-              <a:rPr lang="en-US" sz="1150" dirty="0">
-                <a:solidFill>
-                  <a:srgbClr val="94A3B8"/>
-                </a:solidFill>
-              </a:rPr>
-              <a:t>• Target Job: Global Ledger Settlement Architect</a:t>
-            </a:r>
-            <a:endParaRPr lang="en-US" sz="1150" dirty="0"/>
-          </a:p>
-        </p:txBody>
-      </p:sp>
-      <p:sp>
-        <p:nvSpPr>
-          <p:cNvPr id="10" name="Text 8"/>
-          <p:cNvSpPr/>
-          <p:nvPr/>
-        </p:nvSpPr>
-        <p:spPr>
-          <a:xfrm>
-            <a:off x="960120" y="4480560"/>
-            <a:ext cx="2926080" cy="457200"/>
-          </a:xfrm>
-          <a:prstGeom prst="rect">
-            <a:avLst/>
-          </a:prstGeom>
-          <a:noFill/>
-          <a:ln/>
-        </p:spPr>
-        <p:txBody>
-          <a:bodyPr wrap="square" rtlCol="0" anchor="ctr"/>
-          <a:lstStyle/>
-          <a:p>
-            <a:pPr indent="0" marL="0">
-              <a:buNone/>
-            </a:pPr>
-            <a:r>
-              <a:rPr lang="en-US" sz="1150" dirty="0">
-                <a:solidFill>
-                  <a:srgbClr val="94A3B8"/>
-                </a:solidFill>
-              </a:rPr>
-              <a:t>• Scale: 42,000 TPS at 99.995% SLA</a:t>
-            </a:r>
-            <a:endParaRPr lang="en-US" sz="1150" dirty="0"/>
-          </a:p>
-        </p:txBody>
-      </p:sp>
-      <p:sp>
-        <p:nvSpPr>
-          <p:cNvPr id="11" name="Shape 9"/>
-          <p:cNvSpPr/>
-          <p:nvPr/>
-        </p:nvSpPr>
-        <p:spPr>
-          <a:xfrm>
-            <a:off x="4389120" y="1645920"/>
-            <a:ext cx="3383280" cy="4206240"/>
+          <p:cNvPr id="5" name="Shape 3"/>
+          <p:cNvSpPr/>
+          <p:nvPr/>
+        </p:nvSpPr>
+        <p:spPr>
+          <a:xfrm>
+            <a:off x="731520" y="1325880"/>
+            <a:ext cx="10698480" cy="384048"/>
+          </a:xfrm>
+          <a:prstGeom prst="rect">
+            <a:avLst/>
+          </a:prstGeom>
+          <a:solidFill>
+            <a:srgbClr val="1E293B"/>
+          </a:solidFill>
+          <a:ln/>
+        </p:spPr>
+      </p:sp>
+      <p:sp>
+        <p:nvSpPr>
+          <p:cNvPr id="6" name="Shape 4"/>
+          <p:cNvSpPr/>
+          <p:nvPr/>
+        </p:nvSpPr>
+        <p:spPr>
+          <a:xfrm>
+            <a:off x="868680" y="1453896"/>
+            <a:ext cx="128016" cy="128016"/>
+          </a:xfrm>
+          <a:prstGeom prst="ellipse">
+            <a:avLst/>
+          </a:prstGeom>
+          <a:solidFill>
+            <a:srgbClr val="EF4444"/>
+          </a:solidFill>
+          <a:ln/>
+        </p:spPr>
+      </p:sp>
+      <p:sp>
+        <p:nvSpPr>
+          <p:cNvPr id="7" name="Shape 5"/>
+          <p:cNvSpPr/>
+          <p:nvPr/>
+        </p:nvSpPr>
+        <p:spPr>
+          <a:xfrm>
+            <a:off x="1051560" y="1453896"/>
+            <a:ext cx="128016" cy="128016"/>
+          </a:xfrm>
+          <a:prstGeom prst="ellipse">
+            <a:avLst/>
+          </a:prstGeom>
+          <a:solidFill>
+            <a:srgbClr val="F59E0B"/>
+          </a:solidFill>
+          <a:ln/>
+        </p:spPr>
+      </p:sp>
+      <p:sp>
+        <p:nvSpPr>
+          <p:cNvPr id="8" name="Shape 6"/>
+          <p:cNvSpPr/>
+          <p:nvPr/>
+        </p:nvSpPr>
+        <p:spPr>
+          <a:xfrm>
+            <a:off x="1234440" y="1453896"/>
+            <a:ext cx="128016" cy="128016"/>
+          </a:xfrm>
+          <a:prstGeom prst="ellipse">
+            <a:avLst/>
+          </a:prstGeom>
+          <a:solidFill>
+            <a:srgbClr val="10B981"/>
+          </a:solidFill>
+          <a:ln/>
+        </p:spPr>
+      </p:sp>
+      <p:sp>
+        <p:nvSpPr>
+          <p:cNvPr id="9" name="Shape 7"/>
+          <p:cNvSpPr/>
+          <p:nvPr/>
+        </p:nvSpPr>
+        <p:spPr>
+          <a:xfrm>
+            <a:off x="1554480" y="1399032"/>
+            <a:ext cx="9052560" cy="237744"/>
           </a:xfrm>
           <a:prstGeom prst="roundRect">
             <a:avLst/>
           </a:prstGeom>
           <a:solidFill>
-            <a:srgbClr val="151E32"/>
-          </a:solidFill>
-          <a:ln w="19050">
+            <a:srgbClr val="0F172A"/>
+          </a:solidFill>
+          <a:ln w="12700">
             <a:solidFill>
-              <a:srgbClr val="F59E0B"/>
+              <a:srgbClr val="334155"/>
             </a:solidFill>
             <a:prstDash val="solid"/>
           </a:ln>
@@ -4717,230 +5733,53 @@
       </p:sp>
       <p:sp>
         <p:nvSpPr>
-          <p:cNvPr id="12" name="Text 10"/>
-          <p:cNvSpPr/>
-          <p:nvPr/>
-        </p:nvSpPr>
-        <p:spPr>
-          <a:xfrm>
-            <a:off x="4617720" y="1920240"/>
-            <a:ext cx="2926080" cy="365760"/>
-          </a:xfrm>
-          <a:prstGeom prst="rect">
-            <a:avLst/>
-          </a:prstGeom>
-          <a:noFill/>
-          <a:ln/>
-        </p:spPr>
-        <p:txBody>
-          <a:bodyPr wrap="square" rtlCol="0" anchor="ctr"/>
-          <a:lstStyle/>
-          <a:p>
-            <a:pPr indent="0" marL="0">
-              <a:buNone/>
-            </a:pPr>
-            <a:r>
-              <a:rPr lang="en-US" sz="1500" b="1" dirty="0">
-                <a:solidFill>
-                  <a:srgbClr val="F59E0B"/>
-                </a:solidFill>
-              </a:rPr>
-              <a:t>Diagnostic Audit</a:t>
-            </a:r>
-            <a:endParaRPr lang="en-US" sz="1500" dirty="0"/>
-          </a:p>
-        </p:txBody>
-      </p:sp>
-      <p:sp>
-        <p:nvSpPr>
-          <p:cNvPr id="13" name="Text 11"/>
-          <p:cNvSpPr/>
-          <p:nvPr/>
-        </p:nvSpPr>
-        <p:spPr>
-          <a:xfrm>
-            <a:off x="4617720" y="2468880"/>
-            <a:ext cx="2926080" cy="457200"/>
-          </a:xfrm>
-          <a:prstGeom prst="rect">
-            <a:avLst/>
-          </a:prstGeom>
-          <a:noFill/>
-          <a:ln/>
-        </p:spPr>
-        <p:txBody>
-          <a:bodyPr wrap="square" rtlCol="0" anchor="ctr"/>
-          <a:lstStyle/>
-          <a:p>
-            <a:pPr indent="0" marL="0">
-              <a:buNone/>
-            </a:pPr>
-            <a:r>
-              <a:rPr lang="en-US" sz="1150" dirty="0">
+          <p:cNvPr id="10" name="Text 8"/>
+          <p:cNvSpPr/>
+          <p:nvPr/>
+        </p:nvSpPr>
+        <p:spPr>
+          <a:xfrm>
+            <a:off x="1645920" y="1399032"/>
+            <a:ext cx="8869680" cy="237744"/>
+          </a:xfrm>
+          <a:prstGeom prst="rect">
+            <a:avLst/>
+          </a:prstGeom>
+          <a:noFill/>
+          <a:ln/>
+        </p:spPr>
+        <p:txBody>
+          <a:bodyPr wrap="square" rtlCol="0" anchor="ctr"/>
+          <a:lstStyle/>
+          <a:p>
+            <a:pPr indent="0" marL="0">
+              <a:buNone/>
+            </a:pPr>
+            <a:r>
+              <a:rPr lang="en-US" sz="900" dirty="0">
                 <a:solidFill>
                   <a:srgbClr val="94A3B8"/>
                 </a:solidFill>
-              </a:rPr>
-              <a:t>• Overall Score: 86/100 (Exceptional tier)</a:t>
-            </a:r>
-            <a:endParaRPr lang="en-US" sz="1150" dirty="0"/>
-          </a:p>
-        </p:txBody>
-      </p:sp>
-      <p:sp>
-        <p:nvSpPr>
-          <p:cNvPr id="14" name="Text 12"/>
-          <p:cNvSpPr/>
-          <p:nvPr/>
-        </p:nvSpPr>
-        <p:spPr>
-          <a:xfrm>
-            <a:off x="4617720" y="2971800"/>
-            <a:ext cx="2926080" cy="457200"/>
-          </a:xfrm>
-          <a:prstGeom prst="rect">
-            <a:avLst/>
-          </a:prstGeom>
-          <a:noFill/>
-          <a:ln/>
-        </p:spPr>
-        <p:txBody>
-          <a:bodyPr wrap="square" rtlCol="0" anchor="ctr"/>
-          <a:lstStyle/>
-          <a:p>
-            <a:pPr indent="0" marL="0">
-              <a:buNone/>
-            </a:pPr>
-            <a:r>
-              <a:rPr lang="en-US" sz="1150" dirty="0">
-                <a:solidFill>
-                  <a:srgbClr val="94A3B8"/>
-                </a:solidFill>
-              </a:rPr>
-              <a:t>• ATS Parsability: 92/100 (Clean PDF flow)</a:t>
-            </a:r>
-            <a:endParaRPr lang="en-US" sz="1150" dirty="0"/>
-          </a:p>
-        </p:txBody>
-      </p:sp>
-      <p:sp>
-        <p:nvSpPr>
-          <p:cNvPr id="15" name="Text 13"/>
-          <p:cNvSpPr/>
-          <p:nvPr/>
-        </p:nvSpPr>
-        <p:spPr>
-          <a:xfrm>
-            <a:off x="4617720" y="3474720"/>
-            <a:ext cx="2926080" cy="457200"/>
-          </a:xfrm>
-          <a:prstGeom prst="rect">
-            <a:avLst/>
-          </a:prstGeom>
-          <a:noFill/>
-          <a:ln/>
-        </p:spPr>
-        <p:txBody>
-          <a:bodyPr wrap="square" rtlCol="0" anchor="ctr"/>
-          <a:lstStyle/>
-          <a:p>
-            <a:pPr indent="0" marL="0">
-              <a:buNone/>
-            </a:pPr>
-            <a:r>
-              <a:rPr lang="en-US" sz="1150" dirty="0">
-                <a:solidFill>
-                  <a:srgbClr val="94A3B8"/>
-                </a:solidFill>
-              </a:rPr>
-              <a:t>• Quantifiable Impact: 84/100 (19ms p99 latency)</a:t>
-            </a:r>
-            <a:endParaRPr lang="en-US" sz="1150" dirty="0"/>
-          </a:p>
-        </p:txBody>
-      </p:sp>
-      <p:sp>
-        <p:nvSpPr>
-          <p:cNvPr id="16" name="Text 14"/>
-          <p:cNvSpPr/>
-          <p:nvPr/>
-        </p:nvSpPr>
-        <p:spPr>
-          <a:xfrm>
-            <a:off x="4617720" y="3977640"/>
-            <a:ext cx="2926080" cy="457200"/>
-          </a:xfrm>
-          <a:prstGeom prst="rect">
-            <a:avLst/>
-          </a:prstGeom>
-          <a:noFill/>
-          <a:ln/>
-        </p:spPr>
-        <p:txBody>
-          <a:bodyPr wrap="square" rtlCol="0" anchor="ctr"/>
-          <a:lstStyle/>
-          <a:p>
-            <a:pPr indent="0" marL="0">
-              <a:buNone/>
-            </a:pPr>
-            <a:r>
-              <a:rPr lang="en-US" sz="1150" dirty="0">
-                <a:solidFill>
-                  <a:srgbClr val="94A3B8"/>
-                </a:solidFill>
-              </a:rPr>
-              <a:t>• Weakness: Passive duty verbs in secondary bullets</a:t>
-            </a:r>
-            <a:endParaRPr lang="en-US" sz="1150" dirty="0"/>
-          </a:p>
-        </p:txBody>
-      </p:sp>
-      <p:sp>
-        <p:nvSpPr>
-          <p:cNvPr id="17" name="Text 15"/>
-          <p:cNvSpPr/>
-          <p:nvPr/>
-        </p:nvSpPr>
-        <p:spPr>
-          <a:xfrm>
-            <a:off x="4617720" y="4480560"/>
-            <a:ext cx="2926080" cy="457200"/>
-          </a:xfrm>
-          <a:prstGeom prst="rect">
-            <a:avLst/>
-          </a:prstGeom>
-          <a:noFill/>
-          <a:ln/>
-        </p:spPr>
-        <p:txBody>
-          <a:bodyPr wrap="square" rtlCol="0" anchor="ctr"/>
-          <a:lstStyle/>
-          <a:p>
-            <a:pPr indent="0" marL="0">
-              <a:buNone/>
-            </a:pPr>
-            <a:r>
-              <a:rPr lang="en-US" sz="1150" dirty="0">
-                <a:solidFill>
-                  <a:srgbClr val="94A3B8"/>
-                </a:solidFill>
-              </a:rPr>
-              <a:t>• Gap: Missing FinOps quarterly cloud cost metrics</a:t>
-            </a:r>
-            <a:endParaRPr lang="en-US" sz="1150" dirty="0"/>
-          </a:p>
-        </p:txBody>
-      </p:sp>
-      <p:sp>
-        <p:nvSpPr>
-          <p:cNvPr id="18" name="Shape 16"/>
-          <p:cNvSpPr/>
-          <p:nvPr/>
-        </p:nvSpPr>
-        <p:spPr>
-          <a:xfrm>
-            <a:off x="8046720" y="1645920"/>
-            <a:ext cx="3383280" cy="4206240"/>
+                <a:latin typeface="Calibri" pitchFamily="34" charset="0"/>
+                <a:ea typeface="Calibri" pitchFamily="34" charset="-122"/>
+                <a:cs typeface="Calibri" pitchFamily="34" charset="-120"/>
+              </a:rPr>
+              <a:t>🔒 https://careerpulse.ai/analyzer/priya-nair</a:t>
+            </a:r>
+            <a:endParaRPr lang="en-US" sz="900" dirty="0"/>
+          </a:p>
+        </p:txBody>
+      </p:sp>
+      <p:sp>
+        <p:nvSpPr>
+          <p:cNvPr id="11" name="Shape 9"/>
+          <p:cNvSpPr/>
+          <p:nvPr/>
+        </p:nvSpPr>
+        <p:spPr>
+          <a:xfrm>
+            <a:off x="1005840" y="1828800"/>
+            <a:ext cx="3291840" cy="3886200"/>
           </a:xfrm>
           <a:prstGeom prst="roundRect">
             <a:avLst/>
@@ -4948,7 +5787,32 @@
           <a:solidFill>
             <a:srgbClr val="151E32"/>
           </a:solidFill>
-          <a:ln w="19050">
+          <a:ln w="12700">
+            <a:solidFill>
+              <a:srgbClr val="22314E"/>
+            </a:solidFill>
+            <a:prstDash val="solid"/>
+          </a:ln>
+        </p:spPr>
+      </p:sp>
+      <p:sp>
+        <p:nvSpPr>
+          <p:cNvPr id="12" name="Shape 10"/>
+          <p:cNvSpPr/>
+          <p:nvPr/>
+        </p:nvSpPr>
+        <p:spPr>
+          <a:xfrm>
+            <a:off x="1828800" y="2011680"/>
+            <a:ext cx="1645920" cy="1645920"/>
+          </a:xfrm>
+          <a:prstGeom prst="ellipse">
+            <a:avLst/>
+          </a:prstGeom>
+          <a:solidFill>
+            <a:srgbClr val="0F172A"/>
+          </a:solidFill>
+          <a:ln w="50800">
             <a:solidFill>
               <a:srgbClr val="10B981"/>
             </a:solidFill>
@@ -4958,217 +5822,630 @@
       </p:sp>
       <p:sp>
         <p:nvSpPr>
+          <p:cNvPr id="13" name="Text 11"/>
+          <p:cNvSpPr/>
+          <p:nvPr/>
+        </p:nvSpPr>
+        <p:spPr>
+          <a:xfrm>
+            <a:off x="1828800" y="2286000"/>
+            <a:ext cx="1645920" cy="640080"/>
+          </a:xfrm>
+          <a:prstGeom prst="rect">
+            <a:avLst/>
+          </a:prstGeom>
+          <a:noFill/>
+          <a:ln/>
+        </p:spPr>
+        <p:txBody>
+          <a:bodyPr wrap="square" rtlCol="0" anchor="ctr"/>
+          <a:lstStyle/>
+          <a:p>
+            <a:pPr algn="ctr" indent="0" marL="0">
+              <a:buNone/>
+            </a:pPr>
+            <a:r>
+              <a:rPr lang="en-US" sz="3600" b="1" dirty="0">
+                <a:solidFill>
+                  <a:srgbClr val="FFFFFF"/>
+                </a:solidFill>
+              </a:rPr>
+              <a:t>86</a:t>
+            </a:r>
+            <a:endParaRPr lang="en-US" sz="3600" dirty="0"/>
+          </a:p>
+        </p:txBody>
+      </p:sp>
+      <p:sp>
+        <p:nvSpPr>
+          <p:cNvPr id="14" name="Text 12"/>
+          <p:cNvSpPr/>
+          <p:nvPr/>
+        </p:nvSpPr>
+        <p:spPr>
+          <a:xfrm>
+            <a:off x="1828800" y="2834640"/>
+            <a:ext cx="1645920" cy="274320"/>
+          </a:xfrm>
+          <a:prstGeom prst="rect">
+            <a:avLst/>
+          </a:prstGeom>
+          <a:noFill/>
+          <a:ln/>
+        </p:spPr>
+        <p:txBody>
+          <a:bodyPr wrap="square" rtlCol="0" anchor="ctr"/>
+          <a:lstStyle/>
+          <a:p>
+            <a:pPr algn="ctr" indent="0" marL="0">
+              <a:buNone/>
+            </a:pPr>
+            <a:r>
+              <a:rPr lang="en-US" sz="1000" dirty="0">
+                <a:solidFill>
+                  <a:srgbClr val="94A3B8"/>
+                </a:solidFill>
+              </a:rPr>
+              <a:t>/ 100</a:t>
+            </a:r>
+            <a:endParaRPr lang="en-US" sz="1000" dirty="0"/>
+          </a:p>
+        </p:txBody>
+      </p:sp>
+      <p:sp>
+        <p:nvSpPr>
+          <p:cNvPr id="15" name="Text 13"/>
+          <p:cNvSpPr/>
+          <p:nvPr/>
+        </p:nvSpPr>
+        <p:spPr>
+          <a:xfrm>
+            <a:off x="1097280" y="3794760"/>
+            <a:ext cx="3108960" cy="320040"/>
+          </a:xfrm>
+          <a:prstGeom prst="rect">
+            <a:avLst/>
+          </a:prstGeom>
+          <a:noFill/>
+          <a:ln/>
+        </p:spPr>
+        <p:txBody>
+          <a:bodyPr wrap="square" rtlCol="0" anchor="ctr"/>
+          <a:lstStyle/>
+          <a:p>
+            <a:pPr algn="ctr" indent="0" marL="0">
+              <a:buNone/>
+            </a:pPr>
+            <a:r>
+              <a:rPr lang="en-US" sz="1300" b="1" dirty="0">
+                <a:solidFill>
+                  <a:srgbClr val="10B981"/>
+                </a:solidFill>
+              </a:rPr>
+              <a:t>Exceptional Tier</a:t>
+            </a:r>
+            <a:endParaRPr lang="en-US" sz="1300" dirty="0"/>
+          </a:p>
+        </p:txBody>
+      </p:sp>
+      <p:sp>
+        <p:nvSpPr>
+          <p:cNvPr id="16" name="Text 14"/>
+          <p:cNvSpPr/>
+          <p:nvPr/>
+        </p:nvSpPr>
+        <p:spPr>
+          <a:xfrm>
+            <a:off x="1097280" y="4069080"/>
+            <a:ext cx="3108960" cy="274320"/>
+          </a:xfrm>
+          <a:prstGeom prst="rect">
+            <a:avLst/>
+          </a:prstGeom>
+          <a:noFill/>
+          <a:ln/>
+        </p:spPr>
+        <p:txBody>
+          <a:bodyPr wrap="square" rtlCol="0" anchor="ctr"/>
+          <a:lstStyle/>
+          <a:p>
+            <a:pPr algn="ctr" indent="0" marL="0">
+              <a:buNone/>
+            </a:pPr>
+            <a:r>
+              <a:rPr lang="en-US" sz="950" dirty="0">
+                <a:solidFill>
+                  <a:srgbClr val="94A3B8"/>
+                </a:solidFill>
+              </a:rPr>
+              <a:t>Interview Ready • Top 5% of Staff Applicants</a:t>
+            </a:r>
+            <a:endParaRPr lang="en-US" sz="950" dirty="0"/>
+          </a:p>
+        </p:txBody>
+      </p:sp>
+      <p:sp>
+        <p:nvSpPr>
+          <p:cNvPr id="17" name="Text 15"/>
+          <p:cNvSpPr/>
+          <p:nvPr/>
+        </p:nvSpPr>
+        <p:spPr>
+          <a:xfrm>
+            <a:off x="1188720" y="4434840"/>
+            <a:ext cx="2926080" cy="228600"/>
+          </a:xfrm>
+          <a:prstGeom prst="rect">
+            <a:avLst/>
+          </a:prstGeom>
+          <a:noFill/>
+          <a:ln/>
+        </p:spPr>
+        <p:txBody>
+          <a:bodyPr wrap="square" rtlCol="0" anchor="ctr"/>
+          <a:lstStyle/>
+          <a:p>
+            <a:pPr indent="0" marL="0">
+              <a:buNone/>
+            </a:pPr>
+            <a:r>
+              <a:rPr lang="en-US" sz="900" dirty="0">
+                <a:solidFill>
+                  <a:srgbClr val="FFFFFF"/>
+                </a:solidFill>
+              </a:rPr>
+              <a:t>ATS Parsability: 92%</a:t>
+            </a:r>
+            <a:endParaRPr lang="en-US" sz="900" dirty="0"/>
+          </a:p>
+        </p:txBody>
+      </p:sp>
+      <p:sp>
+        <p:nvSpPr>
+          <p:cNvPr id="18" name="Shape 16"/>
+          <p:cNvSpPr/>
+          <p:nvPr/>
+        </p:nvSpPr>
+        <p:spPr>
+          <a:xfrm>
+            <a:off x="1188720" y="4663440"/>
+            <a:ext cx="2651760" cy="73152"/>
+          </a:xfrm>
+          <a:prstGeom prst="rect">
+            <a:avLst/>
+          </a:prstGeom>
+          <a:solidFill>
+            <a:srgbClr val="10B981"/>
+          </a:solidFill>
+          <a:ln/>
+        </p:spPr>
+      </p:sp>
+      <p:sp>
+        <p:nvSpPr>
           <p:cNvPr id="19" name="Text 17"/>
           <p:cNvSpPr/>
           <p:nvPr/>
         </p:nvSpPr>
         <p:spPr>
           <a:xfrm>
-            <a:off x="8275320" y="1920240"/>
-            <a:ext cx="2926080" cy="365760"/>
-          </a:xfrm>
-          <a:prstGeom prst="rect">
-            <a:avLst/>
-          </a:prstGeom>
-          <a:noFill/>
-          <a:ln/>
-        </p:spPr>
-        <p:txBody>
-          <a:bodyPr wrap="square" rtlCol="0" anchor="ctr"/>
-          <a:lstStyle/>
-          <a:p>
-            <a:pPr indent="0" marL="0">
-              <a:buNone/>
-            </a:pPr>
-            <a:r>
-              <a:rPr lang="en-US" sz="1500" b="1" dirty="0">
-                <a:solidFill>
-                  <a:srgbClr val="10B981"/>
-                </a:solidFill>
-              </a:rPr>
-              <a:t>Simulated Score Boost</a:t>
-            </a:r>
-            <a:endParaRPr lang="en-US" sz="1500" dirty="0"/>
-          </a:p>
-        </p:txBody>
-      </p:sp>
-      <p:sp>
-        <p:nvSpPr>
-          <p:cNvPr id="20" name="Text 18"/>
-          <p:cNvSpPr/>
-          <p:nvPr/>
-        </p:nvSpPr>
-        <p:spPr>
-          <a:xfrm>
-            <a:off x="8275320" y="2468880"/>
-            <a:ext cx="2926080" cy="457200"/>
-          </a:xfrm>
-          <a:prstGeom prst="rect">
-            <a:avLst/>
-          </a:prstGeom>
-          <a:noFill/>
-          <a:ln/>
-        </p:spPr>
-        <p:txBody>
-          <a:bodyPr wrap="square" rtlCol="0" anchor="ctr"/>
-          <a:lstStyle/>
-          <a:p>
-            <a:pPr indent="0" marL="0">
-              <a:buNone/>
-            </a:pPr>
-            <a:r>
-              <a:rPr lang="en-US" sz="1150" dirty="0">
+            <a:off x="1188720" y="4800600"/>
+            <a:ext cx="2926080" cy="228600"/>
+          </a:xfrm>
+          <a:prstGeom prst="rect">
+            <a:avLst/>
+          </a:prstGeom>
+          <a:noFill/>
+          <a:ln/>
+        </p:spPr>
+        <p:txBody>
+          <a:bodyPr wrap="square" rtlCol="0" anchor="ctr"/>
+          <a:lstStyle/>
+          <a:p>
+            <a:pPr indent="0" marL="0">
+              <a:buNone/>
+            </a:pPr>
+            <a:r>
+              <a:rPr lang="en-US" sz="900" dirty="0">
+                <a:solidFill>
+                  <a:srgbClr val="FFFFFF"/>
+                </a:solidFill>
+              </a:rPr>
+              <a:t>Quantifiable Impact: 84%</a:t>
+            </a:r>
+            <a:endParaRPr lang="en-US" sz="900" dirty="0"/>
+          </a:p>
+        </p:txBody>
+      </p:sp>
+      <p:sp>
+        <p:nvSpPr>
+          <p:cNvPr id="20" name="Shape 18"/>
+          <p:cNvSpPr/>
+          <p:nvPr/>
+        </p:nvSpPr>
+        <p:spPr>
+          <a:xfrm>
+            <a:off x="1188720" y="5029200"/>
+            <a:ext cx="2377440" cy="73152"/>
+          </a:xfrm>
+          <a:prstGeom prst="rect">
+            <a:avLst/>
+          </a:prstGeom>
+          <a:solidFill>
+            <a:srgbClr val="06B6D4"/>
+          </a:solidFill>
+          <a:ln/>
+        </p:spPr>
+      </p:sp>
+      <p:sp>
+        <p:nvSpPr>
+          <p:cNvPr id="21" name="Text 19"/>
+          <p:cNvSpPr/>
+          <p:nvPr/>
+        </p:nvSpPr>
+        <p:spPr>
+          <a:xfrm>
+            <a:off x="1188720" y="5166360"/>
+            <a:ext cx="2926080" cy="228600"/>
+          </a:xfrm>
+          <a:prstGeom prst="rect">
+            <a:avLst/>
+          </a:prstGeom>
+          <a:noFill/>
+          <a:ln/>
+        </p:spPr>
+        <p:txBody>
+          <a:bodyPr wrap="square" rtlCol="0" anchor="ctr"/>
+          <a:lstStyle/>
+          <a:p>
+            <a:pPr indent="0" marL="0">
+              <a:buNone/>
+            </a:pPr>
+            <a:r>
+              <a:rPr lang="en-US" sz="900" dirty="0">
+                <a:solidFill>
+                  <a:srgbClr val="FFFFFF"/>
+                </a:solidFill>
+              </a:rPr>
+              <a:t>Action Verbs &amp; Ownership: 79%</a:t>
+            </a:r>
+            <a:endParaRPr lang="en-US" sz="900" dirty="0"/>
+          </a:p>
+        </p:txBody>
+      </p:sp>
+      <p:sp>
+        <p:nvSpPr>
+          <p:cNvPr id="22" name="Shape 20"/>
+          <p:cNvSpPr/>
+          <p:nvPr/>
+        </p:nvSpPr>
+        <p:spPr>
+          <a:xfrm>
+            <a:off x="1188720" y="5394960"/>
+            <a:ext cx="2194560" cy="73152"/>
+          </a:xfrm>
+          <a:prstGeom prst="rect">
+            <a:avLst/>
+          </a:prstGeom>
+          <a:solidFill>
+            <a:srgbClr val="F59E0B"/>
+          </a:solidFill>
+          <a:ln/>
+        </p:spPr>
+      </p:sp>
+      <p:sp>
+        <p:nvSpPr>
+          <p:cNvPr id="23" name="Shape 21"/>
+          <p:cNvSpPr/>
+          <p:nvPr/>
+        </p:nvSpPr>
+        <p:spPr>
+          <a:xfrm>
+            <a:off x="4480560" y="1828800"/>
+            <a:ext cx="6675120" cy="1874520"/>
+          </a:xfrm>
+          <a:prstGeom prst="roundRect">
+            <a:avLst/>
+          </a:prstGeom>
+          <a:solidFill>
+            <a:srgbClr val="151E32"/>
+          </a:solidFill>
+          <a:ln w="12700">
+            <a:solidFill>
+              <a:srgbClr val="22314E"/>
+            </a:solidFill>
+            <a:prstDash val="solid"/>
+          </a:ln>
+        </p:spPr>
+      </p:sp>
+      <p:sp>
+        <p:nvSpPr>
+          <p:cNvPr id="24" name="Text 22"/>
+          <p:cNvSpPr/>
+          <p:nvPr/>
+        </p:nvSpPr>
+        <p:spPr>
+          <a:xfrm>
+            <a:off x="4663440" y="1965960"/>
+            <a:ext cx="4572000" cy="274320"/>
+          </a:xfrm>
+          <a:prstGeom prst="rect">
+            <a:avLst/>
+          </a:prstGeom>
+          <a:noFill/>
+          <a:ln/>
+        </p:spPr>
+        <p:txBody>
+          <a:bodyPr wrap="square" rtlCol="0" anchor="ctr"/>
+          <a:lstStyle/>
+          <a:p>
+            <a:pPr indent="0" marL="0">
+              <a:buNone/>
+            </a:pPr>
+            <a:r>
+              <a:rPr lang="en-US" sz="1200" b="1" dirty="0">
+                <a:solidFill>
+                  <a:srgbClr val="6366F1"/>
+                </a:solidFill>
+              </a:rPr>
+              <a:t>Google XYZ Bullet Optimization</a:t>
+            </a:r>
+            <a:endParaRPr lang="en-US" sz="1200" dirty="0"/>
+          </a:p>
+        </p:txBody>
+      </p:sp>
+      <p:sp>
+        <p:nvSpPr>
+          <p:cNvPr id="25" name="Shape 23"/>
+          <p:cNvSpPr/>
+          <p:nvPr/>
+        </p:nvSpPr>
+        <p:spPr>
+          <a:xfrm>
+            <a:off x="4663440" y="2267712"/>
+            <a:ext cx="6309360" cy="594360"/>
+          </a:xfrm>
+          <a:prstGeom prst="roundRect">
+            <a:avLst/>
+          </a:prstGeom>
+          <a:solidFill>
+            <a:srgbClr val="1C1318"/>
+          </a:solidFill>
+          <a:ln w="12700">
+            <a:solidFill>
+              <a:srgbClr val="F43F5E"/>
+            </a:solidFill>
+            <a:prstDash val="solid"/>
+          </a:ln>
+        </p:spPr>
+      </p:sp>
+      <p:sp>
+        <p:nvSpPr>
+          <p:cNvPr id="26" name="Text 24"/>
+          <p:cNvSpPr/>
+          <p:nvPr/>
+        </p:nvSpPr>
+        <p:spPr>
+          <a:xfrm>
+            <a:off x="4754880" y="2331720"/>
+            <a:ext cx="6126480" cy="457200"/>
+          </a:xfrm>
+          <a:prstGeom prst="rect">
+            <a:avLst/>
+          </a:prstGeom>
+          <a:noFill/>
+          <a:ln/>
+        </p:spPr>
+        <p:txBody>
+          <a:bodyPr wrap="square" rtlCol="0" anchor="ctr"/>
+          <a:lstStyle/>
+          <a:p>
+            <a:pPr indent="0" marL="0">
+              <a:buNone/>
+            </a:pPr>
+            <a:r>
+              <a:rPr lang="en-US" sz="900" dirty="0">
+                <a:solidFill>
+                  <a:srgbClr val="FDA4AF"/>
+                </a:solidFill>
+              </a:rPr>
+              <a:t>Weak Duty: "Responsible for reviewing system design documents and helping engineers with backend deployments."</a:t>
+            </a:r>
+            <a:endParaRPr lang="en-US" sz="900" dirty="0"/>
+          </a:p>
+        </p:txBody>
+      </p:sp>
+      <p:sp>
+        <p:nvSpPr>
+          <p:cNvPr id="27" name="Shape 25"/>
+          <p:cNvSpPr/>
+          <p:nvPr/>
+        </p:nvSpPr>
+        <p:spPr>
+          <a:xfrm>
+            <a:off x="4663440" y="2926080"/>
+            <a:ext cx="6309360" cy="658368"/>
+          </a:xfrm>
+          <a:prstGeom prst="roundRect">
+            <a:avLst/>
+          </a:prstGeom>
+          <a:solidFill>
+            <a:srgbClr val="0F1E1B"/>
+          </a:solidFill>
+          <a:ln w="12700">
+            <a:solidFill>
+              <a:srgbClr val="10B981"/>
+            </a:solidFill>
+            <a:prstDash val="solid"/>
+          </a:ln>
+        </p:spPr>
+      </p:sp>
+      <p:sp>
+        <p:nvSpPr>
+          <p:cNvPr id="28" name="Text 26"/>
+          <p:cNvSpPr/>
+          <p:nvPr/>
+        </p:nvSpPr>
+        <p:spPr>
+          <a:xfrm>
+            <a:off x="4754880" y="2999232"/>
+            <a:ext cx="6126480" cy="502920"/>
+          </a:xfrm>
+          <a:prstGeom prst="rect">
+            <a:avLst/>
+          </a:prstGeom>
+          <a:noFill/>
+          <a:ln/>
+        </p:spPr>
+        <p:txBody>
+          <a:bodyPr wrap="square" rtlCol="0" anchor="ctr"/>
+          <a:lstStyle/>
+          <a:p>
+            <a:pPr indent="0" marL="0">
+              <a:buNone/>
+            </a:pPr>
+            <a:r>
+              <a:rPr lang="en-US" sz="950" b="1" dirty="0">
+                <a:solidFill>
+                  <a:srgbClr val="A7F3D0"/>
+                </a:solidFill>
+              </a:rPr>
+              <a:t>Google XYZ: "Spearheaded 24+ RFC design reviews, accelerating sprint velocity by 34% with zero rollback incidents."</a:t>
+            </a:r>
+            <a:endParaRPr lang="en-US" sz="950" dirty="0"/>
+          </a:p>
+        </p:txBody>
+      </p:sp>
+      <p:sp>
+        <p:nvSpPr>
+          <p:cNvPr id="29" name="Shape 27"/>
+          <p:cNvSpPr/>
+          <p:nvPr/>
+        </p:nvSpPr>
+        <p:spPr>
+          <a:xfrm>
+            <a:off x="4480560" y="3840480"/>
+            <a:ext cx="6675120" cy="1874520"/>
+          </a:xfrm>
+          <a:prstGeom prst="roundRect">
+            <a:avLst/>
+          </a:prstGeom>
+          <a:solidFill>
+            <a:srgbClr val="151E32"/>
+          </a:solidFill>
+          <a:ln w="12700">
+            <a:solidFill>
+              <a:srgbClr val="22314E"/>
+            </a:solidFill>
+            <a:prstDash val="solid"/>
+          </a:ln>
+        </p:spPr>
+      </p:sp>
+      <p:sp>
+        <p:nvSpPr>
+          <p:cNvPr id="30" name="Text 28"/>
+          <p:cNvSpPr/>
+          <p:nvPr/>
+        </p:nvSpPr>
+        <p:spPr>
+          <a:xfrm>
+            <a:off x="4663440" y="3977640"/>
+            <a:ext cx="6217920" cy="274320"/>
+          </a:xfrm>
+          <a:prstGeom prst="rect">
+            <a:avLst/>
+          </a:prstGeom>
+          <a:noFill/>
+          <a:ln/>
+        </p:spPr>
+        <p:txBody>
+          <a:bodyPr wrap="square" rtlCol="0" anchor="ctr"/>
+          <a:lstStyle/>
+          <a:p>
+            <a:pPr indent="0" marL="0">
+              <a:buNone/>
+            </a:pPr>
+            <a:r>
+              <a:rPr lang="en-US" sz="1200" b="1" dirty="0">
+                <a:solidFill>
+                  <a:srgbClr val="06B6D4"/>
+                </a:solidFill>
+              </a:rPr>
+              <a:t>Actionable Critical Fixes Checklist (Simulated Score Lift: 86 ➔ 96)</a:t>
+            </a:r>
+            <a:endParaRPr lang="en-US" sz="1200" dirty="0"/>
+          </a:p>
+        </p:txBody>
+      </p:sp>
+      <p:sp>
+        <p:nvSpPr>
+          <p:cNvPr id="31" name="Text 29"/>
+          <p:cNvSpPr/>
+          <p:nvPr/>
+        </p:nvSpPr>
+        <p:spPr>
+          <a:xfrm>
+            <a:off x="4663440" y="4343400"/>
+            <a:ext cx="6217920" cy="1188720"/>
+          </a:xfrm>
+          <a:prstGeom prst="rect">
+            <a:avLst/>
+          </a:prstGeom>
+          <a:noFill/>
+          <a:ln/>
+        </p:spPr>
+        <p:txBody>
+          <a:bodyPr wrap="square" rtlCol="0" anchor="ctr"/>
+          <a:lstStyle/>
+          <a:p>
+            <a:pPr indent="0" marL="0">
+              <a:lnSpc>
+                <a:spcPts val="1800"/>
+              </a:lnSpc>
+              <a:buNone/>
+            </a:pPr>
+            <a:r>
+              <a:rPr lang="en-US" sz="1000" dirty="0">
                 <a:solidFill>
                   <a:srgbClr val="94A3B8"/>
                 </a:solidFill>
               </a:rPr>
-              <a:t>• Score Lift: 86 -&gt; 96 (+10 Point Jump)</a:t>
-            </a:r>
-            <a:endParaRPr lang="en-US" sz="1150" dirty="0"/>
-          </a:p>
-        </p:txBody>
-      </p:sp>
-      <p:sp>
-        <p:nvSpPr>
-          <p:cNvPr id="21" name="Text 19"/>
-          <p:cNvSpPr/>
-          <p:nvPr/>
-        </p:nvSpPr>
-        <p:spPr>
-          <a:xfrm>
-            <a:off x="8275320" y="2971800"/>
-            <a:ext cx="2926080" cy="457200"/>
-          </a:xfrm>
-          <a:prstGeom prst="rect">
-            <a:avLst/>
-          </a:prstGeom>
-          <a:noFill/>
-          <a:ln/>
-        </p:spPr>
-        <p:txBody>
-          <a:bodyPr wrap="square" rtlCol="0" anchor="ctr"/>
-          <a:lstStyle/>
-          <a:p>
-            <a:pPr indent="0" marL="0">
-              <a:buNone/>
-            </a:pPr>
-            <a:r>
-              <a:rPr lang="en-US" sz="1150" dirty="0">
+              <a:t>☑ Fix 1: Upgrade passive verbs ("Responsible for") to decisive executive verbs ("Architected", "Spearheaded").</a:t>
+            </a:r>
+            <a:endParaRPr lang="en-US" sz="1000" dirty="0"/>
+          </a:p>
+          <a:p>
+            <a:pPr indent="0" marL="0">
+              <a:lnSpc>
+                <a:spcPts val="1800"/>
+              </a:lnSpc>
+              <a:buNone/>
+            </a:pPr>
+            <a:r>
+              <a:rPr lang="en-US" sz="1000" dirty="0">
                 <a:solidFill>
                   <a:srgbClr val="94A3B8"/>
                 </a:solidFill>
               </a:rPr>
-              <a:t>• XYZ Fix 1: Deadlock resolution quantified</a:t>
-            </a:r>
-            <a:endParaRPr lang="en-US" sz="1150" dirty="0"/>
-          </a:p>
-        </p:txBody>
-      </p:sp>
-      <p:sp>
-        <p:nvSpPr>
-          <p:cNvPr id="22" name="Text 20"/>
-          <p:cNvSpPr/>
-          <p:nvPr/>
-        </p:nvSpPr>
-        <p:spPr>
-          <a:xfrm>
-            <a:off x="8275320" y="3474720"/>
-            <a:ext cx="2926080" cy="457200"/>
-          </a:xfrm>
-          <a:prstGeom prst="rect">
-            <a:avLst/>
-          </a:prstGeom>
-          <a:noFill/>
-          <a:ln/>
-        </p:spPr>
-        <p:txBody>
-          <a:bodyPr wrap="square" rtlCol="0" anchor="ctr"/>
-          <a:lstStyle/>
-          <a:p>
-            <a:pPr indent="0" marL="0">
-              <a:buNone/>
-            </a:pPr>
-            <a:r>
-              <a:rPr lang="en-US" sz="1150" dirty="0">
+              <a:t>☑ Fix 2: Quantify cloud FinOps quarterly savings alongside 42,000 TPS scale metrics.</a:t>
+            </a:r>
+            <a:endParaRPr lang="en-US" sz="1000" dirty="0"/>
+          </a:p>
+          <a:p>
+            <a:pPr indent="0" marL="0">
+              <a:lnSpc>
+                <a:spcPts val="1800"/>
+              </a:lnSpc>
+              <a:buNone/>
+            </a:pPr>
+            <a:r>
+              <a:rPr lang="en-US" sz="1000" dirty="0">
                 <a:solidFill>
                   <a:srgbClr val="94A3B8"/>
                 </a:solidFill>
               </a:rPr>
-              <a:t>• XYZ Fix 2: Leadership velocity metrics added</a:t>
-            </a:r>
-            <a:endParaRPr lang="en-US" sz="1150" dirty="0"/>
-          </a:p>
-        </p:txBody>
-      </p:sp>
-      <p:sp>
-        <p:nvSpPr>
-          <p:cNvPr id="23" name="Text 21"/>
-          <p:cNvSpPr/>
-          <p:nvPr/>
-        </p:nvSpPr>
-        <p:spPr>
-          <a:xfrm>
-            <a:off x="8275320" y="3977640"/>
-            <a:ext cx="2926080" cy="457200"/>
-          </a:xfrm>
-          <a:prstGeom prst="rect">
-            <a:avLst/>
-          </a:prstGeom>
-          <a:noFill/>
-          <a:ln/>
-        </p:spPr>
-        <p:txBody>
-          <a:bodyPr wrap="square" rtlCol="0" anchor="ctr"/>
-          <a:lstStyle/>
-          <a:p>
-            <a:pPr indent="0" marL="0">
-              <a:buNone/>
-            </a:pPr>
-            <a:r>
-              <a:rPr lang="en-US" sz="1150" dirty="0">
-                <a:solidFill>
-                  <a:srgbClr val="94A3B8"/>
-                </a:solidFill>
-              </a:rPr>
-              <a:t>• Keyword Alignment: 88% -&gt; 96% match</a:t>
-            </a:r>
-            <a:endParaRPr lang="en-US" sz="1150" dirty="0"/>
-          </a:p>
-        </p:txBody>
-      </p:sp>
-      <p:sp>
-        <p:nvSpPr>
-          <p:cNvPr id="24" name="Text 22"/>
-          <p:cNvSpPr/>
-          <p:nvPr/>
-        </p:nvSpPr>
-        <p:spPr>
-          <a:xfrm>
-            <a:off x="8275320" y="4480560"/>
-            <a:ext cx="2926080" cy="457200"/>
-          </a:xfrm>
-          <a:prstGeom prst="rect">
-            <a:avLst/>
-          </a:prstGeom>
-          <a:noFill/>
-          <a:ln/>
-        </p:spPr>
-        <p:txBody>
-          <a:bodyPr wrap="square" rtlCol="0" anchor="ctr"/>
-          <a:lstStyle/>
-          <a:p>
-            <a:pPr indent="0" marL="0">
-              <a:buNone/>
-            </a:pPr>
-            <a:r>
-              <a:rPr lang="en-US" sz="1150" dirty="0">
-                <a:solidFill>
-                  <a:srgbClr val="94A3B8"/>
-                </a:solidFill>
-              </a:rPr>
-              <a:t>• Outcome: Guaranteed Tier-1 Recruiter Callback</a:t>
-            </a:r>
-            <a:endParaRPr lang="en-US" sz="1150" dirty="0"/>
+              <a:t>☑ Fix 3: Add explicit Project Loom / Virtual Threads governance in the architecture summary.</a:t>
+            </a:r>
+            <a:endParaRPr lang="en-US" sz="1000" dirty="0"/>
           </a:p>
         </p:txBody>
       </p:sp>
@@ -5212,7 +6489,7 @@
         </p:nvSpPr>
         <p:spPr>
           <a:xfrm>
-            <a:off x="731520" y="548640"/>
+            <a:off x="731520" y="457200"/>
             <a:ext cx="9144000" cy="274320"/>
           </a:xfrm>
           <a:prstGeom prst="rect">
@@ -5234,7 +6511,7 @@
                   <a:srgbClr val="06B6D4"/>
                 </a:solidFill>
               </a:rPr>
-              <a:t>06 / BENCHMARKS &amp; VERIFICATION</a:t>
+              <a:t>06 / VISUAL OCR INSPECTOR SCREENSHOT</a:t>
             </a:r>
             <a:endParaRPr lang="en-US" sz="1000" dirty="0"/>
           </a:p>
@@ -5248,31 +6525,31 @@
         </p:nvSpPr>
         <p:spPr>
           <a:xfrm>
-            <a:off x="731520" y="822960"/>
-            <a:ext cx="10515600" cy="548640"/>
-          </a:xfrm>
-          <a:prstGeom prst="rect">
-            <a:avLst/>
-          </a:prstGeom>
-          <a:noFill/>
-          <a:ln/>
-        </p:spPr>
-        <p:txBody>
-          <a:bodyPr wrap="square" rtlCol="0" anchor="ctr"/>
-          <a:lstStyle/>
-          <a:p>
-            <a:pPr indent="0" marL="0">
-              <a:buNone/>
-            </a:pPr>
-            <a:r>
-              <a:rPr lang="en-US" sz="2800" b="1" dirty="0">
+            <a:off x="731520" y="731520"/>
+            <a:ext cx="10515600" cy="457200"/>
+          </a:xfrm>
+          <a:prstGeom prst="rect">
+            <a:avLst/>
+          </a:prstGeom>
+          <a:noFill/>
+          <a:ln/>
+        </p:spPr>
+        <p:txBody>
+          <a:bodyPr wrap="square" rtlCol="0" anchor="ctr"/>
+          <a:lstStyle/>
+          <a:p>
+            <a:pPr indent="0" marL="0">
+              <a:buNone/>
+            </a:pPr>
+            <a:r>
+              <a:rPr lang="en-US" sz="2400" b="1" dirty="0">
                 <a:solidFill>
                   <a:srgbClr val="FFFFFF"/>
                 </a:solidFill>
               </a:rPr>
-              <a:t>System Performance &amp; Resiliency Metrics</a:t>
-            </a:r>
-            <a:endParaRPr lang="en-US" sz="2800" dirty="0"/>
+              <a:t>Website Screenshot: Visual Document &amp; OCR Layout Drawer</a:t>
+            </a:r>
+            <a:endParaRPr lang="en-US" sz="2400" dirty="0"/>
           </a:p>
         </p:txBody>
       </p:sp>
@@ -5284,18 +6561,18 @@
         </p:nvSpPr>
         <p:spPr>
           <a:xfrm>
-            <a:off x="731520" y="1645920"/>
-            <a:ext cx="2468880" cy="2011680"/>
+            <a:off x="731520" y="1325880"/>
+            <a:ext cx="10698480" cy="4572000"/>
           </a:xfrm>
           <a:prstGeom prst="roundRect">
             <a:avLst/>
           </a:prstGeom>
           <a:solidFill>
-            <a:srgbClr val="151E32"/>
+            <a:srgbClr val="0F172A"/>
           </a:solidFill>
           <a:ln w="19050">
             <a:solidFill>
-              <a:srgbClr val="06B6D4"/>
+              <a:srgbClr val="334155"/>
             </a:solidFill>
             <a:prstDash val="solid"/>
           </a:ln>
@@ -5303,111 +6580,63 @@
       </p:sp>
       <p:sp>
         <p:nvSpPr>
-          <p:cNvPr id="5" name="Text 3"/>
-          <p:cNvSpPr/>
-          <p:nvPr/>
-        </p:nvSpPr>
-        <p:spPr>
-          <a:xfrm>
-            <a:off x="868680" y="1874520"/>
-            <a:ext cx="2194560" cy="640080"/>
-          </a:xfrm>
-          <a:prstGeom prst="rect">
-            <a:avLst/>
-          </a:prstGeom>
-          <a:noFill/>
-          <a:ln/>
-        </p:spPr>
-        <p:txBody>
-          <a:bodyPr wrap="square" rtlCol="0" anchor="ctr"/>
-          <a:lstStyle/>
-          <a:p>
-            <a:pPr indent="0" marL="0">
-              <a:buNone/>
-            </a:pPr>
-            <a:r>
-              <a:rPr lang="en-US" sz="3200" b="1" dirty="0">
-                <a:solidFill>
-                  <a:srgbClr val="06B6D4"/>
-                </a:solidFill>
-              </a:rPr>
-              <a:t>&lt; 4.5s</a:t>
-            </a:r>
-            <a:endParaRPr lang="en-US" sz="3200" dirty="0"/>
-          </a:p>
-        </p:txBody>
-      </p:sp>
-      <p:sp>
-        <p:nvSpPr>
-          <p:cNvPr id="6" name="Text 4"/>
-          <p:cNvSpPr/>
-          <p:nvPr/>
-        </p:nvSpPr>
-        <p:spPr>
-          <a:xfrm>
-            <a:off x="868680" y="2514600"/>
-            <a:ext cx="2194560" cy="411480"/>
-          </a:xfrm>
-          <a:prstGeom prst="rect">
-            <a:avLst/>
-          </a:prstGeom>
-          <a:noFill/>
-          <a:ln/>
-        </p:spPr>
-        <p:txBody>
-          <a:bodyPr wrap="square" rtlCol="0" anchor="ctr"/>
-          <a:lstStyle/>
-          <a:p>
-            <a:pPr indent="0" marL="0">
-              <a:buNone/>
-            </a:pPr>
-            <a:r>
-              <a:rPr lang="en-US" sz="1200" b="1" dirty="0">
-                <a:solidFill>
-                  <a:srgbClr val="FFFFFF"/>
-                </a:solidFill>
-              </a:rPr>
-              <a:t>Average Cloud Audit Time</a:t>
-            </a:r>
-            <a:endParaRPr lang="en-US" sz="1200" dirty="0"/>
-          </a:p>
-        </p:txBody>
-      </p:sp>
-      <p:sp>
-        <p:nvSpPr>
-          <p:cNvPr id="7" name="Text 5"/>
-          <p:cNvSpPr/>
-          <p:nvPr/>
-        </p:nvSpPr>
-        <p:spPr>
-          <a:xfrm>
-            <a:off x="868680" y="2926080"/>
-            <a:ext cx="2194560" cy="548640"/>
-          </a:xfrm>
-          <a:prstGeom prst="rect">
-            <a:avLst/>
-          </a:prstGeom>
-          <a:noFill/>
-          <a:ln/>
-        </p:spPr>
-        <p:txBody>
-          <a:bodyPr wrap="square" rtlCol="0" anchor="ctr"/>
-          <a:lstStyle/>
-          <a:p>
-            <a:pPr indent="0" marL="0">
-              <a:buNone/>
-            </a:pPr>
-            <a:r>
-              <a:rPr lang="en-US" sz="1000" dirty="0">
-                <a:solidFill>
-                  <a:srgbClr val="94A3B8"/>
-                </a:solidFill>
-              </a:rPr>
-              <a:t>Multimodal Vision &amp; Low Thinking Level</a:t>
-            </a:r>
-            <a:endParaRPr lang="en-US" sz="1000" dirty="0"/>
-          </a:p>
-        </p:txBody>
+          <p:cNvPr id="5" name="Shape 3"/>
+          <p:cNvSpPr/>
+          <p:nvPr/>
+        </p:nvSpPr>
+        <p:spPr>
+          <a:xfrm>
+            <a:off x="731520" y="1325880"/>
+            <a:ext cx="10698480" cy="384048"/>
+          </a:xfrm>
+          <a:prstGeom prst="rect">
+            <a:avLst/>
+          </a:prstGeom>
+          <a:solidFill>
+            <a:srgbClr val="1E293B"/>
+          </a:solidFill>
+          <a:ln/>
+        </p:spPr>
+      </p:sp>
+      <p:sp>
+        <p:nvSpPr>
+          <p:cNvPr id="6" name="Shape 4"/>
+          <p:cNvSpPr/>
+          <p:nvPr/>
+        </p:nvSpPr>
+        <p:spPr>
+          <a:xfrm>
+            <a:off x="868680" y="1453896"/>
+            <a:ext cx="128016" cy="128016"/>
+          </a:xfrm>
+          <a:prstGeom prst="ellipse">
+            <a:avLst/>
+          </a:prstGeom>
+          <a:solidFill>
+            <a:srgbClr val="EF4444"/>
+          </a:solidFill>
+          <a:ln/>
+        </p:spPr>
+      </p:sp>
+      <p:sp>
+        <p:nvSpPr>
+          <p:cNvPr id="7" name="Shape 5"/>
+          <p:cNvSpPr/>
+          <p:nvPr/>
+        </p:nvSpPr>
+        <p:spPr>
+          <a:xfrm>
+            <a:off x="1051560" y="1453896"/>
+            <a:ext cx="128016" cy="128016"/>
+          </a:xfrm>
+          <a:prstGeom prst="ellipse">
+            <a:avLst/>
+          </a:prstGeom>
+          <a:solidFill>
+            <a:srgbClr val="F59E0B"/>
+          </a:solidFill>
+          <a:ln/>
+        </p:spPr>
       </p:sp>
       <p:sp>
         <p:nvSpPr>
@@ -5417,18 +6646,38 @@
         </p:nvSpPr>
         <p:spPr>
           <a:xfrm>
-            <a:off x="3474720" y="1645920"/>
-            <a:ext cx="2468880" cy="2011680"/>
+            <a:off x="1234440" y="1453896"/>
+            <a:ext cx="128016" cy="128016"/>
+          </a:xfrm>
+          <a:prstGeom prst="ellipse">
+            <a:avLst/>
+          </a:prstGeom>
+          <a:solidFill>
+            <a:srgbClr val="10B981"/>
+          </a:solidFill>
+          <a:ln/>
+        </p:spPr>
+      </p:sp>
+      <p:sp>
+        <p:nvSpPr>
+          <p:cNvPr id="9" name="Shape 7"/>
+          <p:cNvSpPr/>
+          <p:nvPr/>
+        </p:nvSpPr>
+        <p:spPr>
+          <a:xfrm>
+            <a:off x="1554480" y="1399032"/>
+            <a:ext cx="9052560" cy="237744"/>
           </a:xfrm>
           <a:prstGeom prst="roundRect">
             <a:avLst/>
           </a:prstGeom>
           <a:solidFill>
-            <a:srgbClr val="151E32"/>
-          </a:solidFill>
-          <a:ln w="19050">
+            <a:srgbClr val="0F172A"/>
+          </a:solidFill>
+          <a:ln w="12700">
             <a:solidFill>
-              <a:srgbClr val="10B981"/>
+              <a:srgbClr val="334155"/>
             </a:solidFill>
             <a:prstDash val="solid"/>
           </a:ln>
@@ -5436,132 +6685,63 @@
       </p:sp>
       <p:sp>
         <p:nvSpPr>
-          <p:cNvPr id="9" name="Text 7"/>
-          <p:cNvSpPr/>
-          <p:nvPr/>
-        </p:nvSpPr>
-        <p:spPr>
-          <a:xfrm>
-            <a:off x="3611880" y="1874520"/>
-            <a:ext cx="2194560" cy="640080"/>
-          </a:xfrm>
-          <a:prstGeom prst="rect">
-            <a:avLst/>
-          </a:prstGeom>
-          <a:noFill/>
-          <a:ln/>
-        </p:spPr>
-        <p:txBody>
-          <a:bodyPr wrap="square" rtlCol="0" anchor="ctr"/>
-          <a:lstStyle/>
-          <a:p>
-            <a:pPr indent="0" marL="0">
-              <a:buNone/>
-            </a:pPr>
-            <a:r>
-              <a:rPr lang="en-US" sz="3200" b="1" dirty="0">
-                <a:solidFill>
-                  <a:srgbClr val="10B981"/>
-                </a:solidFill>
-              </a:rPr>
-              <a:t>3 ms</a:t>
-            </a:r>
-            <a:endParaRPr lang="en-US" sz="3200" dirty="0"/>
-          </a:p>
-        </p:txBody>
-      </p:sp>
-      <p:sp>
-        <p:nvSpPr>
           <p:cNvPr id="10" name="Text 8"/>
           <p:cNvSpPr/>
           <p:nvPr/>
         </p:nvSpPr>
         <p:spPr>
           <a:xfrm>
-            <a:off x="3611880" y="2514600"/>
-            <a:ext cx="2194560" cy="411480"/>
-          </a:xfrm>
-          <a:prstGeom prst="rect">
-            <a:avLst/>
-          </a:prstGeom>
-          <a:noFill/>
-          <a:ln/>
-        </p:spPr>
-        <p:txBody>
-          <a:bodyPr wrap="square" rtlCol="0" anchor="ctr"/>
-          <a:lstStyle/>
-          <a:p>
-            <a:pPr indent="0" marL="0">
-              <a:buNone/>
-            </a:pPr>
-            <a:r>
-              <a:rPr lang="en-US" sz="1200" b="1" dirty="0">
-                <a:solidFill>
-                  <a:srgbClr val="FFFFFF"/>
-                </a:solidFill>
-              </a:rPr>
-              <a:t>Local Turbo Failover Latency</a:t>
-            </a:r>
-            <a:endParaRPr lang="en-US" sz="1200" dirty="0"/>
-          </a:p>
-        </p:txBody>
-      </p:sp>
-      <p:sp>
-        <p:nvSpPr>
-          <p:cNvPr id="11" name="Text 9"/>
-          <p:cNvSpPr/>
-          <p:nvPr/>
-        </p:nvSpPr>
-        <p:spPr>
-          <a:xfrm>
-            <a:off x="3611880" y="2926080"/>
-            <a:ext cx="2194560" cy="548640"/>
-          </a:xfrm>
-          <a:prstGeom prst="rect">
-            <a:avLst/>
-          </a:prstGeom>
-          <a:noFill/>
-          <a:ln/>
-        </p:spPr>
-        <p:txBody>
-          <a:bodyPr wrap="square" rtlCol="0" anchor="ctr"/>
-          <a:lstStyle/>
-          <a:p>
-            <a:pPr indent="0" marL="0">
-              <a:buNone/>
-            </a:pPr>
-            <a:r>
-              <a:rPr lang="en-US" sz="1000" dirty="0">
+            <a:off x="1645920" y="1399032"/>
+            <a:ext cx="8869680" cy="237744"/>
+          </a:xfrm>
+          <a:prstGeom prst="rect">
+            <a:avLst/>
+          </a:prstGeom>
+          <a:noFill/>
+          <a:ln/>
+        </p:spPr>
+        <p:txBody>
+          <a:bodyPr wrap="square" rtlCol="0" anchor="ctr"/>
+          <a:lstStyle/>
+          <a:p>
+            <a:pPr indent="0" marL="0">
+              <a:buNone/>
+            </a:pPr>
+            <a:r>
+              <a:rPr lang="en-US" sz="900" dirty="0">
                 <a:solidFill>
                   <a:srgbClr val="94A3B8"/>
                 </a:solidFill>
-              </a:rPr>
-              <a:t>Zero-Downtime CPRW Heuristic Engine</a:t>
-            </a:r>
-            <a:endParaRPr lang="en-US" sz="1000" dirty="0"/>
-          </a:p>
-        </p:txBody>
-      </p:sp>
-      <p:sp>
-        <p:nvSpPr>
-          <p:cNvPr id="12" name="Shape 10"/>
-          <p:cNvSpPr/>
-          <p:nvPr/>
-        </p:nvSpPr>
-        <p:spPr>
-          <a:xfrm>
-            <a:off x="6217920" y="1645920"/>
-            <a:ext cx="2468880" cy="2011680"/>
+                <a:latin typeface="Calibri" pitchFamily="34" charset="0"/>
+                <a:ea typeface="Calibri" pitchFamily="34" charset="-122"/>
+                <a:cs typeface="Calibri" pitchFamily="34" charset="-120"/>
+              </a:rPr>
+              <a:t>🔒 https://careerpulse.ai/analyzer/document-inspector</a:t>
+            </a:r>
+            <a:endParaRPr lang="en-US" sz="900" dirty="0"/>
+          </a:p>
+        </p:txBody>
+      </p:sp>
+      <p:sp>
+        <p:nvSpPr>
+          <p:cNvPr id="11" name="Shape 9"/>
+          <p:cNvSpPr/>
+          <p:nvPr/>
+        </p:nvSpPr>
+        <p:spPr>
+          <a:xfrm>
+            <a:off x="1097280" y="1828800"/>
+            <a:ext cx="3657600" cy="3886200"/>
           </a:xfrm>
           <a:prstGeom prst="roundRect">
             <a:avLst/>
           </a:prstGeom>
           <a:solidFill>
-            <a:srgbClr val="151E32"/>
-          </a:solidFill>
-          <a:ln w="19050">
+            <a:srgbClr val="F8FAFC"/>
+          </a:solidFill>
+          <a:ln w="12700">
             <a:solidFill>
-              <a:srgbClr val="6366F1"/>
+              <a:srgbClr val="CBD5E1"/>
             </a:solidFill>
             <a:prstDash val="solid"/>
           </a:ln>
@@ -5569,132 +6749,111 @@
       </p:sp>
       <p:sp>
         <p:nvSpPr>
+          <p:cNvPr id="12" name="Text 10"/>
+          <p:cNvSpPr/>
+          <p:nvPr/>
+        </p:nvSpPr>
+        <p:spPr>
+          <a:xfrm>
+            <a:off x="1280160" y="2011680"/>
+            <a:ext cx="3291840" cy="274320"/>
+          </a:xfrm>
+          <a:prstGeom prst="rect">
+            <a:avLst/>
+          </a:prstGeom>
+          <a:noFill/>
+          <a:ln/>
+        </p:spPr>
+        <p:txBody>
+          <a:bodyPr wrap="square" rtlCol="0" anchor="ctr"/>
+          <a:lstStyle/>
+          <a:p>
+            <a:pPr indent="0" marL="0">
+              <a:buNone/>
+            </a:pPr>
+            <a:r>
+              <a:rPr lang="en-US" sz="1300" b="1" dirty="0">
+                <a:solidFill>
+                  <a:srgbClr val="0F172A"/>
+                </a:solidFill>
+                <a:latin typeface="Calibri" pitchFamily="34" charset="0"/>
+                <a:ea typeface="Calibri" pitchFamily="34" charset="-122"/>
+                <a:cs typeface="Calibri" pitchFamily="34" charset="-120"/>
+              </a:rPr>
+              <a:t>PRIYA NAIR</a:t>
+            </a:r>
+            <a:endParaRPr lang="en-US" sz="1300" dirty="0"/>
+          </a:p>
+        </p:txBody>
+      </p:sp>
+      <p:sp>
+        <p:nvSpPr>
           <p:cNvPr id="13" name="Text 11"/>
           <p:cNvSpPr/>
           <p:nvPr/>
         </p:nvSpPr>
         <p:spPr>
           <a:xfrm>
-            <a:off x="6355080" y="1874520"/>
-            <a:ext cx="2194560" cy="640080"/>
-          </a:xfrm>
-          <a:prstGeom prst="rect">
-            <a:avLst/>
-          </a:prstGeom>
-          <a:noFill/>
-          <a:ln/>
-        </p:spPr>
-        <p:txBody>
-          <a:bodyPr wrap="square" rtlCol="0" anchor="ctr"/>
-          <a:lstStyle/>
-          <a:p>
-            <a:pPr indent="0" marL="0">
-              <a:buNone/>
-            </a:pPr>
-            <a:r>
-              <a:rPr lang="en-US" sz="3200" b="1" dirty="0">
-                <a:solidFill>
-                  <a:srgbClr val="6366F1"/>
-                </a:solidFill>
-              </a:rPr>
-              <a:t>99.99%</a:t>
-            </a:r>
-            <a:endParaRPr lang="en-US" sz="3200" dirty="0"/>
-          </a:p>
-        </p:txBody>
-      </p:sp>
-      <p:sp>
-        <p:nvSpPr>
-          <p:cNvPr id="14" name="Text 12"/>
-          <p:cNvSpPr/>
-          <p:nvPr/>
-        </p:nvSpPr>
-        <p:spPr>
-          <a:xfrm>
-            <a:off x="6355080" y="2514600"/>
-            <a:ext cx="2194560" cy="411480"/>
-          </a:xfrm>
-          <a:prstGeom prst="rect">
-            <a:avLst/>
-          </a:prstGeom>
-          <a:noFill/>
-          <a:ln/>
-        </p:spPr>
-        <p:txBody>
-          <a:bodyPr wrap="square" rtlCol="0" anchor="ctr"/>
-          <a:lstStyle/>
-          <a:p>
-            <a:pPr indent="0" marL="0">
-              <a:buNone/>
-            </a:pPr>
-            <a:r>
-              <a:rPr lang="en-US" sz="1200" b="1" dirty="0">
-                <a:solidFill>
-                  <a:srgbClr val="FFFFFF"/>
-                </a:solidFill>
-              </a:rPr>
-              <a:t>Effective Service Availability</a:t>
-            </a:r>
-            <a:endParaRPr lang="en-US" sz="1200" dirty="0"/>
-          </a:p>
-        </p:txBody>
-      </p:sp>
-      <p:sp>
-        <p:nvSpPr>
-          <p:cNvPr id="15" name="Text 13"/>
-          <p:cNvSpPr/>
-          <p:nvPr/>
-        </p:nvSpPr>
-        <p:spPr>
-          <a:xfrm>
-            <a:off x="6355080" y="2926080"/>
-            <a:ext cx="2194560" cy="548640"/>
-          </a:xfrm>
-          <a:prstGeom prst="rect">
-            <a:avLst/>
-          </a:prstGeom>
-          <a:noFill/>
-          <a:ln/>
-        </p:spPr>
-        <p:txBody>
-          <a:bodyPr wrap="square" rtlCol="0" anchor="ctr"/>
-          <a:lstStyle/>
-          <a:p>
-            <a:pPr indent="0" marL="0">
-              <a:buNone/>
-            </a:pPr>
-            <a:r>
-              <a:rPr lang="en-US" sz="1000" dirty="0">
-                <a:solidFill>
-                  <a:srgbClr val="94A3B8"/>
-                </a:solidFill>
-              </a:rPr>
-              <a:t>Eliminated 503 Outages via Cascading</a:t>
-            </a:r>
-            <a:endParaRPr lang="en-US" sz="1000" dirty="0"/>
-          </a:p>
-        </p:txBody>
-      </p:sp>
-      <p:sp>
-        <p:nvSpPr>
-          <p:cNvPr id="16" name="Shape 14"/>
-          <p:cNvSpPr/>
-          <p:nvPr/>
-        </p:nvSpPr>
-        <p:spPr>
-          <a:xfrm>
-            <a:off x="8961120" y="1645920"/>
-            <a:ext cx="2468880" cy="2011680"/>
-          </a:xfrm>
-          <a:prstGeom prst="roundRect">
-            <a:avLst/>
-          </a:prstGeom>
-          <a:solidFill>
-            <a:srgbClr val="151E32"/>
-          </a:solidFill>
-          <a:ln w="19050">
+            <a:off x="1280160" y="2286000"/>
+            <a:ext cx="3291840" cy="365760"/>
+          </a:xfrm>
+          <a:prstGeom prst="rect">
+            <a:avLst/>
+          </a:prstGeom>
+          <a:noFill/>
+          <a:ln/>
+        </p:spPr>
+        <p:txBody>
+          <a:bodyPr wrap="square" rtlCol="0" anchor="ctr"/>
+          <a:lstStyle/>
+          <a:p>
+            <a:pPr indent="0" marL="0">
+              <a:buNone/>
+            </a:pPr>
+            <a:r>
+              <a:rPr lang="en-US" sz="750" dirty="0">
+                <a:solidFill>
+                  <a:srgbClr val="475569"/>
+                </a:solidFill>
+              </a:rPr>
+              <a:t>Principal Java &amp; Distributed Systems Architect</a:t>
+            </a:r>
+            <a:endParaRPr lang="en-US" sz="750" dirty="0"/>
+          </a:p>
+          <a:p>
+            <a:pPr indent="0" marL="0">
+              <a:buNone/>
+            </a:pPr>
+            <a:r>
+              <a:rPr lang="en-US" sz="750" dirty="0">
+                <a:solidFill>
+                  <a:srgbClr val="475569"/>
+                </a:solidFill>
+              </a:rPr>
+              <a:t>Seattle, WA • priya.nair@javaarch.io • (206) 555-0148</a:t>
+            </a:r>
+            <a:endParaRPr lang="en-US" sz="750" dirty="0"/>
+          </a:p>
+        </p:txBody>
+      </p:sp>
+      <p:sp>
+        <p:nvSpPr>
+          <p:cNvPr id="14" name="Shape 12"/>
+          <p:cNvSpPr/>
+          <p:nvPr/>
+        </p:nvSpPr>
+        <p:spPr>
+          <a:xfrm>
+            <a:off x="1280160" y="2697480"/>
+            <a:ext cx="3291840" cy="0"/>
+          </a:xfrm>
+          <a:prstGeom prst="line">
+            <a:avLst/>
+          </a:prstGeom>
+          <a:noFill/>
+          <a:ln w="12700">
             <a:solidFill>
-              <a:srgbClr val="F59E0B"/>
+              <a:srgbClr val="0284C7"/>
             </a:solidFill>
             <a:prstDash val="solid"/>
           </a:ln>
@@ -5702,122 +6861,194 @@
       </p:sp>
       <p:sp>
         <p:nvSpPr>
-          <p:cNvPr id="17" name="Text 15"/>
-          <p:cNvSpPr/>
-          <p:nvPr/>
-        </p:nvSpPr>
-        <p:spPr>
-          <a:xfrm>
-            <a:off x="9098280" y="1874520"/>
-            <a:ext cx="2194560" cy="640080"/>
-          </a:xfrm>
-          <a:prstGeom prst="rect">
-            <a:avLst/>
-          </a:prstGeom>
-          <a:noFill/>
-          <a:ln/>
-        </p:spPr>
-        <p:txBody>
-          <a:bodyPr wrap="square" rtlCol="0" anchor="ctr"/>
-          <a:lstStyle/>
-          <a:p>
-            <a:pPr indent="0" marL="0">
-              <a:buNone/>
-            </a:pPr>
-            <a:r>
-              <a:rPr lang="en-US" sz="3200" b="1" dirty="0">
-                <a:solidFill>
-                  <a:srgbClr val="F59E0B"/>
-                </a:solidFill>
-              </a:rPr>
-              <a:t>4 Formats</a:t>
-            </a:r>
-            <a:endParaRPr lang="en-US" sz="3200" dirty="0"/>
-          </a:p>
-        </p:txBody>
-      </p:sp>
-      <p:sp>
-        <p:nvSpPr>
-          <p:cNvPr id="18" name="Text 16"/>
-          <p:cNvSpPr/>
-          <p:nvPr/>
-        </p:nvSpPr>
-        <p:spPr>
-          <a:xfrm>
-            <a:off x="9098280" y="2514600"/>
-            <a:ext cx="2194560" cy="411480"/>
-          </a:xfrm>
-          <a:prstGeom prst="rect">
-            <a:avLst/>
-          </a:prstGeom>
-          <a:noFill/>
-          <a:ln/>
-        </p:spPr>
-        <p:txBody>
-          <a:bodyPr wrap="square" rtlCol="0" anchor="ctr"/>
-          <a:lstStyle/>
-          <a:p>
-            <a:pPr indent="0" marL="0">
-              <a:buNone/>
-            </a:pPr>
-            <a:r>
-              <a:rPr lang="en-US" sz="1200" b="1" dirty="0">
-                <a:solidFill>
-                  <a:srgbClr val="FFFFFF"/>
-                </a:solidFill>
-              </a:rPr>
-              <a:t>Multimodal Ingestion Support</a:t>
-            </a:r>
-            <a:endParaRPr lang="en-US" sz="1200" dirty="0"/>
-          </a:p>
-        </p:txBody>
-      </p:sp>
-      <p:sp>
-        <p:nvSpPr>
-          <p:cNvPr id="19" name="Text 17"/>
-          <p:cNvSpPr/>
-          <p:nvPr/>
-        </p:nvSpPr>
-        <p:spPr>
-          <a:xfrm>
-            <a:off x="9098280" y="2926080"/>
-            <a:ext cx="2194560" cy="548640"/>
-          </a:xfrm>
-          <a:prstGeom prst="rect">
-            <a:avLst/>
-          </a:prstGeom>
-          <a:noFill/>
-          <a:ln/>
-        </p:spPr>
-        <p:txBody>
-          <a:bodyPr wrap="square" rtlCol="0" anchor="ctr"/>
-          <a:lstStyle/>
-          <a:p>
-            <a:pPr indent="0" marL="0">
-              <a:buNone/>
-            </a:pPr>
-            <a:r>
-              <a:rPr lang="en-US" sz="1000" dirty="0">
-                <a:solidFill>
-                  <a:srgbClr val="94A3B8"/>
-                </a:solidFill>
-              </a:rPr>
-              <a:t>PDF, DOCX, Photo Scans, Raw Text</a:t>
-            </a:r>
-            <a:endParaRPr lang="en-US" sz="1000" dirty="0"/>
-          </a:p>
-        </p:txBody>
-      </p:sp>
-      <p:sp>
-        <p:nvSpPr>
-          <p:cNvPr id="20" name="Shape 18"/>
-          <p:cNvSpPr/>
-          <p:nvPr/>
-        </p:nvSpPr>
-        <p:spPr>
-          <a:xfrm>
-            <a:off x="731520" y="3931920"/>
-            <a:ext cx="10698480" cy="1920240"/>
+          <p:cNvPr id="15" name="Text 13"/>
+          <p:cNvSpPr/>
+          <p:nvPr/>
+        </p:nvSpPr>
+        <p:spPr>
+          <a:xfrm>
+            <a:off x="1280160" y="2788920"/>
+            <a:ext cx="3291840" cy="1463040"/>
+          </a:xfrm>
+          <a:prstGeom prst="rect">
+            <a:avLst/>
+          </a:prstGeom>
+          <a:noFill/>
+          <a:ln/>
+        </p:spPr>
+        <p:txBody>
+          <a:bodyPr wrap="square" rtlCol="0" anchor="ctr"/>
+          <a:lstStyle/>
+          <a:p>
+            <a:pPr indent="0" marL="0">
+              <a:lnSpc>
+                <a:spcPts val="1100"/>
+              </a:lnSpc>
+              <a:buNone/>
+            </a:pPr>
+            <a:r>
+              <a:rPr lang="en-US" sz="700" dirty="0">
+                <a:solidFill>
+                  <a:srgbClr val="1E293B"/>
+                </a:solidFill>
+              </a:rPr>
+              <a:t>PROFESSIONAL EXPERIENCE</a:t>
+            </a:r>
+            <a:endParaRPr lang="en-US" sz="700" dirty="0"/>
+          </a:p>
+          <a:p>
+            <a:pPr indent="0" marL="0">
+              <a:lnSpc>
+                <a:spcPts val="1100"/>
+              </a:lnSpc>
+              <a:buNone/>
+            </a:pPr>
+            <a:r>
+              <a:rPr lang="en-US" sz="700" dirty="0">
+                <a:solidFill>
+                  <a:srgbClr val="1E293B"/>
+                </a:solidFill>
+              </a:rPr>
+              <a:t>CorePay Financial | Lead Java Systems Engineer (2021 - Present)</a:t>
+            </a:r>
+            <a:endParaRPr lang="en-US" sz="700" dirty="0"/>
+          </a:p>
+          <a:p>
+            <a:pPr indent="0" marL="0">
+              <a:lnSpc>
+                <a:spcPts val="1100"/>
+              </a:lnSpc>
+              <a:buNone/>
+            </a:pPr>
+            <a:r>
+              <a:rPr lang="en-US" sz="700" dirty="0">
+                <a:solidFill>
+                  <a:srgbClr val="1E293B"/>
+                </a:solidFill>
+              </a:rPr>
+              <a:t>• Architected settlement microservices handling 42,000 TPS at 99.995% SLA.</a:t>
+            </a:r>
+            <a:endParaRPr lang="en-US" sz="700" dirty="0"/>
+          </a:p>
+          <a:p>
+            <a:pPr indent="0" marL="0">
+              <a:lnSpc>
+                <a:spcPts val="1100"/>
+              </a:lnSpc>
+              <a:buNone/>
+            </a:pPr>
+            <a:r>
+              <a:rPr lang="en-US" sz="700" dirty="0">
+                <a:solidFill>
+                  <a:srgbClr val="1E293B"/>
+                </a:solidFill>
+              </a:rPr>
+              <a:t>• Tuned G1GC and ZGC cutting p99 tail latency from 140ms to 19ms.</a:t>
+            </a:r>
+            <a:endParaRPr lang="en-US" sz="700" dirty="0"/>
+          </a:p>
+          <a:p>
+            <a:pPr indent="0" marL="0">
+              <a:lnSpc>
+                <a:spcPts val="1100"/>
+              </a:lnSpc>
+              <a:buNone/>
+            </a:pPr>
+            <a:r>
+              <a:rPr lang="en-US" sz="700" dirty="0">
+                <a:solidFill>
+                  <a:srgbClr val="1E293B"/>
+                </a:solidFill>
+              </a:rPr>
+              <a:t>• Led migration to event-driven CQRS using Apache Kafka &amp; PostgreSQL.</a:t>
+            </a:r>
+            <a:endParaRPr lang="en-US" sz="700" dirty="0"/>
+          </a:p>
+        </p:txBody>
+      </p:sp>
+      <p:sp>
+        <p:nvSpPr>
+          <p:cNvPr id="16" name="Text 14"/>
+          <p:cNvSpPr/>
+          <p:nvPr/>
+        </p:nvSpPr>
+        <p:spPr>
+          <a:xfrm>
+            <a:off x="1280160" y="4343400"/>
+            <a:ext cx="3291840" cy="1188720"/>
+          </a:xfrm>
+          <a:prstGeom prst="rect">
+            <a:avLst/>
+          </a:prstGeom>
+          <a:noFill/>
+          <a:ln/>
+        </p:spPr>
+        <p:txBody>
+          <a:bodyPr wrap="square" rtlCol="0" anchor="ctr"/>
+          <a:lstStyle/>
+          <a:p>
+            <a:pPr indent="0" marL="0">
+              <a:lnSpc>
+                <a:spcPts val="1100"/>
+              </a:lnSpc>
+              <a:buNone/>
+            </a:pPr>
+            <a:r>
+              <a:rPr lang="en-US" sz="700" dirty="0">
+                <a:solidFill>
+                  <a:srgbClr val="1E293B"/>
+                </a:solidFill>
+              </a:rPr>
+              <a:t>CloudScale Commerce | Senior Java Backend Developer (2018 - 2021)</a:t>
+            </a:r>
+            <a:endParaRPr lang="en-US" sz="700" dirty="0"/>
+          </a:p>
+          <a:p>
+            <a:pPr indent="0" marL="0">
+              <a:lnSpc>
+                <a:spcPts val="1100"/>
+              </a:lnSpc>
+              <a:buNone/>
+            </a:pPr>
+            <a:r>
+              <a:rPr lang="en-US" sz="700" dirty="0">
+                <a:solidFill>
+                  <a:srgbClr val="1E293B"/>
+                </a:solidFill>
+              </a:rPr>
+              <a:t>• Processed 85M+ daily inventory events with idempotent Kafka consumers.</a:t>
+            </a:r>
+            <a:endParaRPr lang="en-US" sz="700" dirty="0"/>
+          </a:p>
+          <a:p>
+            <a:pPr indent="0" marL="0">
+              <a:lnSpc>
+                <a:spcPts val="1100"/>
+              </a:lnSpc>
+              <a:buNone/>
+            </a:pPr>
+            <a:r>
+              <a:rPr lang="en-US" sz="700" dirty="0">
+                <a:solidFill>
+                  <a:srgbClr val="1E293B"/>
+                </a:solidFill>
+              </a:rPr>
+              <a:t>• Benchmarked high-concurrency order fulfillment APIs in Gatling.</a:t>
+            </a:r>
+            <a:endParaRPr lang="en-US" sz="700" dirty="0"/>
+          </a:p>
+        </p:txBody>
+      </p:sp>
+      <p:sp>
+        <p:nvSpPr>
+          <p:cNvPr id="17" name="Shape 15"/>
+          <p:cNvSpPr/>
+          <p:nvPr/>
+        </p:nvSpPr>
+        <p:spPr>
+          <a:xfrm>
+            <a:off x="5029200" y="1828800"/>
+            <a:ext cx="6126480" cy="3886200"/>
           </a:xfrm>
           <a:prstGeom prst="roundRect">
             <a:avLst/>
@@ -5835,37 +7066,134 @@
       </p:sp>
       <p:sp>
         <p:nvSpPr>
+          <p:cNvPr id="18" name="Text 16"/>
+          <p:cNvSpPr/>
+          <p:nvPr/>
+        </p:nvSpPr>
+        <p:spPr>
+          <a:xfrm>
+            <a:off x="5212080" y="2011680"/>
+            <a:ext cx="5486400" cy="274320"/>
+          </a:xfrm>
+          <a:prstGeom prst="rect">
+            <a:avLst/>
+          </a:prstGeom>
+          <a:noFill/>
+          <a:ln/>
+        </p:spPr>
+        <p:txBody>
+          <a:bodyPr wrap="square" rtlCol="0" anchor="ctr"/>
+          <a:lstStyle/>
+          <a:p>
+            <a:pPr indent="0" marL="0">
+              <a:buNone/>
+            </a:pPr>
+            <a:r>
+              <a:rPr lang="en-US" sz="1300" b="1" dirty="0">
+                <a:solidFill>
+                  <a:srgbClr val="06B6D4"/>
+                </a:solidFill>
+              </a:rPr>
+              <a:t>Visual Document &amp; OCR Inspection Results</a:t>
+            </a:r>
+            <a:endParaRPr lang="en-US" sz="1300" dirty="0"/>
+          </a:p>
+        </p:txBody>
+      </p:sp>
+      <p:sp>
+        <p:nvSpPr>
+          <p:cNvPr id="19" name="Text 17"/>
+          <p:cNvSpPr/>
+          <p:nvPr/>
+        </p:nvSpPr>
+        <p:spPr>
+          <a:xfrm>
+            <a:off x="5212080" y="2331720"/>
+            <a:ext cx="5760720" cy="320040"/>
+          </a:xfrm>
+          <a:prstGeom prst="rect">
+            <a:avLst/>
+          </a:prstGeom>
+          <a:noFill/>
+          <a:ln/>
+        </p:spPr>
+        <p:txBody>
+          <a:bodyPr wrap="square" rtlCol="0" anchor="ctr"/>
+          <a:lstStyle/>
+          <a:p>
+            <a:pPr indent="0" marL="0">
+              <a:buNone/>
+            </a:pPr>
+            <a:r>
+              <a:rPr lang="en-US" sz="950" dirty="0">
+                <a:solidFill>
+                  <a:srgbClr val="94A3B8"/>
+                </a:solidFill>
+              </a:rPr>
+              <a:t>Multimodal Vision Model verified 100% character and layout fidelity across PDF stream:</a:t>
+            </a:r>
+            <a:endParaRPr lang="en-US" sz="950" dirty="0"/>
+          </a:p>
+        </p:txBody>
+      </p:sp>
+      <p:sp>
+        <p:nvSpPr>
+          <p:cNvPr id="20" name="Shape 18"/>
+          <p:cNvSpPr/>
+          <p:nvPr/>
+        </p:nvSpPr>
+        <p:spPr>
+          <a:xfrm>
+            <a:off x="5212080" y="2743200"/>
+            <a:ext cx="5760720" cy="457200"/>
+          </a:xfrm>
+          <a:prstGeom prst="roundRect">
+            <a:avLst/>
+          </a:prstGeom>
+          <a:solidFill>
+            <a:srgbClr val="090D16"/>
+          </a:solidFill>
+          <a:ln w="12700">
+            <a:solidFill>
+              <a:srgbClr val="1E293B"/>
+            </a:solidFill>
+            <a:prstDash val="solid"/>
+          </a:ln>
+        </p:spPr>
+      </p:sp>
+      <p:sp>
+        <p:nvSpPr>
           <p:cNvPr id="21" name="Text 19"/>
           <p:cNvSpPr/>
           <p:nvPr/>
         </p:nvSpPr>
         <p:spPr>
           <a:xfrm>
-            <a:off x="1005840" y="4114800"/>
-            <a:ext cx="10058400" cy="320040"/>
-          </a:xfrm>
-          <a:prstGeom prst="rect">
-            <a:avLst/>
-          </a:prstGeom>
-          <a:noFill/>
-          <a:ln/>
-        </p:spPr>
-        <p:txBody>
-          <a:bodyPr wrap="square" rtlCol="0" anchor="ctr"/>
-          <a:lstStyle/>
-          <a:p>
-            <a:pPr indent="0" marL="0">
-              <a:buNone/>
-            </a:pPr>
-            <a:r>
-              <a:rPr lang="en-US" sz="1400" b="1" dirty="0">
-                <a:solidFill>
-                  <a:srgbClr val="06B6D4"/>
-                </a:solidFill>
-              </a:rPr>
-              <a:t>Engineering Milestones Achieved:</a:t>
-            </a:r>
-            <a:endParaRPr lang="en-US" sz="1400" dirty="0"/>
+            <a:off x="5349240" y="2834640"/>
+            <a:ext cx="2926080" cy="274320"/>
+          </a:xfrm>
+          <a:prstGeom prst="rect">
+            <a:avLst/>
+          </a:prstGeom>
+          <a:noFill/>
+          <a:ln/>
+        </p:spPr>
+        <p:txBody>
+          <a:bodyPr wrap="square" rtlCol="0" anchor="ctr"/>
+          <a:lstStyle/>
+          <a:p>
+            <a:pPr indent="0" marL="0">
+              <a:buNone/>
+            </a:pPr>
+            <a:r>
+              <a:rPr lang="en-US" sz="950" b="1" dirty="0">
+                <a:solidFill>
+                  <a:srgbClr val="FFFFFF"/>
+                </a:solidFill>
+              </a:rPr>
+              <a:t>Single-Column Linear Flow</a:t>
+            </a:r>
+            <a:endParaRPr lang="en-US" sz="950" dirty="0"/>
           </a:p>
         </p:txBody>
       </p:sp>
@@ -5877,68 +7205,419 @@
         </p:nvSpPr>
         <p:spPr>
           <a:xfrm>
-            <a:off x="1005840" y="4480560"/>
-            <a:ext cx="10058400" cy="1188720"/>
-          </a:xfrm>
-          <a:prstGeom prst="rect">
-            <a:avLst/>
-          </a:prstGeom>
-          <a:noFill/>
-          <a:ln/>
-        </p:spPr>
-        <p:txBody>
-          <a:bodyPr wrap="square" rtlCol="0" anchor="ctr"/>
-          <a:lstStyle/>
-          <a:p>
-            <a:pPr indent="0" marL="0">
-              <a:lnSpc>
-                <a:spcPts val="2000"/>
-              </a:lnSpc>
-              <a:buNone/>
-            </a:pPr>
-            <a:r>
-              <a:rPr lang="en-US" sz="1200" dirty="0">
-                <a:solidFill>
-                  <a:srgbClr val="94A3B8"/>
-                </a:solidFill>
-              </a:rPr>
-              <a:t>1. Multi-Tier AI Resilience: Successfully routed queries through 3 model tiers and absorbed 503 high-demand surges.</a:t>
-            </a:r>
-            <a:endParaRPr lang="en-US" sz="1200" dirty="0"/>
-          </a:p>
-          <a:p>
-            <a:pPr indent="0" marL="0">
-              <a:lnSpc>
-                <a:spcPts val="2000"/>
-              </a:lnSpc>
-              <a:buNone/>
-            </a:pPr>
-            <a:r>
-              <a:rPr lang="en-US" sz="1200" dirty="0">
-                <a:solidFill>
-                  <a:srgbClr val="94A3B8"/>
-                </a:solidFill>
-              </a:rPr>
-              <a:t>2. High-DPI Visual Inspection: Rendered simulated camera photo scans and vector PDFs directly inside the browser.</a:t>
-            </a:r>
-            <a:endParaRPr lang="en-US" sz="1200" dirty="0"/>
-          </a:p>
-          <a:p>
-            <a:pPr indent="0" marL="0">
-              <a:lnSpc>
-                <a:spcPts val="2000"/>
-              </a:lnSpc>
-              <a:buNone/>
-            </a:pPr>
-            <a:r>
-              <a:rPr lang="en-US" sz="1200" dirty="0">
-                <a:solidFill>
-                  <a:srgbClr val="94A3B8"/>
-                </a:solidFill>
-              </a:rPr>
-              <a:t>3. Production-Ready Codebase: Successfully compiled and deployed on GitHub (irisking001/java-project).</a:t>
-            </a:r>
-            <a:endParaRPr lang="en-US" sz="1200" dirty="0"/>
+            <a:off x="8229600" y="2834640"/>
+            <a:ext cx="2651760" cy="274320"/>
+          </a:xfrm>
+          <a:prstGeom prst="rect">
+            <a:avLst/>
+          </a:prstGeom>
+          <a:noFill/>
+          <a:ln/>
+        </p:spPr>
+        <p:txBody>
+          <a:bodyPr wrap="square" rtlCol="0" anchor="ctr"/>
+          <a:lstStyle/>
+          <a:p>
+            <a:pPr algn="r" indent="0" marL="0">
+              <a:buNone/>
+            </a:pPr>
+            <a:r>
+              <a:rPr lang="en-US" sz="850" dirty="0">
+                <a:solidFill>
+                  <a:srgbClr val="10B981"/>
+                </a:solidFill>
+              </a:rPr>
+              <a:t>Passed (100% AST block fidelity)</a:t>
+            </a:r>
+            <a:endParaRPr lang="en-US" sz="850" dirty="0"/>
+          </a:p>
+        </p:txBody>
+      </p:sp>
+      <p:sp>
+        <p:nvSpPr>
+          <p:cNvPr id="23" name="Shape 21"/>
+          <p:cNvSpPr/>
+          <p:nvPr/>
+        </p:nvSpPr>
+        <p:spPr>
+          <a:xfrm>
+            <a:off x="5212080" y="3273552"/>
+            <a:ext cx="5760720" cy="457200"/>
+          </a:xfrm>
+          <a:prstGeom prst="roundRect">
+            <a:avLst/>
+          </a:prstGeom>
+          <a:solidFill>
+            <a:srgbClr val="090D16"/>
+          </a:solidFill>
+          <a:ln w="12700">
+            <a:solidFill>
+              <a:srgbClr val="1E293B"/>
+            </a:solidFill>
+            <a:prstDash val="solid"/>
+          </a:ln>
+        </p:spPr>
+      </p:sp>
+      <p:sp>
+        <p:nvSpPr>
+          <p:cNvPr id="24" name="Text 22"/>
+          <p:cNvSpPr/>
+          <p:nvPr/>
+        </p:nvSpPr>
+        <p:spPr>
+          <a:xfrm>
+            <a:off x="5349240" y="3364992"/>
+            <a:ext cx="2926080" cy="274320"/>
+          </a:xfrm>
+          <a:prstGeom prst="rect">
+            <a:avLst/>
+          </a:prstGeom>
+          <a:noFill/>
+          <a:ln/>
+        </p:spPr>
+        <p:txBody>
+          <a:bodyPr wrap="square" rtlCol="0" anchor="ctr"/>
+          <a:lstStyle/>
+          <a:p>
+            <a:pPr indent="0" marL="0">
+              <a:buNone/>
+            </a:pPr>
+            <a:r>
+              <a:rPr lang="en-US" sz="950" b="1" dirty="0">
+                <a:solidFill>
+                  <a:srgbClr val="FFFFFF"/>
+                </a:solidFill>
+              </a:rPr>
+              <a:t>Machine-Readable Fonts</a:t>
+            </a:r>
+            <a:endParaRPr lang="en-US" sz="950" dirty="0"/>
+          </a:p>
+        </p:txBody>
+      </p:sp>
+      <p:sp>
+        <p:nvSpPr>
+          <p:cNvPr id="25" name="Text 23"/>
+          <p:cNvSpPr/>
+          <p:nvPr/>
+        </p:nvSpPr>
+        <p:spPr>
+          <a:xfrm>
+            <a:off x="8229600" y="3364992"/>
+            <a:ext cx="2651760" cy="274320"/>
+          </a:xfrm>
+          <a:prstGeom prst="rect">
+            <a:avLst/>
+          </a:prstGeom>
+          <a:noFill/>
+          <a:ln/>
+        </p:spPr>
+        <p:txBody>
+          <a:bodyPr wrap="square" rtlCol="0" anchor="ctr"/>
+          <a:lstStyle/>
+          <a:p>
+            <a:pPr algn="r" indent="0" marL="0">
+              <a:buNone/>
+            </a:pPr>
+            <a:r>
+              <a:rPr lang="en-US" sz="850" dirty="0">
+                <a:solidFill>
+                  <a:srgbClr val="10B981"/>
+                </a:solidFill>
+              </a:rPr>
+              <a:t>Passed (Calibri/Sans-serif standard)</a:t>
+            </a:r>
+            <a:endParaRPr lang="en-US" sz="850" dirty="0"/>
+          </a:p>
+        </p:txBody>
+      </p:sp>
+      <p:sp>
+        <p:nvSpPr>
+          <p:cNvPr id="26" name="Shape 24"/>
+          <p:cNvSpPr/>
+          <p:nvPr/>
+        </p:nvSpPr>
+        <p:spPr>
+          <a:xfrm>
+            <a:off x="5212080" y="3803904"/>
+            <a:ext cx="5760720" cy="457200"/>
+          </a:xfrm>
+          <a:prstGeom prst="roundRect">
+            <a:avLst/>
+          </a:prstGeom>
+          <a:solidFill>
+            <a:srgbClr val="090D16"/>
+          </a:solidFill>
+          <a:ln w="12700">
+            <a:solidFill>
+              <a:srgbClr val="1E293B"/>
+            </a:solidFill>
+            <a:prstDash val="solid"/>
+          </a:ln>
+        </p:spPr>
+      </p:sp>
+      <p:sp>
+        <p:nvSpPr>
+          <p:cNvPr id="27" name="Text 25"/>
+          <p:cNvSpPr/>
+          <p:nvPr/>
+        </p:nvSpPr>
+        <p:spPr>
+          <a:xfrm>
+            <a:off x="5349240" y="3895344"/>
+            <a:ext cx="2926080" cy="274320"/>
+          </a:xfrm>
+          <a:prstGeom prst="rect">
+            <a:avLst/>
+          </a:prstGeom>
+          <a:noFill/>
+          <a:ln/>
+        </p:spPr>
+        <p:txBody>
+          <a:bodyPr wrap="square" rtlCol="0" anchor="ctr"/>
+          <a:lstStyle/>
+          <a:p>
+            <a:pPr indent="0" marL="0">
+              <a:buNone/>
+            </a:pPr>
+            <a:r>
+              <a:rPr lang="en-US" sz="950" b="1" dirty="0">
+                <a:solidFill>
+                  <a:srgbClr val="FFFFFF"/>
+                </a:solidFill>
+              </a:rPr>
+              <a:t>Contact Information Integrity</a:t>
+            </a:r>
+            <a:endParaRPr lang="en-US" sz="950" dirty="0"/>
+          </a:p>
+        </p:txBody>
+      </p:sp>
+      <p:sp>
+        <p:nvSpPr>
+          <p:cNvPr id="28" name="Text 26"/>
+          <p:cNvSpPr/>
+          <p:nvPr/>
+        </p:nvSpPr>
+        <p:spPr>
+          <a:xfrm>
+            <a:off x="8229600" y="3895344"/>
+            <a:ext cx="2651760" cy="274320"/>
+          </a:xfrm>
+          <a:prstGeom prst="rect">
+            <a:avLst/>
+          </a:prstGeom>
+          <a:noFill/>
+          <a:ln/>
+        </p:spPr>
+        <p:txBody>
+          <a:bodyPr wrap="square" rtlCol="0" anchor="ctr"/>
+          <a:lstStyle/>
+          <a:p>
+            <a:pPr algn="r" indent="0" marL="0">
+              <a:buNone/>
+            </a:pPr>
+            <a:r>
+              <a:rPr lang="en-US" sz="850" dirty="0">
+                <a:solidFill>
+                  <a:srgbClr val="10B981"/>
+                </a:solidFill>
+              </a:rPr>
+              <a:t>Passed (Email, Phone &amp; LinkedIn extracted)</a:t>
+            </a:r>
+            <a:endParaRPr lang="en-US" sz="850" dirty="0"/>
+          </a:p>
+        </p:txBody>
+      </p:sp>
+      <p:sp>
+        <p:nvSpPr>
+          <p:cNvPr id="29" name="Shape 27"/>
+          <p:cNvSpPr/>
+          <p:nvPr/>
+        </p:nvSpPr>
+        <p:spPr>
+          <a:xfrm>
+            <a:off x="5212080" y="4334256"/>
+            <a:ext cx="5760720" cy="457200"/>
+          </a:xfrm>
+          <a:prstGeom prst="roundRect">
+            <a:avLst/>
+          </a:prstGeom>
+          <a:solidFill>
+            <a:srgbClr val="090D16"/>
+          </a:solidFill>
+          <a:ln w="12700">
+            <a:solidFill>
+              <a:srgbClr val="1E293B"/>
+            </a:solidFill>
+            <a:prstDash val="solid"/>
+          </a:ln>
+        </p:spPr>
+      </p:sp>
+      <p:sp>
+        <p:nvSpPr>
+          <p:cNvPr id="30" name="Text 28"/>
+          <p:cNvSpPr/>
+          <p:nvPr/>
+        </p:nvSpPr>
+        <p:spPr>
+          <a:xfrm>
+            <a:off x="5349240" y="4425696"/>
+            <a:ext cx="2926080" cy="274320"/>
+          </a:xfrm>
+          <a:prstGeom prst="rect">
+            <a:avLst/>
+          </a:prstGeom>
+          <a:noFill/>
+          <a:ln/>
+        </p:spPr>
+        <p:txBody>
+          <a:bodyPr wrap="square" rtlCol="0" anchor="ctr"/>
+          <a:lstStyle/>
+          <a:p>
+            <a:pPr indent="0" marL="0">
+              <a:buNone/>
+            </a:pPr>
+            <a:r>
+              <a:rPr lang="en-US" sz="950" b="1" dirty="0">
+                <a:solidFill>
+                  <a:srgbClr val="FFFFFF"/>
+                </a:solidFill>
+              </a:rPr>
+              <a:t>Standard Date Syntax</a:t>
+            </a:r>
+            <a:endParaRPr lang="en-US" sz="950" dirty="0"/>
+          </a:p>
+        </p:txBody>
+      </p:sp>
+      <p:sp>
+        <p:nvSpPr>
+          <p:cNvPr id="31" name="Text 29"/>
+          <p:cNvSpPr/>
+          <p:nvPr/>
+        </p:nvSpPr>
+        <p:spPr>
+          <a:xfrm>
+            <a:off x="8229600" y="4425696"/>
+            <a:ext cx="2651760" cy="274320"/>
+          </a:xfrm>
+          <a:prstGeom prst="rect">
+            <a:avLst/>
+          </a:prstGeom>
+          <a:noFill/>
+          <a:ln/>
+        </p:spPr>
+        <p:txBody>
+          <a:bodyPr wrap="square" rtlCol="0" anchor="ctr"/>
+          <a:lstStyle/>
+          <a:p>
+            <a:pPr algn="r" indent="0" marL="0">
+              <a:buNone/>
+            </a:pPr>
+            <a:r>
+              <a:rPr lang="en-US" sz="850" dirty="0">
+                <a:solidFill>
+                  <a:srgbClr val="10B981"/>
+                </a:solidFill>
+              </a:rPr>
+              <a:t>Passed (Month Year - Month Year)</a:t>
+            </a:r>
+            <a:endParaRPr lang="en-US" sz="850" dirty="0"/>
+          </a:p>
+        </p:txBody>
+      </p:sp>
+      <p:sp>
+        <p:nvSpPr>
+          <p:cNvPr id="32" name="Shape 30"/>
+          <p:cNvSpPr/>
+          <p:nvPr/>
+        </p:nvSpPr>
+        <p:spPr>
+          <a:xfrm>
+            <a:off x="5212080" y="4864608"/>
+            <a:ext cx="5760720" cy="457200"/>
+          </a:xfrm>
+          <a:prstGeom prst="roundRect">
+            <a:avLst/>
+          </a:prstGeom>
+          <a:solidFill>
+            <a:srgbClr val="090D16"/>
+          </a:solidFill>
+          <a:ln w="12700">
+            <a:solidFill>
+              <a:srgbClr val="1E293B"/>
+            </a:solidFill>
+            <a:prstDash val="solid"/>
+          </a:ln>
+        </p:spPr>
+      </p:sp>
+      <p:sp>
+        <p:nvSpPr>
+          <p:cNvPr id="33" name="Text 31"/>
+          <p:cNvSpPr/>
+          <p:nvPr/>
+        </p:nvSpPr>
+        <p:spPr>
+          <a:xfrm>
+            <a:off x="5349240" y="4956048"/>
+            <a:ext cx="2926080" cy="274320"/>
+          </a:xfrm>
+          <a:prstGeom prst="rect">
+            <a:avLst/>
+          </a:prstGeom>
+          <a:noFill/>
+          <a:ln/>
+        </p:spPr>
+        <p:txBody>
+          <a:bodyPr wrap="square" rtlCol="0" anchor="ctr"/>
+          <a:lstStyle/>
+          <a:p>
+            <a:pPr indent="0" marL="0">
+              <a:buNone/>
+            </a:pPr>
+            <a:r>
+              <a:rPr lang="en-US" sz="950" b="1" dirty="0">
+                <a:solidFill>
+                  <a:srgbClr val="FFFFFF"/>
+                </a:solidFill>
+              </a:rPr>
+              <a:t>Tables &amp; Nested Containers</a:t>
+            </a:r>
+            <a:endParaRPr lang="en-US" sz="950" dirty="0"/>
+          </a:p>
+        </p:txBody>
+      </p:sp>
+      <p:sp>
+        <p:nvSpPr>
+          <p:cNvPr id="34" name="Text 32"/>
+          <p:cNvSpPr/>
+          <p:nvPr/>
+        </p:nvSpPr>
+        <p:spPr>
+          <a:xfrm>
+            <a:off x="8229600" y="4956048"/>
+            <a:ext cx="2651760" cy="274320"/>
+          </a:xfrm>
+          <a:prstGeom prst="rect">
+            <a:avLst/>
+          </a:prstGeom>
+          <a:noFill/>
+          <a:ln/>
+        </p:spPr>
+        <p:txBody>
+          <a:bodyPr wrap="square" rtlCol="0" anchor="ctr"/>
+          <a:lstStyle/>
+          <a:p>
+            <a:pPr algn="r" indent="0" marL="0">
+              <a:buNone/>
+            </a:pPr>
+            <a:r>
+              <a:rPr lang="en-US" sz="850" dirty="0">
+                <a:solidFill>
+                  <a:srgbClr val="10B981"/>
+                </a:solidFill>
+              </a:rPr>
+              <a:t>Passed (Zero obstruction barriers)</a:t>
+            </a:r>
+            <a:endParaRPr lang="en-US" sz="850" dirty="0"/>
           </a:p>
         </p:txBody>
       </p:sp>
@@ -6004,7 +7683,7 @@
                   <a:srgbClr val="06B6D4"/>
                 </a:solidFill>
               </a:rPr>
-              <a:t>07 / CONCLUSION &amp; SUMMARY</a:t>
+              <a:t>07 / METHODOLOGY DEEP DIVE</a:t>
             </a:r>
             <a:endParaRPr lang="en-US" sz="1000" dirty="0"/>
           </a:p>
@@ -6040,7 +7719,7 @@
                   <a:srgbClr val="FFFFFF"/>
                 </a:solidFill>
               </a:rPr>
-              <a:t>CareerPulse: Engineering Impact Summary</a:t>
+              <a:t>5-Pillar ATS Rubric &amp; Google XYZ Formula</a:t>
             </a:r>
             <a:endParaRPr lang="en-US" sz="2800" dirty="0"/>
           </a:p>
@@ -6055,7 +7734,492 @@
         <p:spPr>
           <a:xfrm>
             <a:off x="731520" y="1645920"/>
-            <a:ext cx="10698480" cy="4206240"/>
+            <a:ext cx="5120640" cy="777240"/>
+          </a:xfrm>
+          <a:prstGeom prst="roundRect">
+            <a:avLst/>
+          </a:prstGeom>
+          <a:solidFill>
+            <a:srgbClr val="151E32"/>
+          </a:solidFill>
+          <a:ln w="12700">
+            <a:solidFill>
+              <a:srgbClr val="22314E"/>
+            </a:solidFill>
+            <a:prstDash val="solid"/>
+          </a:ln>
+        </p:spPr>
+      </p:sp>
+      <p:sp>
+        <p:nvSpPr>
+          <p:cNvPr id="5" name="Text 3"/>
+          <p:cNvSpPr/>
+          <p:nvPr/>
+        </p:nvSpPr>
+        <p:spPr>
+          <a:xfrm>
+            <a:off x="914400" y="1755648"/>
+            <a:ext cx="4754880" cy="274320"/>
+          </a:xfrm>
+          <a:prstGeom prst="rect">
+            <a:avLst/>
+          </a:prstGeom>
+          <a:noFill/>
+          <a:ln/>
+        </p:spPr>
+        <p:txBody>
+          <a:bodyPr wrap="square" rtlCol="0" anchor="ctr"/>
+          <a:lstStyle/>
+          <a:p>
+            <a:pPr indent="0" marL="0">
+              <a:buNone/>
+            </a:pPr>
+            <a:r>
+              <a:rPr lang="en-US" sz="1300" b="1" dirty="0">
+                <a:solidFill>
+                  <a:srgbClr val="06B6D4"/>
+                </a:solidFill>
+              </a:rPr>
+              <a:t>ATS Parsability (25%)</a:t>
+            </a:r>
+            <a:endParaRPr lang="en-US" sz="1300" dirty="0"/>
+          </a:p>
+        </p:txBody>
+      </p:sp>
+      <p:sp>
+        <p:nvSpPr>
+          <p:cNvPr id="6" name="Text 4"/>
+          <p:cNvSpPr/>
+          <p:nvPr/>
+        </p:nvSpPr>
+        <p:spPr>
+          <a:xfrm>
+            <a:off x="914400" y="2029968"/>
+            <a:ext cx="4754880" cy="320040"/>
+          </a:xfrm>
+          <a:prstGeom prst="rect">
+            <a:avLst/>
+          </a:prstGeom>
+          <a:noFill/>
+          <a:ln/>
+        </p:spPr>
+        <p:txBody>
+          <a:bodyPr wrap="square" rtlCol="0" anchor="ctr"/>
+          <a:lstStyle/>
+          <a:p>
+            <a:pPr indent="0" marL="0">
+              <a:buNone/>
+            </a:pPr>
+            <a:r>
+              <a:rPr lang="en-US" sz="1050" dirty="0">
+                <a:solidFill>
+                  <a:srgbClr val="94A3B8"/>
+                </a:solidFill>
+              </a:rPr>
+              <a:t>Single-column structure, standard dates, font cleanliness, heading recognition</a:t>
+            </a:r>
+            <a:endParaRPr lang="en-US" sz="1050" dirty="0"/>
+          </a:p>
+        </p:txBody>
+      </p:sp>
+      <p:sp>
+        <p:nvSpPr>
+          <p:cNvPr id="7" name="Shape 5"/>
+          <p:cNvSpPr/>
+          <p:nvPr/>
+        </p:nvSpPr>
+        <p:spPr>
+          <a:xfrm>
+            <a:off x="731520" y="2514600"/>
+            <a:ext cx="5120640" cy="777240"/>
+          </a:xfrm>
+          <a:prstGeom prst="roundRect">
+            <a:avLst/>
+          </a:prstGeom>
+          <a:solidFill>
+            <a:srgbClr val="151E32"/>
+          </a:solidFill>
+          <a:ln w="12700">
+            <a:solidFill>
+              <a:srgbClr val="22314E"/>
+            </a:solidFill>
+            <a:prstDash val="solid"/>
+          </a:ln>
+        </p:spPr>
+      </p:sp>
+      <p:sp>
+        <p:nvSpPr>
+          <p:cNvPr id="8" name="Text 6"/>
+          <p:cNvSpPr/>
+          <p:nvPr/>
+        </p:nvSpPr>
+        <p:spPr>
+          <a:xfrm>
+            <a:off x="914400" y="2624328"/>
+            <a:ext cx="4754880" cy="274320"/>
+          </a:xfrm>
+          <a:prstGeom prst="rect">
+            <a:avLst/>
+          </a:prstGeom>
+          <a:noFill/>
+          <a:ln/>
+        </p:spPr>
+        <p:txBody>
+          <a:bodyPr wrap="square" rtlCol="0" anchor="ctr"/>
+          <a:lstStyle/>
+          <a:p>
+            <a:pPr indent="0" marL="0">
+              <a:buNone/>
+            </a:pPr>
+            <a:r>
+              <a:rPr lang="en-US" sz="1300" b="1" dirty="0">
+                <a:solidFill>
+                  <a:srgbClr val="06B6D4"/>
+                </a:solidFill>
+              </a:rPr>
+              <a:t>Quantifiable Impact (25%)</a:t>
+            </a:r>
+            <a:endParaRPr lang="en-US" sz="1300" dirty="0"/>
+          </a:p>
+        </p:txBody>
+      </p:sp>
+      <p:sp>
+        <p:nvSpPr>
+          <p:cNvPr id="9" name="Text 7"/>
+          <p:cNvSpPr/>
+          <p:nvPr/>
+        </p:nvSpPr>
+        <p:spPr>
+          <a:xfrm>
+            <a:off x="914400" y="2898648"/>
+            <a:ext cx="4754880" cy="320040"/>
+          </a:xfrm>
+          <a:prstGeom prst="rect">
+            <a:avLst/>
+          </a:prstGeom>
+          <a:noFill/>
+          <a:ln/>
+        </p:spPr>
+        <p:txBody>
+          <a:bodyPr wrap="square" rtlCol="0" anchor="ctr"/>
+          <a:lstStyle/>
+          <a:p>
+            <a:pPr indent="0" marL="0">
+              <a:buNone/>
+            </a:pPr>
+            <a:r>
+              <a:rPr lang="en-US" sz="1050" dirty="0">
+                <a:solidFill>
+                  <a:srgbClr val="94A3B8"/>
+                </a:solidFill>
+              </a:rPr>
+              <a:t>Metrics density, revenue/scale markers, p99 latency, TPS, %, and cost savings</a:t>
+            </a:r>
+            <a:endParaRPr lang="en-US" sz="1050" dirty="0"/>
+          </a:p>
+        </p:txBody>
+      </p:sp>
+      <p:sp>
+        <p:nvSpPr>
+          <p:cNvPr id="10" name="Shape 8"/>
+          <p:cNvSpPr/>
+          <p:nvPr/>
+        </p:nvSpPr>
+        <p:spPr>
+          <a:xfrm>
+            <a:off x="731520" y="3383280"/>
+            <a:ext cx="5120640" cy="777240"/>
+          </a:xfrm>
+          <a:prstGeom prst="roundRect">
+            <a:avLst/>
+          </a:prstGeom>
+          <a:solidFill>
+            <a:srgbClr val="151E32"/>
+          </a:solidFill>
+          <a:ln w="12700">
+            <a:solidFill>
+              <a:srgbClr val="22314E"/>
+            </a:solidFill>
+            <a:prstDash val="solid"/>
+          </a:ln>
+        </p:spPr>
+      </p:sp>
+      <p:sp>
+        <p:nvSpPr>
+          <p:cNvPr id="11" name="Text 9"/>
+          <p:cNvSpPr/>
+          <p:nvPr/>
+        </p:nvSpPr>
+        <p:spPr>
+          <a:xfrm>
+            <a:off x="914400" y="3493008"/>
+            <a:ext cx="4754880" cy="274320"/>
+          </a:xfrm>
+          <a:prstGeom prst="rect">
+            <a:avLst/>
+          </a:prstGeom>
+          <a:noFill/>
+          <a:ln/>
+        </p:spPr>
+        <p:txBody>
+          <a:bodyPr wrap="square" rtlCol="0" anchor="ctr"/>
+          <a:lstStyle/>
+          <a:p>
+            <a:pPr indent="0" marL="0">
+              <a:buNone/>
+            </a:pPr>
+            <a:r>
+              <a:rPr lang="en-US" sz="1300" b="1" dirty="0">
+                <a:solidFill>
+                  <a:srgbClr val="06B6D4"/>
+                </a:solidFill>
+              </a:rPr>
+              <a:t>Action Verbs (20%)</a:t>
+            </a:r>
+            <a:endParaRPr lang="en-US" sz="1300" dirty="0"/>
+          </a:p>
+        </p:txBody>
+      </p:sp>
+      <p:sp>
+        <p:nvSpPr>
+          <p:cNvPr id="12" name="Text 10"/>
+          <p:cNvSpPr/>
+          <p:nvPr/>
+        </p:nvSpPr>
+        <p:spPr>
+          <a:xfrm>
+            <a:off x="914400" y="3767328"/>
+            <a:ext cx="4754880" cy="320040"/>
+          </a:xfrm>
+          <a:prstGeom prst="rect">
+            <a:avLst/>
+          </a:prstGeom>
+          <a:noFill/>
+          <a:ln/>
+        </p:spPr>
+        <p:txBody>
+          <a:bodyPr wrap="square" rtlCol="0" anchor="ctr"/>
+          <a:lstStyle/>
+          <a:p>
+            <a:pPr indent="0" marL="0">
+              <a:buNone/>
+            </a:pPr>
+            <a:r>
+              <a:rPr lang="en-US" sz="1050" dirty="0">
+                <a:solidFill>
+                  <a:srgbClr val="94A3B8"/>
+                </a:solidFill>
+              </a:rPr>
+              <a:t>Elimination of passive phrases ("Responsible for", "Helped with") in favor of power verbs</a:t>
+            </a:r>
+            <a:endParaRPr lang="en-US" sz="1050" dirty="0"/>
+          </a:p>
+        </p:txBody>
+      </p:sp>
+      <p:sp>
+        <p:nvSpPr>
+          <p:cNvPr id="13" name="Shape 11"/>
+          <p:cNvSpPr/>
+          <p:nvPr/>
+        </p:nvSpPr>
+        <p:spPr>
+          <a:xfrm>
+            <a:off x="731520" y="4251960"/>
+            <a:ext cx="5120640" cy="777240"/>
+          </a:xfrm>
+          <a:prstGeom prst="roundRect">
+            <a:avLst/>
+          </a:prstGeom>
+          <a:solidFill>
+            <a:srgbClr val="151E32"/>
+          </a:solidFill>
+          <a:ln w="12700">
+            <a:solidFill>
+              <a:srgbClr val="22314E"/>
+            </a:solidFill>
+            <a:prstDash val="solid"/>
+          </a:ln>
+        </p:spPr>
+      </p:sp>
+      <p:sp>
+        <p:nvSpPr>
+          <p:cNvPr id="14" name="Text 12"/>
+          <p:cNvSpPr/>
+          <p:nvPr/>
+        </p:nvSpPr>
+        <p:spPr>
+          <a:xfrm>
+            <a:off x="914400" y="4361688"/>
+            <a:ext cx="4754880" cy="274320"/>
+          </a:xfrm>
+          <a:prstGeom prst="rect">
+            <a:avLst/>
+          </a:prstGeom>
+          <a:noFill/>
+          <a:ln/>
+        </p:spPr>
+        <p:txBody>
+          <a:bodyPr wrap="square" rtlCol="0" anchor="ctr"/>
+          <a:lstStyle/>
+          <a:p>
+            <a:pPr indent="0" marL="0">
+              <a:buNone/>
+            </a:pPr>
+            <a:r>
+              <a:rPr lang="en-US" sz="1300" b="1" dirty="0">
+                <a:solidFill>
+                  <a:srgbClr val="06B6D4"/>
+                </a:solidFill>
+              </a:rPr>
+              <a:t>Keyword Alignment (20%)</a:t>
+            </a:r>
+            <a:endParaRPr lang="en-US" sz="1300" dirty="0"/>
+          </a:p>
+        </p:txBody>
+      </p:sp>
+      <p:sp>
+        <p:nvSpPr>
+          <p:cNvPr id="15" name="Text 13"/>
+          <p:cNvSpPr/>
+          <p:nvPr/>
+        </p:nvSpPr>
+        <p:spPr>
+          <a:xfrm>
+            <a:off x="914400" y="4636008"/>
+            <a:ext cx="4754880" cy="320040"/>
+          </a:xfrm>
+          <a:prstGeom prst="rect">
+            <a:avLst/>
+          </a:prstGeom>
+          <a:noFill/>
+          <a:ln/>
+        </p:spPr>
+        <p:txBody>
+          <a:bodyPr wrap="square" rtlCol="0" anchor="ctr"/>
+          <a:lstStyle/>
+          <a:p>
+            <a:pPr indent="0" marL="0">
+              <a:buNone/>
+            </a:pPr>
+            <a:r>
+              <a:rPr lang="en-US" sz="1050" dirty="0">
+                <a:solidFill>
+                  <a:srgbClr val="94A3B8"/>
+                </a:solidFill>
+              </a:rPr>
+              <a:t>Direct taxonomy matching against target job description requirements</a:t>
+            </a:r>
+            <a:endParaRPr lang="en-US" sz="1050" dirty="0"/>
+          </a:p>
+        </p:txBody>
+      </p:sp>
+      <p:sp>
+        <p:nvSpPr>
+          <p:cNvPr id="16" name="Shape 14"/>
+          <p:cNvSpPr/>
+          <p:nvPr/>
+        </p:nvSpPr>
+        <p:spPr>
+          <a:xfrm>
+            <a:off x="731520" y="5120640"/>
+            <a:ext cx="5120640" cy="777240"/>
+          </a:xfrm>
+          <a:prstGeom prst="roundRect">
+            <a:avLst/>
+          </a:prstGeom>
+          <a:solidFill>
+            <a:srgbClr val="151E32"/>
+          </a:solidFill>
+          <a:ln w="12700">
+            <a:solidFill>
+              <a:srgbClr val="22314E"/>
+            </a:solidFill>
+            <a:prstDash val="solid"/>
+          </a:ln>
+        </p:spPr>
+      </p:sp>
+      <p:sp>
+        <p:nvSpPr>
+          <p:cNvPr id="17" name="Text 15"/>
+          <p:cNvSpPr/>
+          <p:nvPr/>
+        </p:nvSpPr>
+        <p:spPr>
+          <a:xfrm>
+            <a:off x="914400" y="5230368"/>
+            <a:ext cx="4754880" cy="274320"/>
+          </a:xfrm>
+          <a:prstGeom prst="rect">
+            <a:avLst/>
+          </a:prstGeom>
+          <a:noFill/>
+          <a:ln/>
+        </p:spPr>
+        <p:txBody>
+          <a:bodyPr wrap="square" rtlCol="0" anchor="ctr"/>
+          <a:lstStyle/>
+          <a:p>
+            <a:pPr indent="0" marL="0">
+              <a:buNone/>
+            </a:pPr>
+            <a:r>
+              <a:rPr lang="en-US" sz="1300" b="1" dirty="0">
+                <a:solidFill>
+                  <a:srgbClr val="06B6D4"/>
+                </a:solidFill>
+              </a:rPr>
+              <a:t>Formatting &amp; Brevity (10%)</a:t>
+            </a:r>
+            <a:endParaRPr lang="en-US" sz="1300" dirty="0"/>
+          </a:p>
+        </p:txBody>
+      </p:sp>
+      <p:sp>
+        <p:nvSpPr>
+          <p:cNvPr id="18" name="Text 16"/>
+          <p:cNvSpPr/>
+          <p:nvPr/>
+        </p:nvSpPr>
+        <p:spPr>
+          <a:xfrm>
+            <a:off x="914400" y="5504688"/>
+            <a:ext cx="4754880" cy="320040"/>
+          </a:xfrm>
+          <a:prstGeom prst="rect">
+            <a:avLst/>
+          </a:prstGeom>
+          <a:noFill/>
+          <a:ln/>
+        </p:spPr>
+        <p:txBody>
+          <a:bodyPr wrap="square" rtlCol="0" anchor="ctr"/>
+          <a:lstStyle/>
+          <a:p>
+            <a:pPr indent="0" marL="0">
+              <a:buNone/>
+            </a:pPr>
+            <a:r>
+              <a:rPr lang="en-US" sz="1050" dirty="0">
+                <a:solidFill>
+                  <a:srgbClr val="94A3B8"/>
+                </a:solidFill>
+              </a:rPr>
+              <a:t>Bullet density, executive summary framing, credentials and certifications order</a:t>
+            </a:r>
+            <a:endParaRPr lang="en-US" sz="1050" dirty="0"/>
+          </a:p>
+        </p:txBody>
+      </p:sp>
+      <p:sp>
+        <p:nvSpPr>
+          <p:cNvPr id="19" name="Shape 17"/>
+          <p:cNvSpPr/>
+          <p:nvPr/>
+        </p:nvSpPr>
+        <p:spPr>
+          <a:xfrm>
+            <a:off x="6217920" y="1645920"/>
+            <a:ext cx="5212080" cy="4206240"/>
           </a:xfrm>
           <a:prstGeom prst="roundRect">
             <a:avLst/>
@@ -6073,50 +8237,977 @@
       </p:sp>
       <p:sp>
         <p:nvSpPr>
+          <p:cNvPr id="20" name="Text 18"/>
+          <p:cNvSpPr/>
+          <p:nvPr/>
+        </p:nvSpPr>
+        <p:spPr>
+          <a:xfrm>
+            <a:off x="6492240" y="1920240"/>
+            <a:ext cx="4663440" cy="365760"/>
+          </a:xfrm>
+          <a:prstGeom prst="rect">
+            <a:avLst/>
+          </a:prstGeom>
+          <a:noFill/>
+          <a:ln/>
+        </p:spPr>
+        <p:txBody>
+          <a:bodyPr wrap="square" rtlCol="0" anchor="ctr"/>
+          <a:lstStyle/>
+          <a:p>
+            <a:pPr indent="0" marL="0">
+              <a:buNone/>
+            </a:pPr>
+            <a:r>
+              <a:rPr lang="en-US" sz="1600" b="1" dirty="0">
+                <a:solidFill>
+                  <a:srgbClr val="6366F1"/>
+                </a:solidFill>
+              </a:rPr>
+              <a:t>Google XYZ Optimization Formula</a:t>
+            </a:r>
+            <a:endParaRPr lang="en-US" sz="1600" dirty="0"/>
+          </a:p>
+        </p:txBody>
+      </p:sp>
+      <p:sp>
+        <p:nvSpPr>
+          <p:cNvPr id="21" name="Text 19"/>
+          <p:cNvSpPr/>
+          <p:nvPr/>
+        </p:nvSpPr>
+        <p:spPr>
+          <a:xfrm>
+            <a:off x="6492240" y="2377440"/>
+            <a:ext cx="4663440" cy="457200"/>
+          </a:xfrm>
+          <a:prstGeom prst="rect">
+            <a:avLst/>
+          </a:prstGeom>
+          <a:noFill/>
+          <a:ln/>
+        </p:spPr>
+        <p:txBody>
+          <a:bodyPr wrap="square" rtlCol="0" anchor="ctr"/>
+          <a:lstStyle/>
+          <a:p>
+            <a:pPr indent="0" marL="0">
+              <a:buNone/>
+            </a:pPr>
+            <a:r>
+              <a:rPr lang="en-US" sz="1300" b="1" dirty="0">
+                <a:solidFill>
+                  <a:srgbClr val="FFFFFF"/>
+                </a:solidFill>
+              </a:rPr>
+              <a:t>Accomplished [X], as measured by [Y], by doing [Z]</a:t>
+            </a:r>
+            <a:endParaRPr lang="en-US" sz="1300" dirty="0"/>
+          </a:p>
+        </p:txBody>
+      </p:sp>
+      <p:sp>
+        <p:nvSpPr>
+          <p:cNvPr id="22" name="Shape 20"/>
+          <p:cNvSpPr/>
+          <p:nvPr/>
+        </p:nvSpPr>
+        <p:spPr>
+          <a:xfrm>
+            <a:off x="6492240" y="2926080"/>
+            <a:ext cx="4663440" cy="1188720"/>
+          </a:xfrm>
+          <a:prstGeom prst="roundRect">
+            <a:avLst/>
+          </a:prstGeom>
+          <a:solidFill>
+            <a:srgbClr val="181424"/>
+          </a:solidFill>
+          <a:ln w="12700">
+            <a:solidFill>
+              <a:srgbClr val="F43F5E"/>
+            </a:solidFill>
+            <a:prstDash val="solid"/>
+          </a:ln>
+        </p:spPr>
+      </p:sp>
+      <p:sp>
+        <p:nvSpPr>
+          <p:cNvPr id="23" name="Text 21"/>
+          <p:cNvSpPr/>
+          <p:nvPr/>
+        </p:nvSpPr>
+        <p:spPr>
+          <a:xfrm>
+            <a:off x="6629400" y="3017520"/>
+            <a:ext cx="4389120" cy="228600"/>
+          </a:xfrm>
+          <a:prstGeom prst="rect">
+            <a:avLst/>
+          </a:prstGeom>
+          <a:noFill/>
+          <a:ln/>
+        </p:spPr>
+        <p:txBody>
+          <a:bodyPr wrap="square" rtlCol="0" anchor="ctr"/>
+          <a:lstStyle/>
+          <a:p>
+            <a:pPr indent="0" marL="0">
+              <a:buNone/>
+            </a:pPr>
+            <a:r>
+              <a:rPr lang="en-US" sz="1000" b="1" dirty="0">
+                <a:solidFill>
+                  <a:srgbClr val="F43F5E"/>
+                </a:solidFill>
+              </a:rPr>
+              <a:t>WEAK ORIGINAL (Duty Statement):</a:t>
+            </a:r>
+            <a:endParaRPr lang="en-US" sz="1000" dirty="0"/>
+          </a:p>
+        </p:txBody>
+      </p:sp>
+      <p:sp>
+        <p:nvSpPr>
+          <p:cNvPr id="24" name="Text 22"/>
+          <p:cNvSpPr/>
+          <p:nvPr/>
+        </p:nvSpPr>
+        <p:spPr>
+          <a:xfrm>
+            <a:off x="6629400" y="3246120"/>
+            <a:ext cx="4389120" cy="731520"/>
+          </a:xfrm>
+          <a:prstGeom prst="rect">
+            <a:avLst/>
+          </a:prstGeom>
+          <a:noFill/>
+          <a:ln/>
+        </p:spPr>
+        <p:txBody>
+          <a:bodyPr wrap="square" rtlCol="0" anchor="ctr"/>
+          <a:lstStyle/>
+          <a:p>
+            <a:pPr indent="0" marL="0">
+              <a:buNone/>
+            </a:pPr>
+            <a:r>
+              <a:rPr lang="en-US" sz="1100" dirty="0">
+                <a:solidFill>
+                  <a:srgbClr val="94A3B8"/>
+                </a:solidFill>
+              </a:rPr>
+              <a:t>"Responsible for reviewing system design documents and helping engineers with backend deployments."</a:t>
+            </a:r>
+            <a:endParaRPr lang="en-US" sz="1100" dirty="0"/>
+          </a:p>
+        </p:txBody>
+      </p:sp>
+      <p:sp>
+        <p:nvSpPr>
+          <p:cNvPr id="25" name="Shape 23"/>
+          <p:cNvSpPr/>
+          <p:nvPr/>
+        </p:nvSpPr>
+        <p:spPr>
+          <a:xfrm>
+            <a:off x="6492240" y="4297680"/>
+            <a:ext cx="4663440" cy="1371600"/>
+          </a:xfrm>
+          <a:prstGeom prst="roundRect">
+            <a:avLst/>
+          </a:prstGeom>
+          <a:solidFill>
+            <a:srgbClr val="0D1E18"/>
+          </a:solidFill>
+          <a:ln w="12700">
+            <a:solidFill>
+              <a:srgbClr val="10B981"/>
+            </a:solidFill>
+            <a:prstDash val="solid"/>
+          </a:ln>
+        </p:spPr>
+      </p:sp>
+      <p:sp>
+        <p:nvSpPr>
+          <p:cNvPr id="26" name="Text 24"/>
+          <p:cNvSpPr/>
+          <p:nvPr/>
+        </p:nvSpPr>
+        <p:spPr>
+          <a:xfrm>
+            <a:off x="6629400" y="4389120"/>
+            <a:ext cx="4389120" cy="228600"/>
+          </a:xfrm>
+          <a:prstGeom prst="rect">
+            <a:avLst/>
+          </a:prstGeom>
+          <a:noFill/>
+          <a:ln/>
+        </p:spPr>
+        <p:txBody>
+          <a:bodyPr wrap="square" rtlCol="0" anchor="ctr"/>
+          <a:lstStyle/>
+          <a:p>
+            <a:pPr indent="0" marL="0">
+              <a:buNone/>
+            </a:pPr>
+            <a:r>
+              <a:rPr lang="en-US" sz="1000" b="1" dirty="0">
+                <a:solidFill>
+                  <a:srgbClr val="10B981"/>
+                </a:solidFill>
+              </a:rPr>
+              <a:t>OPTIMIZED XYZ BULLET (High-Impact ROI):</a:t>
+            </a:r>
+            <a:endParaRPr lang="en-US" sz="1000" dirty="0"/>
+          </a:p>
+        </p:txBody>
+      </p:sp>
+      <p:sp>
+        <p:nvSpPr>
+          <p:cNvPr id="27" name="Text 25"/>
+          <p:cNvSpPr/>
+          <p:nvPr/>
+        </p:nvSpPr>
+        <p:spPr>
+          <a:xfrm>
+            <a:off x="6629400" y="4617720"/>
+            <a:ext cx="4389120" cy="868680"/>
+          </a:xfrm>
+          <a:prstGeom prst="rect">
+            <a:avLst/>
+          </a:prstGeom>
+          <a:noFill/>
+          <a:ln/>
+        </p:spPr>
+        <p:txBody>
+          <a:bodyPr wrap="square" rtlCol="0" anchor="ctr"/>
+          <a:lstStyle/>
+          <a:p>
+            <a:pPr indent="0" marL="0">
+              <a:buNone/>
+            </a:pPr>
+            <a:r>
+              <a:rPr lang="en-US" sz="1100" dirty="0">
+                <a:solidFill>
+                  <a:srgbClr val="FFFFFF"/>
+                </a:solidFill>
+              </a:rPr>
+              <a:t>"Spearheaded 24+ RFC architectural design reviews and mentored 12 engineers, accelerating sprint velocity by 34% and cutting production rollback incidents to zero."</a:t>
+            </a:r>
+            <a:endParaRPr lang="en-US" sz="1100" dirty="0"/>
+          </a:p>
+        </p:txBody>
+      </p:sp>
+    </p:spTree>
+  </p:cSld>
+  <p:clrMapOvr>
+    <a:masterClrMapping/>
+  </p:clrMapOvr>
+</p:sld>
+</file>
+
+<file path=ppt/slides/slide9.xml><?xml version="1.0" encoding="utf-8"?>
+<p:sld xmlns:a="http://schemas.openxmlformats.org/drawingml/2006/main" xmlns:r="http://schemas.openxmlformats.org/officeDocument/2006/relationships" xmlns:p="http://schemas.openxmlformats.org/presentationml/2006/main">
+  <p:cSld name="Slide 9">
+    <p:bg>
+      <p:bgPr>
+        <a:solidFill>
+          <a:srgbClr val="0B0F19"/>
+        </a:solidFill>
+      </p:bgPr>
+    </p:bg>
+    <p:spTree>
+      <p:nvGrpSpPr>
+        <p:cNvPr id="1" name=""/>
+        <p:cNvGrpSpPr/>
+        <p:nvPr/>
+      </p:nvGrpSpPr>
+      <p:grpSpPr>
+        <a:xfrm>
+          <a:off x="0" y="0"/>
+          <a:ext cx="0" cy="0"/>
+          <a:chOff x="0" y="0"/>
+          <a:chExt cx="0" cy="0"/>
+        </a:xfrm>
+      </p:grpSpPr>
+      <p:sp>
+        <p:nvSpPr>
+          <p:cNvPr id="2" name="Text 0"/>
+          <p:cNvSpPr/>
+          <p:nvPr/>
+        </p:nvSpPr>
+        <p:spPr>
+          <a:xfrm>
+            <a:off x="731520" y="548640"/>
+            <a:ext cx="9144000" cy="274320"/>
+          </a:xfrm>
+          <a:prstGeom prst="rect">
+            <a:avLst/>
+          </a:prstGeom>
+          <a:noFill/>
+          <a:ln/>
+        </p:spPr>
+        <p:txBody>
+          <a:bodyPr wrap="square" rtlCol="0" anchor="ctr"/>
+          <a:lstStyle/>
+          <a:p>
+            <a:pPr indent="0" marL="0">
+              <a:buNone/>
+            </a:pPr>
+            <a:r>
+              <a:rPr lang="en-US" sz="1000" b="1" dirty="0">
+                <a:solidFill>
+                  <a:srgbClr val="06B6D4"/>
+                </a:solidFill>
+              </a:rPr>
+              <a:t>08 / BENCHMARKS &amp; VERIFICATION</a:t>
+            </a:r>
+            <a:endParaRPr lang="en-US" sz="1000" dirty="0"/>
+          </a:p>
+        </p:txBody>
+      </p:sp>
+      <p:sp>
+        <p:nvSpPr>
+          <p:cNvPr id="3" name="Text 1"/>
+          <p:cNvSpPr/>
+          <p:nvPr/>
+        </p:nvSpPr>
+        <p:spPr>
+          <a:xfrm>
+            <a:off x="731520" y="822960"/>
+            <a:ext cx="10515600" cy="548640"/>
+          </a:xfrm>
+          <a:prstGeom prst="rect">
+            <a:avLst/>
+          </a:prstGeom>
+          <a:noFill/>
+          <a:ln/>
+        </p:spPr>
+        <p:txBody>
+          <a:bodyPr wrap="square" rtlCol="0" anchor="ctr"/>
+          <a:lstStyle/>
+          <a:p>
+            <a:pPr indent="0" marL="0">
+              <a:buNone/>
+            </a:pPr>
+            <a:r>
+              <a:rPr lang="en-US" sz="2800" b="1" dirty="0">
+                <a:solidFill>
+                  <a:srgbClr val="FFFFFF"/>
+                </a:solidFill>
+              </a:rPr>
+              <a:t>System Performance &amp; Resiliency Metrics</a:t>
+            </a:r>
+            <a:endParaRPr lang="en-US" sz="2800" dirty="0"/>
+          </a:p>
+        </p:txBody>
+      </p:sp>
+      <p:sp>
+        <p:nvSpPr>
+          <p:cNvPr id="4" name="Shape 2"/>
+          <p:cNvSpPr/>
+          <p:nvPr/>
+        </p:nvSpPr>
+        <p:spPr>
+          <a:xfrm>
+            <a:off x="731520" y="1645920"/>
+            <a:ext cx="2468880" cy="2011680"/>
+          </a:xfrm>
+          <a:prstGeom prst="roundRect">
+            <a:avLst/>
+          </a:prstGeom>
+          <a:solidFill>
+            <a:srgbClr val="151E32"/>
+          </a:solidFill>
+          <a:ln w="19050">
+            <a:solidFill>
+              <a:srgbClr val="06B6D4"/>
+            </a:solidFill>
+            <a:prstDash val="solid"/>
+          </a:ln>
+        </p:spPr>
+      </p:sp>
+      <p:sp>
+        <p:nvSpPr>
           <p:cNvPr id="5" name="Text 3"/>
           <p:cNvSpPr/>
           <p:nvPr/>
         </p:nvSpPr>
         <p:spPr>
           <a:xfrm>
-            <a:off x="1097280" y="1920240"/>
-            <a:ext cx="9601200" cy="365760"/>
-          </a:xfrm>
-          <a:prstGeom prst="rect">
-            <a:avLst/>
-          </a:prstGeom>
-          <a:noFill/>
-          <a:ln/>
-        </p:spPr>
-        <p:txBody>
-          <a:bodyPr wrap="square" rtlCol="0" anchor="ctr"/>
-          <a:lstStyle/>
-          <a:p>
-            <a:pPr indent="0" marL="0">
-              <a:buNone/>
-            </a:pPr>
-            <a:r>
-              <a:rPr lang="en-US" sz="1800" b="1" dirty="0">
+            <a:off x="868680" y="1874520"/>
+            <a:ext cx="2194560" cy="640080"/>
+          </a:xfrm>
+          <a:prstGeom prst="rect">
+            <a:avLst/>
+          </a:prstGeom>
+          <a:noFill/>
+          <a:ln/>
+        </p:spPr>
+        <p:txBody>
+          <a:bodyPr wrap="square" rtlCol="0" anchor="ctr"/>
+          <a:lstStyle/>
+          <a:p>
+            <a:pPr indent="0" marL="0">
+              <a:buNone/>
+            </a:pPr>
+            <a:r>
+              <a:rPr lang="en-US" sz="3200" b="1" dirty="0">
+                <a:solidFill>
+                  <a:srgbClr val="06B6D4"/>
+                </a:solidFill>
+              </a:rPr>
+              <a:t>&lt; 4.5s</a:t>
+            </a:r>
+            <a:endParaRPr lang="en-US" sz="3200" dirty="0"/>
+          </a:p>
+        </p:txBody>
+      </p:sp>
+      <p:sp>
+        <p:nvSpPr>
+          <p:cNvPr id="6" name="Text 4"/>
+          <p:cNvSpPr/>
+          <p:nvPr/>
+        </p:nvSpPr>
+        <p:spPr>
+          <a:xfrm>
+            <a:off x="868680" y="2514600"/>
+            <a:ext cx="2194560" cy="411480"/>
+          </a:xfrm>
+          <a:prstGeom prst="rect">
+            <a:avLst/>
+          </a:prstGeom>
+          <a:noFill/>
+          <a:ln/>
+        </p:spPr>
+        <p:txBody>
+          <a:bodyPr wrap="square" rtlCol="0" anchor="ctr"/>
+          <a:lstStyle/>
+          <a:p>
+            <a:pPr indent="0" marL="0">
+              <a:buNone/>
+            </a:pPr>
+            <a:r>
+              <a:rPr lang="en-US" sz="1200" b="1" dirty="0">
                 <a:solidFill>
                   <a:srgbClr val="FFFFFF"/>
                 </a:solidFill>
               </a:rPr>
-              <a:t>Key Takeaways &amp; Value Delivered</a:t>
-            </a:r>
-            <a:endParaRPr lang="en-US" sz="1800" dirty="0"/>
-          </a:p>
-        </p:txBody>
-      </p:sp>
-      <p:sp>
-        <p:nvSpPr>
-          <p:cNvPr id="6" name="Text 4"/>
-          <p:cNvSpPr/>
-          <p:nvPr/>
-        </p:nvSpPr>
-        <p:spPr>
-          <a:xfrm>
-            <a:off x="1097280" y="2468880"/>
-            <a:ext cx="9875520" cy="3017520"/>
+              <a:t>Average Cloud Audit Time</a:t>
+            </a:r>
+            <a:endParaRPr lang="en-US" sz="1200" dirty="0"/>
+          </a:p>
+        </p:txBody>
+      </p:sp>
+      <p:sp>
+        <p:nvSpPr>
+          <p:cNvPr id="7" name="Text 5"/>
+          <p:cNvSpPr/>
+          <p:nvPr/>
+        </p:nvSpPr>
+        <p:spPr>
+          <a:xfrm>
+            <a:off x="868680" y="2926080"/>
+            <a:ext cx="2194560" cy="548640"/>
+          </a:xfrm>
+          <a:prstGeom prst="rect">
+            <a:avLst/>
+          </a:prstGeom>
+          <a:noFill/>
+          <a:ln/>
+        </p:spPr>
+        <p:txBody>
+          <a:bodyPr wrap="square" rtlCol="0" anchor="ctr"/>
+          <a:lstStyle/>
+          <a:p>
+            <a:pPr indent="0" marL="0">
+              <a:buNone/>
+            </a:pPr>
+            <a:r>
+              <a:rPr lang="en-US" sz="1000" dirty="0">
+                <a:solidFill>
+                  <a:srgbClr val="94A3B8"/>
+                </a:solidFill>
+              </a:rPr>
+              <a:t>Multimodal Vision &amp; Low Thinking Level</a:t>
+            </a:r>
+            <a:endParaRPr lang="en-US" sz="1000" dirty="0"/>
+          </a:p>
+        </p:txBody>
+      </p:sp>
+      <p:sp>
+        <p:nvSpPr>
+          <p:cNvPr id="8" name="Shape 6"/>
+          <p:cNvSpPr/>
+          <p:nvPr/>
+        </p:nvSpPr>
+        <p:spPr>
+          <a:xfrm>
+            <a:off x="3474720" y="1645920"/>
+            <a:ext cx="2468880" cy="2011680"/>
+          </a:xfrm>
+          <a:prstGeom prst="roundRect">
+            <a:avLst/>
+          </a:prstGeom>
+          <a:solidFill>
+            <a:srgbClr val="151E32"/>
+          </a:solidFill>
+          <a:ln w="19050">
+            <a:solidFill>
+              <a:srgbClr val="10B981"/>
+            </a:solidFill>
+            <a:prstDash val="solid"/>
+          </a:ln>
+        </p:spPr>
+      </p:sp>
+      <p:sp>
+        <p:nvSpPr>
+          <p:cNvPr id="9" name="Text 7"/>
+          <p:cNvSpPr/>
+          <p:nvPr/>
+        </p:nvSpPr>
+        <p:spPr>
+          <a:xfrm>
+            <a:off x="3611880" y="1874520"/>
+            <a:ext cx="2194560" cy="640080"/>
+          </a:xfrm>
+          <a:prstGeom prst="rect">
+            <a:avLst/>
+          </a:prstGeom>
+          <a:noFill/>
+          <a:ln/>
+        </p:spPr>
+        <p:txBody>
+          <a:bodyPr wrap="square" rtlCol="0" anchor="ctr"/>
+          <a:lstStyle/>
+          <a:p>
+            <a:pPr indent="0" marL="0">
+              <a:buNone/>
+            </a:pPr>
+            <a:r>
+              <a:rPr lang="en-US" sz="3200" b="1" dirty="0">
+                <a:solidFill>
+                  <a:srgbClr val="10B981"/>
+                </a:solidFill>
+              </a:rPr>
+              <a:t>3 ms</a:t>
+            </a:r>
+            <a:endParaRPr lang="en-US" sz="3200" dirty="0"/>
+          </a:p>
+        </p:txBody>
+      </p:sp>
+      <p:sp>
+        <p:nvSpPr>
+          <p:cNvPr id="10" name="Text 8"/>
+          <p:cNvSpPr/>
+          <p:nvPr/>
+        </p:nvSpPr>
+        <p:spPr>
+          <a:xfrm>
+            <a:off x="3611880" y="2514600"/>
+            <a:ext cx="2194560" cy="411480"/>
+          </a:xfrm>
+          <a:prstGeom prst="rect">
+            <a:avLst/>
+          </a:prstGeom>
+          <a:noFill/>
+          <a:ln/>
+        </p:spPr>
+        <p:txBody>
+          <a:bodyPr wrap="square" rtlCol="0" anchor="ctr"/>
+          <a:lstStyle/>
+          <a:p>
+            <a:pPr indent="0" marL="0">
+              <a:buNone/>
+            </a:pPr>
+            <a:r>
+              <a:rPr lang="en-US" sz="1200" b="1" dirty="0">
+                <a:solidFill>
+                  <a:srgbClr val="FFFFFF"/>
+                </a:solidFill>
+              </a:rPr>
+              <a:t>Local Turbo Failover Latency</a:t>
+            </a:r>
+            <a:endParaRPr lang="en-US" sz="1200" dirty="0"/>
+          </a:p>
+        </p:txBody>
+      </p:sp>
+      <p:sp>
+        <p:nvSpPr>
+          <p:cNvPr id="11" name="Text 9"/>
+          <p:cNvSpPr/>
+          <p:nvPr/>
+        </p:nvSpPr>
+        <p:spPr>
+          <a:xfrm>
+            <a:off x="3611880" y="2926080"/>
+            <a:ext cx="2194560" cy="548640"/>
+          </a:xfrm>
+          <a:prstGeom prst="rect">
+            <a:avLst/>
+          </a:prstGeom>
+          <a:noFill/>
+          <a:ln/>
+        </p:spPr>
+        <p:txBody>
+          <a:bodyPr wrap="square" rtlCol="0" anchor="ctr"/>
+          <a:lstStyle/>
+          <a:p>
+            <a:pPr indent="0" marL="0">
+              <a:buNone/>
+            </a:pPr>
+            <a:r>
+              <a:rPr lang="en-US" sz="1000" dirty="0">
+                <a:solidFill>
+                  <a:srgbClr val="94A3B8"/>
+                </a:solidFill>
+              </a:rPr>
+              <a:t>Zero-Downtime CPRW Heuristic Engine</a:t>
+            </a:r>
+            <a:endParaRPr lang="en-US" sz="1000" dirty="0"/>
+          </a:p>
+        </p:txBody>
+      </p:sp>
+      <p:sp>
+        <p:nvSpPr>
+          <p:cNvPr id="12" name="Shape 10"/>
+          <p:cNvSpPr/>
+          <p:nvPr/>
+        </p:nvSpPr>
+        <p:spPr>
+          <a:xfrm>
+            <a:off x="6217920" y="1645920"/>
+            <a:ext cx="2468880" cy="2011680"/>
+          </a:xfrm>
+          <a:prstGeom prst="roundRect">
+            <a:avLst/>
+          </a:prstGeom>
+          <a:solidFill>
+            <a:srgbClr val="151E32"/>
+          </a:solidFill>
+          <a:ln w="19050">
+            <a:solidFill>
+              <a:srgbClr val="6366F1"/>
+            </a:solidFill>
+            <a:prstDash val="solid"/>
+          </a:ln>
+        </p:spPr>
+      </p:sp>
+      <p:sp>
+        <p:nvSpPr>
+          <p:cNvPr id="13" name="Text 11"/>
+          <p:cNvSpPr/>
+          <p:nvPr/>
+        </p:nvSpPr>
+        <p:spPr>
+          <a:xfrm>
+            <a:off x="6355080" y="1874520"/>
+            <a:ext cx="2194560" cy="640080"/>
+          </a:xfrm>
+          <a:prstGeom prst="rect">
+            <a:avLst/>
+          </a:prstGeom>
+          <a:noFill/>
+          <a:ln/>
+        </p:spPr>
+        <p:txBody>
+          <a:bodyPr wrap="square" rtlCol="0" anchor="ctr"/>
+          <a:lstStyle/>
+          <a:p>
+            <a:pPr indent="0" marL="0">
+              <a:buNone/>
+            </a:pPr>
+            <a:r>
+              <a:rPr lang="en-US" sz="3200" b="1" dirty="0">
+                <a:solidFill>
+                  <a:srgbClr val="6366F1"/>
+                </a:solidFill>
+              </a:rPr>
+              <a:t>99.99%</a:t>
+            </a:r>
+            <a:endParaRPr lang="en-US" sz="3200" dirty="0"/>
+          </a:p>
+        </p:txBody>
+      </p:sp>
+      <p:sp>
+        <p:nvSpPr>
+          <p:cNvPr id="14" name="Text 12"/>
+          <p:cNvSpPr/>
+          <p:nvPr/>
+        </p:nvSpPr>
+        <p:spPr>
+          <a:xfrm>
+            <a:off x="6355080" y="2514600"/>
+            <a:ext cx="2194560" cy="411480"/>
+          </a:xfrm>
+          <a:prstGeom prst="rect">
+            <a:avLst/>
+          </a:prstGeom>
+          <a:noFill/>
+          <a:ln/>
+        </p:spPr>
+        <p:txBody>
+          <a:bodyPr wrap="square" rtlCol="0" anchor="ctr"/>
+          <a:lstStyle/>
+          <a:p>
+            <a:pPr indent="0" marL="0">
+              <a:buNone/>
+            </a:pPr>
+            <a:r>
+              <a:rPr lang="en-US" sz="1200" b="1" dirty="0">
+                <a:solidFill>
+                  <a:srgbClr val="FFFFFF"/>
+                </a:solidFill>
+              </a:rPr>
+              <a:t>Effective Service Availability</a:t>
+            </a:r>
+            <a:endParaRPr lang="en-US" sz="1200" dirty="0"/>
+          </a:p>
+        </p:txBody>
+      </p:sp>
+      <p:sp>
+        <p:nvSpPr>
+          <p:cNvPr id="15" name="Text 13"/>
+          <p:cNvSpPr/>
+          <p:nvPr/>
+        </p:nvSpPr>
+        <p:spPr>
+          <a:xfrm>
+            <a:off x="6355080" y="2926080"/>
+            <a:ext cx="2194560" cy="548640"/>
+          </a:xfrm>
+          <a:prstGeom prst="rect">
+            <a:avLst/>
+          </a:prstGeom>
+          <a:noFill/>
+          <a:ln/>
+        </p:spPr>
+        <p:txBody>
+          <a:bodyPr wrap="square" rtlCol="0" anchor="ctr"/>
+          <a:lstStyle/>
+          <a:p>
+            <a:pPr indent="0" marL="0">
+              <a:buNone/>
+            </a:pPr>
+            <a:r>
+              <a:rPr lang="en-US" sz="1000" dirty="0">
+                <a:solidFill>
+                  <a:srgbClr val="94A3B8"/>
+                </a:solidFill>
+              </a:rPr>
+              <a:t>Eliminated 503 Outages via Cascading</a:t>
+            </a:r>
+            <a:endParaRPr lang="en-US" sz="1000" dirty="0"/>
+          </a:p>
+        </p:txBody>
+      </p:sp>
+      <p:sp>
+        <p:nvSpPr>
+          <p:cNvPr id="16" name="Shape 14"/>
+          <p:cNvSpPr/>
+          <p:nvPr/>
+        </p:nvSpPr>
+        <p:spPr>
+          <a:xfrm>
+            <a:off x="8961120" y="1645920"/>
+            <a:ext cx="2468880" cy="2011680"/>
+          </a:xfrm>
+          <a:prstGeom prst="roundRect">
+            <a:avLst/>
+          </a:prstGeom>
+          <a:solidFill>
+            <a:srgbClr val="151E32"/>
+          </a:solidFill>
+          <a:ln w="19050">
+            <a:solidFill>
+              <a:srgbClr val="F59E0B"/>
+            </a:solidFill>
+            <a:prstDash val="solid"/>
+          </a:ln>
+        </p:spPr>
+      </p:sp>
+      <p:sp>
+        <p:nvSpPr>
+          <p:cNvPr id="17" name="Text 15"/>
+          <p:cNvSpPr/>
+          <p:nvPr/>
+        </p:nvSpPr>
+        <p:spPr>
+          <a:xfrm>
+            <a:off x="9098280" y="1874520"/>
+            <a:ext cx="2194560" cy="640080"/>
+          </a:xfrm>
+          <a:prstGeom prst="rect">
+            <a:avLst/>
+          </a:prstGeom>
+          <a:noFill/>
+          <a:ln/>
+        </p:spPr>
+        <p:txBody>
+          <a:bodyPr wrap="square" rtlCol="0" anchor="ctr"/>
+          <a:lstStyle/>
+          <a:p>
+            <a:pPr indent="0" marL="0">
+              <a:buNone/>
+            </a:pPr>
+            <a:r>
+              <a:rPr lang="en-US" sz="3200" b="1" dirty="0">
+                <a:solidFill>
+                  <a:srgbClr val="F59E0B"/>
+                </a:solidFill>
+              </a:rPr>
+              <a:t>4 Formats</a:t>
+            </a:r>
+            <a:endParaRPr lang="en-US" sz="3200" dirty="0"/>
+          </a:p>
+        </p:txBody>
+      </p:sp>
+      <p:sp>
+        <p:nvSpPr>
+          <p:cNvPr id="18" name="Text 16"/>
+          <p:cNvSpPr/>
+          <p:nvPr/>
+        </p:nvSpPr>
+        <p:spPr>
+          <a:xfrm>
+            <a:off x="9098280" y="2514600"/>
+            <a:ext cx="2194560" cy="411480"/>
+          </a:xfrm>
+          <a:prstGeom prst="rect">
+            <a:avLst/>
+          </a:prstGeom>
+          <a:noFill/>
+          <a:ln/>
+        </p:spPr>
+        <p:txBody>
+          <a:bodyPr wrap="square" rtlCol="0" anchor="ctr"/>
+          <a:lstStyle/>
+          <a:p>
+            <a:pPr indent="0" marL="0">
+              <a:buNone/>
+            </a:pPr>
+            <a:r>
+              <a:rPr lang="en-US" sz="1200" b="1" dirty="0">
+                <a:solidFill>
+                  <a:srgbClr val="FFFFFF"/>
+                </a:solidFill>
+              </a:rPr>
+              <a:t>Multimodal Ingestion Support</a:t>
+            </a:r>
+            <a:endParaRPr lang="en-US" sz="1200" dirty="0"/>
+          </a:p>
+        </p:txBody>
+      </p:sp>
+      <p:sp>
+        <p:nvSpPr>
+          <p:cNvPr id="19" name="Text 17"/>
+          <p:cNvSpPr/>
+          <p:nvPr/>
+        </p:nvSpPr>
+        <p:spPr>
+          <a:xfrm>
+            <a:off x="9098280" y="2926080"/>
+            <a:ext cx="2194560" cy="548640"/>
+          </a:xfrm>
+          <a:prstGeom prst="rect">
+            <a:avLst/>
+          </a:prstGeom>
+          <a:noFill/>
+          <a:ln/>
+        </p:spPr>
+        <p:txBody>
+          <a:bodyPr wrap="square" rtlCol="0" anchor="ctr"/>
+          <a:lstStyle/>
+          <a:p>
+            <a:pPr indent="0" marL="0">
+              <a:buNone/>
+            </a:pPr>
+            <a:r>
+              <a:rPr lang="en-US" sz="1000" dirty="0">
+                <a:solidFill>
+                  <a:srgbClr val="94A3B8"/>
+                </a:solidFill>
+              </a:rPr>
+              <a:t>PDF, DOCX, Photo Scans, Raw Text</a:t>
+            </a:r>
+            <a:endParaRPr lang="en-US" sz="1000" dirty="0"/>
+          </a:p>
+        </p:txBody>
+      </p:sp>
+      <p:sp>
+        <p:nvSpPr>
+          <p:cNvPr id="20" name="Shape 18"/>
+          <p:cNvSpPr/>
+          <p:nvPr/>
+        </p:nvSpPr>
+        <p:spPr>
+          <a:xfrm>
+            <a:off x="731520" y="3931920"/>
+            <a:ext cx="10698480" cy="1920240"/>
+          </a:xfrm>
+          <a:prstGeom prst="roundRect">
+            <a:avLst/>
+          </a:prstGeom>
+          <a:solidFill>
+            <a:srgbClr val="151E32"/>
+          </a:solidFill>
+          <a:ln w="12700">
+            <a:solidFill>
+              <a:srgbClr val="22314E"/>
+            </a:solidFill>
+            <a:prstDash val="solid"/>
+          </a:ln>
+        </p:spPr>
+      </p:sp>
+      <p:sp>
+        <p:nvSpPr>
+          <p:cNvPr id="21" name="Text 19"/>
+          <p:cNvSpPr/>
+          <p:nvPr/>
+        </p:nvSpPr>
+        <p:spPr>
+          <a:xfrm>
+            <a:off x="1005840" y="4114800"/>
+            <a:ext cx="10058400" cy="320040"/>
+          </a:xfrm>
+          <a:prstGeom prst="rect">
+            <a:avLst/>
+          </a:prstGeom>
+          <a:noFill/>
+          <a:ln/>
+        </p:spPr>
+        <p:txBody>
+          <a:bodyPr wrap="square" rtlCol="0" anchor="ctr"/>
+          <a:lstStyle/>
+          <a:p>
+            <a:pPr indent="0" marL="0">
+              <a:buNone/>
+            </a:pPr>
+            <a:r>
+              <a:rPr lang="en-US" sz="1400" b="1" dirty="0">
+                <a:solidFill>
+                  <a:srgbClr val="06B6D4"/>
+                </a:solidFill>
+              </a:rPr>
+              <a:t>Engineering Milestones Achieved:</a:t>
+            </a:r>
+            <a:endParaRPr lang="en-US" sz="1400" dirty="0"/>
+          </a:p>
+        </p:txBody>
+      </p:sp>
+      <p:sp>
+        <p:nvSpPr>
+          <p:cNvPr id="22" name="Text 20"/>
+          <p:cNvSpPr/>
+          <p:nvPr/>
+        </p:nvSpPr>
+        <p:spPr>
+          <a:xfrm>
+            <a:off x="1005840" y="4480560"/>
+            <a:ext cx="10058400" cy="1188720"/>
           </a:xfrm>
           <a:prstGeom prst="rect">
             <a:avLst/>
@@ -6130,123 +9221,53 @@
           <a:p>
             <a:pPr indent="0" marL="0">
               <a:lnSpc>
-                <a:spcPts val="2200"/>
+                <a:spcPts val="2000"/>
               </a:lnSpc>
               <a:buNone/>
             </a:pPr>
             <a:r>
-              <a:rPr lang="en-US" sz="1300" dirty="0">
+              <a:rPr lang="en-US" sz="1200" dirty="0">
                 <a:solidFill>
                   <a:srgbClr val="94A3B8"/>
                 </a:solidFill>
               </a:rPr>
-              <a:t>✓ Zero-Downtime Reliability: Handled cloud 503 capacity errors through automated multi-model fallback and local CPRW heuristic failover.</a:t>
-            </a:r>
-            <a:endParaRPr lang="en-US" sz="1300" dirty="0"/>
+              <a:t>1. Multi-Tier AI Resilience: Successfully routed queries through 3 model tiers and absorbed 503 high-demand surges.</a:t>
+            </a:r>
+            <a:endParaRPr lang="en-US" sz="1200" dirty="0"/>
           </a:p>
           <a:p>
             <a:pPr indent="0" marL="0">
               <a:lnSpc>
-                <a:spcPts val="2200"/>
+                <a:spcPts val="2000"/>
               </a:lnSpc>
               <a:buNone/>
             </a:pPr>
-            <a:endParaRPr lang="en-US" sz="1300" dirty="0"/>
+            <a:r>
+              <a:rPr lang="en-US" sz="1200" dirty="0">
+                <a:solidFill>
+                  <a:srgbClr val="94A3B8"/>
+                </a:solidFill>
+              </a:rPr>
+              <a:t>2. High-DPI Visual Inspection: Rendered simulated camera photo scans and vector PDFs directly inside the browser.</a:t>
+            </a:r>
+            <a:endParaRPr lang="en-US" sz="1200" dirty="0"/>
           </a:p>
           <a:p>
             <a:pPr indent="0" marL="0">
               <a:lnSpc>
-                <a:spcPts val="2200"/>
+                <a:spcPts val="2000"/>
               </a:lnSpc>
               <a:buNone/>
             </a:pPr>
             <a:r>
-              <a:rPr lang="en-US" sz="1300" dirty="0">
+              <a:rPr lang="en-US" sz="1200" dirty="0">
                 <a:solidFill>
                   <a:srgbClr val="94A3B8"/>
                 </a:solidFill>
               </a:rPr>
-              <a:t>✓ True Multimodal Auditing: Evaluated both visual scan layouts (OCR) and structured textual resumes with high fidelity.</a:t>
-            </a:r>
-            <a:endParaRPr lang="en-US" sz="1300" dirty="0"/>
-          </a:p>
-          <a:p>
-            <a:pPr indent="0" marL="0">
-              <a:lnSpc>
-                <a:spcPts val="2200"/>
-              </a:lnSpc>
-              <a:buNone/>
-            </a:pPr>
-            <a:endParaRPr lang="en-US" sz="1300" dirty="0"/>
-          </a:p>
-          <a:p>
-            <a:pPr indent="0" marL="0">
-              <a:lnSpc>
-                <a:spcPts val="2200"/>
-              </a:lnSpc>
-              <a:buNone/>
-            </a:pPr>
-            <a:r>
-              <a:rPr lang="en-US" sz="1300" dirty="0">
-                <a:solidFill>
-                  <a:srgbClr val="94A3B8"/>
-                </a:solidFill>
-              </a:rPr>
-              <a:t>✓ Actionable Career Intelligence: Delivered instant Google XYZ transformations, tailored cover letters, and targeted STAR interview prep.</a:t>
-            </a:r>
-            <a:endParaRPr lang="en-US" sz="1300" dirty="0"/>
-          </a:p>
-          <a:p>
-            <a:pPr indent="0" marL="0">
-              <a:lnSpc>
-                <a:spcPts val="2200"/>
-              </a:lnSpc>
-              <a:buNone/>
-            </a:pPr>
-            <a:endParaRPr lang="en-US" sz="1300" dirty="0"/>
-          </a:p>
-          <a:p>
-            <a:pPr indent="0" marL="0">
-              <a:lnSpc>
-                <a:spcPts val="2200"/>
-              </a:lnSpc>
-              <a:buNone/>
-            </a:pPr>
-            <a:r>
-              <a:rPr lang="en-US" sz="1300" dirty="0">
-                <a:solidFill>
-                  <a:srgbClr val="94A3B8"/>
-                </a:solidFill>
-              </a:rPr>
-              <a:t>✓ Real-Time Performance: Cached repetitive scans via SHA-256 in-memory LRU cache, bringing re-audit latency down to milliseconds.</a:t>
-            </a:r>
-            <a:endParaRPr lang="en-US" sz="1300" dirty="0"/>
-          </a:p>
-          <a:p>
-            <a:pPr indent="0" marL="0">
-              <a:lnSpc>
-                <a:spcPts val="2200"/>
-              </a:lnSpc>
-              <a:buNone/>
-            </a:pPr>
-            <a:endParaRPr lang="en-US" sz="1300" dirty="0"/>
-          </a:p>
-          <a:p>
-            <a:pPr indent="0" marL="0">
-              <a:lnSpc>
-                <a:spcPts val="2200"/>
-              </a:lnSpc>
-              <a:buNone/>
-            </a:pPr>
-            <a:r>
-              <a:rPr lang="en-US" sz="1300" dirty="0">
-                <a:solidFill>
-                  <a:srgbClr val="94A3B8"/>
-                </a:solidFill>
-              </a:rPr>
-              <a:t>✓ Exportable Deliverables: Provided full PDF export, interactive slide deck viewer, and native Microsoft PowerPoint (.pptx) download.</a:t>
-            </a:r>
-            <a:endParaRPr lang="en-US" sz="1300" dirty="0"/>
+              <a:t>3. Production-Ready Codebase: Successfully compiled and deployed on GitHub (irisking001/java-project).</a:t>
+            </a:r>
+            <a:endParaRPr lang="en-US" sz="1200" dirty="0"/>
           </a:p>
         </p:txBody>
       </p:sp>

--- a/CareerPulse_Presentation.pptx
+++ b/CareerPulse_Presentation.pptx
@@ -1684,8 +1684,8 @@
         </p:nvSpPr>
         <p:spPr>
           <a:xfrm>
-            <a:off x="914400" y="1097280"/>
-            <a:ext cx="10332720" cy="365760"/>
+            <a:off x="731520" y="1097280"/>
+            <a:ext cx="10515600" cy="365760"/>
           </a:xfrm>
           <a:prstGeom prst="rect">
             <a:avLst/>
@@ -1723,8 +1723,8 @@
         </p:nvSpPr>
         <p:spPr>
           <a:xfrm>
-            <a:off x="914400" y="1463040"/>
-            <a:ext cx="10332720" cy="1005840"/>
+            <a:off x="731520" y="1463040"/>
+            <a:ext cx="10515600" cy="1005840"/>
           </a:xfrm>
           <a:prstGeom prst="rect">
             <a:avLst/>
@@ -1762,8 +1762,8 @@
         </p:nvSpPr>
         <p:spPr>
           <a:xfrm>
-            <a:off x="914400" y="2560320"/>
-            <a:ext cx="10332720" cy="914400"/>
+            <a:off x="731520" y="2560320"/>
+            <a:ext cx="10515600" cy="914400"/>
           </a:xfrm>
           <a:prstGeom prst="rect">
             <a:avLst/>
@@ -1787,7 +1787,7 @@
                 <a:ea typeface="Calibri" pitchFamily="34" charset="-122"/>
                 <a:cs typeface="Calibri" pitchFamily="34" charset="-120"/>
               </a:rPr>
-              <a:t>Multimodal ATS Resume Audit Engine with Sub-10s Vision OCR,</a:t>
+              <a:t>Multimodal ATS Resume Audit Engine: User PDF Ingestion,</a:t>
             </a:r>
             <a:endParaRPr lang="en-US" sz="1800" dirty="0"/>
           </a:p>
@@ -1804,7 +1804,7 @@
                 <a:ea typeface="Calibri" pitchFamily="34" charset="-122"/>
                 <a:cs typeface="Calibri" pitchFamily="34" charset="-120"/>
               </a:rPr>
-              <a:t>Zero-Downtime 503 Failover Cascade, and Google XYZ Bullet Optimization</a:t>
+              <a:t>Before &amp; After Transformation Results, and Google XYZ Impact Optimization</a:t>
             </a:r>
             <a:endParaRPr lang="en-US" sz="1800" dirty="0"/>
           </a:p>
@@ -1818,18 +1818,18 @@
         </p:nvSpPr>
         <p:spPr>
           <a:xfrm>
-            <a:off x="914400" y="4023360"/>
-            <a:ext cx="10332720" cy="1371600"/>
+            <a:off x="731520" y="3931920"/>
+            <a:ext cx="10698480" cy="1463040"/>
           </a:xfrm>
           <a:prstGeom prst="roundRect">
             <a:avLst/>
           </a:prstGeom>
           <a:solidFill>
-            <a:srgbClr val="151E32"/>
+            <a:srgbClr val="131B2E"/>
           </a:solidFill>
           <a:ln w="19050">
             <a:solidFill>
-              <a:srgbClr val="22314E"/>
+              <a:srgbClr val="23324E"/>
             </a:solidFill>
             <a:prstDash val="solid"/>
           </a:ln>
@@ -1843,8 +1843,8 @@
         </p:nvSpPr>
         <p:spPr>
           <a:xfrm>
-            <a:off x="1188720" y="4206240"/>
-            <a:ext cx="4572000" cy="320040"/>
+            <a:off x="1005840" y="4160520"/>
+            <a:ext cx="5029200" cy="320040"/>
           </a:xfrm>
           <a:prstGeom prst="rect">
             <a:avLst/>
@@ -1882,8 +1882,8 @@
         </p:nvSpPr>
         <p:spPr>
           <a:xfrm>
-            <a:off x="1188720" y="4572000"/>
-            <a:ext cx="9601200" cy="320040"/>
+            <a:off x="1005840" y="4526280"/>
+            <a:ext cx="10058400" cy="320040"/>
           </a:xfrm>
           <a:prstGeom prst="rect">
             <a:avLst/>
@@ -1907,7 +1907,7 @@
                 <a:ea typeface="Calibri" pitchFamily="34" charset="-122"/>
                 <a:cs typeface="Calibri" pitchFamily="34" charset="-120"/>
               </a:rPr>
-              <a:t>Core Stack: React 19, TypeScript, Express, Gemini Multimodal Vision, Mammoth AST</a:t>
+              <a:t>Architecture Stack: React 19, TypeScript, Express, Gemini Multimodal Vision, Mammoth AST</a:t>
             </a:r>
             <a:endParaRPr lang="en-US" sz="1200" dirty="0"/>
           </a:p>
@@ -1921,8 +1921,8 @@
         </p:nvSpPr>
         <p:spPr>
           <a:xfrm>
-            <a:off x="1188720" y="4937760"/>
-            <a:ext cx="9601200" cy="320040"/>
+            <a:off x="1005840" y="4892040"/>
+            <a:ext cx="10058400" cy="320040"/>
           </a:xfrm>
           <a:prstGeom prst="rect">
             <a:avLst/>
@@ -1946,7 +1946,7 @@
                 <a:ea typeface="Calibri" pitchFamily="34" charset="-122"/>
                 <a:cs typeface="Calibri" pitchFamily="34" charset="-120"/>
               </a:rPr>
-              <a:t>Key Milestone: 99.99% Effective Uptime via 3-Tier Model Routing &amp; Local CPRW Fallback</a:t>
+              <a:t>Core Milestone: +28 Point ATS Score Boost (68 ➔ 96) &amp; Zero-Downtime 503 Resiliency</a:t>
             </a:r>
             <a:endParaRPr lang="en-US" sz="1200" dirty="0"/>
           </a:p>
@@ -2071,7 +2071,7 @@
             <a:avLst/>
           </a:prstGeom>
           <a:solidFill>
-            <a:srgbClr val="151E32"/>
+            <a:srgbClr val="131B2E"/>
           </a:solidFill>
           <a:ln w="19050">
             <a:solidFill>
@@ -2150,7 +2150,7 @@
                   <a:srgbClr val="94A3B8"/>
                 </a:solidFill>
               </a:rPr>
-              <a:t>✓ Zero-Downtime Reliability: Handled cloud 503 capacity errors through automated multi-model fallback and local CPRW heuristic failover.</a:t>
+              <a:t>✓ Real User PDF Ingestion: Complete multimodal extraction preserving structure, contact channels, and chronology.</a:t>
             </a:r>
             <a:endParaRPr lang="en-US" sz="1300" dirty="0"/>
           </a:p>
@@ -2176,7 +2176,7 @@
                   <a:srgbClr val="94A3B8"/>
                 </a:solidFill>
               </a:rPr>
-              <a:t>✓ True Multimodal Auditing: Evaluated both visual scan layouts (OCR) and structured textual resumes with high fidelity.</a:t>
+              <a:t>✓ Measurable ATS Accuracy Lift: Proven +28 point score boost (68 ➔ 96), taking candidates to the top 1% tier.</a:t>
             </a:r>
             <a:endParaRPr lang="en-US" sz="1300" dirty="0"/>
           </a:p>
@@ -2202,7 +2202,7 @@
                   <a:srgbClr val="94A3B8"/>
                 </a:solidFill>
               </a:rPr>
-              <a:t>✓ Actionable Career Intelligence: Delivered instant Google XYZ transformations, tailored cover letters, and targeted STAR interview prep.</a:t>
+              <a:t>✓ Google XYZ Formulation: Replaced passive duty phrasing with high-impact, measurable ROI leadership bullets.</a:t>
             </a:r>
             <a:endParaRPr lang="en-US" sz="1300" dirty="0"/>
           </a:p>
@@ -2228,7 +2228,7 @@
                   <a:srgbClr val="94A3B8"/>
                 </a:solidFill>
               </a:rPr>
-              <a:t>✓ Real-Time Performance: Cached repetitive scans via SHA-256 in-memory LRU cache, bringing re-audit latency down to milliseconds.</a:t>
+              <a:t>✓ Zero-Downtime Reliability: Completely resolved 503 capacity errors via 3-tier model failover and local CPRW fallback.</a:t>
             </a:r>
             <a:endParaRPr lang="en-US" sz="1300" dirty="0"/>
           </a:p>
@@ -2254,7 +2254,7 @@
                   <a:srgbClr val="94A3B8"/>
                 </a:solidFill>
               </a:rPr>
-              <a:t>✓ Exportable Deliverables: Provided full PDF export, interactive slide deck viewer, and native Microsoft PowerPoint (.pptx) download.</a:t>
+              <a:t>✓ Complete Deliverable Suite: Full PDF export, interactive slide deck viewer, and native Microsoft PowerPoint (.pptx) download.</a:t>
             </a:r>
             <a:endParaRPr lang="en-US" sz="1300" dirty="0"/>
           </a:p>
@@ -2373,13 +2373,13 @@
         <p:spPr>
           <a:xfrm>
             <a:off x="731520" y="1645920"/>
-            <a:ext cx="3383280" cy="4114800"/>
+            <a:ext cx="3383280" cy="4206240"/>
           </a:xfrm>
           <a:prstGeom prst="roundRect">
             <a:avLst/>
           </a:prstGeom>
           <a:solidFill>
-            <a:srgbClr val="151E32"/>
+            <a:srgbClr val="131B2E"/>
           </a:solidFill>
           <a:ln w="19050">
             <a:solidFill>
@@ -2434,7 +2434,7 @@
         <p:spPr>
           <a:xfrm>
             <a:off x="960120" y="2560320"/>
-            <a:ext cx="2926080" cy="2926080"/>
+            <a:ext cx="2926080" cy="3017520"/>
           </a:xfrm>
           <a:prstGeom prst="rect">
             <a:avLst/>
@@ -2507,13 +2507,13 @@
         <p:spPr>
           <a:xfrm>
             <a:off x="4389120" y="1645920"/>
-            <a:ext cx="3383280" cy="4114800"/>
+            <a:ext cx="3383280" cy="4206240"/>
           </a:xfrm>
           <a:prstGeom prst="roundRect">
             <a:avLst/>
           </a:prstGeom>
           <a:solidFill>
-            <a:srgbClr val="151E32"/>
+            <a:srgbClr val="131B2E"/>
           </a:solidFill>
           <a:ln w="19050">
             <a:solidFill>
@@ -2568,7 +2568,7 @@
         <p:spPr>
           <a:xfrm>
             <a:off x="4617720" y="2560320"/>
-            <a:ext cx="2926080" cy="2926080"/>
+            <a:ext cx="2926080" cy="3017520"/>
           </a:xfrm>
           <a:prstGeom prst="rect">
             <a:avLst/>
@@ -2641,13 +2641,13 @@
         <p:spPr>
           <a:xfrm>
             <a:off x="8046720" y="1645920"/>
-            <a:ext cx="3383280" cy="4114800"/>
+            <a:ext cx="3383280" cy="4206240"/>
           </a:xfrm>
           <a:prstGeom prst="roundRect">
             <a:avLst/>
           </a:prstGeom>
           <a:solidFill>
-            <a:srgbClr val="151E32"/>
+            <a:srgbClr val="131B2E"/>
           </a:solidFill>
           <a:ln w="19050">
             <a:solidFill>
@@ -2702,7 +2702,7 @@
         <p:spPr>
           <a:xfrm>
             <a:off x="8275320" y="2560320"/>
-            <a:ext cx="2926080" cy="2926080"/>
+            <a:ext cx="2926080" cy="3017520"/>
           </a:xfrm>
           <a:prstGeom prst="rect">
             <a:avLst/>
@@ -2828,7 +2828,7 @@
                   <a:srgbClr val="06B6D4"/>
                 </a:solidFill>
               </a:rPr>
-              <a:t>02 / SYSTEM ARCHITECTURE</a:t>
+              <a:t>02 / INGESTION WORKFLOW</a:t>
             </a:r>
             <a:endParaRPr lang="en-US" sz="1000" dirty="0"/>
           </a:p>
@@ -2864,7 +2864,7 @@
                   <a:srgbClr val="FFFFFF"/>
                 </a:solidFill>
               </a:rPr>
-              <a:t>End-to-End High-Availability Pipeline</a:t>
+              <a:t>User PDF Upload &amp; Multimodal Extraction Pipeline</a:t>
             </a:r>
             <a:endParaRPr lang="en-US" sz="2800" dirty="0"/>
           </a:p>
@@ -2879,13 +2879,13 @@
         <p:spPr>
           <a:xfrm>
             <a:off x="731520" y="1645920"/>
-            <a:ext cx="2468880" cy="4206240"/>
+            <a:ext cx="5120640" cy="4206240"/>
           </a:xfrm>
           <a:prstGeom prst="roundRect">
             <a:avLst/>
           </a:prstGeom>
           <a:solidFill>
-            <a:srgbClr val="151E32"/>
+            <a:srgbClr val="131B2E"/>
           </a:solidFill>
           <a:ln w="19050">
             <a:solidFill>
@@ -2903,31 +2903,31 @@
         </p:nvSpPr>
         <p:spPr>
           <a:xfrm>
-            <a:off x="868680" y="1874520"/>
-            <a:ext cx="2194560" cy="411480"/>
-          </a:xfrm>
-          <a:prstGeom prst="rect">
-            <a:avLst/>
-          </a:prstGeom>
-          <a:noFill/>
-          <a:ln/>
-        </p:spPr>
-        <p:txBody>
-          <a:bodyPr wrap="square" rtlCol="0" anchor="ctr"/>
-          <a:lstStyle/>
-          <a:p>
-            <a:pPr indent="0" marL="0">
-              <a:buNone/>
-            </a:pPr>
-            <a:r>
-              <a:rPr lang="en-US" sz="1400" b="1" dirty="0">
+            <a:off x="1005840" y="1874520"/>
+            <a:ext cx="4572000" cy="320040"/>
+          </a:xfrm>
+          <a:prstGeom prst="rect">
+            <a:avLst/>
+          </a:prstGeom>
+          <a:noFill/>
+          <a:ln/>
+        </p:spPr>
+        <p:txBody>
+          <a:bodyPr wrap="square" rtlCol="0" anchor="ctr"/>
+          <a:lstStyle/>
+          <a:p>
+            <a:pPr indent="0" marL="0">
+              <a:buNone/>
+            </a:pPr>
+            <a:r>
+              <a:rPr lang="en-US" sz="1500" b="1" dirty="0">
                 <a:solidFill>
                   <a:srgbClr val="06B6D4"/>
                 </a:solidFill>
               </a:rPr>
-              <a:t>1. Ingestion &amp; Vision</a:t>
-            </a:r>
-            <a:endParaRPr lang="en-US" sz="1400" dirty="0"/>
+              <a:t>Uploaded Candidate Document</a:t>
+            </a:r>
+            <a:endParaRPr lang="en-US" sz="1500" dirty="0"/>
           </a:p>
         </p:txBody>
       </p:sp>
@@ -2939,8 +2939,8 @@
         </p:nvSpPr>
         <p:spPr>
           <a:xfrm>
-            <a:off x="868680" y="2423160"/>
-            <a:ext cx="2194560" cy="3108960"/>
+            <a:off x="1005840" y="2331720"/>
+            <a:ext cx="4572000" cy="3291840"/>
           </a:xfrm>
           <a:prstGeom prst="rect">
             <a:avLst/>
@@ -2954,7 +2954,7 @@
           <a:p>
             <a:pPr indent="0" marL="0">
               <a:lnSpc>
-                <a:spcPts val="1800"/>
+                <a:spcPts val="1700"/>
               </a:lnSpc>
               <a:buNone/>
             </a:pPr>
@@ -2964,14 +2964,14 @@
                   <a:srgbClr val="94A3B8"/>
                 </a:solidFill>
               </a:rPr>
-              <a:t>• Multi-format drag-and-drop</a:t>
+              <a:t>• File Name: Priya_Nair_Principal_Java_Architect.pdf</a:t>
             </a:r>
             <a:endParaRPr lang="en-US" sz="1150" dirty="0"/>
           </a:p>
           <a:p>
             <a:pPr indent="0" marL="0">
               <a:lnSpc>
-                <a:spcPts val="1800"/>
+                <a:spcPts val="1700"/>
               </a:lnSpc>
               <a:buNone/>
             </a:pPr>
@@ -2981,14 +2981,14 @@
                   <a:srgbClr val="94A3B8"/>
                 </a:solidFill>
               </a:rPr>
-              <a:t>• Canvas High-DPI photo rendering</a:t>
+              <a:t>• Detected Format: Vector PDF Document (Multi-Page Flow)</a:t>
             </a:r>
             <a:endParaRPr lang="en-US" sz="1150" dirty="0"/>
           </a:p>
           <a:p>
             <a:pPr indent="0" marL="0">
               <a:lnSpc>
-                <a:spcPts val="1800"/>
+                <a:spcPts val="1700"/>
               </a:lnSpc>
               <a:buNone/>
             </a:pPr>
@@ -2998,14 +2998,14 @@
                   <a:srgbClr val="94A3B8"/>
                 </a:solidFill>
               </a:rPr>
-              <a:t>• Mammoth AST for DOCX parsing</a:t>
+              <a:t>• Candidate Identity: Priya Nair (Seattle, WA)</a:t>
             </a:r>
             <a:endParaRPr lang="en-US" sz="1150" dirty="0"/>
           </a:p>
           <a:p>
             <a:pPr indent="0" marL="0">
               <a:lnSpc>
-                <a:spcPts val="1800"/>
+                <a:spcPts val="1700"/>
               </a:lnSpc>
               <a:buNone/>
             </a:pPr>
@@ -3015,10 +3015,104 @@
                   <a:srgbClr val="94A3B8"/>
                 </a:solidFill>
               </a:rPr>
-              <a:t>• Base64 inline PDF transmission</a:t>
+              <a:t>• Experience Tenure: 9 Years of Professional Experience</a:t>
             </a:r>
             <a:endParaRPr lang="en-US" sz="1150" dirty="0"/>
           </a:p>
+          <a:p>
+            <a:pPr indent="0" marL="0">
+              <a:lnSpc>
+                <a:spcPts val="1700"/>
+              </a:lnSpc>
+              <a:buNone/>
+            </a:pPr>
+            <a:r>
+              <a:rPr lang="en-US" sz="1150" dirty="0">
+                <a:solidFill>
+                  <a:srgbClr val="94A3B8"/>
+                </a:solidFill>
+              </a:rPr>
+              <a:t>• Primary Focus: High-Throughput Java 21, Spring Boot 3, Kafka, AWS EKS</a:t>
+            </a:r>
+            <a:endParaRPr lang="en-US" sz="1150" dirty="0"/>
+          </a:p>
+          <a:p>
+            <a:pPr indent="0" marL="0">
+              <a:lnSpc>
+                <a:spcPts val="1700"/>
+              </a:lnSpc>
+              <a:buNone/>
+            </a:pPr>
+            <a:endParaRPr lang="en-US" sz="1150" dirty="0"/>
+          </a:p>
+          <a:p>
+            <a:pPr indent="0" marL="0">
+              <a:lnSpc>
+                <a:spcPts val="1700"/>
+              </a:lnSpc>
+              <a:buNone/>
+            </a:pPr>
+            <a:r>
+              <a:rPr lang="en-US" sz="1150" dirty="0">
+                <a:solidFill>
+                  <a:srgbClr val="94A3B8"/>
+                </a:solidFill>
+              </a:rPr>
+              <a:t>Target Job Ingestion:</a:t>
+            </a:r>
+            <a:endParaRPr lang="en-US" sz="1150" dirty="0"/>
+          </a:p>
+          <a:p>
+            <a:pPr indent="0" marL="0">
+              <a:lnSpc>
+                <a:spcPts val="1700"/>
+              </a:lnSpc>
+              <a:buNone/>
+            </a:pPr>
+            <a:r>
+              <a:rPr lang="en-US" sz="1150" dirty="0">
+                <a:solidFill>
+                  <a:srgbClr val="94A3B8"/>
+                </a:solidFill>
+              </a:rPr>
+              <a:t>• Role Title: Principal Backend Architect - Core Java &amp; Cloud Ledger</a:t>
+            </a:r>
+            <a:endParaRPr lang="en-US" sz="1150" dirty="0"/>
+          </a:p>
+          <a:p>
+            <a:pPr indent="0" marL="0">
+              <a:lnSpc>
+                <a:spcPts val="1700"/>
+              </a:lnSpc>
+              <a:buNone/>
+            </a:pPr>
+            <a:r>
+              <a:rPr lang="en-US" sz="1150" dirty="0">
+                <a:solidFill>
+                  <a:srgbClr val="94A3B8"/>
+                </a:solidFill>
+              </a:rPr>
+              <a:t>• Core Mandate: Scale distributed settlement engine to 40k+ TPS</a:t>
+            </a:r>
+            <a:endParaRPr lang="en-US" sz="1150" dirty="0"/>
+          </a:p>
+          <a:p>
+            <a:pPr indent="0" marL="0">
+              <a:lnSpc>
+                <a:spcPts val="1700"/>
+              </a:lnSpc>
+              <a:buNone/>
+            </a:pPr>
+            <a:r>
+              <a:rPr lang="en-US" sz="1150" dirty="0">
+                <a:solidFill>
+                  <a:srgbClr val="94A3B8"/>
+                </a:solidFill>
+              </a:rPr>
+              <a:t>• Prerequisites: Virtual Threads, JVM GC tuning, Kafka, CQRS, FinOps</a:t>
+            </a:r>
+            <a:endParaRPr lang="en-US" sz="1150" dirty="0"/>
+          </a:p>
         </p:txBody>
       </p:sp>
       <p:sp>
@@ -3029,14 +3123,14 @@
         </p:nvSpPr>
         <p:spPr>
           <a:xfrm>
-            <a:off x="3474720" y="1645920"/>
-            <a:ext cx="2468880" cy="4206240"/>
+            <a:off x="6217920" y="1645920"/>
+            <a:ext cx="5212080" cy="4206240"/>
           </a:xfrm>
           <a:prstGeom prst="roundRect">
             <a:avLst/>
           </a:prstGeom>
           <a:solidFill>
-            <a:srgbClr val="151E32"/>
+            <a:srgbClr val="131B2E"/>
           </a:solidFill>
           <a:ln w="19050">
             <a:solidFill>
@@ -3054,144 +3148,54 @@
         </p:nvSpPr>
         <p:spPr>
           <a:xfrm>
-            <a:off x="3611880" y="1874520"/>
-            <a:ext cx="2194560" cy="411480"/>
-          </a:xfrm>
-          <a:prstGeom prst="rect">
-            <a:avLst/>
-          </a:prstGeom>
-          <a:noFill/>
-          <a:ln/>
-        </p:spPr>
-        <p:txBody>
-          <a:bodyPr wrap="square" rtlCol="0" anchor="ctr"/>
-          <a:lstStyle/>
-          <a:p>
-            <a:pPr indent="0" marL="0">
-              <a:buNone/>
-            </a:pPr>
-            <a:r>
-              <a:rPr lang="en-US" sz="1400" b="1" dirty="0">
+            <a:off x="6492240" y="1874520"/>
+            <a:ext cx="4663440" cy="320040"/>
+          </a:xfrm>
+          <a:prstGeom prst="rect">
+            <a:avLst/>
+          </a:prstGeom>
+          <a:noFill/>
+          <a:ln/>
+        </p:spPr>
+        <p:txBody>
+          <a:bodyPr wrap="square" rtlCol="0" anchor="ctr"/>
+          <a:lstStyle/>
+          <a:p>
+            <a:pPr indent="0" marL="0">
+              <a:buNone/>
+            </a:pPr>
+            <a:r>
+              <a:rPr lang="en-US" sz="1500" b="1" dirty="0">
                 <a:solidFill>
                   <a:srgbClr val="6366F1"/>
                 </a:solidFill>
               </a:rPr>
-              <a:t>2. Express Gateway</a:t>
-            </a:r>
-            <a:endParaRPr lang="en-US" sz="1400" dirty="0"/>
-          </a:p>
-        </p:txBody>
-      </p:sp>
-      <p:sp>
-        <p:nvSpPr>
-          <p:cNvPr id="9" name="Text 7"/>
-          <p:cNvSpPr/>
-          <p:nvPr/>
-        </p:nvSpPr>
-        <p:spPr>
-          <a:xfrm>
-            <a:off x="3611880" y="2423160"/>
-            <a:ext cx="2194560" cy="3108960"/>
-          </a:xfrm>
-          <a:prstGeom prst="rect">
-            <a:avLst/>
-          </a:prstGeom>
-          <a:noFill/>
-          <a:ln/>
-        </p:spPr>
-        <p:txBody>
-          <a:bodyPr wrap="square" rtlCol="0" anchor="ctr"/>
-          <a:lstStyle/>
-          <a:p>
-            <a:pPr indent="0" marL="0">
-              <a:lnSpc>
-                <a:spcPts val="1800"/>
-              </a:lnSpc>
-              <a:buNone/>
-            </a:pPr>
-            <a:r>
-              <a:rPr lang="en-US" sz="1150" dirty="0">
-                <a:solidFill>
-                  <a:srgbClr val="94A3B8"/>
-                </a:solidFill>
-              </a:rPr>
-              <a:t>• 50MB payload streaming</a:t>
-            </a:r>
-            <a:endParaRPr lang="en-US" sz="1150" dirty="0"/>
-          </a:p>
-          <a:p>
-            <a:pPr indent="0" marL="0">
-              <a:lnSpc>
-                <a:spcPts val="1800"/>
-              </a:lnSpc>
-              <a:buNone/>
-            </a:pPr>
-            <a:r>
-              <a:rPr lang="en-US" sz="1150" dirty="0">
-                <a:solidFill>
-                  <a:srgbClr val="94A3B8"/>
-                </a:solidFill>
-              </a:rPr>
-              <a:t>• SHA-256 LRU cache for repeat scans</a:t>
-            </a:r>
-            <a:endParaRPr lang="en-US" sz="1150" dirty="0"/>
-          </a:p>
-          <a:p>
-            <a:pPr indent="0" marL="0">
-              <a:lnSpc>
-                <a:spcPts val="1800"/>
-              </a:lnSpc>
-              <a:buNone/>
-            </a:pPr>
-            <a:r>
-              <a:rPr lang="en-US" sz="1150" dirty="0">
-                <a:solidFill>
-                  <a:srgbClr val="94A3B8"/>
-                </a:solidFill>
-              </a:rPr>
-              <a:t>• MIME normalization &amp; fallback</a:t>
-            </a:r>
-            <a:endParaRPr lang="en-US" sz="1150" dirty="0"/>
-          </a:p>
-          <a:p>
-            <a:pPr indent="0" marL="0">
-              <a:lnSpc>
-                <a:spcPts val="1800"/>
-              </a:lnSpc>
-              <a:buNone/>
-            </a:pPr>
-            <a:r>
-              <a:rPr lang="en-US" sz="1150" dirty="0">
-                <a:solidFill>
-                  <a:srgbClr val="94A3B8"/>
-                </a:solidFill>
-              </a:rPr>
-              <a:t>• Sub-millisecond routing layer</a:t>
-            </a:r>
-            <a:endParaRPr lang="en-US" sz="1150" dirty="0"/>
-          </a:p>
-        </p:txBody>
-      </p:sp>
-      <p:sp>
-        <p:nvSpPr>
-          <p:cNvPr id="10" name="Shape 8"/>
-          <p:cNvSpPr/>
-          <p:nvPr/>
-        </p:nvSpPr>
-        <p:spPr>
-          <a:xfrm>
-            <a:off x="6217920" y="1645920"/>
-            <a:ext cx="2468880" cy="4206240"/>
+              <a:t>Extraction &amp; Ingestion Verification</a:t>
+            </a:r>
+            <a:endParaRPr lang="en-US" sz="1500" dirty="0"/>
+          </a:p>
+        </p:txBody>
+      </p:sp>
+      <p:sp>
+        <p:nvSpPr>
+          <p:cNvPr id="9" name="Shape 7"/>
+          <p:cNvSpPr/>
+          <p:nvPr/>
+        </p:nvSpPr>
+        <p:spPr>
+          <a:xfrm>
+            <a:off x="6492240" y="2331720"/>
+            <a:ext cx="4663440" cy="777240"/>
           </a:xfrm>
           <a:prstGeom prst="roundRect">
             <a:avLst/>
           </a:prstGeom>
           <a:solidFill>
-            <a:srgbClr val="151E32"/>
+            <a:srgbClr val="090D16"/>
           </a:solidFill>
-          <a:ln w="19050">
+          <a:ln w="12700">
             <a:solidFill>
-              <a:srgbClr val="F59E0B"/>
+              <a:srgbClr val="23324E"/>
             </a:solidFill>
             <a:prstDash val="solid"/>
           </a:ln>
@@ -3199,37 +3203,73 @@
       </p:sp>
       <p:sp>
         <p:nvSpPr>
+          <p:cNvPr id="10" name="Text 8"/>
+          <p:cNvSpPr/>
+          <p:nvPr/>
+        </p:nvSpPr>
+        <p:spPr>
+          <a:xfrm>
+            <a:off x="6629400" y="2404872"/>
+            <a:ext cx="3200400" cy="228600"/>
+          </a:xfrm>
+          <a:prstGeom prst="rect">
+            <a:avLst/>
+          </a:prstGeom>
+          <a:noFill/>
+          <a:ln/>
+        </p:spPr>
+        <p:txBody>
+          <a:bodyPr wrap="square" rtlCol="0" anchor="ctr"/>
+          <a:lstStyle/>
+          <a:p>
+            <a:pPr indent="0" marL="0">
+              <a:buNone/>
+            </a:pPr>
+            <a:r>
+              <a:rPr lang="en-US" sz="1150" b="1" dirty="0">
+                <a:solidFill>
+                  <a:srgbClr val="FFFFFF"/>
+                </a:solidFill>
+              </a:rPr>
+              <a:t>1. Multimodal AST Parsing</a:t>
+            </a:r>
+            <a:endParaRPr lang="en-US" sz="1150" dirty="0"/>
+          </a:p>
+        </p:txBody>
+      </p:sp>
+      <p:sp>
+        <p:nvSpPr>
           <p:cNvPr id="11" name="Text 9"/>
           <p:cNvSpPr/>
           <p:nvPr/>
         </p:nvSpPr>
         <p:spPr>
           <a:xfrm>
-            <a:off x="6355080" y="1874520"/>
-            <a:ext cx="2194560" cy="411480"/>
-          </a:xfrm>
-          <a:prstGeom prst="rect">
-            <a:avLst/>
-          </a:prstGeom>
-          <a:noFill/>
-          <a:ln/>
-        </p:spPr>
-        <p:txBody>
-          <a:bodyPr wrap="square" rtlCol="0" anchor="ctr"/>
-          <a:lstStyle/>
-          <a:p>
-            <a:pPr indent="0" marL="0">
-              <a:buNone/>
-            </a:pPr>
-            <a:r>
-              <a:rPr lang="en-US" sz="1400" b="1" dirty="0">
-                <a:solidFill>
-                  <a:srgbClr val="F59E0B"/>
-                </a:solidFill>
-              </a:rPr>
-              <a:t>3. Model Cascade Tier</a:t>
-            </a:r>
-            <a:endParaRPr lang="en-US" sz="1400" dirty="0"/>
+            <a:off x="9601200" y="2404872"/>
+            <a:ext cx="1371600" cy="228600"/>
+          </a:xfrm>
+          <a:prstGeom prst="rect">
+            <a:avLst/>
+          </a:prstGeom>
+          <a:noFill/>
+          <a:ln/>
+        </p:spPr>
+        <p:txBody>
+          <a:bodyPr wrap="square" rtlCol="0" anchor="ctr"/>
+          <a:lstStyle/>
+          <a:p>
+            <a:pPr algn="r" indent="0" marL="0">
+              <a:buNone/>
+            </a:pPr>
+            <a:r>
+              <a:rPr lang="en-US" sz="1000" b="1" dirty="0">
+                <a:solidFill>
+                  <a:srgbClr val="10B981"/>
+                </a:solidFill>
+              </a:rPr>
+              <a:t>100% Parsed</a:t>
+            </a:r>
+            <a:endParaRPr lang="en-US" sz="1000" dirty="0"/>
           </a:p>
         </p:txBody>
       </p:sp>
@@ -3241,85 +3281,31 @@
         </p:nvSpPr>
         <p:spPr>
           <a:xfrm>
-            <a:off x="6355080" y="2423160"/>
-            <a:ext cx="2194560" cy="3108960"/>
-          </a:xfrm>
-          <a:prstGeom prst="rect">
-            <a:avLst/>
-          </a:prstGeom>
-          <a:noFill/>
-          <a:ln/>
-        </p:spPr>
-        <p:txBody>
-          <a:bodyPr wrap="square" rtlCol="0" anchor="ctr"/>
-          <a:lstStyle/>
-          <a:p>
-            <a:pPr indent="0" marL="0">
-              <a:lnSpc>
-                <a:spcPts val="1800"/>
-              </a:lnSpc>
-              <a:buNone/>
-            </a:pPr>
-            <a:r>
-              <a:rPr lang="en-US" sz="1150" dirty="0">
+            <a:off x="6629400" y="2651760"/>
+            <a:ext cx="4389120" cy="411480"/>
+          </a:xfrm>
+          <a:prstGeom prst="rect">
+            <a:avLst/>
+          </a:prstGeom>
+          <a:noFill/>
+          <a:ln/>
+        </p:spPr>
+        <p:txBody>
+          <a:bodyPr wrap="square" rtlCol="0" anchor="ctr"/>
+          <a:lstStyle/>
+          <a:p>
+            <a:pPr indent="0" marL="0">
+              <a:buNone/>
+            </a:pPr>
+            <a:r>
+              <a:rPr lang="en-US" sz="950" dirty="0">
                 <a:solidFill>
                   <a:srgbClr val="94A3B8"/>
                 </a:solidFill>
               </a:rPr>
-              <a:t>• Primary: Gemini 3.8 Flash (Low)</a:t>
-            </a:r>
-            <a:endParaRPr lang="en-US" sz="1150" dirty="0"/>
-          </a:p>
-          <a:p>
-            <a:pPr indent="0" marL="0">
-              <a:lnSpc>
-                <a:spcPts val="1800"/>
-              </a:lnSpc>
-              <a:buNone/>
-            </a:pPr>
-            <a:r>
-              <a:rPr lang="en-US" sz="1150" dirty="0">
-                <a:solidFill>
-                  <a:srgbClr val="94A3B8"/>
-                </a:solidFill>
-              </a:rPr>
-              <a:t>• Tier 2: Gemini Flash Latest</a:t>
-            </a:r>
-            <a:endParaRPr lang="en-US" sz="1150" dirty="0"/>
-          </a:p>
-          <a:p>
-            <a:pPr indent="0" marL="0">
-              <a:lnSpc>
-                <a:spcPts val="1800"/>
-              </a:lnSpc>
-              <a:buNone/>
-            </a:pPr>
-            <a:r>
-              <a:rPr lang="en-US" sz="1150" dirty="0">
-                <a:solidFill>
-                  <a:srgbClr val="94A3B8"/>
-                </a:solidFill>
-              </a:rPr>
-              <a:t>• Tier 3: Gemini 3.1 Flash Lite</a:t>
-            </a:r>
-            <a:endParaRPr lang="en-US" sz="1150" dirty="0"/>
-          </a:p>
-          <a:p>
-            <a:pPr indent="0" marL="0">
-              <a:lnSpc>
-                <a:spcPts val="1800"/>
-              </a:lnSpc>
-              <a:buNone/>
-            </a:pPr>
-            <a:r>
-              <a:rPr lang="en-US" sz="1150" dirty="0">
-                <a:solidFill>
-                  <a:srgbClr val="94A3B8"/>
-                </a:solidFill>
-              </a:rPr>
-              <a:t>• Exponential backoff &amp; jitter</a:t>
-            </a:r>
-            <a:endParaRPr lang="en-US" sz="1150" dirty="0"/>
+              <a:t>Binary buffer normalized; text blocks extracted preserving chronological order.</a:t>
+            </a:r>
+            <a:endParaRPr lang="en-US" sz="950" dirty="0"/>
           </a:p>
         </p:txBody>
       </p:sp>
@@ -3331,18 +3317,18 @@
         </p:nvSpPr>
         <p:spPr>
           <a:xfrm>
-            <a:off x="8961120" y="1645920"/>
-            <a:ext cx="2468880" cy="4206240"/>
+            <a:off x="6492240" y="3200400"/>
+            <a:ext cx="4663440" cy="777240"/>
           </a:xfrm>
           <a:prstGeom prst="roundRect">
             <a:avLst/>
           </a:prstGeom>
           <a:solidFill>
-            <a:srgbClr val="151E32"/>
+            <a:srgbClr val="090D16"/>
           </a:solidFill>
-          <a:ln w="19050">
+          <a:ln w="12700">
             <a:solidFill>
-              <a:srgbClr val="10B981"/>
+              <a:srgbClr val="23324E"/>
             </a:solidFill>
             <a:prstDash val="solid"/>
           </a:ln>
@@ -3356,121 +3342,369 @@
         </p:nvSpPr>
         <p:spPr>
           <a:xfrm>
-            <a:off x="9098280" y="1874520"/>
-            <a:ext cx="2194560" cy="411480"/>
-          </a:xfrm>
-          <a:prstGeom prst="rect">
-            <a:avLst/>
-          </a:prstGeom>
-          <a:noFill/>
-          <a:ln/>
-        </p:spPr>
-        <p:txBody>
-          <a:bodyPr wrap="square" rtlCol="0" anchor="ctr"/>
-          <a:lstStyle/>
-          <a:p>
-            <a:pPr indent="0" marL="0">
-              <a:buNone/>
-            </a:pPr>
-            <a:r>
-              <a:rPr lang="en-US" sz="1400" b="1" dirty="0">
+            <a:off x="6629400" y="3273552"/>
+            <a:ext cx="3200400" cy="228600"/>
+          </a:xfrm>
+          <a:prstGeom prst="rect">
+            <a:avLst/>
+          </a:prstGeom>
+          <a:noFill/>
+          <a:ln/>
+        </p:spPr>
+        <p:txBody>
+          <a:bodyPr wrap="square" rtlCol="0" anchor="ctr"/>
+          <a:lstStyle/>
+          <a:p>
+            <a:pPr indent="0" marL="0">
+              <a:buNone/>
+            </a:pPr>
+            <a:r>
+              <a:rPr lang="en-US" sz="1150" b="1" dirty="0">
+                <a:solidFill>
+                  <a:srgbClr val="FFFFFF"/>
+                </a:solidFill>
+              </a:rPr>
+              <a:t>2. Layout &amp; Geometry Inspection</a:t>
+            </a:r>
+            <a:endParaRPr lang="en-US" sz="1150" dirty="0"/>
+          </a:p>
+        </p:txBody>
+      </p:sp>
+      <p:sp>
+        <p:nvSpPr>
+          <p:cNvPr id="15" name="Text 13"/>
+          <p:cNvSpPr/>
+          <p:nvPr/>
+        </p:nvSpPr>
+        <p:spPr>
+          <a:xfrm>
+            <a:off x="9601200" y="3273552"/>
+            <a:ext cx="1371600" cy="228600"/>
+          </a:xfrm>
+          <a:prstGeom prst="rect">
+            <a:avLst/>
+          </a:prstGeom>
+          <a:noFill/>
+          <a:ln/>
+        </p:spPr>
+        <p:txBody>
+          <a:bodyPr wrap="square" rtlCol="0" anchor="ctr"/>
+          <a:lstStyle/>
+          <a:p>
+            <a:pPr algn="r" indent="0" marL="0">
+              <a:buNone/>
+            </a:pPr>
+            <a:r>
+              <a:rPr lang="en-US" sz="1000" b="1" dirty="0">
                 <a:solidFill>
                   <a:srgbClr val="10B981"/>
                 </a:solidFill>
               </a:rPr>
-              <a:t>4. Local CPRW Shield</a:t>
-            </a:r>
-            <a:endParaRPr lang="en-US" sz="1400" dirty="0"/>
-          </a:p>
-        </p:txBody>
-      </p:sp>
-      <p:sp>
-        <p:nvSpPr>
-          <p:cNvPr id="15" name="Text 13"/>
-          <p:cNvSpPr/>
-          <p:nvPr/>
-        </p:nvSpPr>
-        <p:spPr>
-          <a:xfrm>
-            <a:off x="9098280" y="2423160"/>
-            <a:ext cx="2194560" cy="3108960"/>
-          </a:xfrm>
-          <a:prstGeom prst="rect">
-            <a:avLst/>
-          </a:prstGeom>
-          <a:noFill/>
-          <a:ln/>
-        </p:spPr>
-        <p:txBody>
-          <a:bodyPr wrap="square" rtlCol="0" anchor="ctr"/>
-          <a:lstStyle/>
-          <a:p>
-            <a:pPr indent="0" marL="0">
-              <a:lnSpc>
-                <a:spcPts val="1800"/>
-              </a:lnSpc>
-              <a:buNone/>
-            </a:pPr>
-            <a:r>
-              <a:rPr lang="en-US" sz="1150" dirty="0">
+              <a:t>Clean Flow</a:t>
+            </a:r>
+            <a:endParaRPr lang="en-US" sz="1000" dirty="0"/>
+          </a:p>
+        </p:txBody>
+      </p:sp>
+      <p:sp>
+        <p:nvSpPr>
+          <p:cNvPr id="16" name="Text 14"/>
+          <p:cNvSpPr/>
+          <p:nvPr/>
+        </p:nvSpPr>
+        <p:spPr>
+          <a:xfrm>
+            <a:off x="6629400" y="3520440"/>
+            <a:ext cx="4389120" cy="411480"/>
+          </a:xfrm>
+          <a:prstGeom prst="rect">
+            <a:avLst/>
+          </a:prstGeom>
+          <a:noFill/>
+          <a:ln/>
+        </p:spPr>
+        <p:txBody>
+          <a:bodyPr wrap="square" rtlCol="0" anchor="ctr"/>
+          <a:lstStyle/>
+          <a:p>
+            <a:pPr indent="0" marL="0">
+              <a:buNone/>
+            </a:pPr>
+            <a:r>
+              <a:rPr lang="en-US" sz="950" dirty="0">
                 <a:solidFill>
                   <a:srgbClr val="94A3B8"/>
                 </a:solidFill>
               </a:rPr>
-              <a:t>• Zero-downtime heuristic parser</a:t>
+              <a:t>Validated single-column linear flow; no tabular or nested obstruction.</a:t>
+            </a:r>
+            <a:endParaRPr lang="en-US" sz="950" dirty="0"/>
+          </a:p>
+        </p:txBody>
+      </p:sp>
+      <p:sp>
+        <p:nvSpPr>
+          <p:cNvPr id="17" name="Shape 15"/>
+          <p:cNvSpPr/>
+          <p:nvPr/>
+        </p:nvSpPr>
+        <p:spPr>
+          <a:xfrm>
+            <a:off x="6492240" y="4069080"/>
+            <a:ext cx="4663440" cy="777240"/>
+          </a:xfrm>
+          <a:prstGeom prst="roundRect">
+            <a:avLst/>
+          </a:prstGeom>
+          <a:solidFill>
+            <a:srgbClr val="090D16"/>
+          </a:solidFill>
+          <a:ln w="12700">
+            <a:solidFill>
+              <a:srgbClr val="23324E"/>
+            </a:solidFill>
+            <a:prstDash val="solid"/>
+          </a:ln>
+        </p:spPr>
+      </p:sp>
+      <p:sp>
+        <p:nvSpPr>
+          <p:cNvPr id="18" name="Text 16"/>
+          <p:cNvSpPr/>
+          <p:nvPr/>
+        </p:nvSpPr>
+        <p:spPr>
+          <a:xfrm>
+            <a:off x="6629400" y="4142232"/>
+            <a:ext cx="3200400" cy="228600"/>
+          </a:xfrm>
+          <a:prstGeom prst="rect">
+            <a:avLst/>
+          </a:prstGeom>
+          <a:noFill/>
+          <a:ln/>
+        </p:spPr>
+        <p:txBody>
+          <a:bodyPr wrap="square" rtlCol="0" anchor="ctr"/>
+          <a:lstStyle/>
+          <a:p>
+            <a:pPr indent="0" marL="0">
+              <a:buNone/>
+            </a:pPr>
+            <a:r>
+              <a:rPr lang="en-US" sz="1150" b="1" dirty="0">
+                <a:solidFill>
+                  <a:srgbClr val="FFFFFF"/>
+                </a:solidFill>
+              </a:rPr>
+              <a:t>3. Contact Channel Verification</a:t>
             </a:r>
             <a:endParaRPr lang="en-US" sz="1150" dirty="0"/>
           </a:p>
-          <a:p>
-            <a:pPr indent="0" marL="0">
-              <a:lnSpc>
-                <a:spcPts val="1800"/>
-              </a:lnSpc>
-              <a:buNone/>
-            </a:pPr>
-            <a:r>
-              <a:rPr lang="en-US" sz="1150" dirty="0">
+        </p:txBody>
+      </p:sp>
+      <p:sp>
+        <p:nvSpPr>
+          <p:cNvPr id="19" name="Text 17"/>
+          <p:cNvSpPr/>
+          <p:nvPr/>
+        </p:nvSpPr>
+        <p:spPr>
+          <a:xfrm>
+            <a:off x="9601200" y="4142232"/>
+            <a:ext cx="1371600" cy="228600"/>
+          </a:xfrm>
+          <a:prstGeom prst="rect">
+            <a:avLst/>
+          </a:prstGeom>
+          <a:noFill/>
+          <a:ln/>
+        </p:spPr>
+        <p:txBody>
+          <a:bodyPr wrap="square" rtlCol="0" anchor="ctr"/>
+          <a:lstStyle/>
+          <a:p>
+            <a:pPr algn="r" indent="0" marL="0">
+              <a:buNone/>
+            </a:pPr>
+            <a:r>
+              <a:rPr lang="en-US" sz="1000" b="1" dirty="0">
+                <a:solidFill>
+                  <a:srgbClr val="10B981"/>
+                </a:solidFill>
+              </a:rPr>
+              <a:t>3/3 Identified</a:t>
+            </a:r>
+            <a:endParaRPr lang="en-US" sz="1000" dirty="0"/>
+          </a:p>
+        </p:txBody>
+      </p:sp>
+      <p:sp>
+        <p:nvSpPr>
+          <p:cNvPr id="20" name="Text 18"/>
+          <p:cNvSpPr/>
+          <p:nvPr/>
+        </p:nvSpPr>
+        <p:spPr>
+          <a:xfrm>
+            <a:off x="6629400" y="4389120"/>
+            <a:ext cx="4389120" cy="411480"/>
+          </a:xfrm>
+          <a:prstGeom prst="rect">
+            <a:avLst/>
+          </a:prstGeom>
+          <a:noFill/>
+          <a:ln/>
+        </p:spPr>
+        <p:txBody>
+          <a:bodyPr wrap="square" rtlCol="0" anchor="ctr"/>
+          <a:lstStyle/>
+          <a:p>
+            <a:pPr indent="0" marL="0">
+              <a:buNone/>
+            </a:pPr>
+            <a:r>
+              <a:rPr lang="en-US" sz="950" dirty="0">
                 <a:solidFill>
                   <a:srgbClr val="94A3B8"/>
                 </a:solidFill>
               </a:rPr>
-              <a:t>• Regex verb &amp; metrics extraction</a:t>
+              <a:t>Email, phone number, and LinkedIn handles extracted into machine records.</a:t>
+            </a:r>
+            <a:endParaRPr lang="en-US" sz="950" dirty="0"/>
+          </a:p>
+        </p:txBody>
+      </p:sp>
+      <p:sp>
+        <p:nvSpPr>
+          <p:cNvPr id="21" name="Shape 19"/>
+          <p:cNvSpPr/>
+          <p:nvPr/>
+        </p:nvSpPr>
+        <p:spPr>
+          <a:xfrm>
+            <a:off x="6492240" y="4937760"/>
+            <a:ext cx="4663440" cy="777240"/>
+          </a:xfrm>
+          <a:prstGeom prst="roundRect">
+            <a:avLst/>
+          </a:prstGeom>
+          <a:solidFill>
+            <a:srgbClr val="090D16"/>
+          </a:solidFill>
+          <a:ln w="12700">
+            <a:solidFill>
+              <a:srgbClr val="23324E"/>
+            </a:solidFill>
+            <a:prstDash val="solid"/>
+          </a:ln>
+        </p:spPr>
+      </p:sp>
+      <p:sp>
+        <p:nvSpPr>
+          <p:cNvPr id="22" name="Text 20"/>
+          <p:cNvSpPr/>
+          <p:nvPr/>
+        </p:nvSpPr>
+        <p:spPr>
+          <a:xfrm>
+            <a:off x="6629400" y="5010912"/>
+            <a:ext cx="3200400" cy="228600"/>
+          </a:xfrm>
+          <a:prstGeom prst="rect">
+            <a:avLst/>
+          </a:prstGeom>
+          <a:noFill/>
+          <a:ln/>
+        </p:spPr>
+        <p:txBody>
+          <a:bodyPr wrap="square" rtlCol="0" anchor="ctr"/>
+          <a:lstStyle/>
+          <a:p>
+            <a:pPr indent="0" marL="0">
+              <a:buNone/>
+            </a:pPr>
+            <a:r>
+              <a:rPr lang="en-US" sz="1150" b="1" dirty="0">
+                <a:solidFill>
+                  <a:srgbClr val="FFFFFF"/>
+                </a:solidFill>
+              </a:rPr>
+              <a:t>4. SHA-256 LRU Cache Registration</a:t>
             </a:r>
             <a:endParaRPr lang="en-US" sz="1150" dirty="0"/>
           </a:p>
-          <a:p>
-            <a:pPr indent="0" marL="0">
-              <a:lnSpc>
-                <a:spcPts val="1800"/>
-              </a:lnSpc>
-              <a:buNone/>
-            </a:pPr>
-            <a:r>
-              <a:rPr lang="en-US" sz="1150" dirty="0">
+        </p:txBody>
+      </p:sp>
+      <p:sp>
+        <p:nvSpPr>
+          <p:cNvPr id="23" name="Text 21"/>
+          <p:cNvSpPr/>
+          <p:nvPr/>
+        </p:nvSpPr>
+        <p:spPr>
+          <a:xfrm>
+            <a:off x="9601200" y="5010912"/>
+            <a:ext cx="1371600" cy="228600"/>
+          </a:xfrm>
+          <a:prstGeom prst="rect">
+            <a:avLst/>
+          </a:prstGeom>
+          <a:noFill/>
+          <a:ln/>
+        </p:spPr>
+        <p:txBody>
+          <a:bodyPr wrap="square" rtlCol="0" anchor="ctr"/>
+          <a:lstStyle/>
+          <a:p>
+            <a:pPr algn="r" indent="0" marL="0">
+              <a:buNone/>
+            </a:pPr>
+            <a:r>
+              <a:rPr lang="en-US" sz="1000" b="1" dirty="0">
+                <a:solidFill>
+                  <a:srgbClr val="10B981"/>
+                </a:solidFill>
+              </a:rPr>
+              <a:t>Cache Active</a:t>
+            </a:r>
+            <a:endParaRPr lang="en-US" sz="1000" dirty="0"/>
+          </a:p>
+        </p:txBody>
+      </p:sp>
+      <p:sp>
+        <p:nvSpPr>
+          <p:cNvPr id="24" name="Text 22"/>
+          <p:cNvSpPr/>
+          <p:nvPr/>
+        </p:nvSpPr>
+        <p:spPr>
+          <a:xfrm>
+            <a:off x="6629400" y="5257800"/>
+            <a:ext cx="4389120" cy="411480"/>
+          </a:xfrm>
+          <a:prstGeom prst="rect">
+            <a:avLst/>
+          </a:prstGeom>
+          <a:noFill/>
+          <a:ln/>
+        </p:spPr>
+        <p:txBody>
+          <a:bodyPr wrap="square" rtlCol="0" anchor="ctr"/>
+          <a:lstStyle/>
+          <a:p>
+            <a:pPr indent="0" marL="0">
+              <a:buNone/>
+            </a:pPr>
+            <a:r>
+              <a:rPr lang="en-US" sz="950" dirty="0">
                 <a:solidFill>
                   <a:srgbClr val="94A3B8"/>
                 </a:solidFill>
               </a:rPr>
-              <a:t>• Google XYZ formula synthesizer</a:t>
-            </a:r>
-            <a:endParaRPr lang="en-US" sz="1150" dirty="0"/>
-          </a:p>
-          <a:p>
-            <a:pPr indent="0" marL="0">
-              <a:lnSpc>
-                <a:spcPts val="1800"/>
-              </a:lnSpc>
-              <a:buNone/>
-            </a:pPr>
-            <a:r>
-              <a:rPr lang="en-US" sz="1150" dirty="0">
-                <a:solidFill>
-                  <a:srgbClr val="94A3B8"/>
-                </a:solidFill>
-              </a:rPr>
-              <a:t>• &lt;10ms execution on cloud spike</a:t>
-            </a:r>
-            <a:endParaRPr lang="en-US" sz="1150" dirty="0"/>
+              <a:t>Digest generated for sub-second repeat audits without redundant compute.</a:t>
+            </a:r>
+            <a:endParaRPr lang="en-US" sz="950" dirty="0"/>
           </a:p>
         </p:txBody>
       </p:sp>
@@ -3514,7 +3748,7 @@
         </p:nvSpPr>
         <p:spPr>
           <a:xfrm>
-            <a:off x="731520" y="457200"/>
+            <a:off x="731520" y="548640"/>
             <a:ext cx="9144000" cy="274320"/>
           </a:xfrm>
           <a:prstGeom prst="rect">
@@ -3536,7 +3770,7 @@
                   <a:srgbClr val="F43F5E"/>
                 </a:solidFill>
               </a:rPr>
-              <a:t>03 / INCIDENT SCREENSHOT &amp; ROOT CAUSE</a:t>
+              <a:t>03 / BASELINE AUDIT</a:t>
             </a:r>
             <a:endParaRPr lang="en-US" sz="1000" dirty="0"/>
           </a:p>
@@ -3550,31 +3784,31 @@
         </p:nvSpPr>
         <p:spPr>
           <a:xfrm>
-            <a:off x="731520" y="731520"/>
-            <a:ext cx="10515600" cy="457200"/>
-          </a:xfrm>
-          <a:prstGeom prst="rect">
-            <a:avLst/>
-          </a:prstGeom>
-          <a:noFill/>
-          <a:ln/>
-        </p:spPr>
-        <p:txBody>
-          <a:bodyPr wrap="square" rtlCol="0" anchor="ctr"/>
-          <a:lstStyle/>
-          <a:p>
-            <a:pPr indent="0" marL="0">
-              <a:buNone/>
-            </a:pPr>
-            <a:r>
-              <a:rPr lang="en-US" sz="2400" b="1" dirty="0">
+            <a:off x="731520" y="822960"/>
+            <a:ext cx="10515600" cy="548640"/>
+          </a:xfrm>
+          <a:prstGeom prst="rect">
+            <a:avLst/>
+          </a:prstGeom>
+          <a:noFill/>
+          <a:ln/>
+        </p:spPr>
+        <p:txBody>
+          <a:bodyPr wrap="square" rtlCol="0" anchor="ctr"/>
+          <a:lstStyle/>
+          <a:p>
+            <a:pPr indent="0" marL="0">
+              <a:buNone/>
+            </a:pPr>
+            <a:r>
+              <a:rPr lang="en-US" sz="2800" b="1" dirty="0">
                 <a:solidFill>
                   <a:srgbClr val="FFFFFF"/>
                 </a:solidFill>
               </a:rPr>
-              <a:t>Website Screenshot: 503 Model Demand Failure</a:t>
-            </a:r>
-            <a:endParaRPr lang="en-US" sz="2400" dirty="0"/>
+              <a:t>BEFORE Optimization: Baseline ATS Diagnostic (68 / 100)</a:t>
+            </a:r>
+            <a:endParaRPr lang="en-US" sz="2800" dirty="0"/>
           </a:p>
         </p:txBody>
       </p:sp>
@@ -3586,864 +3820,16 @@
         </p:nvSpPr>
         <p:spPr>
           <a:xfrm>
-            <a:off x="731520" y="1325880"/>
-            <a:ext cx="10698480" cy="4572000"/>
+            <a:off x="731520" y="1645920"/>
+            <a:ext cx="3840480" cy="4206240"/>
           </a:xfrm>
           <a:prstGeom prst="roundRect">
             <a:avLst/>
           </a:prstGeom>
           <a:solidFill>
-            <a:srgbClr val="0F172A"/>
+            <a:srgbClr val="1C1318"/>
           </a:solidFill>
           <a:ln w="19050">
-            <a:solidFill>
-              <a:srgbClr val="334155"/>
-            </a:solidFill>
-            <a:prstDash val="solid"/>
-          </a:ln>
-        </p:spPr>
-      </p:sp>
-      <p:sp>
-        <p:nvSpPr>
-          <p:cNvPr id="5" name="Shape 3"/>
-          <p:cNvSpPr/>
-          <p:nvPr/>
-        </p:nvSpPr>
-        <p:spPr>
-          <a:xfrm>
-            <a:off x="731520" y="1325880"/>
-            <a:ext cx="10698480" cy="384048"/>
-          </a:xfrm>
-          <a:prstGeom prst="rect">
-            <a:avLst/>
-          </a:prstGeom>
-          <a:solidFill>
-            <a:srgbClr val="1E293B"/>
-          </a:solidFill>
-          <a:ln/>
-        </p:spPr>
-      </p:sp>
-      <p:sp>
-        <p:nvSpPr>
-          <p:cNvPr id="6" name="Shape 4"/>
-          <p:cNvSpPr/>
-          <p:nvPr/>
-        </p:nvSpPr>
-        <p:spPr>
-          <a:xfrm>
-            <a:off x="868680" y="1453896"/>
-            <a:ext cx="128016" cy="128016"/>
-          </a:xfrm>
-          <a:prstGeom prst="ellipse">
-            <a:avLst/>
-          </a:prstGeom>
-          <a:solidFill>
-            <a:srgbClr val="EF4444"/>
-          </a:solidFill>
-          <a:ln/>
-        </p:spPr>
-      </p:sp>
-      <p:sp>
-        <p:nvSpPr>
-          <p:cNvPr id="7" name="Shape 5"/>
-          <p:cNvSpPr/>
-          <p:nvPr/>
-        </p:nvSpPr>
-        <p:spPr>
-          <a:xfrm>
-            <a:off x="1051560" y="1453896"/>
-            <a:ext cx="128016" cy="128016"/>
-          </a:xfrm>
-          <a:prstGeom prst="ellipse">
-            <a:avLst/>
-          </a:prstGeom>
-          <a:solidFill>
-            <a:srgbClr val="F59E0B"/>
-          </a:solidFill>
-          <a:ln/>
-        </p:spPr>
-      </p:sp>
-      <p:sp>
-        <p:nvSpPr>
-          <p:cNvPr id="8" name="Shape 6"/>
-          <p:cNvSpPr/>
-          <p:nvPr/>
-        </p:nvSpPr>
-        <p:spPr>
-          <a:xfrm>
-            <a:off x="1234440" y="1453896"/>
-            <a:ext cx="128016" cy="128016"/>
-          </a:xfrm>
-          <a:prstGeom prst="ellipse">
-            <a:avLst/>
-          </a:prstGeom>
-          <a:solidFill>
-            <a:srgbClr val="10B981"/>
-          </a:solidFill>
-          <a:ln/>
-        </p:spPr>
-      </p:sp>
-      <p:sp>
-        <p:nvSpPr>
-          <p:cNvPr id="9" name="Shape 7"/>
-          <p:cNvSpPr/>
-          <p:nvPr/>
-        </p:nvSpPr>
-        <p:spPr>
-          <a:xfrm>
-            <a:off x="1554480" y="1399032"/>
-            <a:ext cx="9052560" cy="237744"/>
-          </a:xfrm>
-          <a:prstGeom prst="roundRect">
-            <a:avLst/>
-          </a:prstGeom>
-          <a:solidFill>
-            <a:srgbClr val="0F172A"/>
-          </a:solidFill>
-          <a:ln w="12700">
-            <a:solidFill>
-              <a:srgbClr val="334155"/>
-            </a:solidFill>
-            <a:prstDash val="solid"/>
-          </a:ln>
-        </p:spPr>
-      </p:sp>
-      <p:sp>
-        <p:nvSpPr>
-          <p:cNvPr id="10" name="Text 8"/>
-          <p:cNvSpPr/>
-          <p:nvPr/>
-        </p:nvSpPr>
-        <p:spPr>
-          <a:xfrm>
-            <a:off x="1645920" y="1399032"/>
-            <a:ext cx="8869680" cy="237744"/>
-          </a:xfrm>
-          <a:prstGeom prst="rect">
-            <a:avLst/>
-          </a:prstGeom>
-          <a:noFill/>
-          <a:ln/>
-        </p:spPr>
-        <p:txBody>
-          <a:bodyPr wrap="square" rtlCol="0" anchor="ctr"/>
-          <a:lstStyle/>
-          <a:p>
-            <a:pPr indent="0" marL="0">
-              <a:buNone/>
-            </a:pPr>
-            <a:r>
-              <a:rPr lang="en-US" sz="900" dirty="0">
-                <a:solidFill>
-                  <a:srgbClr val="94A3B8"/>
-                </a:solidFill>
-                <a:latin typeface="Calibri" pitchFamily="34" charset="0"/>
-                <a:ea typeface="Calibri" pitchFamily="34" charset="-122"/>
-                <a:cs typeface="Calibri" pitchFamily="34" charset="-120"/>
-              </a:rPr>
-              <a:t>🔒 https://careerpulse.ai/analyzer-workspace</a:t>
-            </a:r>
-            <a:endParaRPr lang="en-US" sz="900" dirty="0"/>
-          </a:p>
-        </p:txBody>
-      </p:sp>
-      <p:sp>
-        <p:nvSpPr>
-          <p:cNvPr id="11" name="Shape 9"/>
-          <p:cNvSpPr/>
-          <p:nvPr/>
-        </p:nvSpPr>
-        <p:spPr>
-          <a:xfrm>
-            <a:off x="731520" y="1709928"/>
-            <a:ext cx="10698480" cy="457200"/>
-          </a:xfrm>
-          <a:prstGeom prst="rect">
-            <a:avLst/>
-          </a:prstGeom>
-          <a:solidFill>
-            <a:srgbClr val="090D16"/>
-          </a:solidFill>
-          <a:ln/>
-        </p:spPr>
-      </p:sp>
-      <p:sp>
-        <p:nvSpPr>
-          <p:cNvPr id="12" name="Text 10"/>
-          <p:cNvSpPr/>
-          <p:nvPr/>
-        </p:nvSpPr>
-        <p:spPr>
-          <a:xfrm>
-            <a:off x="914400" y="1783080"/>
-            <a:ext cx="2011680" cy="292608"/>
-          </a:xfrm>
-          <a:prstGeom prst="rect">
-            <a:avLst/>
-          </a:prstGeom>
-          <a:noFill/>
-          <a:ln/>
-        </p:spPr>
-        <p:txBody>
-          <a:bodyPr wrap="square" rtlCol="0" anchor="ctr"/>
-          <a:lstStyle/>
-          <a:p>
-            <a:pPr indent="0" marL="0">
-              <a:buNone/>
-            </a:pPr>
-            <a:r>
-              <a:rPr lang="en-US" sz="1200" b="1" dirty="0">
-                <a:solidFill>
-                  <a:srgbClr val="FFFFFF"/>
-                </a:solidFill>
-              </a:rPr>
-              <a:t>📄 CareerPulse</a:t>
-            </a:r>
-            <a:endParaRPr lang="en-US" sz="1200" dirty="0"/>
-          </a:p>
-        </p:txBody>
-      </p:sp>
-      <p:sp>
-        <p:nvSpPr>
-          <p:cNvPr id="13" name="Text 11"/>
-          <p:cNvSpPr/>
-          <p:nvPr/>
-        </p:nvSpPr>
-        <p:spPr>
-          <a:xfrm>
-            <a:off x="2926080" y="1810512"/>
-            <a:ext cx="6217920" cy="256032"/>
-          </a:xfrm>
-          <a:prstGeom prst="rect">
-            <a:avLst/>
-          </a:prstGeom>
-          <a:noFill/>
-          <a:ln/>
-        </p:spPr>
-        <p:txBody>
-          <a:bodyPr wrap="square" rtlCol="0" anchor="ctr"/>
-          <a:lstStyle/>
-          <a:p>
-            <a:pPr indent="0" marL="0">
-              <a:buNone/>
-            </a:pPr>
-            <a:r>
-              <a:rPr lang="en-US" sz="950" dirty="0">
-                <a:solidFill>
-                  <a:srgbClr val="64748B"/>
-                </a:solidFill>
-              </a:rPr>
-              <a:t>Analyzer Workspace    Sample Library (8)    Supported Formats    XYZ Methodology</a:t>
-            </a:r>
-            <a:endParaRPr lang="en-US" sz="950" dirty="0"/>
-          </a:p>
-        </p:txBody>
-      </p:sp>
-      <p:sp>
-        <p:nvSpPr>
-          <p:cNvPr id="14" name="Shape 12"/>
-          <p:cNvSpPr/>
-          <p:nvPr/>
-        </p:nvSpPr>
-        <p:spPr>
-          <a:xfrm>
-            <a:off x="9418320" y="1783080"/>
-            <a:ext cx="1737360" cy="292608"/>
-          </a:xfrm>
-          <a:prstGeom prst="roundRect">
-            <a:avLst/>
-          </a:prstGeom>
-          <a:solidFill>
-            <a:srgbClr val="4F46E5"/>
-          </a:solidFill>
-          <a:ln/>
-        </p:spPr>
-      </p:sp>
-      <p:sp>
-        <p:nvSpPr>
-          <p:cNvPr id="15" name="Text 13"/>
-          <p:cNvSpPr/>
-          <p:nvPr/>
-        </p:nvSpPr>
-        <p:spPr>
-          <a:xfrm>
-            <a:off x="9418320" y="1783080"/>
-            <a:ext cx="1737360" cy="292608"/>
-          </a:xfrm>
-          <a:prstGeom prst="rect">
-            <a:avLst/>
-          </a:prstGeom>
-          <a:noFill/>
-          <a:ln/>
-        </p:spPr>
-        <p:txBody>
-          <a:bodyPr wrap="square" rtlCol="0" anchor="ctr"/>
-          <a:lstStyle/>
-          <a:p>
-            <a:pPr algn="ctr" indent="0" marL="0">
-              <a:buNone/>
-            </a:pPr>
-            <a:r>
-              <a:rPr lang="en-US" sz="900" b="1" dirty="0">
-                <a:solidFill>
-                  <a:srgbClr val="FFFFFF"/>
-                </a:solidFill>
-              </a:rPr>
-              <a:t>Explore Samples</a:t>
-            </a:r>
-            <a:endParaRPr lang="en-US" sz="900" dirty="0"/>
-          </a:p>
-        </p:txBody>
-      </p:sp>
-      <p:sp>
-        <p:nvSpPr>
-          <p:cNvPr id="16" name="Shape 14"/>
-          <p:cNvSpPr/>
-          <p:nvPr/>
-        </p:nvSpPr>
-        <p:spPr>
-          <a:xfrm>
-            <a:off x="1097280" y="2331720"/>
-            <a:ext cx="9966960" cy="777240"/>
-          </a:xfrm>
-          <a:prstGeom prst="roundRect">
-            <a:avLst/>
-          </a:prstGeom>
-          <a:solidFill>
-            <a:srgbClr val="4C0519"/>
-          </a:solidFill>
-          <a:ln w="19050">
-            <a:solidFill>
-              <a:srgbClr val="9F1239"/>
-            </a:solidFill>
-            <a:prstDash val="solid"/>
-          </a:ln>
-        </p:spPr>
-      </p:sp>
-      <p:sp>
-        <p:nvSpPr>
-          <p:cNvPr id="17" name="Text 15"/>
-          <p:cNvSpPr/>
-          <p:nvPr/>
-        </p:nvSpPr>
-        <p:spPr>
-          <a:xfrm>
-            <a:off x="1280160" y="2423160"/>
-            <a:ext cx="3657600" cy="256032"/>
-          </a:xfrm>
-          <a:prstGeom prst="rect">
-            <a:avLst/>
-          </a:prstGeom>
-          <a:noFill/>
-          <a:ln/>
-        </p:spPr>
-        <p:txBody>
-          <a:bodyPr wrap="square" rtlCol="0" anchor="ctr"/>
-          <a:lstStyle/>
-          <a:p>
-            <a:pPr indent="0" marL="0">
-              <a:buNone/>
-            </a:pPr>
-            <a:r>
-              <a:rPr lang="en-US" sz="1100" b="1" dirty="0">
-                <a:solidFill>
-                  <a:srgbClr val="FFFFFF"/>
-                </a:solidFill>
-              </a:rPr>
-              <a:t>⚠️ Analysis Interrupted</a:t>
-            </a:r>
-            <a:endParaRPr lang="en-US" sz="1100" dirty="0"/>
-          </a:p>
-        </p:txBody>
-      </p:sp>
-      <p:sp>
-        <p:nvSpPr>
-          <p:cNvPr id="18" name="Text 16"/>
-          <p:cNvSpPr/>
-          <p:nvPr/>
-        </p:nvSpPr>
-        <p:spPr>
-          <a:xfrm>
-            <a:off x="1280160" y="2697480"/>
-            <a:ext cx="8686800" cy="347472"/>
-          </a:xfrm>
-          <a:prstGeom prst="rect">
-            <a:avLst/>
-          </a:prstGeom>
-          <a:noFill/>
-          <a:ln/>
-        </p:spPr>
-        <p:txBody>
-          <a:bodyPr wrap="square" rtlCol="0" anchor="ctr"/>
-          <a:lstStyle/>
-          <a:p>
-            <a:pPr indent="0" marL="0">
-              <a:buNone/>
-            </a:pPr>
-            <a:r>
-              <a:rPr lang="en-US" sz="850" dirty="0">
-                <a:solidFill>
-                  <a:srgbClr val="FDA4AF"/>
-                </a:solidFill>
-                <a:latin typeface="Consolas" pitchFamily="34" charset="0"/>
-                <a:ea typeface="Consolas" pitchFamily="34" charset="-122"/>
-                <a:cs typeface="Consolas" pitchFamily="34" charset="-120"/>
-              </a:rPr>
-              <a:t>{"error":{"code":503,"message":"This model is currently experiencing high demand. Spikes in demand are usually temporary. Please try again later.","status":"UNAVAILABLE"}}</a:t>
-            </a:r>
-            <a:endParaRPr lang="en-US" sz="850" dirty="0"/>
-          </a:p>
-        </p:txBody>
-      </p:sp>
-      <p:sp>
-        <p:nvSpPr>
-          <p:cNvPr id="19" name="Shape 17"/>
-          <p:cNvSpPr/>
-          <p:nvPr/>
-        </p:nvSpPr>
-        <p:spPr>
-          <a:xfrm>
-            <a:off x="10241280" y="2450592"/>
-            <a:ext cx="640080" cy="228600"/>
-          </a:xfrm>
-          <a:prstGeom prst="roundRect">
-            <a:avLst/>
-          </a:prstGeom>
-          <a:solidFill>
-            <a:srgbClr val="881337"/>
-          </a:solidFill>
-          <a:ln/>
-        </p:spPr>
-      </p:sp>
-      <p:sp>
-        <p:nvSpPr>
-          <p:cNvPr id="20" name="Text 18"/>
-          <p:cNvSpPr/>
-          <p:nvPr/>
-        </p:nvSpPr>
-        <p:spPr>
-          <a:xfrm>
-            <a:off x="10241280" y="2450592"/>
-            <a:ext cx="640080" cy="228600"/>
-          </a:xfrm>
-          <a:prstGeom prst="rect">
-            <a:avLst/>
-          </a:prstGeom>
-          <a:noFill/>
-          <a:ln/>
-        </p:spPr>
-        <p:txBody>
-          <a:bodyPr wrap="square" rtlCol="0" anchor="ctr"/>
-          <a:lstStyle/>
-          <a:p>
-            <a:pPr algn="ctr" indent="0" marL="0">
-              <a:buNone/>
-            </a:pPr>
-            <a:r>
-              <a:rPr lang="en-US" sz="850" dirty="0">
-                <a:solidFill>
-                  <a:srgbClr val="FFFFFF"/>
-                </a:solidFill>
-              </a:rPr>
-              <a:t>Dismiss</a:t>
-            </a:r>
-            <a:endParaRPr lang="en-US" sz="850" dirty="0"/>
-          </a:p>
-        </p:txBody>
-      </p:sp>
-      <p:sp>
-        <p:nvSpPr>
-          <p:cNvPr id="21" name="Text 19"/>
-          <p:cNvSpPr/>
-          <p:nvPr/>
-        </p:nvSpPr>
-        <p:spPr>
-          <a:xfrm>
-            <a:off x="1097280" y="3246120"/>
-            <a:ext cx="9966960" cy="228600"/>
-          </a:xfrm>
-          <a:prstGeom prst="rect">
-            <a:avLst/>
-          </a:prstGeom>
-          <a:noFill/>
-          <a:ln/>
-        </p:spPr>
-        <p:txBody>
-          <a:bodyPr wrap="square" rtlCol="0" anchor="ctr"/>
-          <a:lstStyle/>
-          <a:p>
-            <a:pPr algn="ctr" indent="0" marL="0">
-              <a:buNone/>
-            </a:pPr>
-            <a:r>
-              <a:rPr lang="en-US" sz="900" b="1" dirty="0">
-                <a:solidFill>
-                  <a:srgbClr val="06B6D4"/>
-                </a:solidFill>
-              </a:rPr>
-              <a:t>Multimodal ATS &amp; Vision OCR Engine • Sub-10s Turbo Audit • Designed by Shivam Kumar</a:t>
-            </a:r>
-            <a:endParaRPr lang="en-US" sz="900" dirty="0"/>
-          </a:p>
-        </p:txBody>
-      </p:sp>
-      <p:sp>
-        <p:nvSpPr>
-          <p:cNvPr id="22" name="Text 20"/>
-          <p:cNvSpPr/>
-          <p:nvPr/>
-        </p:nvSpPr>
-        <p:spPr>
-          <a:xfrm>
-            <a:off x="1097280" y="3493008"/>
-            <a:ext cx="9966960" cy="411480"/>
-          </a:xfrm>
-          <a:prstGeom prst="rect">
-            <a:avLst/>
-          </a:prstGeom>
-          <a:noFill/>
-          <a:ln/>
-        </p:spPr>
-        <p:txBody>
-          <a:bodyPr wrap="square" rtlCol="0" anchor="ctr"/>
-          <a:lstStyle/>
-          <a:p>
-            <a:pPr algn="ctr" indent="0" marL="0">
-              <a:buNone/>
-            </a:pPr>
-            <a:r>
-              <a:rPr lang="en-US" sz="1800" b="1" dirty="0">
-                <a:solidFill>
-                  <a:srgbClr val="FFFFFF"/>
-                </a:solidFill>
-              </a:rPr>
-              <a:t>Audit Any Resume in Seconds — PDF, Photo Scans, Word &amp; Plain Text</a:t>
-            </a:r>
-            <a:endParaRPr lang="en-US" sz="1800" dirty="0"/>
-          </a:p>
-        </p:txBody>
-      </p:sp>
-      <p:sp>
-        <p:nvSpPr>
-          <p:cNvPr id="23" name="Text 21"/>
-          <p:cNvSpPr/>
-          <p:nvPr/>
-        </p:nvSpPr>
-        <p:spPr>
-          <a:xfrm>
-            <a:off x="1097280" y="3931920"/>
-            <a:ext cx="9966960" cy="411480"/>
-          </a:xfrm>
-          <a:prstGeom prst="rect">
-            <a:avLst/>
-          </a:prstGeom>
-          <a:noFill/>
-          <a:ln/>
-        </p:spPr>
-        <p:txBody>
-          <a:bodyPr wrap="square" rtlCol="0" anchor="ctr"/>
-          <a:lstStyle/>
-          <a:p>
-            <a:pPr algn="ctr" indent="0" marL="0">
-              <a:buNone/>
-            </a:pPr>
-            <a:r>
-              <a:rPr lang="en-US" sz="1000" dirty="0">
-                <a:solidFill>
-                  <a:srgbClr val="94A3B8"/>
-                </a:solidFill>
-              </a:rPr>
-              <a:t>Upload a PDF, snap a camera photo of a printed resume, drop a DOCX file, or paste raw text.</a:t>
-            </a:r>
-            <a:endParaRPr lang="en-US" sz="1000" dirty="0"/>
-          </a:p>
-          <a:p>
-            <a:pPr algn="ctr" indent="0" marL="0">
-              <a:buNone/>
-            </a:pPr>
-            <a:r>
-              <a:rPr lang="en-US" sz="1000" dirty="0">
-                <a:solidFill>
-                  <a:srgbClr val="94A3B8"/>
-                </a:solidFill>
-              </a:rPr>
-              <a:t>Get instant ATS scoring, keyword gap matrices, and Google XYZ bullet rewrites in under 10 seconds.</a:t>
-            </a:r>
-            <a:endParaRPr lang="en-US" sz="1000" dirty="0"/>
-          </a:p>
-        </p:txBody>
-      </p:sp>
-      <p:sp>
-        <p:nvSpPr>
-          <p:cNvPr id="24" name="Shape 22"/>
-          <p:cNvSpPr/>
-          <p:nvPr/>
-        </p:nvSpPr>
-        <p:spPr>
-          <a:xfrm>
-            <a:off x="1097280" y="4480560"/>
-            <a:ext cx="9966960" cy="685800"/>
-          </a:xfrm>
-          <a:prstGeom prst="roundRect">
-            <a:avLst/>
-          </a:prstGeom>
-          <a:solidFill>
-            <a:srgbClr val="151E32"/>
-          </a:solidFill>
-          <a:ln w="12700">
-            <a:solidFill>
-              <a:srgbClr val="22314E"/>
-            </a:solidFill>
-            <a:prstDash val="solid"/>
-          </a:ln>
-        </p:spPr>
-      </p:sp>
-      <p:sp>
-        <p:nvSpPr>
-          <p:cNvPr id="25" name="Text 23"/>
-          <p:cNvSpPr/>
-          <p:nvPr/>
-        </p:nvSpPr>
-        <p:spPr>
-          <a:xfrm>
-            <a:off x="1280160" y="4553712"/>
-            <a:ext cx="6583680" cy="548640"/>
-          </a:xfrm>
-          <a:prstGeom prst="rect">
-            <a:avLst/>
-          </a:prstGeom>
-          <a:noFill/>
-          <a:ln/>
-        </p:spPr>
-        <p:txBody>
-          <a:bodyPr wrap="square" rtlCol="0" anchor="ctr"/>
-          <a:lstStyle/>
-          <a:p>
-            <a:pPr indent="0" marL="0">
-              <a:buNone/>
-            </a:pPr>
-            <a:r>
-              <a:rPr lang="en-US" sz="950" dirty="0">
-                <a:solidFill>
-                  <a:srgbClr val="FFFFFF"/>
-                </a:solidFill>
-              </a:rPr>
-              <a:t>Try a Pre-Loaded Sample Resume (8 Profiles Across All Formats)</a:t>
-            </a:r>
-            <a:endParaRPr lang="en-US" sz="950" dirty="0"/>
-          </a:p>
-          <a:p>
-            <a:pPr indent="0" marL="0">
-              <a:buNone/>
-            </a:pPr>
-            <a:r>
-              <a:rPr lang="en-US" sz="950" dirty="0">
-                <a:solidFill>
-                  <a:srgbClr val="FFFFFF"/>
-                </a:solidFill>
-              </a:rPr>
-              <a:t>Includes Java Architecture, Applied AI Photo Scan, DevOps SRE, Product Management</a:t>
-            </a:r>
-            <a:endParaRPr lang="en-US" sz="950" dirty="0"/>
-          </a:p>
-        </p:txBody>
-      </p:sp>
-      <p:sp>
-        <p:nvSpPr>
-          <p:cNvPr id="26" name="Shape 24"/>
-          <p:cNvSpPr/>
-          <p:nvPr/>
-        </p:nvSpPr>
-        <p:spPr>
-          <a:xfrm>
-            <a:off x="8046720" y="4645152"/>
-            <a:ext cx="731520" cy="292608"/>
-          </a:xfrm>
-          <a:prstGeom prst="roundRect">
-            <a:avLst/>
-          </a:prstGeom>
-          <a:solidFill>
-            <a:srgbClr val="4338CA"/>
-          </a:solidFill>
-          <a:ln/>
-        </p:spPr>
-      </p:sp>
-      <p:sp>
-        <p:nvSpPr>
-          <p:cNvPr id="27" name="Text 25"/>
-          <p:cNvSpPr/>
-          <p:nvPr/>
-        </p:nvSpPr>
-        <p:spPr>
-          <a:xfrm>
-            <a:off x="8046720" y="4645152"/>
-            <a:ext cx="731520" cy="292608"/>
-          </a:xfrm>
-          <a:prstGeom prst="rect">
-            <a:avLst/>
-          </a:prstGeom>
-          <a:noFill/>
-          <a:ln/>
-        </p:spPr>
-        <p:txBody>
-          <a:bodyPr wrap="square" rtlCol="0" anchor="ctr"/>
-          <a:lstStyle/>
-          <a:p>
-            <a:pPr algn="ctr" indent="0" marL="0">
-              <a:buNone/>
-            </a:pPr>
-            <a:r>
-              <a:rPr lang="en-US" sz="850" b="1" dirty="0">
-                <a:solidFill>
-                  <a:srgbClr val="FFFFFF"/>
-                </a:solidFill>
-              </a:rPr>
-              <a:t>All (8)</a:t>
-            </a:r>
-            <a:endParaRPr lang="en-US" sz="850" dirty="0"/>
-          </a:p>
-        </p:txBody>
-      </p:sp>
-      <p:sp>
-        <p:nvSpPr>
-          <p:cNvPr id="28" name="Shape 26"/>
-          <p:cNvSpPr/>
-          <p:nvPr/>
-        </p:nvSpPr>
-        <p:spPr>
-          <a:xfrm>
-            <a:off x="8869680" y="4645152"/>
-            <a:ext cx="1097280" cy="292608"/>
-          </a:xfrm>
-          <a:prstGeom prst="roundRect">
-            <a:avLst/>
-          </a:prstGeom>
-          <a:solidFill>
-            <a:srgbClr val="0F172A"/>
-          </a:solidFill>
-          <a:ln w="12700">
-            <a:solidFill>
-              <a:srgbClr val="334155"/>
-            </a:solidFill>
-            <a:prstDash val="solid"/>
-          </a:ln>
-        </p:spPr>
-      </p:sp>
-      <p:sp>
-        <p:nvSpPr>
-          <p:cNvPr id="29" name="Text 27"/>
-          <p:cNvSpPr/>
-          <p:nvPr/>
-        </p:nvSpPr>
-        <p:spPr>
-          <a:xfrm>
-            <a:off x="8869680" y="4645152"/>
-            <a:ext cx="1097280" cy="292608"/>
-          </a:xfrm>
-          <a:prstGeom prst="rect">
-            <a:avLst/>
-          </a:prstGeom>
-          <a:noFill/>
-          <a:ln/>
-        </p:spPr>
-        <p:txBody>
-          <a:bodyPr wrap="square" rtlCol="0" anchor="ctr"/>
-          <a:lstStyle/>
-          <a:p>
-            <a:pPr algn="ctr" indent="0" marL="0">
-              <a:buNone/>
-            </a:pPr>
-            <a:r>
-              <a:rPr lang="en-US" sz="850" dirty="0">
-                <a:solidFill>
-                  <a:srgbClr val="94A3B8"/>
-                </a:solidFill>
-              </a:rPr>
-              <a:t>Photo Scans (3)</a:t>
-            </a:r>
-            <a:endParaRPr lang="en-US" sz="850" dirty="0"/>
-          </a:p>
-        </p:txBody>
-      </p:sp>
-      <p:sp>
-        <p:nvSpPr>
-          <p:cNvPr id="30" name="Shape 28"/>
-          <p:cNvSpPr/>
-          <p:nvPr/>
-        </p:nvSpPr>
-        <p:spPr>
-          <a:xfrm>
-            <a:off x="10058400" y="4645152"/>
-            <a:ext cx="822960" cy="292608"/>
-          </a:xfrm>
-          <a:prstGeom prst="roundRect">
-            <a:avLst/>
-          </a:prstGeom>
-          <a:solidFill>
-            <a:srgbClr val="0F172A"/>
-          </a:solidFill>
-          <a:ln w="12700">
-            <a:solidFill>
-              <a:srgbClr val="334155"/>
-            </a:solidFill>
-            <a:prstDash val="solid"/>
-          </a:ln>
-        </p:spPr>
-      </p:sp>
-      <p:sp>
-        <p:nvSpPr>
-          <p:cNvPr id="31" name="Text 29"/>
-          <p:cNvSpPr/>
-          <p:nvPr/>
-        </p:nvSpPr>
-        <p:spPr>
-          <a:xfrm>
-            <a:off x="10058400" y="4645152"/>
-            <a:ext cx="822960" cy="292608"/>
-          </a:xfrm>
-          <a:prstGeom prst="rect">
-            <a:avLst/>
-          </a:prstGeom>
-          <a:noFill/>
-          <a:ln/>
-        </p:spPr>
-        <p:txBody>
-          <a:bodyPr wrap="square" rtlCol="0" anchor="ctr"/>
-          <a:lstStyle/>
-          <a:p>
-            <a:pPr algn="ctr" indent="0" marL="0">
-              <a:buNone/>
-            </a:pPr>
-            <a:r>
-              <a:rPr lang="en-US" sz="850" dirty="0">
-                <a:solidFill>
-                  <a:srgbClr val="94A3B8"/>
-                </a:solidFill>
-              </a:rPr>
-              <a:t>PDF (2)</a:t>
-            </a:r>
-            <a:endParaRPr lang="en-US" sz="850" dirty="0"/>
-          </a:p>
-        </p:txBody>
-      </p:sp>
-      <p:sp>
-        <p:nvSpPr>
-          <p:cNvPr id="32" name="Shape 30"/>
-          <p:cNvSpPr/>
-          <p:nvPr/>
-        </p:nvSpPr>
-        <p:spPr>
-          <a:xfrm>
-            <a:off x="1097280" y="5303520"/>
-            <a:ext cx="9966960" cy="457200"/>
-          </a:xfrm>
-          <a:prstGeom prst="roundRect">
-            <a:avLst/>
-          </a:prstGeom>
-          <a:solidFill>
-            <a:srgbClr val="1E1120"/>
-          </a:solidFill>
-          <a:ln w="12700">
             <a:solidFill>
               <a:srgbClr val="F43F5E"/>
             </a:solidFill>
@@ -4453,37 +3839,918 @@
       </p:sp>
       <p:sp>
         <p:nvSpPr>
-          <p:cNvPr id="33" name="Text 31"/>
-          <p:cNvSpPr/>
-          <p:nvPr/>
-        </p:nvSpPr>
-        <p:spPr>
-          <a:xfrm>
-            <a:off x="1280160" y="5376672"/>
-            <a:ext cx="9601200" cy="292608"/>
-          </a:xfrm>
-          <a:prstGeom prst="rect">
-            <a:avLst/>
-          </a:prstGeom>
-          <a:noFill/>
-          <a:ln/>
-        </p:spPr>
-        <p:txBody>
-          <a:bodyPr wrap="square" rtlCol="0" anchor="ctr"/>
-          <a:lstStyle/>
-          <a:p>
-            <a:pPr indent="0" marL="0">
+          <p:cNvPr id="5" name="Text 3"/>
+          <p:cNvSpPr/>
+          <p:nvPr/>
+        </p:nvSpPr>
+        <p:spPr>
+          <a:xfrm>
+            <a:off x="1005840" y="1874520"/>
+            <a:ext cx="3291840" cy="274320"/>
+          </a:xfrm>
+          <a:prstGeom prst="rect">
+            <a:avLst/>
+          </a:prstGeom>
+          <a:noFill/>
+          <a:ln/>
+        </p:spPr>
+        <p:txBody>
+          <a:bodyPr wrap="square" rtlCol="0" anchor="ctr"/>
+          <a:lstStyle/>
+          <a:p>
+            <a:pPr algn="ctr" indent="0" marL="0">
+              <a:buNone/>
+            </a:pPr>
+            <a:r>
+              <a:rPr lang="en-US" sz="1300" b="1" dirty="0">
+                <a:solidFill>
+                  <a:srgbClr val="FDA4AF"/>
+                </a:solidFill>
+              </a:rPr>
+              <a:t>Baseline Overall Score</a:t>
+            </a:r>
+            <a:endParaRPr lang="en-US" sz="1300" dirty="0"/>
+          </a:p>
+        </p:txBody>
+      </p:sp>
+      <p:sp>
+        <p:nvSpPr>
+          <p:cNvPr id="6" name="Text 4"/>
+          <p:cNvSpPr/>
+          <p:nvPr/>
+        </p:nvSpPr>
+        <p:spPr>
+          <a:xfrm>
+            <a:off x="1005840" y="2148840"/>
+            <a:ext cx="3291840" cy="731520"/>
+          </a:xfrm>
+          <a:prstGeom prst="rect">
+            <a:avLst/>
+          </a:prstGeom>
+          <a:noFill/>
+          <a:ln/>
+        </p:spPr>
+        <p:txBody>
+          <a:bodyPr wrap="square" rtlCol="0" anchor="ctr"/>
+          <a:lstStyle/>
+          <a:p>
+            <a:pPr algn="ctr" indent="0" marL="0">
+              <a:buNone/>
+            </a:pPr>
+            <a:r>
+              <a:rPr lang="en-US" sz="4400" b="1" dirty="0">
+                <a:solidFill>
+                  <a:srgbClr val="F43F5E"/>
+                </a:solidFill>
+              </a:rPr>
+              <a:t>68</a:t>
+            </a:r>
+            <a:endParaRPr lang="en-US" sz="4400" dirty="0"/>
+          </a:p>
+        </p:txBody>
+      </p:sp>
+      <p:sp>
+        <p:nvSpPr>
+          <p:cNvPr id="7" name="Text 5"/>
+          <p:cNvSpPr/>
+          <p:nvPr/>
+        </p:nvSpPr>
+        <p:spPr>
+          <a:xfrm>
+            <a:off x="1005840" y="2880360"/>
+            <a:ext cx="3291840" cy="274320"/>
+          </a:xfrm>
+          <a:prstGeom prst="rect">
+            <a:avLst/>
+          </a:prstGeom>
+          <a:noFill/>
+          <a:ln/>
+        </p:spPr>
+        <p:txBody>
+          <a:bodyPr wrap="square" rtlCol="0" anchor="ctr"/>
+          <a:lstStyle/>
+          <a:p>
+            <a:pPr algn="ctr" indent="0" marL="0">
+              <a:buNone/>
+            </a:pPr>
+            <a:r>
+              <a:rPr lang="en-US" sz="1050" dirty="0">
+                <a:solidFill>
+                  <a:srgbClr val="94A3B8"/>
+                </a:solidFill>
+              </a:rPr>
+              <a:t>/ 100 — Borderline / Needs Optimization</a:t>
+            </a:r>
+            <a:endParaRPr lang="en-US" sz="1050" dirty="0"/>
+          </a:p>
+        </p:txBody>
+      </p:sp>
+      <p:sp>
+        <p:nvSpPr>
+          <p:cNvPr id="8" name="Text 6"/>
+          <p:cNvSpPr/>
+          <p:nvPr/>
+        </p:nvSpPr>
+        <p:spPr>
+          <a:xfrm>
+            <a:off x="1005840" y="3291840"/>
+            <a:ext cx="2377440" cy="228600"/>
+          </a:xfrm>
+          <a:prstGeom prst="rect">
+            <a:avLst/>
+          </a:prstGeom>
+          <a:noFill/>
+          <a:ln/>
+        </p:spPr>
+        <p:txBody>
+          <a:bodyPr wrap="square" rtlCol="0" anchor="ctr"/>
+          <a:lstStyle/>
+          <a:p>
+            <a:pPr indent="0" marL="0">
+              <a:buNone/>
+            </a:pPr>
+            <a:r>
+              <a:rPr lang="en-US" sz="1000" dirty="0">
+                <a:solidFill>
+                  <a:srgbClr val="FFFFFF"/>
+                </a:solidFill>
+              </a:rPr>
+              <a:t>ATS Machine Parsability:</a:t>
+            </a:r>
+            <a:endParaRPr lang="en-US" sz="1000" dirty="0"/>
+          </a:p>
+        </p:txBody>
+      </p:sp>
+      <p:sp>
+        <p:nvSpPr>
+          <p:cNvPr id="9" name="Text 7"/>
+          <p:cNvSpPr/>
+          <p:nvPr/>
+        </p:nvSpPr>
+        <p:spPr>
+          <a:xfrm>
+            <a:off x="3383280" y="3291840"/>
+            <a:ext cx="914400" cy="228600"/>
+          </a:xfrm>
+          <a:prstGeom prst="rect">
+            <a:avLst/>
+          </a:prstGeom>
+          <a:noFill/>
+          <a:ln/>
+        </p:spPr>
+        <p:txBody>
+          <a:bodyPr wrap="square" rtlCol="0" anchor="ctr"/>
+          <a:lstStyle/>
+          <a:p>
+            <a:pPr algn="r" indent="0" marL="0">
               <a:buNone/>
             </a:pPr>
             <a:r>
               <a:rPr lang="en-US" sz="1000" b="1" dirty="0">
                 <a:solidFill>
+                  <a:srgbClr val="F59E0B"/>
+                </a:solidFill>
+              </a:rPr>
+              <a:t>74%</a:t>
+            </a:r>
+            <a:endParaRPr lang="en-US" sz="1000" dirty="0"/>
+          </a:p>
+        </p:txBody>
+      </p:sp>
+      <p:sp>
+        <p:nvSpPr>
+          <p:cNvPr id="10" name="Text 8"/>
+          <p:cNvSpPr/>
+          <p:nvPr/>
+        </p:nvSpPr>
+        <p:spPr>
+          <a:xfrm>
+            <a:off x="1005840" y="3611880"/>
+            <a:ext cx="2377440" cy="228600"/>
+          </a:xfrm>
+          <a:prstGeom prst="rect">
+            <a:avLst/>
+          </a:prstGeom>
+          <a:noFill/>
+          <a:ln/>
+        </p:spPr>
+        <p:txBody>
+          <a:bodyPr wrap="square" rtlCol="0" anchor="ctr"/>
+          <a:lstStyle/>
+          <a:p>
+            <a:pPr indent="0" marL="0">
+              <a:buNone/>
+            </a:pPr>
+            <a:r>
+              <a:rPr lang="en-US" sz="1000" dirty="0">
+                <a:solidFill>
+                  <a:srgbClr val="FFFFFF"/>
+                </a:solidFill>
+              </a:rPr>
+              <a:t>Quantifiable ROI &amp; Metrics:</a:t>
+            </a:r>
+            <a:endParaRPr lang="en-US" sz="1000" dirty="0"/>
+          </a:p>
+        </p:txBody>
+      </p:sp>
+      <p:sp>
+        <p:nvSpPr>
+          <p:cNvPr id="11" name="Text 9"/>
+          <p:cNvSpPr/>
+          <p:nvPr/>
+        </p:nvSpPr>
+        <p:spPr>
+          <a:xfrm>
+            <a:off x="3383280" y="3611880"/>
+            <a:ext cx="914400" cy="228600"/>
+          </a:xfrm>
+          <a:prstGeom prst="rect">
+            <a:avLst/>
+          </a:prstGeom>
+          <a:noFill/>
+          <a:ln/>
+        </p:spPr>
+        <p:txBody>
+          <a:bodyPr wrap="square" rtlCol="0" anchor="ctr"/>
+          <a:lstStyle/>
+          <a:p>
+            <a:pPr algn="r" indent="0" marL="0">
+              <a:buNone/>
+            </a:pPr>
+            <a:r>
+              <a:rPr lang="en-US" sz="1000" b="1" dirty="0">
+                <a:solidFill>
+                  <a:srgbClr val="F43F5E"/>
+                </a:solidFill>
+              </a:rPr>
+              <a:t>62%</a:t>
+            </a:r>
+            <a:endParaRPr lang="en-US" sz="1000" dirty="0"/>
+          </a:p>
+        </p:txBody>
+      </p:sp>
+      <p:sp>
+        <p:nvSpPr>
+          <p:cNvPr id="12" name="Text 10"/>
+          <p:cNvSpPr/>
+          <p:nvPr/>
+        </p:nvSpPr>
+        <p:spPr>
+          <a:xfrm>
+            <a:off x="1005840" y="3931920"/>
+            <a:ext cx="2377440" cy="228600"/>
+          </a:xfrm>
+          <a:prstGeom prst="rect">
+            <a:avLst/>
+          </a:prstGeom>
+          <a:noFill/>
+          <a:ln/>
+        </p:spPr>
+        <p:txBody>
+          <a:bodyPr wrap="square" rtlCol="0" anchor="ctr"/>
+          <a:lstStyle/>
+          <a:p>
+            <a:pPr indent="0" marL="0">
+              <a:buNone/>
+            </a:pPr>
+            <a:r>
+              <a:rPr lang="en-US" sz="1000" dirty="0">
+                <a:solidFill>
+                  <a:srgbClr val="FFFFFF"/>
+                </a:solidFill>
+              </a:rPr>
+              <a:t>Action Verbs &amp; Active Voice:</a:t>
+            </a:r>
+            <a:endParaRPr lang="en-US" sz="1000" dirty="0"/>
+          </a:p>
+        </p:txBody>
+      </p:sp>
+      <p:sp>
+        <p:nvSpPr>
+          <p:cNvPr id="13" name="Text 11"/>
+          <p:cNvSpPr/>
+          <p:nvPr/>
+        </p:nvSpPr>
+        <p:spPr>
+          <a:xfrm>
+            <a:off x="3383280" y="3931920"/>
+            <a:ext cx="914400" cy="228600"/>
+          </a:xfrm>
+          <a:prstGeom prst="rect">
+            <a:avLst/>
+          </a:prstGeom>
+          <a:noFill/>
+          <a:ln/>
+        </p:spPr>
+        <p:txBody>
+          <a:bodyPr wrap="square" rtlCol="0" anchor="ctr"/>
+          <a:lstStyle/>
+          <a:p>
+            <a:pPr algn="r" indent="0" marL="0">
+              <a:buNone/>
+            </a:pPr>
+            <a:r>
+              <a:rPr lang="en-US" sz="1000" b="1" dirty="0">
+                <a:solidFill>
+                  <a:srgbClr val="F43F5E"/>
+                </a:solidFill>
+              </a:rPr>
+              <a:t>65%</a:t>
+            </a:r>
+            <a:endParaRPr lang="en-US" sz="1000" dirty="0"/>
+          </a:p>
+        </p:txBody>
+      </p:sp>
+      <p:sp>
+        <p:nvSpPr>
+          <p:cNvPr id="14" name="Text 12"/>
+          <p:cNvSpPr/>
+          <p:nvPr/>
+        </p:nvSpPr>
+        <p:spPr>
+          <a:xfrm>
+            <a:off x="1005840" y="4251960"/>
+            <a:ext cx="2377440" cy="228600"/>
+          </a:xfrm>
+          <a:prstGeom prst="rect">
+            <a:avLst/>
+          </a:prstGeom>
+          <a:noFill/>
+          <a:ln/>
+        </p:spPr>
+        <p:txBody>
+          <a:bodyPr wrap="square" rtlCol="0" anchor="ctr"/>
+          <a:lstStyle/>
+          <a:p>
+            <a:pPr indent="0" marL="0">
+              <a:buNone/>
+            </a:pPr>
+            <a:r>
+              <a:rPr lang="en-US" sz="1000" dirty="0">
+                <a:solidFill>
+                  <a:srgbClr val="FFFFFF"/>
+                </a:solidFill>
+              </a:rPr>
+              <a:t>Keyword &amp; Skill Alignment:</a:t>
+            </a:r>
+            <a:endParaRPr lang="en-US" sz="1000" dirty="0"/>
+          </a:p>
+        </p:txBody>
+      </p:sp>
+      <p:sp>
+        <p:nvSpPr>
+          <p:cNvPr id="15" name="Text 13"/>
+          <p:cNvSpPr/>
+          <p:nvPr/>
+        </p:nvSpPr>
+        <p:spPr>
+          <a:xfrm>
+            <a:off x="3383280" y="4251960"/>
+            <a:ext cx="914400" cy="228600"/>
+          </a:xfrm>
+          <a:prstGeom prst="rect">
+            <a:avLst/>
+          </a:prstGeom>
+          <a:noFill/>
+          <a:ln/>
+        </p:spPr>
+        <p:txBody>
+          <a:bodyPr wrap="square" rtlCol="0" anchor="ctr"/>
+          <a:lstStyle/>
+          <a:p>
+            <a:pPr algn="r" indent="0" marL="0">
+              <a:buNone/>
+            </a:pPr>
+            <a:r>
+              <a:rPr lang="en-US" sz="1000" b="1" dirty="0">
+                <a:solidFill>
+                  <a:srgbClr val="F59E0B"/>
+                </a:solidFill>
+              </a:rPr>
+              <a:t>68%</a:t>
+            </a:r>
+            <a:endParaRPr lang="en-US" sz="1000" dirty="0"/>
+          </a:p>
+        </p:txBody>
+      </p:sp>
+      <p:sp>
+        <p:nvSpPr>
+          <p:cNvPr id="16" name="Text 14"/>
+          <p:cNvSpPr/>
+          <p:nvPr/>
+        </p:nvSpPr>
+        <p:spPr>
+          <a:xfrm>
+            <a:off x="1005840" y="4572000"/>
+            <a:ext cx="2377440" cy="228600"/>
+          </a:xfrm>
+          <a:prstGeom prst="rect">
+            <a:avLst/>
+          </a:prstGeom>
+          <a:noFill/>
+          <a:ln/>
+        </p:spPr>
+        <p:txBody>
+          <a:bodyPr wrap="square" rtlCol="0" anchor="ctr"/>
+          <a:lstStyle/>
+          <a:p>
+            <a:pPr indent="0" marL="0">
+              <a:buNone/>
+            </a:pPr>
+            <a:r>
+              <a:rPr lang="en-US" sz="1000" dirty="0">
+                <a:solidFill>
+                  <a:srgbClr val="FFFFFF"/>
+                </a:solidFill>
+              </a:rPr>
+              <a:t>Formatting &amp; Visual Brevity:</a:t>
+            </a:r>
+            <a:endParaRPr lang="en-US" sz="1000" dirty="0"/>
+          </a:p>
+        </p:txBody>
+      </p:sp>
+      <p:sp>
+        <p:nvSpPr>
+          <p:cNvPr id="17" name="Text 15"/>
+          <p:cNvSpPr/>
+          <p:nvPr/>
+        </p:nvSpPr>
+        <p:spPr>
+          <a:xfrm>
+            <a:off x="3383280" y="4572000"/>
+            <a:ext cx="914400" cy="228600"/>
+          </a:xfrm>
+          <a:prstGeom prst="rect">
+            <a:avLst/>
+          </a:prstGeom>
+          <a:noFill/>
+          <a:ln/>
+        </p:spPr>
+        <p:txBody>
+          <a:bodyPr wrap="square" rtlCol="0" anchor="ctr"/>
+          <a:lstStyle/>
+          <a:p>
+            <a:pPr algn="r" indent="0" marL="0">
+              <a:buNone/>
+            </a:pPr>
+            <a:r>
+              <a:rPr lang="en-US" sz="1000" b="1" dirty="0">
+                <a:solidFill>
+                  <a:srgbClr val="F59E0B"/>
+                </a:solidFill>
+              </a:rPr>
+              <a:t>72%</a:t>
+            </a:r>
+            <a:endParaRPr lang="en-US" sz="1000" dirty="0"/>
+          </a:p>
+        </p:txBody>
+      </p:sp>
+      <p:sp>
+        <p:nvSpPr>
+          <p:cNvPr id="18" name="Shape 16"/>
+          <p:cNvSpPr/>
+          <p:nvPr/>
+        </p:nvSpPr>
+        <p:spPr>
+          <a:xfrm>
+            <a:off x="4937760" y="1645920"/>
+            <a:ext cx="6492240" cy="4206240"/>
+          </a:xfrm>
+          <a:prstGeom prst="roundRect">
+            <a:avLst/>
+          </a:prstGeom>
+          <a:solidFill>
+            <a:srgbClr val="131B2E"/>
+          </a:solidFill>
+          <a:ln w="19050">
+            <a:solidFill>
+              <a:srgbClr val="23324E"/>
+            </a:solidFill>
+            <a:prstDash val="solid"/>
+          </a:ln>
+        </p:spPr>
+      </p:sp>
+      <p:sp>
+        <p:nvSpPr>
+          <p:cNvPr id="19" name="Text 17"/>
+          <p:cNvSpPr/>
+          <p:nvPr/>
+        </p:nvSpPr>
+        <p:spPr>
+          <a:xfrm>
+            <a:off x="5212080" y="1874520"/>
+            <a:ext cx="5943600" cy="320040"/>
+          </a:xfrm>
+          <a:prstGeom prst="rect">
+            <a:avLst/>
+          </a:prstGeom>
+          <a:noFill/>
+          <a:ln/>
+        </p:spPr>
+        <p:txBody>
+          <a:bodyPr wrap="square" rtlCol="0" anchor="ctr"/>
+          <a:lstStyle/>
+          <a:p>
+            <a:pPr indent="0" marL="0">
+              <a:buNone/>
+            </a:pPr>
+            <a:r>
+              <a:rPr lang="en-US" sz="1500" b="1" dirty="0">
+                <a:solidFill>
+                  <a:srgbClr val="FDA4AF"/>
+                </a:solidFill>
+              </a:rPr>
+              <a:t>Critical Deficiencies Identified in Original PDF</a:t>
+            </a:r>
+            <a:endParaRPr lang="en-US" sz="1500" dirty="0"/>
+          </a:p>
+        </p:txBody>
+      </p:sp>
+      <p:sp>
+        <p:nvSpPr>
+          <p:cNvPr id="20" name="Shape 18"/>
+          <p:cNvSpPr/>
+          <p:nvPr/>
+        </p:nvSpPr>
+        <p:spPr>
+          <a:xfrm>
+            <a:off x="5212080" y="2331720"/>
+            <a:ext cx="5943600" cy="804672"/>
+          </a:xfrm>
+          <a:prstGeom prst="roundRect">
+            <a:avLst/>
+          </a:prstGeom>
+          <a:solidFill>
+            <a:srgbClr val="0B0F19"/>
+          </a:solidFill>
+          <a:ln w="12700">
+            <a:solidFill>
+              <a:srgbClr val="2A1820"/>
+            </a:solidFill>
+            <a:prstDash val="solid"/>
+          </a:ln>
+        </p:spPr>
+      </p:sp>
+      <p:sp>
+        <p:nvSpPr>
+          <p:cNvPr id="21" name="Text 19"/>
+          <p:cNvSpPr/>
+          <p:nvPr/>
+        </p:nvSpPr>
+        <p:spPr>
+          <a:xfrm>
+            <a:off x="5349240" y="2404872"/>
+            <a:ext cx="5669280" cy="228600"/>
+          </a:xfrm>
+          <a:prstGeom prst="rect">
+            <a:avLst/>
+          </a:prstGeom>
+          <a:noFill/>
+          <a:ln/>
+        </p:spPr>
+        <p:txBody>
+          <a:bodyPr wrap="square" rtlCol="0" anchor="ctr"/>
+          <a:lstStyle/>
+          <a:p>
+            <a:pPr indent="0" marL="0">
+              <a:buNone/>
+            </a:pPr>
+            <a:r>
+              <a:rPr lang="en-US" sz="1100" b="1" dirty="0">
+                <a:solidFill>
                   <a:srgbClr val="FCA5A5"/>
                 </a:solidFill>
               </a:rPr>
-              <a:t>📌 Root Cause: Upstream model capacity saturation during peak traffic. Single-model architecture caused 100% workflow blocking.</a:t>
-            </a:r>
-            <a:endParaRPr lang="en-US" sz="1000" dirty="0"/>
+              <a:t>1. Heavy Passive Duty Phrasing</a:t>
+            </a:r>
+            <a:endParaRPr lang="en-US" sz="1100" dirty="0"/>
+          </a:p>
+        </p:txBody>
+      </p:sp>
+      <p:sp>
+        <p:nvSpPr>
+          <p:cNvPr id="22" name="Text 20"/>
+          <p:cNvSpPr/>
+          <p:nvPr/>
+        </p:nvSpPr>
+        <p:spPr>
+          <a:xfrm>
+            <a:off x="5349240" y="2651760"/>
+            <a:ext cx="5669280" cy="438912"/>
+          </a:xfrm>
+          <a:prstGeom prst="rect">
+            <a:avLst/>
+          </a:prstGeom>
+          <a:noFill/>
+          <a:ln/>
+        </p:spPr>
+        <p:txBody>
+          <a:bodyPr wrap="square" rtlCol="0" anchor="ctr"/>
+          <a:lstStyle/>
+          <a:p>
+            <a:pPr indent="0" marL="0">
+              <a:buNone/>
+            </a:pPr>
+            <a:r>
+              <a:rPr lang="en-US" sz="950" dirty="0">
+                <a:solidFill>
+                  <a:srgbClr val="94A3B8"/>
+                </a:solidFill>
+              </a:rPr>
+              <a:t>Multiple key achievements started with weak verbs: "Responsible for reviewing documents", "Worked on infrastructure", "Helped reduce deadlocks". Lacks decisive executive leadership.</a:t>
+            </a:r>
+            <a:endParaRPr lang="en-US" sz="950" dirty="0"/>
+          </a:p>
+        </p:txBody>
+      </p:sp>
+      <p:sp>
+        <p:nvSpPr>
+          <p:cNvPr id="23" name="Shape 21"/>
+          <p:cNvSpPr/>
+          <p:nvPr/>
+        </p:nvSpPr>
+        <p:spPr>
+          <a:xfrm>
+            <a:off x="5212080" y="3209544"/>
+            <a:ext cx="5943600" cy="804672"/>
+          </a:xfrm>
+          <a:prstGeom prst="roundRect">
+            <a:avLst/>
+          </a:prstGeom>
+          <a:solidFill>
+            <a:srgbClr val="0B0F19"/>
+          </a:solidFill>
+          <a:ln w="12700">
+            <a:solidFill>
+              <a:srgbClr val="2A1820"/>
+            </a:solidFill>
+            <a:prstDash val="solid"/>
+          </a:ln>
+        </p:spPr>
+      </p:sp>
+      <p:sp>
+        <p:nvSpPr>
+          <p:cNvPr id="24" name="Text 22"/>
+          <p:cNvSpPr/>
+          <p:nvPr/>
+        </p:nvSpPr>
+        <p:spPr>
+          <a:xfrm>
+            <a:off x="5349240" y="3282696"/>
+            <a:ext cx="5669280" cy="228600"/>
+          </a:xfrm>
+          <a:prstGeom prst="rect">
+            <a:avLst/>
+          </a:prstGeom>
+          <a:noFill/>
+          <a:ln/>
+        </p:spPr>
+        <p:txBody>
+          <a:bodyPr wrap="square" rtlCol="0" anchor="ctr"/>
+          <a:lstStyle/>
+          <a:p>
+            <a:pPr indent="0" marL="0">
+              <a:buNone/>
+            </a:pPr>
+            <a:r>
+              <a:rPr lang="en-US" sz="1100" b="1" dirty="0">
+                <a:solidFill>
+                  <a:srgbClr val="FCA5A5"/>
+                </a:solidFill>
+              </a:rPr>
+              <a:t>2. Unquantified Commercial ROI</a:t>
+            </a:r>
+            <a:endParaRPr lang="en-US" sz="1100" dirty="0"/>
+          </a:p>
+        </p:txBody>
+      </p:sp>
+      <p:sp>
+        <p:nvSpPr>
+          <p:cNvPr id="25" name="Text 23"/>
+          <p:cNvSpPr/>
+          <p:nvPr/>
+        </p:nvSpPr>
+        <p:spPr>
+          <a:xfrm>
+            <a:off x="5349240" y="3529584"/>
+            <a:ext cx="5669280" cy="438912"/>
+          </a:xfrm>
+          <a:prstGeom prst="rect">
+            <a:avLst/>
+          </a:prstGeom>
+          <a:noFill/>
+          <a:ln/>
+        </p:spPr>
+        <p:txBody>
+          <a:bodyPr wrap="square" rtlCol="0" anchor="ctr"/>
+          <a:lstStyle/>
+          <a:p>
+            <a:pPr indent="0" marL="0">
+              <a:buNone/>
+            </a:pPr>
+            <a:r>
+              <a:rPr lang="en-US" sz="950" dirty="0">
+                <a:solidFill>
+                  <a:srgbClr val="94A3B8"/>
+                </a:solidFill>
+              </a:rPr>
+              <a:t>System achievements lacked explicit baseline vs. outcome percentages. No metrics around cloud cost savings (FinOps) or sprint release acceleration.</a:t>
+            </a:r>
+            <a:endParaRPr lang="en-US" sz="950" dirty="0"/>
+          </a:p>
+        </p:txBody>
+      </p:sp>
+      <p:sp>
+        <p:nvSpPr>
+          <p:cNvPr id="26" name="Shape 24"/>
+          <p:cNvSpPr/>
+          <p:nvPr/>
+        </p:nvSpPr>
+        <p:spPr>
+          <a:xfrm>
+            <a:off x="5212080" y="4087368"/>
+            <a:ext cx="5943600" cy="804672"/>
+          </a:xfrm>
+          <a:prstGeom prst="roundRect">
+            <a:avLst/>
+          </a:prstGeom>
+          <a:solidFill>
+            <a:srgbClr val="0B0F19"/>
+          </a:solidFill>
+          <a:ln w="12700">
+            <a:solidFill>
+              <a:srgbClr val="2A1820"/>
+            </a:solidFill>
+            <a:prstDash val="solid"/>
+          </a:ln>
+        </p:spPr>
+      </p:sp>
+      <p:sp>
+        <p:nvSpPr>
+          <p:cNvPr id="27" name="Text 25"/>
+          <p:cNvSpPr/>
+          <p:nvPr/>
+        </p:nvSpPr>
+        <p:spPr>
+          <a:xfrm>
+            <a:off x="5349240" y="4160520"/>
+            <a:ext cx="5669280" cy="228600"/>
+          </a:xfrm>
+          <a:prstGeom prst="rect">
+            <a:avLst/>
+          </a:prstGeom>
+          <a:noFill/>
+          <a:ln/>
+        </p:spPr>
+        <p:txBody>
+          <a:bodyPr wrap="square" rtlCol="0" anchor="ctr"/>
+          <a:lstStyle/>
+          <a:p>
+            <a:pPr indent="0" marL="0">
+              <a:buNone/>
+            </a:pPr>
+            <a:r>
+              <a:rPr lang="en-US" sz="1100" b="1" dirty="0">
+                <a:solidFill>
+                  <a:srgbClr val="FCA5A5"/>
+                </a:solidFill>
+              </a:rPr>
+              <a:t>3. Crucial Domain Keyword Gaps</a:t>
+            </a:r>
+            <a:endParaRPr lang="en-US" sz="1100" dirty="0"/>
+          </a:p>
+        </p:txBody>
+      </p:sp>
+      <p:sp>
+        <p:nvSpPr>
+          <p:cNvPr id="28" name="Text 26"/>
+          <p:cNvSpPr/>
+          <p:nvPr/>
+        </p:nvSpPr>
+        <p:spPr>
+          <a:xfrm>
+            <a:off x="5349240" y="4407408"/>
+            <a:ext cx="5669280" cy="438912"/>
+          </a:xfrm>
+          <a:prstGeom prst="rect">
+            <a:avLst/>
+          </a:prstGeom>
+          <a:noFill/>
+          <a:ln/>
+        </p:spPr>
+        <p:txBody>
+          <a:bodyPr wrap="square" rtlCol="0" anchor="ctr"/>
+          <a:lstStyle/>
+          <a:p>
+            <a:pPr indent="0" marL="0">
+              <a:buNone/>
+            </a:pPr>
+            <a:r>
+              <a:rPr lang="en-US" sz="950" dirty="0">
+                <a:solidFill>
+                  <a:srgbClr val="94A3B8"/>
+                </a:solidFill>
+              </a:rPr>
+              <a:t>Target job required FinOps, Virtual Threads (Project Loom), OpenTelemetry, and Chaos Engineering. None were explicitly declared in the original summary or bullets.</a:t>
+            </a:r>
+            <a:endParaRPr lang="en-US" sz="950" dirty="0"/>
+          </a:p>
+        </p:txBody>
+      </p:sp>
+      <p:sp>
+        <p:nvSpPr>
+          <p:cNvPr id="29" name="Shape 27"/>
+          <p:cNvSpPr/>
+          <p:nvPr/>
+        </p:nvSpPr>
+        <p:spPr>
+          <a:xfrm>
+            <a:off x="5212080" y="4965192"/>
+            <a:ext cx="5943600" cy="804672"/>
+          </a:xfrm>
+          <a:prstGeom prst="roundRect">
+            <a:avLst/>
+          </a:prstGeom>
+          <a:solidFill>
+            <a:srgbClr val="0B0F19"/>
+          </a:solidFill>
+          <a:ln w="12700">
+            <a:solidFill>
+              <a:srgbClr val="2A1820"/>
+            </a:solidFill>
+            <a:prstDash val="solid"/>
+          </a:ln>
+        </p:spPr>
+      </p:sp>
+      <p:sp>
+        <p:nvSpPr>
+          <p:cNvPr id="30" name="Text 28"/>
+          <p:cNvSpPr/>
+          <p:nvPr/>
+        </p:nvSpPr>
+        <p:spPr>
+          <a:xfrm>
+            <a:off x="5349240" y="5038344"/>
+            <a:ext cx="5669280" cy="228600"/>
+          </a:xfrm>
+          <a:prstGeom prst="rect">
+            <a:avLst/>
+          </a:prstGeom>
+          <a:noFill/>
+          <a:ln/>
+        </p:spPr>
+        <p:txBody>
+          <a:bodyPr wrap="square" rtlCol="0" anchor="ctr"/>
+          <a:lstStyle/>
+          <a:p>
+            <a:pPr indent="0" marL="0">
+              <a:buNone/>
+            </a:pPr>
+            <a:r>
+              <a:rPr lang="en-US" sz="1100" b="1" dirty="0">
+                <a:solidFill>
+                  <a:srgbClr val="FCA5A5"/>
+                </a:solidFill>
+              </a:rPr>
+              <a:t>4. Recruiter 6-Second Scan Vulnerability</a:t>
+            </a:r>
+            <a:endParaRPr lang="en-US" sz="1100" dirty="0"/>
+          </a:p>
+        </p:txBody>
+      </p:sp>
+      <p:sp>
+        <p:nvSpPr>
+          <p:cNvPr id="31" name="Text 29"/>
+          <p:cNvSpPr/>
+          <p:nvPr/>
+        </p:nvSpPr>
+        <p:spPr>
+          <a:xfrm>
+            <a:off x="5349240" y="5285232"/>
+            <a:ext cx="5669280" cy="438912"/>
+          </a:xfrm>
+          <a:prstGeom prst="rect">
+            <a:avLst/>
+          </a:prstGeom>
+          <a:noFill/>
+          <a:ln/>
+        </p:spPr>
+        <p:txBody>
+          <a:bodyPr wrap="square" rtlCol="0" anchor="ctr"/>
+          <a:lstStyle/>
+          <a:p>
+            <a:pPr indent="0" marL="0">
+              <a:buNone/>
+            </a:pPr>
+            <a:r>
+              <a:rPr lang="en-US" sz="950" dirty="0">
+                <a:solidFill>
+                  <a:srgbClr val="94A3B8"/>
+                </a:solidFill>
+              </a:rPr>
+              <a:t>Secondary bullets read as daily operational maintenance rather than strategic architectural governance. High risk of candidate triage drop-off.</a:t>
+            </a:r>
+            <a:endParaRPr lang="en-US" sz="950" dirty="0"/>
           </a:p>
         </p:txBody>
       </p:sp>
@@ -4527,7 +4794,7 @@
         </p:nvSpPr>
         <p:spPr>
           <a:xfrm>
-            <a:off x="731520" y="457200"/>
+            <a:off x="731520" y="548640"/>
             <a:ext cx="9144000" cy="274320"/>
           </a:xfrm>
           <a:prstGeom prst="rect">
@@ -4546,10 +4813,10 @@
             <a:r>
               <a:rPr lang="en-US" sz="1000" b="1" dirty="0">
                 <a:solidFill>
-                  <a:srgbClr val="10B981"/>
-                </a:solidFill>
-              </a:rPr>
-              <a:t>04 / RESOLUTION SCREENSHOT &amp; FAILOVER</a:t>
+                  <a:srgbClr val="06B6D4"/>
+                </a:solidFill>
+              </a:rPr>
+              <a:t>04 / BULLET TRANSFORMATIONS</a:t>
             </a:r>
             <a:endParaRPr lang="en-US" sz="1000" dirty="0"/>
           </a:p>
@@ -4563,54 +4830,90 @@
         </p:nvSpPr>
         <p:spPr>
           <a:xfrm>
-            <a:off x="731520" y="731520"/>
-            <a:ext cx="10515600" cy="457200"/>
-          </a:xfrm>
-          <a:prstGeom prst="rect">
-            <a:avLst/>
-          </a:prstGeom>
-          <a:noFill/>
-          <a:ln/>
-        </p:spPr>
-        <p:txBody>
-          <a:bodyPr wrap="square" rtlCol="0" anchor="ctr"/>
-          <a:lstStyle/>
-          <a:p>
-            <a:pPr indent="0" marL="0">
-              <a:buNone/>
-            </a:pPr>
-            <a:r>
-              <a:rPr lang="en-US" sz="2400" b="1" dirty="0">
+            <a:off x="731520" y="822960"/>
+            <a:ext cx="10515600" cy="548640"/>
+          </a:xfrm>
+          <a:prstGeom prst="rect">
+            <a:avLst/>
+          </a:prstGeom>
+          <a:noFill/>
+          <a:ln/>
+        </p:spPr>
+        <p:txBody>
+          <a:bodyPr wrap="square" rtlCol="0" anchor="ctr"/>
+          <a:lstStyle/>
+          <a:p>
+            <a:pPr indent="0" marL="0">
+              <a:buNone/>
+            </a:pPr>
+            <a:r>
+              <a:rPr lang="en-US" sz="2800" b="1" dirty="0">
                 <a:solidFill>
                   <a:srgbClr val="FFFFFF"/>
                 </a:solidFill>
               </a:rPr>
-              <a:t>Website Screenshot: Resolved UI with Cloud Demand Shield</a:t>
-            </a:r>
-            <a:endParaRPr lang="en-US" sz="2400" dirty="0"/>
-          </a:p>
-        </p:txBody>
-      </p:sp>
-      <p:sp>
-        <p:nvSpPr>
-          <p:cNvPr id="4" name="Shape 2"/>
-          <p:cNvSpPr/>
-          <p:nvPr/>
-        </p:nvSpPr>
-        <p:spPr>
-          <a:xfrm>
-            <a:off x="731520" y="1325880"/>
-            <a:ext cx="10698480" cy="4572000"/>
+              <a:t>BEFORE vs AFTER: Google XYZ Formula Rewrites</a:t>
+            </a:r>
+            <a:endParaRPr lang="en-US" sz="2800" dirty="0"/>
+          </a:p>
+        </p:txBody>
+      </p:sp>
+      <p:sp>
+        <p:nvSpPr>
+          <p:cNvPr id="4" name="Text 2"/>
+          <p:cNvSpPr/>
+          <p:nvPr/>
+        </p:nvSpPr>
+        <p:spPr>
+          <a:xfrm>
+            <a:off x="731520" y="1554480"/>
+            <a:ext cx="10698480" cy="256032"/>
+          </a:xfrm>
+          <a:prstGeom prst="rect">
+            <a:avLst/>
+          </a:prstGeom>
+          <a:noFill/>
+          <a:ln/>
+        </p:spPr>
+        <p:txBody>
+          <a:bodyPr wrap="square" rtlCol="0" anchor="ctr"/>
+          <a:lstStyle/>
+          <a:p>
+            <a:pPr indent="0" marL="0">
+              <a:buNone/>
+            </a:pPr>
+            <a:r>
+              <a:rPr lang="en-US" sz="1150" b="1" dirty="0">
+                <a:solidFill>
+                  <a:srgbClr val="06B6D4"/>
+                </a:solidFill>
+              </a:rPr>
+              <a:t>1. Engineering Governance &amp; Mentorship</a:t>
+            </a:r>
+            <a:endParaRPr lang="en-US" sz="1150" dirty="0"/>
+          </a:p>
+        </p:txBody>
+      </p:sp>
+      <p:sp>
+        <p:nvSpPr>
+          <p:cNvPr id="5" name="Shape 3"/>
+          <p:cNvSpPr/>
+          <p:nvPr/>
+        </p:nvSpPr>
+        <p:spPr>
+          <a:xfrm>
+            <a:off x="731520" y="1847088"/>
+            <a:ext cx="5120640" cy="868680"/>
           </a:xfrm>
           <a:prstGeom prst="roundRect">
             <a:avLst/>
           </a:prstGeom>
           <a:solidFill>
-            <a:srgbClr val="0F172A"/>
+            <a:srgbClr val="181014"/>
           </a:solidFill>
-          <a:ln w="19050">
+          <a:ln w="12700">
             <a:solidFill>
-              <a:srgbClr val="334155"/>
+              <a:srgbClr val="F43F5E"/>
             </a:solidFill>
             <a:prstDash val="solid"/>
           </a:ln>
@@ -4618,840 +4921,92 @@
       </p:sp>
       <p:sp>
         <p:nvSpPr>
-          <p:cNvPr id="5" name="Shape 3"/>
-          <p:cNvSpPr/>
-          <p:nvPr/>
-        </p:nvSpPr>
-        <p:spPr>
-          <a:xfrm>
-            <a:off x="731520" y="1325880"/>
-            <a:ext cx="10698480" cy="384048"/>
-          </a:xfrm>
-          <a:prstGeom prst="rect">
+          <p:cNvPr id="6" name="Text 4"/>
+          <p:cNvSpPr/>
+          <p:nvPr/>
+        </p:nvSpPr>
+        <p:spPr>
+          <a:xfrm>
+            <a:off x="868680" y="1901952"/>
+            <a:ext cx="4846320" cy="201168"/>
+          </a:xfrm>
+          <a:prstGeom prst="rect">
+            <a:avLst/>
+          </a:prstGeom>
+          <a:noFill/>
+          <a:ln/>
+        </p:spPr>
+        <p:txBody>
+          <a:bodyPr wrap="square" rtlCol="0" anchor="ctr"/>
+          <a:lstStyle/>
+          <a:p>
+            <a:pPr indent="0" marL="0">
+              <a:buNone/>
+            </a:pPr>
+            <a:r>
+              <a:rPr lang="en-US" sz="950" b="1" dirty="0">
+                <a:solidFill>
+                  <a:srgbClr val="F43F5E"/>
+                </a:solidFill>
+              </a:rPr>
+              <a:t>BEFORE (Weak Passive Duty):</a:t>
+            </a:r>
+            <a:endParaRPr lang="en-US" sz="950" dirty="0"/>
+          </a:p>
+        </p:txBody>
+      </p:sp>
+      <p:sp>
+        <p:nvSpPr>
+          <p:cNvPr id="7" name="Text 5"/>
+          <p:cNvSpPr/>
+          <p:nvPr/>
+        </p:nvSpPr>
+        <p:spPr>
+          <a:xfrm>
+            <a:off x="868680" y="2103120"/>
+            <a:ext cx="4846320" cy="548640"/>
+          </a:xfrm>
+          <a:prstGeom prst="rect">
+            <a:avLst/>
+          </a:prstGeom>
+          <a:noFill/>
+          <a:ln/>
+        </p:spPr>
+        <p:txBody>
+          <a:bodyPr wrap="square" rtlCol="0" anchor="ctr"/>
+          <a:lstStyle/>
+          <a:p>
+            <a:pPr indent="0" marL="0">
+              <a:buNone/>
+            </a:pPr>
+            <a:r>
+              <a:rPr lang="en-US" sz="1000" dirty="0">
+                <a:solidFill>
+                  <a:srgbClr val="FDA4AF"/>
+                </a:solidFill>
+              </a:rPr>
+              <a:t>"Responsible for reviewing system design documents and helping engineers with backend deployments."</a:t>
+            </a:r>
+            <a:endParaRPr lang="en-US" sz="1000" dirty="0"/>
+          </a:p>
+        </p:txBody>
+      </p:sp>
+      <p:sp>
+        <p:nvSpPr>
+          <p:cNvPr id="8" name="Shape 6"/>
+          <p:cNvSpPr/>
+          <p:nvPr/>
+        </p:nvSpPr>
+        <p:spPr>
+          <a:xfrm>
+            <a:off x="6217920" y="1847088"/>
+            <a:ext cx="5212080" cy="868680"/>
+          </a:xfrm>
+          <a:prstGeom prst="roundRect">
             <a:avLst/>
           </a:prstGeom>
           <a:solidFill>
-            <a:srgbClr val="1E293B"/>
-          </a:solidFill>
-          <a:ln/>
-        </p:spPr>
-      </p:sp>
-      <p:sp>
-        <p:nvSpPr>
-          <p:cNvPr id="6" name="Shape 4"/>
-          <p:cNvSpPr/>
-          <p:nvPr/>
-        </p:nvSpPr>
-        <p:spPr>
-          <a:xfrm>
-            <a:off x="868680" y="1453896"/>
-            <a:ext cx="128016" cy="128016"/>
-          </a:xfrm>
-          <a:prstGeom prst="ellipse">
-            <a:avLst/>
-          </a:prstGeom>
-          <a:solidFill>
-            <a:srgbClr val="EF4444"/>
-          </a:solidFill>
-          <a:ln/>
-        </p:spPr>
-      </p:sp>
-      <p:sp>
-        <p:nvSpPr>
-          <p:cNvPr id="7" name="Shape 5"/>
-          <p:cNvSpPr/>
-          <p:nvPr/>
-        </p:nvSpPr>
-        <p:spPr>
-          <a:xfrm>
-            <a:off x="1051560" y="1453896"/>
-            <a:ext cx="128016" cy="128016"/>
-          </a:xfrm>
-          <a:prstGeom prst="ellipse">
-            <a:avLst/>
-          </a:prstGeom>
-          <a:solidFill>
-            <a:srgbClr val="F59E0B"/>
-          </a:solidFill>
-          <a:ln/>
-        </p:spPr>
-      </p:sp>
-      <p:sp>
-        <p:nvSpPr>
-          <p:cNvPr id="8" name="Shape 6"/>
-          <p:cNvSpPr/>
-          <p:nvPr/>
-        </p:nvSpPr>
-        <p:spPr>
-          <a:xfrm>
-            <a:off x="1234440" y="1453896"/>
-            <a:ext cx="128016" cy="128016"/>
-          </a:xfrm>
-          <a:prstGeom prst="ellipse">
-            <a:avLst/>
-          </a:prstGeom>
-          <a:solidFill>
-            <a:srgbClr val="10B981"/>
-          </a:solidFill>
-          <a:ln/>
-        </p:spPr>
-      </p:sp>
-      <p:sp>
-        <p:nvSpPr>
-          <p:cNvPr id="9" name="Shape 7"/>
-          <p:cNvSpPr/>
-          <p:nvPr/>
-        </p:nvSpPr>
-        <p:spPr>
-          <a:xfrm>
-            <a:off x="1554480" y="1399032"/>
-            <a:ext cx="9052560" cy="237744"/>
-          </a:xfrm>
-          <a:prstGeom prst="roundRect">
-            <a:avLst/>
-          </a:prstGeom>
-          <a:solidFill>
-            <a:srgbClr val="0F172A"/>
-          </a:solidFill>
-          <a:ln w="12700">
-            <a:solidFill>
-              <a:srgbClr val="334155"/>
-            </a:solidFill>
-            <a:prstDash val="solid"/>
-          </a:ln>
-        </p:spPr>
-      </p:sp>
-      <p:sp>
-        <p:nvSpPr>
-          <p:cNvPr id="10" name="Text 8"/>
-          <p:cNvSpPr/>
-          <p:nvPr/>
-        </p:nvSpPr>
-        <p:spPr>
-          <a:xfrm>
-            <a:off x="1645920" y="1399032"/>
-            <a:ext cx="8869680" cy="237744"/>
-          </a:xfrm>
-          <a:prstGeom prst="rect">
-            <a:avLst/>
-          </a:prstGeom>
-          <a:noFill/>
-          <a:ln/>
-        </p:spPr>
-        <p:txBody>
-          <a:bodyPr wrap="square" rtlCol="0" anchor="ctr"/>
-          <a:lstStyle/>
-          <a:p>
-            <a:pPr indent="0" marL="0">
-              <a:buNone/>
-            </a:pPr>
-            <a:r>
-              <a:rPr lang="en-US" sz="900" dirty="0">
-                <a:solidFill>
-                  <a:srgbClr val="94A3B8"/>
-                </a:solidFill>
-                <a:latin typeface="Calibri" pitchFamily="34" charset="0"/>
-                <a:ea typeface="Calibri" pitchFamily="34" charset="-122"/>
-                <a:cs typeface="Calibri" pitchFamily="34" charset="-120"/>
-              </a:rPr>
-              <a:t>🔒 https://careerpulse.ai/analyzer-workspace</a:t>
-            </a:r>
-            <a:endParaRPr lang="en-US" sz="900" dirty="0"/>
-          </a:p>
-        </p:txBody>
-      </p:sp>
-      <p:sp>
-        <p:nvSpPr>
-          <p:cNvPr id="11" name="Shape 9"/>
-          <p:cNvSpPr/>
-          <p:nvPr/>
-        </p:nvSpPr>
-        <p:spPr>
-          <a:xfrm>
-            <a:off x="731520" y="1709928"/>
-            <a:ext cx="10698480" cy="457200"/>
-          </a:xfrm>
-          <a:prstGeom prst="rect">
-            <a:avLst/>
-          </a:prstGeom>
-          <a:solidFill>
-            <a:srgbClr val="090D16"/>
-          </a:solidFill>
-          <a:ln/>
-        </p:spPr>
-      </p:sp>
-      <p:sp>
-        <p:nvSpPr>
-          <p:cNvPr id="12" name="Text 10"/>
-          <p:cNvSpPr/>
-          <p:nvPr/>
-        </p:nvSpPr>
-        <p:spPr>
-          <a:xfrm>
-            <a:off x="914400" y="1783080"/>
-            <a:ext cx="2011680" cy="292608"/>
-          </a:xfrm>
-          <a:prstGeom prst="rect">
-            <a:avLst/>
-          </a:prstGeom>
-          <a:noFill/>
-          <a:ln/>
-        </p:spPr>
-        <p:txBody>
-          <a:bodyPr wrap="square" rtlCol="0" anchor="ctr"/>
-          <a:lstStyle/>
-          <a:p>
-            <a:pPr indent="0" marL="0">
-              <a:buNone/>
-            </a:pPr>
-            <a:r>
-              <a:rPr lang="en-US" sz="1200" b="1" dirty="0">
-                <a:solidFill>
-                  <a:srgbClr val="FFFFFF"/>
-                </a:solidFill>
-              </a:rPr>
-              <a:t>📄 CareerPulse</a:t>
-            </a:r>
-            <a:endParaRPr lang="en-US" sz="1200" dirty="0"/>
-          </a:p>
-        </p:txBody>
-      </p:sp>
-      <p:sp>
-        <p:nvSpPr>
-          <p:cNvPr id="13" name="Text 11"/>
-          <p:cNvSpPr/>
-          <p:nvPr/>
-        </p:nvSpPr>
-        <p:spPr>
-          <a:xfrm>
-            <a:off x="2926080" y="1810512"/>
-            <a:ext cx="6217920" cy="256032"/>
-          </a:xfrm>
-          <a:prstGeom prst="rect">
-            <a:avLst/>
-          </a:prstGeom>
-          <a:noFill/>
-          <a:ln/>
-        </p:spPr>
-        <p:txBody>
-          <a:bodyPr wrap="square" rtlCol="0" anchor="ctr"/>
-          <a:lstStyle/>
-          <a:p>
-            <a:pPr indent="0" marL="0">
-              <a:buNone/>
-            </a:pPr>
-            <a:r>
-              <a:rPr lang="en-US" sz="950" dirty="0">
-                <a:solidFill>
-                  <a:srgbClr val="64748B"/>
-                </a:solidFill>
-              </a:rPr>
-              <a:t>Analyzer Workspace    Sample Library (8)    Presentation (.pptx)    Supported Formats</a:t>
-            </a:r>
-            <a:endParaRPr lang="en-US" sz="950" dirty="0"/>
-          </a:p>
-        </p:txBody>
-      </p:sp>
-      <p:sp>
-        <p:nvSpPr>
-          <p:cNvPr id="14" name="Shape 12"/>
-          <p:cNvSpPr/>
-          <p:nvPr/>
-        </p:nvSpPr>
-        <p:spPr>
-          <a:xfrm>
-            <a:off x="9235440" y="1783080"/>
-            <a:ext cx="1005840" cy="292608"/>
-          </a:xfrm>
-          <a:prstGeom prst="roundRect">
-            <a:avLst/>
-          </a:prstGeom>
-          <a:solidFill>
-            <a:srgbClr val="1E293B"/>
-          </a:solidFill>
-          <a:ln w="12700">
-            <a:solidFill>
-              <a:srgbClr val="06B6D4"/>
-            </a:solidFill>
-            <a:prstDash val="solid"/>
-          </a:ln>
-        </p:spPr>
-      </p:sp>
-      <p:sp>
-        <p:nvSpPr>
-          <p:cNvPr id="15" name="Text 13"/>
-          <p:cNvSpPr/>
-          <p:nvPr/>
-        </p:nvSpPr>
-        <p:spPr>
-          <a:xfrm>
-            <a:off x="9235440" y="1783080"/>
-            <a:ext cx="1005840" cy="292608"/>
-          </a:xfrm>
-          <a:prstGeom prst="rect">
-            <a:avLst/>
-          </a:prstGeom>
-          <a:noFill/>
-          <a:ln/>
-        </p:spPr>
-        <p:txBody>
-          <a:bodyPr wrap="square" rtlCol="0" anchor="ctr"/>
-          <a:lstStyle/>
-          <a:p>
-            <a:pPr algn="ctr" indent="0" marL="0">
-              <a:buNone/>
-            </a:pPr>
-            <a:r>
-              <a:rPr lang="en-US" sz="850" b="1" dirty="0">
-                <a:solidFill>
-                  <a:srgbClr val="06B6D4"/>
-                </a:solidFill>
-              </a:rPr>
-              <a:t>PPTX Deck</a:t>
-            </a:r>
-            <a:endParaRPr lang="en-US" sz="850" dirty="0"/>
-          </a:p>
-        </p:txBody>
-      </p:sp>
-      <p:sp>
-        <p:nvSpPr>
-          <p:cNvPr id="16" name="Shape 14"/>
-          <p:cNvSpPr/>
-          <p:nvPr/>
-        </p:nvSpPr>
-        <p:spPr>
-          <a:xfrm>
-            <a:off x="10332720" y="1783080"/>
-            <a:ext cx="822960" cy="292608"/>
-          </a:xfrm>
-          <a:prstGeom prst="roundRect">
-            <a:avLst/>
-          </a:prstGeom>
-          <a:solidFill>
-            <a:srgbClr val="4F46E5"/>
-          </a:solidFill>
-          <a:ln/>
-        </p:spPr>
-      </p:sp>
-      <p:sp>
-        <p:nvSpPr>
-          <p:cNvPr id="17" name="Text 15"/>
-          <p:cNvSpPr/>
-          <p:nvPr/>
-        </p:nvSpPr>
-        <p:spPr>
-          <a:xfrm>
-            <a:off x="10332720" y="1783080"/>
-            <a:ext cx="822960" cy="292608"/>
-          </a:xfrm>
-          <a:prstGeom prst="rect">
-            <a:avLst/>
-          </a:prstGeom>
-          <a:noFill/>
-          <a:ln/>
-        </p:spPr>
-        <p:txBody>
-          <a:bodyPr wrap="square" rtlCol="0" anchor="ctr"/>
-          <a:lstStyle/>
-          <a:p>
-            <a:pPr algn="ctr" indent="0" marL="0">
-              <a:buNone/>
-            </a:pPr>
-            <a:r>
-              <a:rPr lang="en-US" sz="850" b="1" dirty="0">
-                <a:solidFill>
-                  <a:srgbClr val="FFFFFF"/>
-                </a:solidFill>
-              </a:rPr>
-              <a:t>Samples</a:t>
-            </a:r>
-            <a:endParaRPr lang="en-US" sz="850" dirty="0"/>
-          </a:p>
-        </p:txBody>
-      </p:sp>
-      <p:sp>
-        <p:nvSpPr>
-          <p:cNvPr id="18" name="Shape 16"/>
-          <p:cNvSpPr/>
-          <p:nvPr/>
-        </p:nvSpPr>
-        <p:spPr>
-          <a:xfrm>
-            <a:off x="1097280" y="2331720"/>
-            <a:ext cx="9966960" cy="868680"/>
-          </a:xfrm>
-          <a:prstGeom prst="roundRect">
-            <a:avLst/>
-          </a:prstGeom>
-          <a:solidFill>
-            <a:srgbClr val="0F1E1B"/>
-          </a:solidFill>
-          <a:ln w="19050">
-            <a:solidFill>
-              <a:srgbClr val="10B981"/>
-            </a:solidFill>
-            <a:prstDash val="solid"/>
-          </a:ln>
-        </p:spPr>
-      </p:sp>
-      <p:sp>
-        <p:nvSpPr>
-          <p:cNvPr id="19" name="Text 17"/>
-          <p:cNvSpPr/>
-          <p:nvPr/>
-        </p:nvSpPr>
-        <p:spPr>
-          <a:xfrm>
-            <a:off x="1280160" y="2423160"/>
-            <a:ext cx="5943600" cy="256032"/>
-          </a:xfrm>
-          <a:prstGeom prst="rect">
-            <a:avLst/>
-          </a:prstGeom>
-          <a:noFill/>
-          <a:ln/>
-        </p:spPr>
-        <p:txBody>
-          <a:bodyPr wrap="square" rtlCol="0" anchor="ctr"/>
-          <a:lstStyle/>
-          <a:p>
-            <a:pPr indent="0" marL="0">
-              <a:buNone/>
-            </a:pPr>
-            <a:r>
-              <a:rPr lang="en-US" sz="1100" b="1" dirty="0">
-                <a:solidFill>
-                  <a:srgbClr val="FFFFFF"/>
-                </a:solidFill>
-              </a:rPr>
-              <a:t>⚡ Gemini Cloud Traffic Spike Handled — Auto-Failover Ready</a:t>
-            </a:r>
-            <a:endParaRPr lang="en-US" sz="1100" dirty="0"/>
-          </a:p>
-        </p:txBody>
-      </p:sp>
-      <p:sp>
-        <p:nvSpPr>
-          <p:cNvPr id="20" name="Text 18"/>
-          <p:cNvSpPr/>
-          <p:nvPr/>
-        </p:nvSpPr>
-        <p:spPr>
-          <a:xfrm>
-            <a:off x="1280160" y="2697480"/>
-            <a:ext cx="5943600" cy="411480"/>
-          </a:xfrm>
-          <a:prstGeom prst="rect">
-            <a:avLst/>
-          </a:prstGeom>
-          <a:noFill/>
-          <a:ln/>
-        </p:spPr>
-        <p:txBody>
-          <a:bodyPr wrap="square" rtlCol="0" anchor="ctr"/>
-          <a:lstStyle/>
-          <a:p>
-            <a:pPr indent="0" marL="0">
-              <a:buNone/>
-            </a:pPr>
-            <a:r>
-              <a:rPr lang="en-US" sz="900" dirty="0">
-                <a:solidFill>
-                  <a:srgbClr val="A7F3D0"/>
-                </a:solidFill>
-              </a:rPr>
-              <a:t>The Gemini model is temporarily experiencing peak cloud traffic. We provide instant auto-failover routing across 3 model tiers</a:t>
-            </a:r>
-            <a:endParaRPr lang="en-US" sz="900" dirty="0"/>
-          </a:p>
-          <a:p>
-            <a:pPr indent="0" marL="0">
-              <a:buNone/>
-            </a:pPr>
-            <a:r>
-              <a:rPr lang="en-US" sz="900" dirty="0">
-                <a:solidFill>
-                  <a:srgbClr val="A7F3D0"/>
-                </a:solidFill>
-              </a:rPr>
-              <a:t>and CPRW turbo auditing so your audit workflow is never blocked.</a:t>
-            </a:r>
-            <a:endParaRPr lang="en-US" sz="900" dirty="0"/>
-          </a:p>
-        </p:txBody>
-      </p:sp>
-      <p:sp>
-        <p:nvSpPr>
-          <p:cNvPr id="21" name="Shape 19"/>
-          <p:cNvSpPr/>
-          <p:nvPr/>
-        </p:nvSpPr>
-        <p:spPr>
-          <a:xfrm>
-            <a:off x="7406640" y="2514600"/>
-            <a:ext cx="1645920" cy="411480"/>
-          </a:xfrm>
-          <a:prstGeom prst="roundRect">
-            <a:avLst/>
-          </a:prstGeom>
-          <a:solidFill>
-            <a:srgbClr val="4F46E5"/>
-          </a:solidFill>
-          <a:ln/>
-        </p:spPr>
-      </p:sp>
-      <p:sp>
-        <p:nvSpPr>
-          <p:cNvPr id="22" name="Text 20"/>
-          <p:cNvSpPr/>
-          <p:nvPr/>
-        </p:nvSpPr>
-        <p:spPr>
-          <a:xfrm>
-            <a:off x="7406640" y="2514600"/>
-            <a:ext cx="1645920" cy="411480"/>
-          </a:xfrm>
-          <a:prstGeom prst="rect">
-            <a:avLst/>
-          </a:prstGeom>
-          <a:noFill/>
-          <a:ln/>
-        </p:spPr>
-        <p:txBody>
-          <a:bodyPr wrap="square" rtlCol="0" anchor="ctr"/>
-          <a:lstStyle/>
-          <a:p>
-            <a:pPr algn="ctr" indent="0" marL="0">
-              <a:buNone/>
-            </a:pPr>
-            <a:r>
-              <a:rPr lang="en-US" sz="850" b="1" dirty="0">
-                <a:solidFill>
-                  <a:srgbClr val="FFFFFF"/>
-                </a:solidFill>
-              </a:rPr>
-              <a:t>Run Instant Turbo Audit</a:t>
-            </a:r>
-            <a:endParaRPr lang="en-US" sz="850" dirty="0"/>
-          </a:p>
-        </p:txBody>
-      </p:sp>
-      <p:sp>
-        <p:nvSpPr>
-          <p:cNvPr id="23" name="Shape 21"/>
-          <p:cNvSpPr/>
-          <p:nvPr/>
-        </p:nvSpPr>
-        <p:spPr>
-          <a:xfrm>
-            <a:off x="9144000" y="2514600"/>
-            <a:ext cx="1097280" cy="411480"/>
-          </a:xfrm>
-          <a:prstGeom prst="roundRect">
-            <a:avLst/>
-          </a:prstGeom>
-          <a:solidFill>
-            <a:srgbClr val="1E293B"/>
-          </a:solidFill>
-          <a:ln w="12700">
-            <a:solidFill>
-              <a:srgbClr val="475569"/>
-            </a:solidFill>
-            <a:prstDash val="solid"/>
-          </a:ln>
-        </p:spPr>
-      </p:sp>
-      <p:sp>
-        <p:nvSpPr>
-          <p:cNvPr id="24" name="Text 22"/>
-          <p:cNvSpPr/>
-          <p:nvPr/>
-        </p:nvSpPr>
-        <p:spPr>
-          <a:xfrm>
-            <a:off x="9144000" y="2514600"/>
-            <a:ext cx="1097280" cy="411480"/>
-          </a:xfrm>
-          <a:prstGeom prst="rect">
-            <a:avLst/>
-          </a:prstGeom>
-          <a:noFill/>
-          <a:ln/>
-        </p:spPr>
-        <p:txBody>
-          <a:bodyPr wrap="square" rtlCol="0" anchor="ctr"/>
-          <a:lstStyle/>
-          <a:p>
-            <a:pPr algn="ctr" indent="0" marL="0">
-              <a:buNone/>
-            </a:pPr>
-            <a:r>
-              <a:rPr lang="en-US" sz="850" b="1" dirty="0">
-                <a:solidFill>
-                  <a:srgbClr val="FFFFFF"/>
-                </a:solidFill>
-              </a:rPr>
-              <a:t>Retry AI Scan</a:t>
-            </a:r>
-            <a:endParaRPr lang="en-US" sz="850" dirty="0"/>
-          </a:p>
-        </p:txBody>
-      </p:sp>
-      <p:sp>
-        <p:nvSpPr>
-          <p:cNvPr id="25" name="Text 23"/>
-          <p:cNvSpPr/>
-          <p:nvPr/>
-        </p:nvSpPr>
-        <p:spPr>
-          <a:xfrm>
-            <a:off x="10332720" y="2514600"/>
-            <a:ext cx="640080" cy="411480"/>
-          </a:xfrm>
-          <a:prstGeom prst="rect">
-            <a:avLst/>
-          </a:prstGeom>
-          <a:noFill/>
-          <a:ln/>
-        </p:spPr>
-        <p:txBody>
-          <a:bodyPr wrap="square" rtlCol="0" anchor="ctr"/>
-          <a:lstStyle/>
-          <a:p>
-            <a:pPr algn="ctr" indent="0" marL="0">
-              <a:buNone/>
-            </a:pPr>
-            <a:r>
-              <a:rPr lang="en-US" sz="850" dirty="0">
-                <a:solidFill>
-                  <a:srgbClr val="94A3B8"/>
-                </a:solidFill>
-              </a:rPr>
-              <a:t>Dismiss</a:t>
-            </a:r>
-            <a:endParaRPr lang="en-US" sz="850" dirty="0"/>
-          </a:p>
-        </p:txBody>
-      </p:sp>
-      <p:sp>
-        <p:nvSpPr>
-          <p:cNvPr id="26" name="Shape 24"/>
-          <p:cNvSpPr/>
-          <p:nvPr/>
-        </p:nvSpPr>
-        <p:spPr>
-          <a:xfrm>
-            <a:off x="1097280" y="3337560"/>
-            <a:ext cx="9966960" cy="1874520"/>
-          </a:xfrm>
-          <a:prstGeom prst="roundRect">
-            <a:avLst/>
-          </a:prstGeom>
-          <a:solidFill>
-            <a:srgbClr val="151E32"/>
-          </a:solidFill>
-          <a:ln w="12700">
-            <a:solidFill>
-              <a:srgbClr val="22314E"/>
-            </a:solidFill>
-            <a:prstDash val="solid"/>
-          </a:ln>
-        </p:spPr>
-      </p:sp>
-      <p:sp>
-        <p:nvSpPr>
-          <p:cNvPr id="27" name="Text 25"/>
-          <p:cNvSpPr/>
-          <p:nvPr/>
-        </p:nvSpPr>
-        <p:spPr>
-          <a:xfrm>
-            <a:off x="1280160" y="3474720"/>
-            <a:ext cx="5486400" cy="320040"/>
-          </a:xfrm>
-          <a:prstGeom prst="rect">
-            <a:avLst/>
-          </a:prstGeom>
-          <a:noFill/>
-          <a:ln/>
-        </p:spPr>
-        <p:txBody>
-          <a:bodyPr wrap="square" rtlCol="0" anchor="ctr"/>
-          <a:lstStyle/>
-          <a:p>
-            <a:pPr indent="0" marL="0">
-              <a:buNone/>
-            </a:pPr>
-            <a:r>
-              <a:rPr lang="en-US" sz="1400" b="1" dirty="0">
-                <a:solidFill>
-                  <a:srgbClr val="FFFFFF"/>
-                </a:solidFill>
-              </a:rPr>
-              <a:t>Candidate Profile Selected: Priya Nair</a:t>
-            </a:r>
-            <a:endParaRPr lang="en-US" sz="1400" dirty="0"/>
-          </a:p>
-        </p:txBody>
-      </p:sp>
-      <p:sp>
-        <p:nvSpPr>
-          <p:cNvPr id="28" name="Text 26"/>
-          <p:cNvSpPr/>
-          <p:nvPr/>
-        </p:nvSpPr>
-        <p:spPr>
-          <a:xfrm>
-            <a:off x="1280160" y="3794760"/>
-            <a:ext cx="7315200" cy="274320"/>
-          </a:xfrm>
-          <a:prstGeom prst="rect">
-            <a:avLst/>
-          </a:prstGeom>
-          <a:noFill/>
-          <a:ln/>
-        </p:spPr>
-        <p:txBody>
-          <a:bodyPr wrap="square" rtlCol="0" anchor="ctr"/>
-          <a:lstStyle/>
-          <a:p>
-            <a:pPr indent="0" marL="0">
-              <a:buNone/>
-            </a:pPr>
-            <a:r>
-              <a:rPr lang="en-US" sz="1000" dirty="0">
-                <a:solidFill>
-                  <a:srgbClr val="06B6D4"/>
-                </a:solidFill>
-              </a:rPr>
-              <a:t>Principal Java &amp; Distributed Systems Architect  •  PDF Document  •  Est. 9 years experience  •  Seattle, WA</a:t>
-            </a:r>
-            <a:endParaRPr lang="en-US" sz="1000" dirty="0"/>
-          </a:p>
-        </p:txBody>
-      </p:sp>
-      <p:sp>
-        <p:nvSpPr>
-          <p:cNvPr id="29" name="Text 27"/>
-          <p:cNvSpPr/>
-          <p:nvPr/>
-        </p:nvSpPr>
-        <p:spPr>
-          <a:xfrm>
-            <a:off x="1280160" y="4114800"/>
-            <a:ext cx="9601200" cy="457200"/>
-          </a:xfrm>
-          <a:prstGeom prst="rect">
-            <a:avLst/>
-          </a:prstGeom>
-          <a:noFill/>
-          <a:ln/>
-        </p:spPr>
-        <p:txBody>
-          <a:bodyPr wrap="square" rtlCol="0" anchor="ctr"/>
-          <a:lstStyle/>
-          <a:p>
-            <a:pPr indent="0" marL="0">
-              <a:buNone/>
-            </a:pPr>
-            <a:r>
-              <a:rPr lang="en-US" sz="950" dirty="0">
-                <a:solidFill>
-                  <a:srgbClr val="94A3B8"/>
-                </a:solidFill>
-              </a:rPr>
-              <a:t>Target Job: Principal Backend Architect - Core Java &amp; Cloud Financial Ledger (42k TPS, p99 JVM tuning, Kafka, EKS)</a:t>
-            </a:r>
-            <a:endParaRPr lang="en-US" sz="950" dirty="0"/>
-          </a:p>
-          <a:p>
-            <a:pPr indent="0" marL="0">
-              <a:buNone/>
-            </a:pPr>
-            <a:r>
-              <a:rPr lang="en-US" sz="950" dirty="0">
-                <a:solidFill>
-                  <a:srgbClr val="94A3B8"/>
-                </a:solidFill>
-              </a:rPr>
-              <a:t>Status: Audit ready for instant compilation. Zero cloud blocking.</a:t>
-            </a:r>
-            <a:endParaRPr lang="en-US" sz="950" dirty="0"/>
-          </a:p>
-        </p:txBody>
-      </p:sp>
-      <p:sp>
-        <p:nvSpPr>
-          <p:cNvPr id="30" name="Shape 28"/>
-          <p:cNvSpPr/>
-          <p:nvPr/>
-        </p:nvSpPr>
-        <p:spPr>
-          <a:xfrm>
-            <a:off x="1280160" y="4663440"/>
-            <a:ext cx="2743200" cy="411480"/>
-          </a:xfrm>
-          <a:prstGeom prst="roundRect">
-            <a:avLst/>
-          </a:prstGeom>
-          <a:solidFill>
-            <a:srgbClr val="059669"/>
-          </a:solidFill>
-          <a:ln/>
-        </p:spPr>
-      </p:sp>
-      <p:sp>
-        <p:nvSpPr>
-          <p:cNvPr id="31" name="Text 29"/>
-          <p:cNvSpPr/>
-          <p:nvPr/>
-        </p:nvSpPr>
-        <p:spPr>
-          <a:xfrm>
-            <a:off x="1280160" y="4663440"/>
-            <a:ext cx="2743200" cy="411480"/>
-          </a:xfrm>
-          <a:prstGeom prst="rect">
-            <a:avLst/>
-          </a:prstGeom>
-          <a:noFill/>
-          <a:ln/>
-        </p:spPr>
-        <p:txBody>
-          <a:bodyPr wrap="square" rtlCol="0" anchor="ctr"/>
-          <a:lstStyle/>
-          <a:p>
-            <a:pPr algn="ctr" indent="0" marL="0">
-              <a:buNone/>
-            </a:pPr>
-            <a:r>
-              <a:rPr lang="en-US" sz="950" b="1" dirty="0">
-                <a:solidFill>
-                  <a:srgbClr val="FFFFFF"/>
-                </a:solidFill>
-              </a:rPr>
-              <a:t>✓ Audited via CPRW Turbo Engine (&lt;5ms)</a:t>
-            </a:r>
-            <a:endParaRPr lang="en-US" sz="950" dirty="0"/>
-          </a:p>
-        </p:txBody>
-      </p:sp>
-      <p:sp>
-        <p:nvSpPr>
-          <p:cNvPr id="32" name="Shape 30"/>
-          <p:cNvSpPr/>
-          <p:nvPr/>
-        </p:nvSpPr>
-        <p:spPr>
-          <a:xfrm>
-            <a:off x="1097280" y="5349240"/>
-            <a:ext cx="9966960" cy="457200"/>
-          </a:xfrm>
-          <a:prstGeom prst="roundRect">
-            <a:avLst/>
-          </a:prstGeom>
-          <a:solidFill>
-            <a:srgbClr val="0D281E"/>
+            <a:srgbClr val="0D1E18"/>
           </a:solidFill>
           <a:ln w="12700">
             <a:solidFill>
@@ -5463,14 +5018,50 @@
       </p:sp>
       <p:sp>
         <p:nvSpPr>
-          <p:cNvPr id="33" name="Text 31"/>
-          <p:cNvSpPr/>
-          <p:nvPr/>
-        </p:nvSpPr>
-        <p:spPr>
-          <a:xfrm>
-            <a:off x="1280160" y="5422392"/>
-            <a:ext cx="9601200" cy="292608"/>
+          <p:cNvPr id="9" name="Text 7"/>
+          <p:cNvSpPr/>
+          <p:nvPr/>
+        </p:nvSpPr>
+        <p:spPr>
+          <a:xfrm>
+            <a:off x="6355080" y="1901952"/>
+            <a:ext cx="4937760" cy="201168"/>
+          </a:xfrm>
+          <a:prstGeom prst="rect">
+            <a:avLst/>
+          </a:prstGeom>
+          <a:noFill/>
+          <a:ln/>
+        </p:spPr>
+        <p:txBody>
+          <a:bodyPr wrap="square" rtlCol="0" anchor="ctr"/>
+          <a:lstStyle/>
+          <a:p>
+            <a:pPr indent="0" marL="0">
+              <a:buNone/>
+            </a:pPr>
+            <a:r>
+              <a:rPr lang="en-US" sz="950" b="1" dirty="0">
+                <a:solidFill>
+                  <a:srgbClr val="10B981"/>
+                </a:solidFill>
+              </a:rPr>
+              <a:t>AFTER (Optimized Google XYZ):</a:t>
+            </a:r>
+            <a:endParaRPr lang="en-US" sz="950" dirty="0"/>
+          </a:p>
+        </p:txBody>
+      </p:sp>
+      <p:sp>
+        <p:nvSpPr>
+          <p:cNvPr id="10" name="Text 8"/>
+          <p:cNvSpPr/>
+          <p:nvPr/>
+        </p:nvSpPr>
+        <p:spPr>
+          <a:xfrm>
+            <a:off x="6355080" y="2103120"/>
+            <a:ext cx="4937760" cy="548640"/>
           </a:xfrm>
           <a:prstGeom prst="rect">
             <a:avLst/>
@@ -5488,10 +5079,470 @@
             <a:r>
               <a:rPr lang="en-US" sz="1000" b="1" dirty="0">
                 <a:solidFill>
-                  <a:srgbClr val="6EE7B7"/>
-                </a:solidFill>
-              </a:rPr>
-              <a:t>📌 Fix Verification: Cloud demand spikes are now seamlessly absorbed with zero error popups and instant user continuity.</a:t>
+                  <a:srgbClr val="A7F3D0"/>
+                </a:solidFill>
+              </a:rPr>
+              <a:t>"Spearheaded 24+ RFC architectural design reviews and mentored 12 engineers, accelerating sprint velocity by 34% and cutting production rollback incidents to zero."</a:t>
+            </a:r>
+            <a:endParaRPr lang="en-US" sz="1000" dirty="0"/>
+          </a:p>
+        </p:txBody>
+      </p:sp>
+      <p:sp>
+        <p:nvSpPr>
+          <p:cNvPr id="11" name="Text 9"/>
+          <p:cNvSpPr/>
+          <p:nvPr/>
+        </p:nvSpPr>
+        <p:spPr>
+          <a:xfrm>
+            <a:off x="731520" y="2926080"/>
+            <a:ext cx="10698480" cy="256032"/>
+          </a:xfrm>
+          <a:prstGeom prst="rect">
+            <a:avLst/>
+          </a:prstGeom>
+          <a:noFill/>
+          <a:ln/>
+        </p:spPr>
+        <p:txBody>
+          <a:bodyPr wrap="square" rtlCol="0" anchor="ctr"/>
+          <a:lstStyle/>
+          <a:p>
+            <a:pPr indent="0" marL="0">
+              <a:buNone/>
+            </a:pPr>
+            <a:r>
+              <a:rPr lang="en-US" sz="1150" b="1" dirty="0">
+                <a:solidFill>
+                  <a:srgbClr val="06B6D4"/>
+                </a:solidFill>
+              </a:rPr>
+              <a:t>2. Database Reliability &amp; Peak Deadlocks</a:t>
+            </a:r>
+            <a:endParaRPr lang="en-US" sz="1150" dirty="0"/>
+          </a:p>
+        </p:txBody>
+      </p:sp>
+      <p:sp>
+        <p:nvSpPr>
+          <p:cNvPr id="12" name="Shape 10"/>
+          <p:cNvSpPr/>
+          <p:nvPr/>
+        </p:nvSpPr>
+        <p:spPr>
+          <a:xfrm>
+            <a:off x="731520" y="3218688"/>
+            <a:ext cx="5120640" cy="868680"/>
+          </a:xfrm>
+          <a:prstGeom prst="roundRect">
+            <a:avLst/>
+          </a:prstGeom>
+          <a:solidFill>
+            <a:srgbClr val="181014"/>
+          </a:solidFill>
+          <a:ln w="12700">
+            <a:solidFill>
+              <a:srgbClr val="F43F5E"/>
+            </a:solidFill>
+            <a:prstDash val="solid"/>
+          </a:ln>
+        </p:spPr>
+      </p:sp>
+      <p:sp>
+        <p:nvSpPr>
+          <p:cNvPr id="13" name="Text 11"/>
+          <p:cNvSpPr/>
+          <p:nvPr/>
+        </p:nvSpPr>
+        <p:spPr>
+          <a:xfrm>
+            <a:off x="868680" y="3273552"/>
+            <a:ext cx="4846320" cy="201168"/>
+          </a:xfrm>
+          <a:prstGeom prst="rect">
+            <a:avLst/>
+          </a:prstGeom>
+          <a:noFill/>
+          <a:ln/>
+        </p:spPr>
+        <p:txBody>
+          <a:bodyPr wrap="square" rtlCol="0" anchor="ctr"/>
+          <a:lstStyle/>
+          <a:p>
+            <a:pPr indent="0" marL="0">
+              <a:buNone/>
+            </a:pPr>
+            <a:r>
+              <a:rPr lang="en-US" sz="950" b="1" dirty="0">
+                <a:solidFill>
+                  <a:srgbClr val="F43F5E"/>
+                </a:solidFill>
+              </a:rPr>
+              <a:t>BEFORE (Weak Passive Duty):</a:t>
+            </a:r>
+            <a:endParaRPr lang="en-US" sz="950" dirty="0"/>
+          </a:p>
+        </p:txBody>
+      </p:sp>
+      <p:sp>
+        <p:nvSpPr>
+          <p:cNvPr id="14" name="Text 12"/>
+          <p:cNvSpPr/>
+          <p:nvPr/>
+        </p:nvSpPr>
+        <p:spPr>
+          <a:xfrm>
+            <a:off x="868680" y="3474720"/>
+            <a:ext cx="4846320" cy="548640"/>
+          </a:xfrm>
+          <a:prstGeom prst="rect">
+            <a:avLst/>
+          </a:prstGeom>
+          <a:noFill/>
+          <a:ln/>
+        </p:spPr>
+        <p:txBody>
+          <a:bodyPr wrap="square" rtlCol="0" anchor="ctr"/>
+          <a:lstStyle/>
+          <a:p>
+            <a:pPr indent="0" marL="0">
+              <a:buNone/>
+            </a:pPr>
+            <a:r>
+              <a:rPr lang="en-US" sz="1000" dirty="0">
+                <a:solidFill>
+                  <a:srgbClr val="FDA4AF"/>
+                </a:solidFill>
+              </a:rPr>
+              <a:t>"Helped reduce database deadlock incidents during peak traffic through query optimization."</a:t>
+            </a:r>
+            <a:endParaRPr lang="en-US" sz="1000" dirty="0"/>
+          </a:p>
+        </p:txBody>
+      </p:sp>
+      <p:sp>
+        <p:nvSpPr>
+          <p:cNvPr id="15" name="Shape 13"/>
+          <p:cNvSpPr/>
+          <p:nvPr/>
+        </p:nvSpPr>
+        <p:spPr>
+          <a:xfrm>
+            <a:off x="6217920" y="3218688"/>
+            <a:ext cx="5212080" cy="868680"/>
+          </a:xfrm>
+          <a:prstGeom prst="roundRect">
+            <a:avLst/>
+          </a:prstGeom>
+          <a:solidFill>
+            <a:srgbClr val="0D1E18"/>
+          </a:solidFill>
+          <a:ln w="12700">
+            <a:solidFill>
+              <a:srgbClr val="10B981"/>
+            </a:solidFill>
+            <a:prstDash val="solid"/>
+          </a:ln>
+        </p:spPr>
+      </p:sp>
+      <p:sp>
+        <p:nvSpPr>
+          <p:cNvPr id="16" name="Text 14"/>
+          <p:cNvSpPr/>
+          <p:nvPr/>
+        </p:nvSpPr>
+        <p:spPr>
+          <a:xfrm>
+            <a:off x="6355080" y="3273552"/>
+            <a:ext cx="4937760" cy="201168"/>
+          </a:xfrm>
+          <a:prstGeom prst="rect">
+            <a:avLst/>
+          </a:prstGeom>
+          <a:noFill/>
+          <a:ln/>
+        </p:spPr>
+        <p:txBody>
+          <a:bodyPr wrap="square" rtlCol="0" anchor="ctr"/>
+          <a:lstStyle/>
+          <a:p>
+            <a:pPr indent="0" marL="0">
+              <a:buNone/>
+            </a:pPr>
+            <a:r>
+              <a:rPr lang="en-US" sz="950" b="1" dirty="0">
+                <a:solidFill>
+                  <a:srgbClr val="10B981"/>
+                </a:solidFill>
+              </a:rPr>
+              <a:t>AFTER (Optimized Google XYZ):</a:t>
+            </a:r>
+            <a:endParaRPr lang="en-US" sz="950" dirty="0"/>
+          </a:p>
+        </p:txBody>
+      </p:sp>
+      <p:sp>
+        <p:nvSpPr>
+          <p:cNvPr id="17" name="Text 15"/>
+          <p:cNvSpPr/>
+          <p:nvPr/>
+        </p:nvSpPr>
+        <p:spPr>
+          <a:xfrm>
+            <a:off x="6355080" y="3474720"/>
+            <a:ext cx="4937760" cy="548640"/>
+          </a:xfrm>
+          <a:prstGeom prst="rect">
+            <a:avLst/>
+          </a:prstGeom>
+          <a:noFill/>
+          <a:ln/>
+        </p:spPr>
+        <p:txBody>
+          <a:bodyPr wrap="square" rtlCol="0" anchor="ctr"/>
+          <a:lstStyle/>
+          <a:p>
+            <a:pPr indent="0" marL="0">
+              <a:buNone/>
+            </a:pPr>
+            <a:r>
+              <a:rPr lang="en-US" sz="1000" b="1" dirty="0">
+                <a:solidFill>
+                  <a:srgbClr val="A7F3D0"/>
+                </a:solidFill>
+              </a:rPr>
+              <a:t>"Eliminated 98% of peak-hour database deadlocks across PostgreSQL cluster by refactoring lock contention algorithms, sustaining 42k TPS during peak events."</a:t>
+            </a:r>
+            <a:endParaRPr lang="en-US" sz="1000" dirty="0"/>
+          </a:p>
+        </p:txBody>
+      </p:sp>
+      <p:sp>
+        <p:nvSpPr>
+          <p:cNvPr id="18" name="Text 16"/>
+          <p:cNvSpPr/>
+          <p:nvPr/>
+        </p:nvSpPr>
+        <p:spPr>
+          <a:xfrm>
+            <a:off x="731520" y="4297680"/>
+            <a:ext cx="10698480" cy="256032"/>
+          </a:xfrm>
+          <a:prstGeom prst="rect">
+            <a:avLst/>
+          </a:prstGeom>
+          <a:noFill/>
+          <a:ln/>
+        </p:spPr>
+        <p:txBody>
+          <a:bodyPr wrap="square" rtlCol="0" anchor="ctr"/>
+          <a:lstStyle/>
+          <a:p>
+            <a:pPr indent="0" marL="0">
+              <a:buNone/>
+            </a:pPr>
+            <a:r>
+              <a:rPr lang="en-US" sz="1150" b="1" dirty="0">
+                <a:solidFill>
+                  <a:srgbClr val="06B6D4"/>
+                </a:solidFill>
+              </a:rPr>
+              <a:t>3. High-Scale JVM Tail-Latency Tuning</a:t>
+            </a:r>
+            <a:endParaRPr lang="en-US" sz="1150" dirty="0"/>
+          </a:p>
+        </p:txBody>
+      </p:sp>
+      <p:sp>
+        <p:nvSpPr>
+          <p:cNvPr id="19" name="Shape 17"/>
+          <p:cNvSpPr/>
+          <p:nvPr/>
+        </p:nvSpPr>
+        <p:spPr>
+          <a:xfrm>
+            <a:off x="731520" y="4590288"/>
+            <a:ext cx="5120640" cy="868680"/>
+          </a:xfrm>
+          <a:prstGeom prst="roundRect">
+            <a:avLst/>
+          </a:prstGeom>
+          <a:solidFill>
+            <a:srgbClr val="181014"/>
+          </a:solidFill>
+          <a:ln w="12700">
+            <a:solidFill>
+              <a:srgbClr val="F43F5E"/>
+            </a:solidFill>
+            <a:prstDash val="solid"/>
+          </a:ln>
+        </p:spPr>
+      </p:sp>
+      <p:sp>
+        <p:nvSpPr>
+          <p:cNvPr id="20" name="Text 18"/>
+          <p:cNvSpPr/>
+          <p:nvPr/>
+        </p:nvSpPr>
+        <p:spPr>
+          <a:xfrm>
+            <a:off x="868680" y="4645152"/>
+            <a:ext cx="4846320" cy="201168"/>
+          </a:xfrm>
+          <a:prstGeom prst="rect">
+            <a:avLst/>
+          </a:prstGeom>
+          <a:noFill/>
+          <a:ln/>
+        </p:spPr>
+        <p:txBody>
+          <a:bodyPr wrap="square" rtlCol="0" anchor="ctr"/>
+          <a:lstStyle/>
+          <a:p>
+            <a:pPr indent="0" marL="0">
+              <a:buNone/>
+            </a:pPr>
+            <a:r>
+              <a:rPr lang="en-US" sz="950" b="1" dirty="0">
+                <a:solidFill>
+                  <a:srgbClr val="F43F5E"/>
+                </a:solidFill>
+              </a:rPr>
+              <a:t>BEFORE (Weak Passive Duty):</a:t>
+            </a:r>
+            <a:endParaRPr lang="en-US" sz="950" dirty="0"/>
+          </a:p>
+        </p:txBody>
+      </p:sp>
+      <p:sp>
+        <p:nvSpPr>
+          <p:cNvPr id="21" name="Text 19"/>
+          <p:cNvSpPr/>
+          <p:nvPr/>
+        </p:nvSpPr>
+        <p:spPr>
+          <a:xfrm>
+            <a:off x="868680" y="4846320"/>
+            <a:ext cx="4846320" cy="548640"/>
+          </a:xfrm>
+          <a:prstGeom prst="rect">
+            <a:avLst/>
+          </a:prstGeom>
+          <a:noFill/>
+          <a:ln/>
+        </p:spPr>
+        <p:txBody>
+          <a:bodyPr wrap="square" rtlCol="0" anchor="ctr"/>
+          <a:lstStyle/>
+          <a:p>
+            <a:pPr indent="0" marL="0">
+              <a:buNone/>
+            </a:pPr>
+            <a:r>
+              <a:rPr lang="en-US" sz="1000" dirty="0">
+                <a:solidFill>
+                  <a:srgbClr val="FDA4AF"/>
+                </a:solidFill>
+              </a:rPr>
+              <a:t>"Worked on tuning garbage collection parameters for high-throughput Java microservices."</a:t>
+            </a:r>
+            <a:endParaRPr lang="en-US" sz="1000" dirty="0"/>
+          </a:p>
+        </p:txBody>
+      </p:sp>
+      <p:sp>
+        <p:nvSpPr>
+          <p:cNvPr id="22" name="Shape 20"/>
+          <p:cNvSpPr/>
+          <p:nvPr/>
+        </p:nvSpPr>
+        <p:spPr>
+          <a:xfrm>
+            <a:off x="6217920" y="4590288"/>
+            <a:ext cx="5212080" cy="868680"/>
+          </a:xfrm>
+          <a:prstGeom prst="roundRect">
+            <a:avLst/>
+          </a:prstGeom>
+          <a:solidFill>
+            <a:srgbClr val="0D1E18"/>
+          </a:solidFill>
+          <a:ln w="12700">
+            <a:solidFill>
+              <a:srgbClr val="10B981"/>
+            </a:solidFill>
+            <a:prstDash val="solid"/>
+          </a:ln>
+        </p:spPr>
+      </p:sp>
+      <p:sp>
+        <p:nvSpPr>
+          <p:cNvPr id="23" name="Text 21"/>
+          <p:cNvSpPr/>
+          <p:nvPr/>
+        </p:nvSpPr>
+        <p:spPr>
+          <a:xfrm>
+            <a:off x="6355080" y="4645152"/>
+            <a:ext cx="4937760" cy="201168"/>
+          </a:xfrm>
+          <a:prstGeom prst="rect">
+            <a:avLst/>
+          </a:prstGeom>
+          <a:noFill/>
+          <a:ln/>
+        </p:spPr>
+        <p:txBody>
+          <a:bodyPr wrap="square" rtlCol="0" anchor="ctr"/>
+          <a:lstStyle/>
+          <a:p>
+            <a:pPr indent="0" marL="0">
+              <a:buNone/>
+            </a:pPr>
+            <a:r>
+              <a:rPr lang="en-US" sz="950" b="1" dirty="0">
+                <a:solidFill>
+                  <a:srgbClr val="10B981"/>
+                </a:solidFill>
+              </a:rPr>
+              <a:t>AFTER (Optimized Google XYZ):</a:t>
+            </a:r>
+            <a:endParaRPr lang="en-US" sz="950" dirty="0"/>
+          </a:p>
+        </p:txBody>
+      </p:sp>
+      <p:sp>
+        <p:nvSpPr>
+          <p:cNvPr id="24" name="Text 22"/>
+          <p:cNvSpPr/>
+          <p:nvPr/>
+        </p:nvSpPr>
+        <p:spPr>
+          <a:xfrm>
+            <a:off x="6355080" y="4846320"/>
+            <a:ext cx="4937760" cy="548640"/>
+          </a:xfrm>
+          <a:prstGeom prst="rect">
+            <a:avLst/>
+          </a:prstGeom>
+          <a:noFill/>
+          <a:ln/>
+        </p:spPr>
+        <p:txBody>
+          <a:bodyPr wrap="square" rtlCol="0" anchor="ctr"/>
+          <a:lstStyle/>
+          <a:p>
+            <a:pPr indent="0" marL="0">
+              <a:buNone/>
+            </a:pPr>
+            <a:r>
+              <a:rPr lang="en-US" sz="1000" b="1" dirty="0">
+                <a:solidFill>
+                  <a:srgbClr val="A7F3D0"/>
+                </a:solidFill>
+              </a:rPr>
+              <a:t>"Tuned ZGC and G1GC JVM garbage collection parameters across 180 production pods, slashing p99 tail latency by 86% from 140ms to 19ms."</a:t>
             </a:r>
             <a:endParaRPr lang="en-US" sz="1000" dirty="0"/>
           </a:p>
@@ -5537,7 +5588,7 @@
         </p:nvSpPr>
         <p:spPr>
           <a:xfrm>
-            <a:off x="731520" y="457200"/>
+            <a:off x="731520" y="548640"/>
             <a:ext cx="9144000" cy="274320"/>
           </a:xfrm>
           <a:prstGeom prst="rect">
@@ -5556,10 +5607,10 @@
             <a:r>
               <a:rPr lang="en-US" sz="1000" b="1" dirty="0">
                 <a:solidFill>
-                  <a:srgbClr val="06B6D4"/>
-                </a:solidFill>
-              </a:rPr>
-              <a:t>05 / AUDIT DASHBOARD SCREENSHOT</a:t>
+                  <a:srgbClr val="10B981"/>
+                </a:solidFill>
+              </a:rPr>
+              <a:t>05 / OPTIMIZATION RESULTS</a:t>
             </a:r>
             <a:endParaRPr lang="en-US" sz="1000" dirty="0"/>
           </a:p>
@@ -5573,31 +5624,31 @@
         </p:nvSpPr>
         <p:spPr>
           <a:xfrm>
-            <a:off x="731520" y="731520"/>
-            <a:ext cx="10515600" cy="457200"/>
-          </a:xfrm>
-          <a:prstGeom prst="rect">
-            <a:avLst/>
-          </a:prstGeom>
-          <a:noFill/>
-          <a:ln/>
-        </p:spPr>
-        <p:txBody>
-          <a:bodyPr wrap="square" rtlCol="0" anchor="ctr"/>
-          <a:lstStyle/>
-          <a:p>
-            <a:pPr indent="0" marL="0">
-              <a:buNone/>
-            </a:pPr>
-            <a:r>
-              <a:rPr lang="en-US" sz="2400" b="1" dirty="0">
+            <a:off x="731520" y="822960"/>
+            <a:ext cx="10515600" cy="548640"/>
+          </a:xfrm>
+          <a:prstGeom prst="rect">
+            <a:avLst/>
+          </a:prstGeom>
+          <a:noFill/>
+          <a:ln/>
+        </p:spPr>
+        <p:txBody>
+          <a:bodyPr wrap="square" rtlCol="0" anchor="ctr"/>
+          <a:lstStyle/>
+          <a:p>
+            <a:pPr indent="0" marL="0">
+              <a:buNone/>
+            </a:pPr>
+            <a:r>
+              <a:rPr lang="en-US" sz="2800" b="1" dirty="0">
                 <a:solidFill>
                   <a:srgbClr val="FFFFFF"/>
                 </a:solidFill>
               </a:rPr>
-              <a:t>Website Screenshot: Live ATS Dashboard (Priya Nair)</a:t>
-            </a:r>
-            <a:endParaRPr lang="en-US" sz="2400" dirty="0"/>
+              <a:t>AFTER Optimization: Boosted ATS Accuracy (96 / 100)</a:t>
+            </a:r>
+            <a:endParaRPr lang="en-US" sz="2800" dirty="0"/>
           </a:p>
         </p:txBody>
       </p:sp>
@@ -5609,210 +5660,16 @@
         </p:nvSpPr>
         <p:spPr>
           <a:xfrm>
-            <a:off x="731520" y="1325880"/>
-            <a:ext cx="10698480" cy="4572000"/>
+            <a:off x="731520" y="1645920"/>
+            <a:ext cx="3840480" cy="4206240"/>
           </a:xfrm>
           <a:prstGeom prst="roundRect">
             <a:avLst/>
           </a:prstGeom>
           <a:solidFill>
-            <a:srgbClr val="0F172A"/>
+            <a:srgbClr val="0F1E1B"/>
           </a:solidFill>
           <a:ln w="19050">
-            <a:solidFill>
-              <a:srgbClr val="334155"/>
-            </a:solidFill>
-            <a:prstDash val="solid"/>
-          </a:ln>
-        </p:spPr>
-      </p:sp>
-      <p:sp>
-        <p:nvSpPr>
-          <p:cNvPr id="5" name="Shape 3"/>
-          <p:cNvSpPr/>
-          <p:nvPr/>
-        </p:nvSpPr>
-        <p:spPr>
-          <a:xfrm>
-            <a:off x="731520" y="1325880"/>
-            <a:ext cx="10698480" cy="384048"/>
-          </a:xfrm>
-          <a:prstGeom prst="rect">
-            <a:avLst/>
-          </a:prstGeom>
-          <a:solidFill>
-            <a:srgbClr val="1E293B"/>
-          </a:solidFill>
-          <a:ln/>
-        </p:spPr>
-      </p:sp>
-      <p:sp>
-        <p:nvSpPr>
-          <p:cNvPr id="6" name="Shape 4"/>
-          <p:cNvSpPr/>
-          <p:nvPr/>
-        </p:nvSpPr>
-        <p:spPr>
-          <a:xfrm>
-            <a:off x="868680" y="1453896"/>
-            <a:ext cx="128016" cy="128016"/>
-          </a:xfrm>
-          <a:prstGeom prst="ellipse">
-            <a:avLst/>
-          </a:prstGeom>
-          <a:solidFill>
-            <a:srgbClr val="EF4444"/>
-          </a:solidFill>
-          <a:ln/>
-        </p:spPr>
-      </p:sp>
-      <p:sp>
-        <p:nvSpPr>
-          <p:cNvPr id="7" name="Shape 5"/>
-          <p:cNvSpPr/>
-          <p:nvPr/>
-        </p:nvSpPr>
-        <p:spPr>
-          <a:xfrm>
-            <a:off x="1051560" y="1453896"/>
-            <a:ext cx="128016" cy="128016"/>
-          </a:xfrm>
-          <a:prstGeom prst="ellipse">
-            <a:avLst/>
-          </a:prstGeom>
-          <a:solidFill>
-            <a:srgbClr val="F59E0B"/>
-          </a:solidFill>
-          <a:ln/>
-        </p:spPr>
-      </p:sp>
-      <p:sp>
-        <p:nvSpPr>
-          <p:cNvPr id="8" name="Shape 6"/>
-          <p:cNvSpPr/>
-          <p:nvPr/>
-        </p:nvSpPr>
-        <p:spPr>
-          <a:xfrm>
-            <a:off x="1234440" y="1453896"/>
-            <a:ext cx="128016" cy="128016"/>
-          </a:xfrm>
-          <a:prstGeom prst="ellipse">
-            <a:avLst/>
-          </a:prstGeom>
-          <a:solidFill>
-            <a:srgbClr val="10B981"/>
-          </a:solidFill>
-          <a:ln/>
-        </p:spPr>
-      </p:sp>
-      <p:sp>
-        <p:nvSpPr>
-          <p:cNvPr id="9" name="Shape 7"/>
-          <p:cNvSpPr/>
-          <p:nvPr/>
-        </p:nvSpPr>
-        <p:spPr>
-          <a:xfrm>
-            <a:off x="1554480" y="1399032"/>
-            <a:ext cx="9052560" cy="237744"/>
-          </a:xfrm>
-          <a:prstGeom prst="roundRect">
-            <a:avLst/>
-          </a:prstGeom>
-          <a:solidFill>
-            <a:srgbClr val="0F172A"/>
-          </a:solidFill>
-          <a:ln w="12700">
-            <a:solidFill>
-              <a:srgbClr val="334155"/>
-            </a:solidFill>
-            <a:prstDash val="solid"/>
-          </a:ln>
-        </p:spPr>
-      </p:sp>
-      <p:sp>
-        <p:nvSpPr>
-          <p:cNvPr id="10" name="Text 8"/>
-          <p:cNvSpPr/>
-          <p:nvPr/>
-        </p:nvSpPr>
-        <p:spPr>
-          <a:xfrm>
-            <a:off x="1645920" y="1399032"/>
-            <a:ext cx="8869680" cy="237744"/>
-          </a:xfrm>
-          <a:prstGeom prst="rect">
-            <a:avLst/>
-          </a:prstGeom>
-          <a:noFill/>
-          <a:ln/>
-        </p:spPr>
-        <p:txBody>
-          <a:bodyPr wrap="square" rtlCol="0" anchor="ctr"/>
-          <a:lstStyle/>
-          <a:p>
-            <a:pPr indent="0" marL="0">
-              <a:buNone/>
-            </a:pPr>
-            <a:r>
-              <a:rPr lang="en-US" sz="900" dirty="0">
-                <a:solidFill>
-                  <a:srgbClr val="94A3B8"/>
-                </a:solidFill>
-                <a:latin typeface="Calibri" pitchFamily="34" charset="0"/>
-                <a:ea typeface="Calibri" pitchFamily="34" charset="-122"/>
-                <a:cs typeface="Calibri" pitchFamily="34" charset="-120"/>
-              </a:rPr>
-              <a:t>🔒 https://careerpulse.ai/analyzer/priya-nair</a:t>
-            </a:r>
-            <a:endParaRPr lang="en-US" sz="900" dirty="0"/>
-          </a:p>
-        </p:txBody>
-      </p:sp>
-      <p:sp>
-        <p:nvSpPr>
-          <p:cNvPr id="11" name="Shape 9"/>
-          <p:cNvSpPr/>
-          <p:nvPr/>
-        </p:nvSpPr>
-        <p:spPr>
-          <a:xfrm>
-            <a:off x="1005840" y="1828800"/>
-            <a:ext cx="3291840" cy="3886200"/>
-          </a:xfrm>
-          <a:prstGeom prst="roundRect">
-            <a:avLst/>
-          </a:prstGeom>
-          <a:solidFill>
-            <a:srgbClr val="151E32"/>
-          </a:solidFill>
-          <a:ln w="12700">
-            <a:solidFill>
-              <a:srgbClr val="22314E"/>
-            </a:solidFill>
-            <a:prstDash val="solid"/>
-          </a:ln>
-        </p:spPr>
-      </p:sp>
-      <p:sp>
-        <p:nvSpPr>
-          <p:cNvPr id="12" name="Shape 10"/>
-          <p:cNvSpPr/>
-          <p:nvPr/>
-        </p:nvSpPr>
-        <p:spPr>
-          <a:xfrm>
-            <a:off x="1828800" y="2011680"/>
-            <a:ext cx="1645920" cy="1645920"/>
-          </a:xfrm>
-          <a:prstGeom prst="ellipse">
-            <a:avLst/>
-          </a:prstGeom>
-          <a:solidFill>
-            <a:srgbClr val="0F172A"/>
-          </a:solidFill>
-          <a:ln w="50800">
             <a:solidFill>
               <a:srgbClr val="10B981"/>
             </a:solidFill>
@@ -5822,71 +5679,431 @@
       </p:sp>
       <p:sp>
         <p:nvSpPr>
+          <p:cNvPr id="5" name="Text 3"/>
+          <p:cNvSpPr/>
+          <p:nvPr/>
+        </p:nvSpPr>
+        <p:spPr>
+          <a:xfrm>
+            <a:off x="1005840" y="1874520"/>
+            <a:ext cx="3291840" cy="274320"/>
+          </a:xfrm>
+          <a:prstGeom prst="rect">
+            <a:avLst/>
+          </a:prstGeom>
+          <a:noFill/>
+          <a:ln/>
+        </p:spPr>
+        <p:txBody>
+          <a:bodyPr wrap="square" rtlCol="0" anchor="ctr"/>
+          <a:lstStyle/>
+          <a:p>
+            <a:pPr algn="ctr" indent="0" marL="0">
+              <a:buNone/>
+            </a:pPr>
+            <a:r>
+              <a:rPr lang="en-US" sz="1300" b="1" dirty="0">
+                <a:solidFill>
+                  <a:srgbClr val="A7F3D0"/>
+                </a:solidFill>
+              </a:rPr>
+              <a:t>Boosted Post-Audit Score</a:t>
+            </a:r>
+            <a:endParaRPr lang="en-US" sz="1300" dirty="0"/>
+          </a:p>
+        </p:txBody>
+      </p:sp>
+      <p:sp>
+        <p:nvSpPr>
+          <p:cNvPr id="6" name="Text 4"/>
+          <p:cNvSpPr/>
+          <p:nvPr/>
+        </p:nvSpPr>
+        <p:spPr>
+          <a:xfrm>
+            <a:off x="1005840" y="2148840"/>
+            <a:ext cx="3291840" cy="731520"/>
+          </a:xfrm>
+          <a:prstGeom prst="rect">
+            <a:avLst/>
+          </a:prstGeom>
+          <a:noFill/>
+          <a:ln/>
+        </p:spPr>
+        <p:txBody>
+          <a:bodyPr wrap="square" rtlCol="0" anchor="ctr"/>
+          <a:lstStyle/>
+          <a:p>
+            <a:pPr algn="ctr" indent="0" marL="0">
+              <a:buNone/>
+            </a:pPr>
+            <a:r>
+              <a:rPr lang="en-US" sz="4400" b="1" dirty="0">
+                <a:solidFill>
+                  <a:srgbClr val="10B981"/>
+                </a:solidFill>
+              </a:rPr>
+              <a:t>96</a:t>
+            </a:r>
+            <a:endParaRPr lang="en-US" sz="4400" dirty="0"/>
+          </a:p>
+        </p:txBody>
+      </p:sp>
+      <p:sp>
+        <p:nvSpPr>
+          <p:cNvPr id="7" name="Text 5"/>
+          <p:cNvSpPr/>
+          <p:nvPr/>
+        </p:nvSpPr>
+        <p:spPr>
+          <a:xfrm>
+            <a:off x="1005840" y="2880360"/>
+            <a:ext cx="3291840" cy="274320"/>
+          </a:xfrm>
+          <a:prstGeom prst="rect">
+            <a:avLst/>
+          </a:prstGeom>
+          <a:noFill/>
+          <a:ln/>
+        </p:spPr>
+        <p:txBody>
+          <a:bodyPr wrap="square" rtlCol="0" anchor="ctr"/>
+          <a:lstStyle/>
+          <a:p>
+            <a:pPr algn="ctr" indent="0" marL="0">
+              <a:buNone/>
+            </a:pPr>
+            <a:r>
+              <a:rPr lang="en-US" sz="1050" dirty="0">
+                <a:solidFill>
+                  <a:srgbClr val="94A3B8"/>
+                </a:solidFill>
+              </a:rPr>
+              <a:t>/ 100 — Exceptional Tier (+28 Point Boost)</a:t>
+            </a:r>
+            <a:endParaRPr lang="en-US" sz="1050" dirty="0"/>
+          </a:p>
+        </p:txBody>
+      </p:sp>
+      <p:sp>
+        <p:nvSpPr>
+          <p:cNvPr id="8" name="Text 6"/>
+          <p:cNvSpPr/>
+          <p:nvPr/>
+        </p:nvSpPr>
+        <p:spPr>
+          <a:xfrm>
+            <a:off x="1005840" y="3291840"/>
+            <a:ext cx="2194560" cy="228600"/>
+          </a:xfrm>
+          <a:prstGeom prst="rect">
+            <a:avLst/>
+          </a:prstGeom>
+          <a:noFill/>
+          <a:ln/>
+        </p:spPr>
+        <p:txBody>
+          <a:bodyPr wrap="square" rtlCol="0" anchor="ctr"/>
+          <a:lstStyle/>
+          <a:p>
+            <a:pPr indent="0" marL="0">
+              <a:buNone/>
+            </a:pPr>
+            <a:r>
+              <a:rPr lang="en-US" sz="1000" dirty="0">
+                <a:solidFill>
+                  <a:srgbClr val="FFFFFF"/>
+                </a:solidFill>
+              </a:rPr>
+              <a:t>ATS Machine Parsability:</a:t>
+            </a:r>
+            <a:endParaRPr lang="en-US" sz="1000" dirty="0"/>
+          </a:p>
+        </p:txBody>
+      </p:sp>
+      <p:sp>
+        <p:nvSpPr>
+          <p:cNvPr id="9" name="Text 7"/>
+          <p:cNvSpPr/>
+          <p:nvPr/>
+        </p:nvSpPr>
+        <p:spPr>
+          <a:xfrm>
+            <a:off x="3200400" y="3291840"/>
+            <a:ext cx="1097280" cy="228600"/>
+          </a:xfrm>
+          <a:prstGeom prst="rect">
+            <a:avLst/>
+          </a:prstGeom>
+          <a:noFill/>
+          <a:ln/>
+        </p:spPr>
+        <p:txBody>
+          <a:bodyPr wrap="square" rtlCol="0" anchor="ctr"/>
+          <a:lstStyle/>
+          <a:p>
+            <a:pPr algn="r" indent="0" marL="0">
+              <a:buNone/>
+            </a:pPr>
+            <a:r>
+              <a:rPr lang="en-US" sz="1000" b="1" dirty="0">
+                <a:solidFill>
+                  <a:srgbClr val="10B981"/>
+                </a:solidFill>
+              </a:rPr>
+              <a:t>94% (+20%)</a:t>
+            </a:r>
+            <a:endParaRPr lang="en-US" sz="1000" dirty="0"/>
+          </a:p>
+        </p:txBody>
+      </p:sp>
+      <p:sp>
+        <p:nvSpPr>
+          <p:cNvPr id="10" name="Text 8"/>
+          <p:cNvSpPr/>
+          <p:nvPr/>
+        </p:nvSpPr>
+        <p:spPr>
+          <a:xfrm>
+            <a:off x="1005840" y="3611880"/>
+            <a:ext cx="2194560" cy="228600"/>
+          </a:xfrm>
+          <a:prstGeom prst="rect">
+            <a:avLst/>
+          </a:prstGeom>
+          <a:noFill/>
+          <a:ln/>
+        </p:spPr>
+        <p:txBody>
+          <a:bodyPr wrap="square" rtlCol="0" anchor="ctr"/>
+          <a:lstStyle/>
+          <a:p>
+            <a:pPr indent="0" marL="0">
+              <a:buNone/>
+            </a:pPr>
+            <a:r>
+              <a:rPr lang="en-US" sz="1000" dirty="0">
+                <a:solidFill>
+                  <a:srgbClr val="FFFFFF"/>
+                </a:solidFill>
+              </a:rPr>
+              <a:t>Quantifiable ROI &amp; Metrics:</a:t>
+            </a:r>
+            <a:endParaRPr lang="en-US" sz="1000" dirty="0"/>
+          </a:p>
+        </p:txBody>
+      </p:sp>
+      <p:sp>
+        <p:nvSpPr>
+          <p:cNvPr id="11" name="Text 9"/>
+          <p:cNvSpPr/>
+          <p:nvPr/>
+        </p:nvSpPr>
+        <p:spPr>
+          <a:xfrm>
+            <a:off x="3200400" y="3611880"/>
+            <a:ext cx="1097280" cy="228600"/>
+          </a:xfrm>
+          <a:prstGeom prst="rect">
+            <a:avLst/>
+          </a:prstGeom>
+          <a:noFill/>
+          <a:ln/>
+        </p:spPr>
+        <p:txBody>
+          <a:bodyPr wrap="square" rtlCol="0" anchor="ctr"/>
+          <a:lstStyle/>
+          <a:p>
+            <a:pPr algn="r" indent="0" marL="0">
+              <a:buNone/>
+            </a:pPr>
+            <a:r>
+              <a:rPr lang="en-US" sz="1000" b="1" dirty="0">
+                <a:solidFill>
+                  <a:srgbClr val="10B981"/>
+                </a:solidFill>
+              </a:rPr>
+              <a:t>96% (+34%)</a:t>
+            </a:r>
+            <a:endParaRPr lang="en-US" sz="1000" dirty="0"/>
+          </a:p>
+        </p:txBody>
+      </p:sp>
+      <p:sp>
+        <p:nvSpPr>
+          <p:cNvPr id="12" name="Text 10"/>
+          <p:cNvSpPr/>
+          <p:nvPr/>
+        </p:nvSpPr>
+        <p:spPr>
+          <a:xfrm>
+            <a:off x="1005840" y="3931920"/>
+            <a:ext cx="2194560" cy="228600"/>
+          </a:xfrm>
+          <a:prstGeom prst="rect">
+            <a:avLst/>
+          </a:prstGeom>
+          <a:noFill/>
+          <a:ln/>
+        </p:spPr>
+        <p:txBody>
+          <a:bodyPr wrap="square" rtlCol="0" anchor="ctr"/>
+          <a:lstStyle/>
+          <a:p>
+            <a:pPr indent="0" marL="0">
+              <a:buNone/>
+            </a:pPr>
+            <a:r>
+              <a:rPr lang="en-US" sz="1000" dirty="0">
+                <a:solidFill>
+                  <a:srgbClr val="FFFFFF"/>
+                </a:solidFill>
+              </a:rPr>
+              <a:t>Action Verbs &amp; Active Voice:</a:t>
+            </a:r>
+            <a:endParaRPr lang="en-US" sz="1000" dirty="0"/>
+          </a:p>
+        </p:txBody>
+      </p:sp>
+      <p:sp>
+        <p:nvSpPr>
           <p:cNvPr id="13" name="Text 11"/>
           <p:cNvSpPr/>
           <p:nvPr/>
         </p:nvSpPr>
         <p:spPr>
           <a:xfrm>
-            <a:off x="1828800" y="2286000"/>
-            <a:ext cx="1645920" cy="640080"/>
-          </a:xfrm>
-          <a:prstGeom prst="rect">
-            <a:avLst/>
-          </a:prstGeom>
-          <a:noFill/>
-          <a:ln/>
-        </p:spPr>
-        <p:txBody>
-          <a:bodyPr wrap="square" rtlCol="0" anchor="ctr"/>
-          <a:lstStyle/>
-          <a:p>
-            <a:pPr algn="ctr" indent="0" marL="0">
-              <a:buNone/>
-            </a:pPr>
-            <a:r>
-              <a:rPr lang="en-US" sz="3600" b="1" dirty="0">
+            <a:off x="3200400" y="3931920"/>
+            <a:ext cx="1097280" cy="228600"/>
+          </a:xfrm>
+          <a:prstGeom prst="rect">
+            <a:avLst/>
+          </a:prstGeom>
+          <a:noFill/>
+          <a:ln/>
+        </p:spPr>
+        <p:txBody>
+          <a:bodyPr wrap="square" rtlCol="0" anchor="ctr"/>
+          <a:lstStyle/>
+          <a:p>
+            <a:pPr algn="r" indent="0" marL="0">
+              <a:buNone/>
+            </a:pPr>
+            <a:r>
+              <a:rPr lang="en-US" sz="1000" b="1" dirty="0">
+                <a:solidFill>
+                  <a:srgbClr val="10B981"/>
+                </a:solidFill>
+              </a:rPr>
+              <a:t>95% (+30%)</a:t>
+            </a:r>
+            <a:endParaRPr lang="en-US" sz="1000" dirty="0"/>
+          </a:p>
+        </p:txBody>
+      </p:sp>
+      <p:sp>
+        <p:nvSpPr>
+          <p:cNvPr id="14" name="Text 12"/>
+          <p:cNvSpPr/>
+          <p:nvPr/>
+        </p:nvSpPr>
+        <p:spPr>
+          <a:xfrm>
+            <a:off x="1005840" y="4251960"/>
+            <a:ext cx="2194560" cy="228600"/>
+          </a:xfrm>
+          <a:prstGeom prst="rect">
+            <a:avLst/>
+          </a:prstGeom>
+          <a:noFill/>
+          <a:ln/>
+        </p:spPr>
+        <p:txBody>
+          <a:bodyPr wrap="square" rtlCol="0" anchor="ctr"/>
+          <a:lstStyle/>
+          <a:p>
+            <a:pPr indent="0" marL="0">
+              <a:buNone/>
+            </a:pPr>
+            <a:r>
+              <a:rPr lang="en-US" sz="1000" dirty="0">
                 <a:solidFill>
                   <a:srgbClr val="FFFFFF"/>
                 </a:solidFill>
               </a:rPr>
-              <a:t>86</a:t>
-            </a:r>
-            <a:endParaRPr lang="en-US" sz="3600" dirty="0"/>
-          </a:p>
-        </p:txBody>
-      </p:sp>
-      <p:sp>
-        <p:nvSpPr>
-          <p:cNvPr id="14" name="Text 12"/>
-          <p:cNvSpPr/>
-          <p:nvPr/>
-        </p:nvSpPr>
-        <p:spPr>
-          <a:xfrm>
-            <a:off x="1828800" y="2834640"/>
-            <a:ext cx="1645920" cy="274320"/>
-          </a:xfrm>
-          <a:prstGeom prst="rect">
-            <a:avLst/>
-          </a:prstGeom>
-          <a:noFill/>
-          <a:ln/>
-        </p:spPr>
-        <p:txBody>
-          <a:bodyPr wrap="square" rtlCol="0" anchor="ctr"/>
-          <a:lstStyle/>
-          <a:p>
-            <a:pPr algn="ctr" indent="0" marL="0">
+              <a:t>Keyword &amp; Skill Alignment:</a:t>
+            </a:r>
+            <a:endParaRPr lang="en-US" sz="1000" dirty="0"/>
+          </a:p>
+        </p:txBody>
+      </p:sp>
+      <p:sp>
+        <p:nvSpPr>
+          <p:cNvPr id="15" name="Text 13"/>
+          <p:cNvSpPr/>
+          <p:nvPr/>
+        </p:nvSpPr>
+        <p:spPr>
+          <a:xfrm>
+            <a:off x="3200400" y="4251960"/>
+            <a:ext cx="1097280" cy="228600"/>
+          </a:xfrm>
+          <a:prstGeom prst="rect">
+            <a:avLst/>
+          </a:prstGeom>
+          <a:noFill/>
+          <a:ln/>
+        </p:spPr>
+        <p:txBody>
+          <a:bodyPr wrap="square" rtlCol="0" anchor="ctr"/>
+          <a:lstStyle/>
+          <a:p>
+            <a:pPr algn="r" indent="0" marL="0">
+              <a:buNone/>
+            </a:pPr>
+            <a:r>
+              <a:rPr lang="en-US" sz="1000" b="1" dirty="0">
+                <a:solidFill>
+                  <a:srgbClr val="10B981"/>
+                </a:solidFill>
+              </a:rPr>
+              <a:t>96% (+28%)</a:t>
+            </a:r>
+            <a:endParaRPr lang="en-US" sz="1000" dirty="0"/>
+          </a:p>
+        </p:txBody>
+      </p:sp>
+      <p:sp>
+        <p:nvSpPr>
+          <p:cNvPr id="16" name="Text 14"/>
+          <p:cNvSpPr/>
+          <p:nvPr/>
+        </p:nvSpPr>
+        <p:spPr>
+          <a:xfrm>
+            <a:off x="1005840" y="4572000"/>
+            <a:ext cx="2194560" cy="228600"/>
+          </a:xfrm>
+          <a:prstGeom prst="rect">
+            <a:avLst/>
+          </a:prstGeom>
+          <a:noFill/>
+          <a:ln/>
+        </p:spPr>
+        <p:txBody>
+          <a:bodyPr wrap="square" rtlCol="0" anchor="ctr"/>
+          <a:lstStyle/>
+          <a:p>
+            <a:pPr indent="0" marL="0">
               <a:buNone/>
             </a:pPr>
             <a:r>
               <a:rPr lang="en-US" sz="1000" dirty="0">
                 <a:solidFill>
-                  <a:srgbClr val="94A3B8"/>
-                </a:solidFill>
-              </a:rPr>
-              <a:t>/ 100</a:t>
+                  <a:srgbClr val="FFFFFF"/>
+                </a:solidFill>
+              </a:rPr>
+              <a:t>Formatting &amp; Visual Brevity:</a:t>
             </a:r>
             <a:endParaRPr lang="en-US" sz="1000" dirty="0"/>
           </a:p>
@@ -5894,109 +6111,37 @@
       </p:sp>
       <p:sp>
         <p:nvSpPr>
-          <p:cNvPr id="15" name="Text 13"/>
-          <p:cNvSpPr/>
-          <p:nvPr/>
-        </p:nvSpPr>
-        <p:spPr>
-          <a:xfrm>
-            <a:off x="1097280" y="3794760"/>
-            <a:ext cx="3108960" cy="320040"/>
-          </a:xfrm>
-          <a:prstGeom prst="rect">
-            <a:avLst/>
-          </a:prstGeom>
-          <a:noFill/>
-          <a:ln/>
-        </p:spPr>
-        <p:txBody>
-          <a:bodyPr wrap="square" rtlCol="0" anchor="ctr"/>
-          <a:lstStyle/>
-          <a:p>
-            <a:pPr algn="ctr" indent="0" marL="0">
-              <a:buNone/>
-            </a:pPr>
-            <a:r>
-              <a:rPr lang="en-US" sz="1300" b="1" dirty="0">
+          <p:cNvPr id="17" name="Text 15"/>
+          <p:cNvSpPr/>
+          <p:nvPr/>
+        </p:nvSpPr>
+        <p:spPr>
+          <a:xfrm>
+            <a:off x="3200400" y="4572000"/>
+            <a:ext cx="1097280" cy="228600"/>
+          </a:xfrm>
+          <a:prstGeom prst="rect">
+            <a:avLst/>
+          </a:prstGeom>
+          <a:noFill/>
+          <a:ln/>
+        </p:spPr>
+        <p:txBody>
+          <a:bodyPr wrap="square" rtlCol="0" anchor="ctr"/>
+          <a:lstStyle/>
+          <a:p>
+            <a:pPr algn="r" indent="0" marL="0">
+              <a:buNone/>
+            </a:pPr>
+            <a:r>
+              <a:rPr lang="en-US" sz="1000" b="1" dirty="0">
                 <a:solidFill>
                   <a:srgbClr val="10B981"/>
                 </a:solidFill>
               </a:rPr>
-              <a:t>Exceptional Tier</a:t>
-            </a:r>
-            <a:endParaRPr lang="en-US" sz="1300" dirty="0"/>
-          </a:p>
-        </p:txBody>
-      </p:sp>
-      <p:sp>
-        <p:nvSpPr>
-          <p:cNvPr id="16" name="Text 14"/>
-          <p:cNvSpPr/>
-          <p:nvPr/>
-        </p:nvSpPr>
-        <p:spPr>
-          <a:xfrm>
-            <a:off x="1097280" y="4069080"/>
-            <a:ext cx="3108960" cy="274320"/>
-          </a:xfrm>
-          <a:prstGeom prst="rect">
-            <a:avLst/>
-          </a:prstGeom>
-          <a:noFill/>
-          <a:ln/>
-        </p:spPr>
-        <p:txBody>
-          <a:bodyPr wrap="square" rtlCol="0" anchor="ctr"/>
-          <a:lstStyle/>
-          <a:p>
-            <a:pPr algn="ctr" indent="0" marL="0">
-              <a:buNone/>
-            </a:pPr>
-            <a:r>
-              <a:rPr lang="en-US" sz="950" dirty="0">
-                <a:solidFill>
-                  <a:srgbClr val="94A3B8"/>
-                </a:solidFill>
-              </a:rPr>
-              <a:t>Interview Ready • Top 5% of Staff Applicants</a:t>
-            </a:r>
-            <a:endParaRPr lang="en-US" sz="950" dirty="0"/>
-          </a:p>
-        </p:txBody>
-      </p:sp>
-      <p:sp>
-        <p:nvSpPr>
-          <p:cNvPr id="17" name="Text 15"/>
-          <p:cNvSpPr/>
-          <p:nvPr/>
-        </p:nvSpPr>
-        <p:spPr>
-          <a:xfrm>
-            <a:off x="1188720" y="4434840"/>
-            <a:ext cx="2926080" cy="228600"/>
-          </a:xfrm>
-          <a:prstGeom prst="rect">
-            <a:avLst/>
-          </a:prstGeom>
-          <a:noFill/>
-          <a:ln/>
-        </p:spPr>
-        <p:txBody>
-          <a:bodyPr wrap="square" rtlCol="0" anchor="ctr"/>
-          <a:lstStyle/>
-          <a:p>
-            <a:pPr indent="0" marL="0">
-              <a:buNone/>
-            </a:pPr>
-            <a:r>
-              <a:rPr lang="en-US" sz="900" dirty="0">
-                <a:solidFill>
-                  <a:srgbClr val="FFFFFF"/>
-                </a:solidFill>
-              </a:rPr>
-              <a:t>ATS Parsability: 92%</a:t>
-            </a:r>
-            <a:endParaRPr lang="en-US" sz="900" dirty="0"/>
+              <a:t>98% (+26%)</a:t>
+            </a:r>
+            <a:endParaRPr lang="en-US" sz="1000" dirty="0"/>
           </a:p>
         </p:txBody>
       </p:sp>
@@ -6008,16 +6153,21 @@
         </p:nvSpPr>
         <p:spPr>
           <a:xfrm>
-            <a:off x="1188720" y="4663440"/>
-            <a:ext cx="2651760" cy="73152"/>
-          </a:xfrm>
-          <a:prstGeom prst="rect">
+            <a:off x="4937760" y="1645920"/>
+            <a:ext cx="6492240" cy="4206240"/>
+          </a:xfrm>
+          <a:prstGeom prst="roundRect">
             <a:avLst/>
           </a:prstGeom>
           <a:solidFill>
-            <a:srgbClr val="10B981"/>
+            <a:srgbClr val="131B2E"/>
           </a:solidFill>
-          <a:ln/>
+          <a:ln w="19050">
+            <a:solidFill>
+              <a:srgbClr val="23324E"/>
+            </a:solidFill>
+            <a:prstDash val="solid"/>
+          </a:ln>
         </p:spPr>
       </p:sp>
       <p:sp>
@@ -6028,31 +6178,31 @@
         </p:nvSpPr>
         <p:spPr>
           <a:xfrm>
-            <a:off x="1188720" y="4800600"/>
-            <a:ext cx="2926080" cy="228600"/>
-          </a:xfrm>
-          <a:prstGeom prst="rect">
-            <a:avLst/>
-          </a:prstGeom>
-          <a:noFill/>
-          <a:ln/>
-        </p:spPr>
-        <p:txBody>
-          <a:bodyPr wrap="square" rtlCol="0" anchor="ctr"/>
-          <a:lstStyle/>
-          <a:p>
-            <a:pPr indent="0" marL="0">
-              <a:buNone/>
-            </a:pPr>
-            <a:r>
-              <a:rPr lang="en-US" sz="900" dirty="0">
-                <a:solidFill>
-                  <a:srgbClr val="FFFFFF"/>
-                </a:solidFill>
-              </a:rPr>
-              <a:t>Quantifiable Impact: 84%</a:t>
-            </a:r>
-            <a:endParaRPr lang="en-US" sz="900" dirty="0"/>
+            <a:off x="5212080" y="1874520"/>
+            <a:ext cx="5943600" cy="320040"/>
+          </a:xfrm>
+          <a:prstGeom prst="rect">
+            <a:avLst/>
+          </a:prstGeom>
+          <a:noFill/>
+          <a:ln/>
+        </p:spPr>
+        <p:txBody>
+          <a:bodyPr wrap="square" rtlCol="0" anchor="ctr"/>
+          <a:lstStyle/>
+          <a:p>
+            <a:pPr indent="0" marL="0">
+              <a:buNone/>
+            </a:pPr>
+            <a:r>
+              <a:rPr lang="en-US" sz="1500" b="1" dirty="0">
+                <a:solidFill>
+                  <a:srgbClr val="A7F3D0"/>
+                </a:solidFill>
+              </a:rPr>
+              <a:t>Verified ATS Accuracy &amp; Conversion Impact</a:t>
+            </a:r>
+            <a:endParaRPr lang="en-US" sz="1500" dirty="0"/>
           </a:p>
         </p:txBody>
       </p:sp>
@@ -6064,94 +6214,18 @@
         </p:nvSpPr>
         <p:spPr>
           <a:xfrm>
-            <a:off x="1188720" y="5029200"/>
-            <a:ext cx="2377440" cy="73152"/>
-          </a:xfrm>
-          <a:prstGeom prst="rect">
+            <a:off x="5212080" y="2331720"/>
+            <a:ext cx="5943600" cy="804672"/>
+          </a:xfrm>
+          <a:prstGeom prst="roundRect">
             <a:avLst/>
           </a:prstGeom>
           <a:solidFill>
-            <a:srgbClr val="06B6D4"/>
-          </a:solidFill>
-          <a:ln/>
-        </p:spPr>
-      </p:sp>
-      <p:sp>
-        <p:nvSpPr>
-          <p:cNvPr id="21" name="Text 19"/>
-          <p:cNvSpPr/>
-          <p:nvPr/>
-        </p:nvSpPr>
-        <p:spPr>
-          <a:xfrm>
-            <a:off x="1188720" y="5166360"/>
-            <a:ext cx="2926080" cy="228600"/>
-          </a:xfrm>
-          <a:prstGeom prst="rect">
-            <a:avLst/>
-          </a:prstGeom>
-          <a:noFill/>
-          <a:ln/>
-        </p:spPr>
-        <p:txBody>
-          <a:bodyPr wrap="square" rtlCol="0" anchor="ctr"/>
-          <a:lstStyle/>
-          <a:p>
-            <a:pPr indent="0" marL="0">
-              <a:buNone/>
-            </a:pPr>
-            <a:r>
-              <a:rPr lang="en-US" sz="900" dirty="0">
-                <a:solidFill>
-                  <a:srgbClr val="FFFFFF"/>
-                </a:solidFill>
-              </a:rPr>
-              <a:t>Action Verbs &amp; Ownership: 79%</a:t>
-            </a:r>
-            <a:endParaRPr lang="en-US" sz="900" dirty="0"/>
-          </a:p>
-        </p:txBody>
-      </p:sp>
-      <p:sp>
-        <p:nvSpPr>
-          <p:cNvPr id="22" name="Shape 20"/>
-          <p:cNvSpPr/>
-          <p:nvPr/>
-        </p:nvSpPr>
-        <p:spPr>
-          <a:xfrm>
-            <a:off x="1188720" y="5394960"/>
-            <a:ext cx="2194560" cy="73152"/>
-          </a:xfrm>
-          <a:prstGeom prst="rect">
-            <a:avLst/>
-          </a:prstGeom>
-          <a:solidFill>
-            <a:srgbClr val="F59E0B"/>
-          </a:solidFill>
-          <a:ln/>
-        </p:spPr>
-      </p:sp>
-      <p:sp>
-        <p:nvSpPr>
-          <p:cNvPr id="23" name="Shape 21"/>
-          <p:cNvSpPr/>
-          <p:nvPr/>
-        </p:nvSpPr>
-        <p:spPr>
-          <a:xfrm>
-            <a:off x="4480560" y="1828800"/>
-            <a:ext cx="6675120" cy="1874520"/>
-          </a:xfrm>
-          <a:prstGeom prst="roundRect">
-            <a:avLst/>
-          </a:prstGeom>
-          <a:solidFill>
-            <a:srgbClr val="151E32"/>
+            <a:srgbClr val="0B0F19"/>
           </a:solidFill>
           <a:ln w="12700">
             <a:solidFill>
-              <a:srgbClr val="22314E"/>
+              <a:srgbClr val="0F281E"/>
             </a:solidFill>
             <a:prstDash val="solid"/>
           </a:ln>
@@ -6159,60 +6233,96 @@
       </p:sp>
       <p:sp>
         <p:nvSpPr>
-          <p:cNvPr id="24" name="Text 22"/>
-          <p:cNvSpPr/>
-          <p:nvPr/>
-        </p:nvSpPr>
-        <p:spPr>
-          <a:xfrm>
-            <a:off x="4663440" y="1965960"/>
-            <a:ext cx="4572000" cy="274320"/>
-          </a:xfrm>
-          <a:prstGeom prst="rect">
-            <a:avLst/>
-          </a:prstGeom>
-          <a:noFill/>
-          <a:ln/>
-        </p:spPr>
-        <p:txBody>
-          <a:bodyPr wrap="square" rtlCol="0" anchor="ctr"/>
-          <a:lstStyle/>
-          <a:p>
-            <a:pPr indent="0" marL="0">
-              <a:buNone/>
-            </a:pPr>
-            <a:r>
-              <a:rPr lang="en-US" sz="1200" b="1" dirty="0">
-                <a:solidFill>
-                  <a:srgbClr val="6366F1"/>
-                </a:solidFill>
-              </a:rPr>
-              <a:t>Google XYZ Bullet Optimization</a:t>
-            </a:r>
-            <a:endParaRPr lang="en-US" sz="1200" dirty="0"/>
-          </a:p>
-        </p:txBody>
-      </p:sp>
-      <p:sp>
-        <p:nvSpPr>
-          <p:cNvPr id="25" name="Shape 23"/>
-          <p:cNvSpPr/>
-          <p:nvPr/>
-        </p:nvSpPr>
-        <p:spPr>
-          <a:xfrm>
-            <a:off x="4663440" y="2267712"/>
-            <a:ext cx="6309360" cy="594360"/>
+          <p:cNvPr id="21" name="Text 19"/>
+          <p:cNvSpPr/>
+          <p:nvPr/>
+        </p:nvSpPr>
+        <p:spPr>
+          <a:xfrm>
+            <a:off x="5349240" y="2404872"/>
+            <a:ext cx="5669280" cy="228600"/>
+          </a:xfrm>
+          <a:prstGeom prst="rect">
+            <a:avLst/>
+          </a:prstGeom>
+          <a:noFill/>
+          <a:ln/>
+        </p:spPr>
+        <p:txBody>
+          <a:bodyPr wrap="square" rtlCol="0" anchor="ctr"/>
+          <a:lstStyle/>
+          <a:p>
+            <a:pPr indent="0" marL="0">
+              <a:buNone/>
+            </a:pPr>
+            <a:r>
+              <a:rPr lang="en-US" sz="1100" b="1" dirty="0">
+                <a:solidFill>
+                  <a:srgbClr val="6EE7B7"/>
+                </a:solidFill>
+              </a:rPr>
+              <a:t>1. Machine Parsability Verification (94%)</a:t>
+            </a:r>
+            <a:endParaRPr lang="en-US" sz="1100" dirty="0"/>
+          </a:p>
+        </p:txBody>
+      </p:sp>
+      <p:sp>
+        <p:nvSpPr>
+          <p:cNvPr id="22" name="Text 20"/>
+          <p:cNvSpPr/>
+          <p:nvPr/>
+        </p:nvSpPr>
+        <p:spPr>
+          <a:xfrm>
+            <a:off x="5349240" y="2651760"/>
+            <a:ext cx="5669280" cy="438912"/>
+          </a:xfrm>
+          <a:prstGeom prst="rect">
+            <a:avLst/>
+          </a:prstGeom>
+          <a:noFill/>
+          <a:ln/>
+        </p:spPr>
+        <p:txBody>
+          <a:bodyPr wrap="square" rtlCol="0" anchor="ctr"/>
+          <a:lstStyle/>
+          <a:p>
+            <a:pPr indent="0" marL="0">
+              <a:buNone/>
+            </a:pPr>
+            <a:r>
+              <a:rPr lang="en-US" sz="950" dirty="0">
+                <a:solidFill>
+                  <a:srgbClr val="94A3B8"/>
+                </a:solidFill>
+              </a:rPr>
+              <a:t>Conforms to 100% block sequence standards across Workday, Greenhouse, Lever, and Taleo ATS parsers without text clipping.</a:t>
+            </a:r>
+            <a:endParaRPr lang="en-US" sz="950" dirty="0"/>
+          </a:p>
+        </p:txBody>
+      </p:sp>
+      <p:sp>
+        <p:nvSpPr>
+          <p:cNvPr id="23" name="Shape 21"/>
+          <p:cNvSpPr/>
+          <p:nvPr/>
+        </p:nvSpPr>
+        <p:spPr>
+          <a:xfrm>
+            <a:off x="5212080" y="3209544"/>
+            <a:ext cx="5943600" cy="804672"/>
           </a:xfrm>
           <a:prstGeom prst="roundRect">
             <a:avLst/>
           </a:prstGeom>
           <a:solidFill>
-            <a:srgbClr val="1C1318"/>
+            <a:srgbClr val="0B0F19"/>
           </a:solidFill>
           <a:ln w="12700">
             <a:solidFill>
-              <a:srgbClr val="F43F5E"/>
+              <a:srgbClr val="0F281E"/>
             </a:solidFill>
             <a:prstDash val="solid"/>
           </a:ln>
@@ -6220,60 +6330,96 @@
       </p:sp>
       <p:sp>
         <p:nvSpPr>
-          <p:cNvPr id="26" name="Text 24"/>
-          <p:cNvSpPr/>
-          <p:nvPr/>
-        </p:nvSpPr>
-        <p:spPr>
-          <a:xfrm>
-            <a:off x="4754880" y="2331720"/>
-            <a:ext cx="6126480" cy="457200"/>
-          </a:xfrm>
-          <a:prstGeom prst="rect">
-            <a:avLst/>
-          </a:prstGeom>
-          <a:noFill/>
-          <a:ln/>
-        </p:spPr>
-        <p:txBody>
-          <a:bodyPr wrap="square" rtlCol="0" anchor="ctr"/>
-          <a:lstStyle/>
-          <a:p>
-            <a:pPr indent="0" marL="0">
-              <a:buNone/>
-            </a:pPr>
-            <a:r>
-              <a:rPr lang="en-US" sz="900" dirty="0">
-                <a:solidFill>
-                  <a:srgbClr val="FDA4AF"/>
-                </a:solidFill>
-              </a:rPr>
-              <a:t>Weak Duty: "Responsible for reviewing system design documents and helping engineers with backend deployments."</a:t>
-            </a:r>
-            <a:endParaRPr lang="en-US" sz="900" dirty="0"/>
-          </a:p>
-        </p:txBody>
-      </p:sp>
-      <p:sp>
-        <p:nvSpPr>
-          <p:cNvPr id="27" name="Shape 25"/>
-          <p:cNvSpPr/>
-          <p:nvPr/>
-        </p:nvSpPr>
-        <p:spPr>
-          <a:xfrm>
-            <a:off x="4663440" y="2926080"/>
-            <a:ext cx="6309360" cy="658368"/>
+          <p:cNvPr id="24" name="Text 22"/>
+          <p:cNvSpPr/>
+          <p:nvPr/>
+        </p:nvSpPr>
+        <p:spPr>
+          <a:xfrm>
+            <a:off x="5349240" y="3282696"/>
+            <a:ext cx="5669280" cy="228600"/>
+          </a:xfrm>
+          <a:prstGeom prst="rect">
+            <a:avLst/>
+          </a:prstGeom>
+          <a:noFill/>
+          <a:ln/>
+        </p:spPr>
+        <p:txBody>
+          <a:bodyPr wrap="square" rtlCol="0" anchor="ctr"/>
+          <a:lstStyle/>
+          <a:p>
+            <a:pPr indent="0" marL="0">
+              <a:buNone/>
+            </a:pPr>
+            <a:r>
+              <a:rPr lang="en-US" sz="1100" b="1" dirty="0">
+                <a:solidFill>
+                  <a:srgbClr val="6EE7B7"/>
+                </a:solidFill>
+              </a:rPr>
+              <a:t>2. 100% Google XYZ Metric Density (96%)</a:t>
+            </a:r>
+            <a:endParaRPr lang="en-US" sz="1100" dirty="0"/>
+          </a:p>
+        </p:txBody>
+      </p:sp>
+      <p:sp>
+        <p:nvSpPr>
+          <p:cNvPr id="25" name="Text 23"/>
+          <p:cNvSpPr/>
+          <p:nvPr/>
+        </p:nvSpPr>
+        <p:spPr>
+          <a:xfrm>
+            <a:off x="5349240" y="3529584"/>
+            <a:ext cx="5669280" cy="438912"/>
+          </a:xfrm>
+          <a:prstGeom prst="rect">
+            <a:avLst/>
+          </a:prstGeom>
+          <a:noFill/>
+          <a:ln/>
+        </p:spPr>
+        <p:txBody>
+          <a:bodyPr wrap="square" rtlCol="0" anchor="ctr"/>
+          <a:lstStyle/>
+          <a:p>
+            <a:pPr indent="0" marL="0">
+              <a:buNone/>
+            </a:pPr>
+            <a:r>
+              <a:rPr lang="en-US" sz="950" dirty="0">
+                <a:solidFill>
+                  <a:srgbClr val="94A3B8"/>
+                </a:solidFill>
+              </a:rPr>
+              <a:t>Every bullet point now contains concrete scale figures (42,000 TPS, 19ms p99, 12 mentored engineers, 34% sprint acceleration).</a:t>
+            </a:r>
+            <a:endParaRPr lang="en-US" sz="950" dirty="0"/>
+          </a:p>
+        </p:txBody>
+      </p:sp>
+      <p:sp>
+        <p:nvSpPr>
+          <p:cNvPr id="26" name="Shape 24"/>
+          <p:cNvSpPr/>
+          <p:nvPr/>
+        </p:nvSpPr>
+        <p:spPr>
+          <a:xfrm>
+            <a:off x="5212080" y="4087368"/>
+            <a:ext cx="5943600" cy="804672"/>
           </a:xfrm>
           <a:prstGeom prst="roundRect">
             <a:avLst/>
           </a:prstGeom>
           <a:solidFill>
-            <a:srgbClr val="0F1E1B"/>
+            <a:srgbClr val="0B0F19"/>
           </a:solidFill>
           <a:ln w="12700">
             <a:solidFill>
-              <a:srgbClr val="10B981"/>
+              <a:srgbClr val="0F281E"/>
             </a:solidFill>
             <a:prstDash val="solid"/>
           </a:ln>
@@ -6281,35 +6427,71 @@
       </p:sp>
       <p:sp>
         <p:nvSpPr>
+          <p:cNvPr id="27" name="Text 25"/>
+          <p:cNvSpPr/>
+          <p:nvPr/>
+        </p:nvSpPr>
+        <p:spPr>
+          <a:xfrm>
+            <a:off x="5349240" y="4160520"/>
+            <a:ext cx="5669280" cy="228600"/>
+          </a:xfrm>
+          <a:prstGeom prst="rect">
+            <a:avLst/>
+          </a:prstGeom>
+          <a:noFill/>
+          <a:ln/>
+        </p:spPr>
+        <p:txBody>
+          <a:bodyPr wrap="square" rtlCol="0" anchor="ctr"/>
+          <a:lstStyle/>
+          <a:p>
+            <a:pPr indent="0" marL="0">
+              <a:buNone/>
+            </a:pPr>
+            <a:r>
+              <a:rPr lang="en-US" sz="1100" b="1" dirty="0">
+                <a:solidFill>
+                  <a:srgbClr val="6EE7B7"/>
+                </a:solidFill>
+              </a:rPr>
+              <a:t>3. Exhaustive Technical Alignment (96%)</a:t>
+            </a:r>
+            <a:endParaRPr lang="en-US" sz="1100" dirty="0"/>
+          </a:p>
+        </p:txBody>
+      </p:sp>
+      <p:sp>
+        <p:nvSpPr>
           <p:cNvPr id="28" name="Text 26"/>
           <p:cNvSpPr/>
           <p:nvPr/>
         </p:nvSpPr>
         <p:spPr>
           <a:xfrm>
-            <a:off x="4754880" y="2999232"/>
-            <a:ext cx="6126480" cy="502920"/>
-          </a:xfrm>
-          <a:prstGeom prst="rect">
-            <a:avLst/>
-          </a:prstGeom>
-          <a:noFill/>
-          <a:ln/>
-        </p:spPr>
-        <p:txBody>
-          <a:bodyPr wrap="square" rtlCol="0" anchor="ctr"/>
-          <a:lstStyle/>
-          <a:p>
-            <a:pPr indent="0" marL="0">
-              <a:buNone/>
-            </a:pPr>
-            <a:r>
-              <a:rPr lang="en-US" sz="950" b="1" dirty="0">
-                <a:solidFill>
-                  <a:srgbClr val="A7F3D0"/>
-                </a:solidFill>
-              </a:rPr>
-              <a:t>Google XYZ: "Spearheaded 24+ RFC design reviews, accelerating sprint velocity by 34% with zero rollback incidents."</a:t>
+            <a:off x="5349240" y="4407408"/>
+            <a:ext cx="5669280" cy="438912"/>
+          </a:xfrm>
+          <a:prstGeom prst="rect">
+            <a:avLst/>
+          </a:prstGeom>
+          <a:noFill/>
+          <a:ln/>
+        </p:spPr>
+        <p:txBody>
+          <a:bodyPr wrap="square" rtlCol="0" anchor="ctr"/>
+          <a:lstStyle/>
+          <a:p>
+            <a:pPr indent="0" marL="0">
+              <a:buNone/>
+            </a:pPr>
+            <a:r>
+              <a:rPr lang="en-US" sz="950" dirty="0">
+                <a:solidFill>
+                  <a:srgbClr val="94A3B8"/>
+                </a:solidFill>
+              </a:rPr>
+              <a:t>Full vocabulary alignment against Principal Backend Architect Ledger requirements (Java 21, Loom, Kafka, EKS, CQRS, FinOps).</a:t>
             </a:r>
             <a:endParaRPr lang="en-US" sz="950" dirty="0"/>
           </a:p>
@@ -6323,18 +6505,18 @@
         </p:nvSpPr>
         <p:spPr>
           <a:xfrm>
-            <a:off x="4480560" y="3840480"/>
-            <a:ext cx="6675120" cy="1874520"/>
+            <a:off x="5212080" y="4965192"/>
+            <a:ext cx="5943600" cy="804672"/>
           </a:xfrm>
           <a:prstGeom prst="roundRect">
             <a:avLst/>
           </a:prstGeom>
           <a:solidFill>
-            <a:srgbClr val="151E32"/>
+            <a:srgbClr val="0B0F19"/>
           </a:solidFill>
           <a:ln w="12700">
             <a:solidFill>
-              <a:srgbClr val="22314E"/>
+              <a:srgbClr val="0F281E"/>
             </a:solidFill>
             <a:prstDash val="solid"/>
           </a:ln>
@@ -6348,31 +6530,31 @@
         </p:nvSpPr>
         <p:spPr>
           <a:xfrm>
-            <a:off x="4663440" y="3977640"/>
-            <a:ext cx="6217920" cy="274320"/>
-          </a:xfrm>
-          <a:prstGeom prst="rect">
-            <a:avLst/>
-          </a:prstGeom>
-          <a:noFill/>
-          <a:ln/>
-        </p:spPr>
-        <p:txBody>
-          <a:bodyPr wrap="square" rtlCol="0" anchor="ctr"/>
-          <a:lstStyle/>
-          <a:p>
-            <a:pPr indent="0" marL="0">
-              <a:buNone/>
-            </a:pPr>
-            <a:r>
-              <a:rPr lang="en-US" sz="1200" b="1" dirty="0">
-                <a:solidFill>
-                  <a:srgbClr val="06B6D4"/>
-                </a:solidFill>
-              </a:rPr>
-              <a:t>Actionable Critical Fixes Checklist (Simulated Score Lift: 86 ➔ 96)</a:t>
-            </a:r>
-            <a:endParaRPr lang="en-US" sz="1200" dirty="0"/>
+            <a:off x="5349240" y="5038344"/>
+            <a:ext cx="5669280" cy="228600"/>
+          </a:xfrm>
+          <a:prstGeom prst="rect">
+            <a:avLst/>
+          </a:prstGeom>
+          <a:noFill/>
+          <a:ln/>
+        </p:spPr>
+        <p:txBody>
+          <a:bodyPr wrap="square" rtlCol="0" anchor="ctr"/>
+          <a:lstStyle/>
+          <a:p>
+            <a:pPr indent="0" marL="0">
+              <a:buNone/>
+            </a:pPr>
+            <a:r>
+              <a:rPr lang="en-US" sz="1100" b="1" dirty="0">
+                <a:solidFill>
+                  <a:srgbClr val="6EE7B7"/>
+                </a:solidFill>
+              </a:rPr>
+              <a:t>4. Executive Recruiter Callback Multiplier</a:t>
+            </a:r>
+            <a:endParaRPr lang="en-US" sz="1100" dirty="0"/>
           </a:p>
         </p:txBody>
       </p:sp>
@@ -6384,68 +6566,31 @@
         </p:nvSpPr>
         <p:spPr>
           <a:xfrm>
-            <a:off x="4663440" y="4343400"/>
-            <a:ext cx="6217920" cy="1188720"/>
-          </a:xfrm>
-          <a:prstGeom prst="rect">
-            <a:avLst/>
-          </a:prstGeom>
-          <a:noFill/>
-          <a:ln/>
-        </p:spPr>
-        <p:txBody>
-          <a:bodyPr wrap="square" rtlCol="0" anchor="ctr"/>
-          <a:lstStyle/>
-          <a:p>
-            <a:pPr indent="0" marL="0">
-              <a:lnSpc>
-                <a:spcPts val="1800"/>
-              </a:lnSpc>
-              <a:buNone/>
-            </a:pPr>
-            <a:r>
-              <a:rPr lang="en-US" sz="1000" dirty="0">
+            <a:off x="5349240" y="5285232"/>
+            <a:ext cx="5669280" cy="438912"/>
+          </a:xfrm>
+          <a:prstGeom prst="rect">
+            <a:avLst/>
+          </a:prstGeom>
+          <a:noFill/>
+          <a:ln/>
+        </p:spPr>
+        <p:txBody>
+          <a:bodyPr wrap="square" rtlCol="0" anchor="ctr"/>
+          <a:lstStyle/>
+          <a:p>
+            <a:pPr indent="0" marL="0">
+              <a:buNone/>
+            </a:pPr>
+            <a:r>
+              <a:rPr lang="en-US" sz="950" dirty="0">
                 <a:solidFill>
                   <a:srgbClr val="94A3B8"/>
                 </a:solidFill>
               </a:rPr>
-              <a:t>☑ Fix 1: Upgrade passive verbs ("Responsible for") to decisive executive verbs ("Architected", "Spearheaded").</a:t>
-            </a:r>
-            <a:endParaRPr lang="en-US" sz="1000" dirty="0"/>
-          </a:p>
-          <a:p>
-            <a:pPr indent="0" marL="0">
-              <a:lnSpc>
-                <a:spcPts val="1800"/>
-              </a:lnSpc>
-              <a:buNone/>
-            </a:pPr>
-            <a:r>
-              <a:rPr lang="en-US" sz="1000" dirty="0">
-                <a:solidFill>
-                  <a:srgbClr val="94A3B8"/>
-                </a:solidFill>
-              </a:rPr>
-              <a:t>☑ Fix 2: Quantify cloud FinOps quarterly savings alongside 42,000 TPS scale metrics.</a:t>
-            </a:r>
-            <a:endParaRPr lang="en-US" sz="1000" dirty="0"/>
-          </a:p>
-          <a:p>
-            <a:pPr indent="0" marL="0">
-              <a:lnSpc>
-                <a:spcPts val="1800"/>
-              </a:lnSpc>
-              <a:buNone/>
-            </a:pPr>
-            <a:r>
-              <a:rPr lang="en-US" sz="1000" dirty="0">
-                <a:solidFill>
-                  <a:srgbClr val="94A3B8"/>
-                </a:solidFill>
-              </a:rPr>
-              <a:t>☑ Fix 3: Add explicit Project Loom / Virtual Threads governance in the architecture summary.</a:t>
-            </a:r>
-            <a:endParaRPr lang="en-US" sz="1000" dirty="0"/>
+              <a:t>Transformed profile from average middle-tier applicant into top 1% of Principal/Staff candidates with estimated 3.4x recruiter callback rate.</a:t>
+            </a:r>
+            <a:endParaRPr lang="en-US" sz="950" dirty="0"/>
           </a:p>
         </p:txBody>
       </p:sp>
@@ -6489,7 +6634,7 @@
         </p:nvSpPr>
         <p:spPr>
           <a:xfrm>
-            <a:off x="731520" y="457200"/>
+            <a:off x="731520" y="548640"/>
             <a:ext cx="9144000" cy="274320"/>
           </a:xfrm>
           <a:prstGeom prst="rect">
@@ -6511,7 +6656,7 @@
                   <a:srgbClr val="06B6D4"/>
                 </a:solidFill>
               </a:rPr>
-              <a:t>06 / VISUAL OCR INSPECTOR SCREENSHOT</a:t>
+              <a:t>06 / DETAILED CHANGES &amp; KEYWORDS</a:t>
             </a:r>
             <a:endParaRPr lang="en-US" sz="1000" dirty="0"/>
           </a:p>
@@ -6525,31 +6670,31 @@
         </p:nvSpPr>
         <p:spPr>
           <a:xfrm>
-            <a:off x="731520" y="731520"/>
-            <a:ext cx="10515600" cy="457200"/>
-          </a:xfrm>
-          <a:prstGeom prst="rect">
-            <a:avLst/>
-          </a:prstGeom>
-          <a:noFill/>
-          <a:ln/>
-        </p:spPr>
-        <p:txBody>
-          <a:bodyPr wrap="square" rtlCol="0" anchor="ctr"/>
-          <a:lstStyle/>
-          <a:p>
-            <a:pPr indent="0" marL="0">
-              <a:buNone/>
-            </a:pPr>
-            <a:r>
-              <a:rPr lang="en-US" sz="2400" b="1" dirty="0">
+            <a:off x="731520" y="822960"/>
+            <a:ext cx="10515600" cy="548640"/>
+          </a:xfrm>
+          <a:prstGeom prst="rect">
+            <a:avLst/>
+          </a:prstGeom>
+          <a:noFill/>
+          <a:ln/>
+        </p:spPr>
+        <p:txBody>
+          <a:bodyPr wrap="square" rtlCol="0" anchor="ctr"/>
+          <a:lstStyle/>
+          <a:p>
+            <a:pPr indent="0" marL="0">
+              <a:buNone/>
+            </a:pPr>
+            <a:r>
+              <a:rPr lang="en-US" sz="2800" b="1" dirty="0">
                 <a:solidFill>
                   <a:srgbClr val="FFFFFF"/>
                 </a:solidFill>
               </a:rPr>
-              <a:t>Website Screenshot: Visual Document &amp; OCR Layout Drawer</a:t>
-            </a:r>
-            <a:endParaRPr lang="en-US" sz="2400" dirty="0"/>
+              <a:t>Action Items Resolved &amp; Keyword Gap Coverage</a:t>
+            </a:r>
+            <a:endParaRPr lang="en-US" sz="2800" dirty="0"/>
           </a:p>
         </p:txBody>
       </p:sp>
@@ -6561,18 +6706,18 @@
         </p:nvSpPr>
         <p:spPr>
           <a:xfrm>
-            <a:off x="731520" y="1325880"/>
-            <a:ext cx="10698480" cy="4572000"/>
+            <a:off x="731520" y="1645920"/>
+            <a:ext cx="5120640" cy="4206240"/>
           </a:xfrm>
           <a:prstGeom prst="roundRect">
             <a:avLst/>
           </a:prstGeom>
           <a:solidFill>
-            <a:srgbClr val="0F172A"/>
+            <a:srgbClr val="131B2E"/>
           </a:solidFill>
           <a:ln w="19050">
             <a:solidFill>
-              <a:srgbClr val="334155"/>
+              <a:srgbClr val="06B6D4"/>
             </a:solidFill>
             <a:prstDash val="solid"/>
           </a:ln>
@@ -6580,23 +6725,39 @@
       </p:sp>
       <p:sp>
         <p:nvSpPr>
-          <p:cNvPr id="5" name="Shape 3"/>
-          <p:cNvSpPr/>
-          <p:nvPr/>
-        </p:nvSpPr>
-        <p:spPr>
-          <a:xfrm>
-            <a:off x="731520" y="1325880"/>
-            <a:ext cx="10698480" cy="384048"/>
-          </a:xfrm>
-          <a:prstGeom prst="rect">
-            <a:avLst/>
-          </a:prstGeom>
-          <a:solidFill>
-            <a:srgbClr val="1E293B"/>
-          </a:solidFill>
-          <a:ln/>
-        </p:spPr>
+          <p:cNvPr id="5" name="Text 3"/>
+          <p:cNvSpPr/>
+          <p:nvPr/>
+        </p:nvSpPr>
+        <p:spPr>
+          <a:xfrm>
+            <a:off x="1005840" y="1874520"/>
+            <a:ext cx="4572000" cy="320040"/>
+          </a:xfrm>
+          <a:prstGeom prst="rect">
+            <a:avLst/>
+          </a:prstGeom>
+          <a:noFill/>
+          <a:ln/>
+        </p:spPr>
+        <p:txBody>
+          <a:bodyPr wrap="square" rtlCol="0" anchor="ctr"/>
+          <a:lstStyle/>
+          <a:p>
+            <a:pPr indent="0" marL="0">
+              <a:buNone/>
+            </a:pPr>
+            <a:r>
+              <a:rPr lang="en-US" sz="1400" b="1" dirty="0">
+                <a:solidFill>
+                  <a:srgbClr val="06B6D4"/>
+                </a:solidFill>
+              </a:rPr>
+              <a:t>4 Critical Fixes Applied by CareerPulse</a:t>
+            </a:r>
+            <a:endParaRPr lang="en-US" sz="1400" dirty="0"/>
+          </a:p>
+        </p:txBody>
       </p:sp>
       <p:sp>
         <p:nvSpPr>
@@ -6606,546 +6767,8 @@
         </p:nvSpPr>
         <p:spPr>
           <a:xfrm>
-            <a:off x="868680" y="1453896"/>
-            <a:ext cx="128016" cy="128016"/>
-          </a:xfrm>
-          <a:prstGeom prst="ellipse">
-            <a:avLst/>
-          </a:prstGeom>
-          <a:solidFill>
-            <a:srgbClr val="EF4444"/>
-          </a:solidFill>
-          <a:ln/>
-        </p:spPr>
-      </p:sp>
-      <p:sp>
-        <p:nvSpPr>
-          <p:cNvPr id="7" name="Shape 5"/>
-          <p:cNvSpPr/>
-          <p:nvPr/>
-        </p:nvSpPr>
-        <p:spPr>
-          <a:xfrm>
-            <a:off x="1051560" y="1453896"/>
-            <a:ext cx="128016" cy="128016"/>
-          </a:xfrm>
-          <a:prstGeom prst="ellipse">
-            <a:avLst/>
-          </a:prstGeom>
-          <a:solidFill>
-            <a:srgbClr val="F59E0B"/>
-          </a:solidFill>
-          <a:ln/>
-        </p:spPr>
-      </p:sp>
-      <p:sp>
-        <p:nvSpPr>
-          <p:cNvPr id="8" name="Shape 6"/>
-          <p:cNvSpPr/>
-          <p:nvPr/>
-        </p:nvSpPr>
-        <p:spPr>
-          <a:xfrm>
-            <a:off x="1234440" y="1453896"/>
-            <a:ext cx="128016" cy="128016"/>
-          </a:xfrm>
-          <a:prstGeom prst="ellipse">
-            <a:avLst/>
-          </a:prstGeom>
-          <a:solidFill>
-            <a:srgbClr val="10B981"/>
-          </a:solidFill>
-          <a:ln/>
-        </p:spPr>
-      </p:sp>
-      <p:sp>
-        <p:nvSpPr>
-          <p:cNvPr id="9" name="Shape 7"/>
-          <p:cNvSpPr/>
-          <p:nvPr/>
-        </p:nvSpPr>
-        <p:spPr>
-          <a:xfrm>
-            <a:off x="1554480" y="1399032"/>
-            <a:ext cx="9052560" cy="237744"/>
-          </a:xfrm>
-          <a:prstGeom prst="roundRect">
-            <a:avLst/>
-          </a:prstGeom>
-          <a:solidFill>
-            <a:srgbClr val="0F172A"/>
-          </a:solidFill>
-          <a:ln w="12700">
-            <a:solidFill>
-              <a:srgbClr val="334155"/>
-            </a:solidFill>
-            <a:prstDash val="solid"/>
-          </a:ln>
-        </p:spPr>
-      </p:sp>
-      <p:sp>
-        <p:nvSpPr>
-          <p:cNvPr id="10" name="Text 8"/>
-          <p:cNvSpPr/>
-          <p:nvPr/>
-        </p:nvSpPr>
-        <p:spPr>
-          <a:xfrm>
-            <a:off x="1645920" y="1399032"/>
-            <a:ext cx="8869680" cy="237744"/>
-          </a:xfrm>
-          <a:prstGeom prst="rect">
-            <a:avLst/>
-          </a:prstGeom>
-          <a:noFill/>
-          <a:ln/>
-        </p:spPr>
-        <p:txBody>
-          <a:bodyPr wrap="square" rtlCol="0" anchor="ctr"/>
-          <a:lstStyle/>
-          <a:p>
-            <a:pPr indent="0" marL="0">
-              <a:buNone/>
-            </a:pPr>
-            <a:r>
-              <a:rPr lang="en-US" sz="900" dirty="0">
-                <a:solidFill>
-                  <a:srgbClr val="94A3B8"/>
-                </a:solidFill>
-                <a:latin typeface="Calibri" pitchFamily="34" charset="0"/>
-                <a:ea typeface="Calibri" pitchFamily="34" charset="-122"/>
-                <a:cs typeface="Calibri" pitchFamily="34" charset="-120"/>
-              </a:rPr>
-              <a:t>🔒 https://careerpulse.ai/analyzer/document-inspector</a:t>
-            </a:r>
-            <a:endParaRPr lang="en-US" sz="900" dirty="0"/>
-          </a:p>
-        </p:txBody>
-      </p:sp>
-      <p:sp>
-        <p:nvSpPr>
-          <p:cNvPr id="11" name="Shape 9"/>
-          <p:cNvSpPr/>
-          <p:nvPr/>
-        </p:nvSpPr>
-        <p:spPr>
-          <a:xfrm>
-            <a:off x="1097280" y="1828800"/>
-            <a:ext cx="3657600" cy="3886200"/>
-          </a:xfrm>
-          <a:prstGeom prst="roundRect">
-            <a:avLst/>
-          </a:prstGeom>
-          <a:solidFill>
-            <a:srgbClr val="F8FAFC"/>
-          </a:solidFill>
-          <a:ln w="12700">
-            <a:solidFill>
-              <a:srgbClr val="CBD5E1"/>
-            </a:solidFill>
-            <a:prstDash val="solid"/>
-          </a:ln>
-        </p:spPr>
-      </p:sp>
-      <p:sp>
-        <p:nvSpPr>
-          <p:cNvPr id="12" name="Text 10"/>
-          <p:cNvSpPr/>
-          <p:nvPr/>
-        </p:nvSpPr>
-        <p:spPr>
-          <a:xfrm>
-            <a:off x="1280160" y="2011680"/>
-            <a:ext cx="3291840" cy="274320"/>
-          </a:xfrm>
-          <a:prstGeom prst="rect">
-            <a:avLst/>
-          </a:prstGeom>
-          <a:noFill/>
-          <a:ln/>
-        </p:spPr>
-        <p:txBody>
-          <a:bodyPr wrap="square" rtlCol="0" anchor="ctr"/>
-          <a:lstStyle/>
-          <a:p>
-            <a:pPr indent="0" marL="0">
-              <a:buNone/>
-            </a:pPr>
-            <a:r>
-              <a:rPr lang="en-US" sz="1300" b="1" dirty="0">
-                <a:solidFill>
-                  <a:srgbClr val="0F172A"/>
-                </a:solidFill>
-                <a:latin typeface="Calibri" pitchFamily="34" charset="0"/>
-                <a:ea typeface="Calibri" pitchFamily="34" charset="-122"/>
-                <a:cs typeface="Calibri" pitchFamily="34" charset="-120"/>
-              </a:rPr>
-              <a:t>PRIYA NAIR</a:t>
-            </a:r>
-            <a:endParaRPr lang="en-US" sz="1300" dirty="0"/>
-          </a:p>
-        </p:txBody>
-      </p:sp>
-      <p:sp>
-        <p:nvSpPr>
-          <p:cNvPr id="13" name="Text 11"/>
-          <p:cNvSpPr/>
-          <p:nvPr/>
-        </p:nvSpPr>
-        <p:spPr>
-          <a:xfrm>
-            <a:off x="1280160" y="2286000"/>
-            <a:ext cx="3291840" cy="365760"/>
-          </a:xfrm>
-          <a:prstGeom prst="rect">
-            <a:avLst/>
-          </a:prstGeom>
-          <a:noFill/>
-          <a:ln/>
-        </p:spPr>
-        <p:txBody>
-          <a:bodyPr wrap="square" rtlCol="0" anchor="ctr"/>
-          <a:lstStyle/>
-          <a:p>
-            <a:pPr indent="0" marL="0">
-              <a:buNone/>
-            </a:pPr>
-            <a:r>
-              <a:rPr lang="en-US" sz="750" dirty="0">
-                <a:solidFill>
-                  <a:srgbClr val="475569"/>
-                </a:solidFill>
-              </a:rPr>
-              <a:t>Principal Java &amp; Distributed Systems Architect</a:t>
-            </a:r>
-            <a:endParaRPr lang="en-US" sz="750" dirty="0"/>
-          </a:p>
-          <a:p>
-            <a:pPr indent="0" marL="0">
-              <a:buNone/>
-            </a:pPr>
-            <a:r>
-              <a:rPr lang="en-US" sz="750" dirty="0">
-                <a:solidFill>
-                  <a:srgbClr val="475569"/>
-                </a:solidFill>
-              </a:rPr>
-              <a:t>Seattle, WA • priya.nair@javaarch.io • (206) 555-0148</a:t>
-            </a:r>
-            <a:endParaRPr lang="en-US" sz="750" dirty="0"/>
-          </a:p>
-        </p:txBody>
-      </p:sp>
-      <p:sp>
-        <p:nvSpPr>
-          <p:cNvPr id="14" name="Shape 12"/>
-          <p:cNvSpPr/>
-          <p:nvPr/>
-        </p:nvSpPr>
-        <p:spPr>
-          <a:xfrm>
-            <a:off x="1280160" y="2697480"/>
-            <a:ext cx="3291840" cy="0"/>
-          </a:xfrm>
-          <a:prstGeom prst="line">
-            <a:avLst/>
-          </a:prstGeom>
-          <a:noFill/>
-          <a:ln w="12700">
-            <a:solidFill>
-              <a:srgbClr val="0284C7"/>
-            </a:solidFill>
-            <a:prstDash val="solid"/>
-          </a:ln>
-        </p:spPr>
-      </p:sp>
-      <p:sp>
-        <p:nvSpPr>
-          <p:cNvPr id="15" name="Text 13"/>
-          <p:cNvSpPr/>
-          <p:nvPr/>
-        </p:nvSpPr>
-        <p:spPr>
-          <a:xfrm>
-            <a:off x="1280160" y="2788920"/>
-            <a:ext cx="3291840" cy="1463040"/>
-          </a:xfrm>
-          <a:prstGeom prst="rect">
-            <a:avLst/>
-          </a:prstGeom>
-          <a:noFill/>
-          <a:ln/>
-        </p:spPr>
-        <p:txBody>
-          <a:bodyPr wrap="square" rtlCol="0" anchor="ctr"/>
-          <a:lstStyle/>
-          <a:p>
-            <a:pPr indent="0" marL="0">
-              <a:lnSpc>
-                <a:spcPts val="1100"/>
-              </a:lnSpc>
-              <a:buNone/>
-            </a:pPr>
-            <a:r>
-              <a:rPr lang="en-US" sz="700" dirty="0">
-                <a:solidFill>
-                  <a:srgbClr val="1E293B"/>
-                </a:solidFill>
-              </a:rPr>
-              <a:t>PROFESSIONAL EXPERIENCE</a:t>
-            </a:r>
-            <a:endParaRPr lang="en-US" sz="700" dirty="0"/>
-          </a:p>
-          <a:p>
-            <a:pPr indent="0" marL="0">
-              <a:lnSpc>
-                <a:spcPts val="1100"/>
-              </a:lnSpc>
-              <a:buNone/>
-            </a:pPr>
-            <a:r>
-              <a:rPr lang="en-US" sz="700" dirty="0">
-                <a:solidFill>
-                  <a:srgbClr val="1E293B"/>
-                </a:solidFill>
-              </a:rPr>
-              <a:t>CorePay Financial | Lead Java Systems Engineer (2021 - Present)</a:t>
-            </a:r>
-            <a:endParaRPr lang="en-US" sz="700" dirty="0"/>
-          </a:p>
-          <a:p>
-            <a:pPr indent="0" marL="0">
-              <a:lnSpc>
-                <a:spcPts val="1100"/>
-              </a:lnSpc>
-              <a:buNone/>
-            </a:pPr>
-            <a:r>
-              <a:rPr lang="en-US" sz="700" dirty="0">
-                <a:solidFill>
-                  <a:srgbClr val="1E293B"/>
-                </a:solidFill>
-              </a:rPr>
-              <a:t>• Architected settlement microservices handling 42,000 TPS at 99.995% SLA.</a:t>
-            </a:r>
-            <a:endParaRPr lang="en-US" sz="700" dirty="0"/>
-          </a:p>
-          <a:p>
-            <a:pPr indent="0" marL="0">
-              <a:lnSpc>
-                <a:spcPts val="1100"/>
-              </a:lnSpc>
-              <a:buNone/>
-            </a:pPr>
-            <a:r>
-              <a:rPr lang="en-US" sz="700" dirty="0">
-                <a:solidFill>
-                  <a:srgbClr val="1E293B"/>
-                </a:solidFill>
-              </a:rPr>
-              <a:t>• Tuned G1GC and ZGC cutting p99 tail latency from 140ms to 19ms.</a:t>
-            </a:r>
-            <a:endParaRPr lang="en-US" sz="700" dirty="0"/>
-          </a:p>
-          <a:p>
-            <a:pPr indent="0" marL="0">
-              <a:lnSpc>
-                <a:spcPts val="1100"/>
-              </a:lnSpc>
-              <a:buNone/>
-            </a:pPr>
-            <a:r>
-              <a:rPr lang="en-US" sz="700" dirty="0">
-                <a:solidFill>
-                  <a:srgbClr val="1E293B"/>
-                </a:solidFill>
-              </a:rPr>
-              <a:t>• Led migration to event-driven CQRS using Apache Kafka &amp; PostgreSQL.</a:t>
-            </a:r>
-            <a:endParaRPr lang="en-US" sz="700" dirty="0"/>
-          </a:p>
-        </p:txBody>
-      </p:sp>
-      <p:sp>
-        <p:nvSpPr>
-          <p:cNvPr id="16" name="Text 14"/>
-          <p:cNvSpPr/>
-          <p:nvPr/>
-        </p:nvSpPr>
-        <p:spPr>
-          <a:xfrm>
-            <a:off x="1280160" y="4343400"/>
-            <a:ext cx="3291840" cy="1188720"/>
-          </a:xfrm>
-          <a:prstGeom prst="rect">
-            <a:avLst/>
-          </a:prstGeom>
-          <a:noFill/>
-          <a:ln/>
-        </p:spPr>
-        <p:txBody>
-          <a:bodyPr wrap="square" rtlCol="0" anchor="ctr"/>
-          <a:lstStyle/>
-          <a:p>
-            <a:pPr indent="0" marL="0">
-              <a:lnSpc>
-                <a:spcPts val="1100"/>
-              </a:lnSpc>
-              <a:buNone/>
-            </a:pPr>
-            <a:r>
-              <a:rPr lang="en-US" sz="700" dirty="0">
-                <a:solidFill>
-                  <a:srgbClr val="1E293B"/>
-                </a:solidFill>
-              </a:rPr>
-              <a:t>CloudScale Commerce | Senior Java Backend Developer (2018 - 2021)</a:t>
-            </a:r>
-            <a:endParaRPr lang="en-US" sz="700" dirty="0"/>
-          </a:p>
-          <a:p>
-            <a:pPr indent="0" marL="0">
-              <a:lnSpc>
-                <a:spcPts val="1100"/>
-              </a:lnSpc>
-              <a:buNone/>
-            </a:pPr>
-            <a:r>
-              <a:rPr lang="en-US" sz="700" dirty="0">
-                <a:solidFill>
-                  <a:srgbClr val="1E293B"/>
-                </a:solidFill>
-              </a:rPr>
-              <a:t>• Processed 85M+ daily inventory events with idempotent Kafka consumers.</a:t>
-            </a:r>
-            <a:endParaRPr lang="en-US" sz="700" dirty="0"/>
-          </a:p>
-          <a:p>
-            <a:pPr indent="0" marL="0">
-              <a:lnSpc>
-                <a:spcPts val="1100"/>
-              </a:lnSpc>
-              <a:buNone/>
-            </a:pPr>
-            <a:r>
-              <a:rPr lang="en-US" sz="700" dirty="0">
-                <a:solidFill>
-                  <a:srgbClr val="1E293B"/>
-                </a:solidFill>
-              </a:rPr>
-              <a:t>• Benchmarked high-concurrency order fulfillment APIs in Gatling.</a:t>
-            </a:r>
-            <a:endParaRPr lang="en-US" sz="700" dirty="0"/>
-          </a:p>
-        </p:txBody>
-      </p:sp>
-      <p:sp>
-        <p:nvSpPr>
-          <p:cNvPr id="17" name="Shape 15"/>
-          <p:cNvSpPr/>
-          <p:nvPr/>
-        </p:nvSpPr>
-        <p:spPr>
-          <a:xfrm>
-            <a:off x="5029200" y="1828800"/>
-            <a:ext cx="6126480" cy="3886200"/>
-          </a:xfrm>
-          <a:prstGeom prst="roundRect">
-            <a:avLst/>
-          </a:prstGeom>
-          <a:solidFill>
-            <a:srgbClr val="151E32"/>
-          </a:solidFill>
-          <a:ln w="12700">
-            <a:solidFill>
-              <a:srgbClr val="22314E"/>
-            </a:solidFill>
-            <a:prstDash val="solid"/>
-          </a:ln>
-        </p:spPr>
-      </p:sp>
-      <p:sp>
-        <p:nvSpPr>
-          <p:cNvPr id="18" name="Text 16"/>
-          <p:cNvSpPr/>
-          <p:nvPr/>
-        </p:nvSpPr>
-        <p:spPr>
-          <a:xfrm>
-            <a:off x="5212080" y="2011680"/>
-            <a:ext cx="5486400" cy="274320"/>
-          </a:xfrm>
-          <a:prstGeom prst="rect">
-            <a:avLst/>
-          </a:prstGeom>
-          <a:noFill/>
-          <a:ln/>
-        </p:spPr>
-        <p:txBody>
-          <a:bodyPr wrap="square" rtlCol="0" anchor="ctr"/>
-          <a:lstStyle/>
-          <a:p>
-            <a:pPr indent="0" marL="0">
-              <a:buNone/>
-            </a:pPr>
-            <a:r>
-              <a:rPr lang="en-US" sz="1300" b="1" dirty="0">
-                <a:solidFill>
-                  <a:srgbClr val="06B6D4"/>
-                </a:solidFill>
-              </a:rPr>
-              <a:t>Visual Document &amp; OCR Inspection Results</a:t>
-            </a:r>
-            <a:endParaRPr lang="en-US" sz="1300" dirty="0"/>
-          </a:p>
-        </p:txBody>
-      </p:sp>
-      <p:sp>
-        <p:nvSpPr>
-          <p:cNvPr id="19" name="Text 17"/>
-          <p:cNvSpPr/>
-          <p:nvPr/>
-        </p:nvSpPr>
-        <p:spPr>
-          <a:xfrm>
-            <a:off x="5212080" y="2331720"/>
-            <a:ext cx="5760720" cy="320040"/>
-          </a:xfrm>
-          <a:prstGeom prst="rect">
-            <a:avLst/>
-          </a:prstGeom>
-          <a:noFill/>
-          <a:ln/>
-        </p:spPr>
-        <p:txBody>
-          <a:bodyPr wrap="square" rtlCol="0" anchor="ctr"/>
-          <a:lstStyle/>
-          <a:p>
-            <a:pPr indent="0" marL="0">
-              <a:buNone/>
-            </a:pPr>
-            <a:r>
-              <a:rPr lang="en-US" sz="950" dirty="0">
-                <a:solidFill>
-                  <a:srgbClr val="94A3B8"/>
-                </a:solidFill>
-              </a:rPr>
-              <a:t>Multimodal Vision Model verified 100% character and layout fidelity across PDF stream:</a:t>
-            </a:r>
-            <a:endParaRPr lang="en-US" sz="950" dirty="0"/>
-          </a:p>
-        </p:txBody>
-      </p:sp>
-      <p:sp>
-        <p:nvSpPr>
-          <p:cNvPr id="20" name="Shape 18"/>
-          <p:cNvSpPr/>
-          <p:nvPr/>
-        </p:nvSpPr>
-        <p:spPr>
-          <a:xfrm>
-            <a:off x="5212080" y="2743200"/>
-            <a:ext cx="5760720" cy="457200"/>
+            <a:off x="1005840" y="2286000"/>
+            <a:ext cx="4572000" cy="804672"/>
           </a:xfrm>
           <a:prstGeom prst="roundRect">
             <a:avLst/>
@@ -7155,7 +6778,7 @@
           </a:solidFill>
           <a:ln w="12700">
             <a:solidFill>
-              <a:srgbClr val="1E293B"/>
+              <a:srgbClr val="23324E"/>
             </a:solidFill>
             <a:prstDash val="solid"/>
           </a:ln>
@@ -7163,35 +6786,71 @@
       </p:sp>
       <p:sp>
         <p:nvSpPr>
-          <p:cNvPr id="21" name="Text 19"/>
-          <p:cNvSpPr/>
-          <p:nvPr/>
-        </p:nvSpPr>
-        <p:spPr>
-          <a:xfrm>
-            <a:off x="5349240" y="2834640"/>
-            <a:ext cx="2926080" cy="274320"/>
-          </a:xfrm>
-          <a:prstGeom prst="rect">
-            <a:avLst/>
-          </a:prstGeom>
-          <a:noFill/>
-          <a:ln/>
-        </p:spPr>
-        <p:txBody>
-          <a:bodyPr wrap="square" rtlCol="0" anchor="ctr"/>
-          <a:lstStyle/>
-          <a:p>
-            <a:pPr indent="0" marL="0">
-              <a:buNone/>
-            </a:pPr>
-            <a:r>
-              <a:rPr lang="en-US" sz="950" b="1" dirty="0">
+          <p:cNvPr id="7" name="Text 5"/>
+          <p:cNvSpPr/>
+          <p:nvPr/>
+        </p:nvSpPr>
+        <p:spPr>
+          <a:xfrm>
+            <a:off x="1143000" y="2359152"/>
+            <a:ext cx="4297680" cy="228600"/>
+          </a:xfrm>
+          <a:prstGeom prst="rect">
+            <a:avLst/>
+          </a:prstGeom>
+          <a:noFill/>
+          <a:ln/>
+        </p:spPr>
+        <p:txBody>
+          <a:bodyPr wrap="square" rtlCol="0" anchor="ctr"/>
+          <a:lstStyle/>
+          <a:p>
+            <a:pPr indent="0" marL="0">
+              <a:buNone/>
+            </a:pPr>
+            <a:r>
+              <a:rPr lang="en-US" sz="1100" b="1" dirty="0">
                 <a:solidFill>
                   <a:srgbClr val="FFFFFF"/>
                 </a:solidFill>
               </a:rPr>
-              <a:t>Single-Column Linear Flow</a:t>
+              <a:t>Fix 1: Eliminating Passive Verb Voice</a:t>
+            </a:r>
+            <a:endParaRPr lang="en-US" sz="1100" dirty="0"/>
+          </a:p>
+        </p:txBody>
+      </p:sp>
+      <p:sp>
+        <p:nvSpPr>
+          <p:cNvPr id="8" name="Text 6"/>
+          <p:cNvSpPr/>
+          <p:nvPr/>
+        </p:nvSpPr>
+        <p:spPr>
+          <a:xfrm>
+            <a:off x="1143000" y="2606040"/>
+            <a:ext cx="4297680" cy="438912"/>
+          </a:xfrm>
+          <a:prstGeom prst="rect">
+            <a:avLst/>
+          </a:prstGeom>
+          <a:noFill/>
+          <a:ln/>
+        </p:spPr>
+        <p:txBody>
+          <a:bodyPr wrap="square" rtlCol="0" anchor="ctr"/>
+          <a:lstStyle/>
+          <a:p>
+            <a:pPr indent="0" marL="0">
+              <a:buNone/>
+            </a:pPr>
+            <a:r>
+              <a:rPr lang="en-US" sz="950" dirty="0">
+                <a:solidFill>
+                  <a:srgbClr val="94A3B8"/>
+                </a:solidFill>
+              </a:rPr>
+              <a:t>Replaced "Responsible for" and "Worked on" with decisive action verbs: "Architected", "Spearheaded", "Engineered".</a:t>
             </a:r>
             <a:endParaRPr lang="en-US" sz="950" dirty="0"/>
           </a:p>
@@ -7199,50 +6858,14 @@
       </p:sp>
       <p:sp>
         <p:nvSpPr>
-          <p:cNvPr id="22" name="Text 20"/>
-          <p:cNvSpPr/>
-          <p:nvPr/>
-        </p:nvSpPr>
-        <p:spPr>
-          <a:xfrm>
-            <a:off x="8229600" y="2834640"/>
-            <a:ext cx="2651760" cy="274320"/>
-          </a:xfrm>
-          <a:prstGeom prst="rect">
-            <a:avLst/>
-          </a:prstGeom>
-          <a:noFill/>
-          <a:ln/>
-        </p:spPr>
-        <p:txBody>
-          <a:bodyPr wrap="square" rtlCol="0" anchor="ctr"/>
-          <a:lstStyle/>
-          <a:p>
-            <a:pPr algn="r" indent="0" marL="0">
-              <a:buNone/>
-            </a:pPr>
-            <a:r>
-              <a:rPr lang="en-US" sz="850" dirty="0">
-                <a:solidFill>
-                  <a:srgbClr val="10B981"/>
-                </a:solidFill>
-              </a:rPr>
-              <a:t>Passed (100% AST block fidelity)</a:t>
-            </a:r>
-            <a:endParaRPr lang="en-US" sz="850" dirty="0"/>
-          </a:p>
-        </p:txBody>
-      </p:sp>
-      <p:sp>
-        <p:nvSpPr>
-          <p:cNvPr id="23" name="Shape 21"/>
-          <p:cNvSpPr/>
-          <p:nvPr/>
-        </p:nvSpPr>
-        <p:spPr>
-          <a:xfrm>
-            <a:off x="5212080" y="3273552"/>
-            <a:ext cx="5760720" cy="457200"/>
+          <p:cNvPr id="9" name="Shape 7"/>
+          <p:cNvSpPr/>
+          <p:nvPr/>
+        </p:nvSpPr>
+        <p:spPr>
+          <a:xfrm>
+            <a:off x="1005840" y="3163824"/>
+            <a:ext cx="4572000" cy="804672"/>
           </a:xfrm>
           <a:prstGeom prst="roundRect">
             <a:avLst/>
@@ -7252,7 +6875,7 @@
           </a:solidFill>
           <a:ln w="12700">
             <a:solidFill>
-              <a:srgbClr val="1E293B"/>
+              <a:srgbClr val="23324E"/>
             </a:solidFill>
             <a:prstDash val="solid"/>
           </a:ln>
@@ -7260,35 +6883,71 @@
       </p:sp>
       <p:sp>
         <p:nvSpPr>
-          <p:cNvPr id="24" name="Text 22"/>
-          <p:cNvSpPr/>
-          <p:nvPr/>
-        </p:nvSpPr>
-        <p:spPr>
-          <a:xfrm>
-            <a:off x="5349240" y="3364992"/>
-            <a:ext cx="2926080" cy="274320"/>
-          </a:xfrm>
-          <a:prstGeom prst="rect">
-            <a:avLst/>
-          </a:prstGeom>
-          <a:noFill/>
-          <a:ln/>
-        </p:spPr>
-        <p:txBody>
-          <a:bodyPr wrap="square" rtlCol="0" anchor="ctr"/>
-          <a:lstStyle/>
-          <a:p>
-            <a:pPr indent="0" marL="0">
-              <a:buNone/>
-            </a:pPr>
-            <a:r>
-              <a:rPr lang="en-US" sz="950" b="1" dirty="0">
+          <p:cNvPr id="10" name="Text 8"/>
+          <p:cNvSpPr/>
+          <p:nvPr/>
+        </p:nvSpPr>
+        <p:spPr>
+          <a:xfrm>
+            <a:off x="1143000" y="3236976"/>
+            <a:ext cx="4297680" cy="228600"/>
+          </a:xfrm>
+          <a:prstGeom prst="rect">
+            <a:avLst/>
+          </a:prstGeom>
+          <a:noFill/>
+          <a:ln/>
+        </p:spPr>
+        <p:txBody>
+          <a:bodyPr wrap="square" rtlCol="0" anchor="ctr"/>
+          <a:lstStyle/>
+          <a:p>
+            <a:pPr indent="0" marL="0">
+              <a:buNone/>
+            </a:pPr>
+            <a:r>
+              <a:rPr lang="en-US" sz="1100" b="1" dirty="0">
                 <a:solidFill>
                   <a:srgbClr val="FFFFFF"/>
                 </a:solidFill>
               </a:rPr>
-              <a:t>Machine-Readable Fonts</a:t>
+              <a:t>Fix 2: Concrete Google XYZ Formulation</a:t>
+            </a:r>
+            <a:endParaRPr lang="en-US" sz="1100" dirty="0"/>
+          </a:p>
+        </p:txBody>
+      </p:sp>
+      <p:sp>
+        <p:nvSpPr>
+          <p:cNvPr id="11" name="Text 9"/>
+          <p:cNvSpPr/>
+          <p:nvPr/>
+        </p:nvSpPr>
+        <p:spPr>
+          <a:xfrm>
+            <a:off x="1143000" y="3483864"/>
+            <a:ext cx="4297680" cy="438912"/>
+          </a:xfrm>
+          <a:prstGeom prst="rect">
+            <a:avLst/>
+          </a:prstGeom>
+          <a:noFill/>
+          <a:ln/>
+        </p:spPr>
+        <p:txBody>
+          <a:bodyPr wrap="square" rtlCol="0" anchor="ctr"/>
+          <a:lstStyle/>
+          <a:p>
+            <a:pPr indent="0" marL="0">
+              <a:buNone/>
+            </a:pPr>
+            <a:r>
+              <a:rPr lang="en-US" sz="950" dirty="0">
+                <a:solidFill>
+                  <a:srgbClr val="94A3B8"/>
+                </a:solidFill>
+              </a:rPr>
+              <a:t>Restructured every bullet to show specific accomplishments, measured outcomes, and technical methods.</a:t>
             </a:r>
             <a:endParaRPr lang="en-US" sz="950" dirty="0"/>
           </a:p>
@@ -7296,50 +6955,14 @@
       </p:sp>
       <p:sp>
         <p:nvSpPr>
-          <p:cNvPr id="25" name="Text 23"/>
-          <p:cNvSpPr/>
-          <p:nvPr/>
-        </p:nvSpPr>
-        <p:spPr>
-          <a:xfrm>
-            <a:off x="8229600" y="3364992"/>
-            <a:ext cx="2651760" cy="274320"/>
-          </a:xfrm>
-          <a:prstGeom prst="rect">
-            <a:avLst/>
-          </a:prstGeom>
-          <a:noFill/>
-          <a:ln/>
-        </p:spPr>
-        <p:txBody>
-          <a:bodyPr wrap="square" rtlCol="0" anchor="ctr"/>
-          <a:lstStyle/>
-          <a:p>
-            <a:pPr algn="r" indent="0" marL="0">
-              <a:buNone/>
-            </a:pPr>
-            <a:r>
-              <a:rPr lang="en-US" sz="850" dirty="0">
-                <a:solidFill>
-                  <a:srgbClr val="10B981"/>
-                </a:solidFill>
-              </a:rPr>
-              <a:t>Passed (Calibri/Sans-serif standard)</a:t>
-            </a:r>
-            <a:endParaRPr lang="en-US" sz="850" dirty="0"/>
-          </a:p>
-        </p:txBody>
-      </p:sp>
-      <p:sp>
-        <p:nvSpPr>
-          <p:cNvPr id="26" name="Shape 24"/>
-          <p:cNvSpPr/>
-          <p:nvPr/>
-        </p:nvSpPr>
-        <p:spPr>
-          <a:xfrm>
-            <a:off x="5212080" y="3803904"/>
-            <a:ext cx="5760720" cy="457200"/>
+          <p:cNvPr id="12" name="Shape 10"/>
+          <p:cNvSpPr/>
+          <p:nvPr/>
+        </p:nvSpPr>
+        <p:spPr>
+          <a:xfrm>
+            <a:off x="1005840" y="4041648"/>
+            <a:ext cx="4572000" cy="804672"/>
           </a:xfrm>
           <a:prstGeom prst="roundRect">
             <a:avLst/>
@@ -7349,7 +6972,7 @@
           </a:solidFill>
           <a:ln w="12700">
             <a:solidFill>
-              <a:srgbClr val="1E293B"/>
+              <a:srgbClr val="23324E"/>
             </a:solidFill>
             <a:prstDash val="solid"/>
           </a:ln>
@@ -7357,35 +6980,71 @@
       </p:sp>
       <p:sp>
         <p:nvSpPr>
-          <p:cNvPr id="27" name="Text 25"/>
-          <p:cNvSpPr/>
-          <p:nvPr/>
-        </p:nvSpPr>
-        <p:spPr>
-          <a:xfrm>
-            <a:off x="5349240" y="3895344"/>
-            <a:ext cx="2926080" cy="274320"/>
-          </a:xfrm>
-          <a:prstGeom prst="rect">
-            <a:avLst/>
-          </a:prstGeom>
-          <a:noFill/>
-          <a:ln/>
-        </p:spPr>
-        <p:txBody>
-          <a:bodyPr wrap="square" rtlCol="0" anchor="ctr"/>
-          <a:lstStyle/>
-          <a:p>
-            <a:pPr indent="0" marL="0">
-              <a:buNone/>
-            </a:pPr>
-            <a:r>
-              <a:rPr lang="en-US" sz="950" b="1" dirty="0">
+          <p:cNvPr id="13" name="Text 11"/>
+          <p:cNvSpPr/>
+          <p:nvPr/>
+        </p:nvSpPr>
+        <p:spPr>
+          <a:xfrm>
+            <a:off x="1143000" y="4114800"/>
+            <a:ext cx="4297680" cy="228600"/>
+          </a:xfrm>
+          <a:prstGeom prst="rect">
+            <a:avLst/>
+          </a:prstGeom>
+          <a:noFill/>
+          <a:ln/>
+        </p:spPr>
+        <p:txBody>
+          <a:bodyPr wrap="square" rtlCol="0" anchor="ctr"/>
+          <a:lstStyle/>
+          <a:p>
+            <a:pPr indent="0" marL="0">
+              <a:buNone/>
+            </a:pPr>
+            <a:r>
+              <a:rPr lang="en-US" sz="1100" b="1" dirty="0">
                 <a:solidFill>
                   <a:srgbClr val="FFFFFF"/>
                 </a:solidFill>
               </a:rPr>
-              <a:t>Contact Information Integrity</a:t>
+              <a:t>Fix 3: FinOps Cloud Cost Governance</a:t>
+            </a:r>
+            <a:endParaRPr lang="en-US" sz="1100" dirty="0"/>
+          </a:p>
+        </p:txBody>
+      </p:sp>
+      <p:sp>
+        <p:nvSpPr>
+          <p:cNvPr id="14" name="Text 12"/>
+          <p:cNvSpPr/>
+          <p:nvPr/>
+        </p:nvSpPr>
+        <p:spPr>
+          <a:xfrm>
+            <a:off x="1143000" y="4361688"/>
+            <a:ext cx="4297680" cy="438912"/>
+          </a:xfrm>
+          <a:prstGeom prst="rect">
+            <a:avLst/>
+          </a:prstGeom>
+          <a:noFill/>
+          <a:ln/>
+        </p:spPr>
+        <p:txBody>
+          <a:bodyPr wrap="square" rtlCol="0" anchor="ctr"/>
+          <a:lstStyle/>
+          <a:p>
+            <a:pPr indent="0" marL="0">
+              <a:buNone/>
+            </a:pPr>
+            <a:r>
+              <a:rPr lang="en-US" sz="950" dirty="0">
+                <a:solidFill>
+                  <a:srgbClr val="94A3B8"/>
+                </a:solidFill>
+              </a:rPr>
+              <a:t>Injected quarterly infrastructure savings ($140K/yr) alongside technical latency metrics.</a:t>
             </a:r>
             <a:endParaRPr lang="en-US" sz="950" dirty="0"/>
           </a:p>
@@ -7393,50 +7052,14 @@
       </p:sp>
       <p:sp>
         <p:nvSpPr>
-          <p:cNvPr id="28" name="Text 26"/>
-          <p:cNvSpPr/>
-          <p:nvPr/>
-        </p:nvSpPr>
-        <p:spPr>
-          <a:xfrm>
-            <a:off x="8229600" y="3895344"/>
-            <a:ext cx="2651760" cy="274320"/>
-          </a:xfrm>
-          <a:prstGeom prst="rect">
-            <a:avLst/>
-          </a:prstGeom>
-          <a:noFill/>
-          <a:ln/>
-        </p:spPr>
-        <p:txBody>
-          <a:bodyPr wrap="square" rtlCol="0" anchor="ctr"/>
-          <a:lstStyle/>
-          <a:p>
-            <a:pPr algn="r" indent="0" marL="0">
-              <a:buNone/>
-            </a:pPr>
-            <a:r>
-              <a:rPr lang="en-US" sz="850" dirty="0">
-                <a:solidFill>
-                  <a:srgbClr val="10B981"/>
-                </a:solidFill>
-              </a:rPr>
-              <a:t>Passed (Email, Phone &amp; LinkedIn extracted)</a:t>
-            </a:r>
-            <a:endParaRPr lang="en-US" sz="850" dirty="0"/>
-          </a:p>
-        </p:txBody>
-      </p:sp>
-      <p:sp>
-        <p:nvSpPr>
-          <p:cNvPr id="29" name="Shape 27"/>
-          <p:cNvSpPr/>
-          <p:nvPr/>
-        </p:nvSpPr>
-        <p:spPr>
-          <a:xfrm>
-            <a:off x="5212080" y="4334256"/>
-            <a:ext cx="5760720" cy="457200"/>
+          <p:cNvPr id="15" name="Shape 13"/>
+          <p:cNvSpPr/>
+          <p:nvPr/>
+        </p:nvSpPr>
+        <p:spPr>
+          <a:xfrm>
+            <a:off x="1005840" y="4919472"/>
+            <a:ext cx="4572000" cy="804672"/>
           </a:xfrm>
           <a:prstGeom prst="roundRect">
             <a:avLst/>
@@ -7446,7 +7069,7 @@
           </a:solidFill>
           <a:ln w="12700">
             <a:solidFill>
-              <a:srgbClr val="1E293B"/>
+              <a:srgbClr val="23324E"/>
             </a:solidFill>
             <a:prstDash val="solid"/>
           </a:ln>
@@ -7454,35 +7077,71 @@
       </p:sp>
       <p:sp>
         <p:nvSpPr>
-          <p:cNvPr id="30" name="Text 28"/>
-          <p:cNvSpPr/>
-          <p:nvPr/>
-        </p:nvSpPr>
-        <p:spPr>
-          <a:xfrm>
-            <a:off x="5349240" y="4425696"/>
-            <a:ext cx="2926080" cy="274320"/>
-          </a:xfrm>
-          <a:prstGeom prst="rect">
-            <a:avLst/>
-          </a:prstGeom>
-          <a:noFill/>
-          <a:ln/>
-        </p:spPr>
-        <p:txBody>
-          <a:bodyPr wrap="square" rtlCol="0" anchor="ctr"/>
-          <a:lstStyle/>
-          <a:p>
-            <a:pPr indent="0" marL="0">
-              <a:buNone/>
-            </a:pPr>
-            <a:r>
-              <a:rPr lang="en-US" sz="950" b="1" dirty="0">
+          <p:cNvPr id="16" name="Text 14"/>
+          <p:cNvSpPr/>
+          <p:nvPr/>
+        </p:nvSpPr>
+        <p:spPr>
+          <a:xfrm>
+            <a:off x="1143000" y="4992624"/>
+            <a:ext cx="4297680" cy="228600"/>
+          </a:xfrm>
+          <a:prstGeom prst="rect">
+            <a:avLst/>
+          </a:prstGeom>
+          <a:noFill/>
+          <a:ln/>
+        </p:spPr>
+        <p:txBody>
+          <a:bodyPr wrap="square" rtlCol="0" anchor="ctr"/>
+          <a:lstStyle/>
+          <a:p>
+            <a:pPr indent="0" marL="0">
+              <a:buNone/>
+            </a:pPr>
+            <a:r>
+              <a:rPr lang="en-US" sz="1100" b="1" dirty="0">
                 <a:solidFill>
                   <a:srgbClr val="FFFFFF"/>
                 </a:solidFill>
               </a:rPr>
-              <a:t>Standard Date Syntax</a:t>
+              <a:t>Fix 4: Engineering Velocity Anchoring</a:t>
+            </a:r>
+            <a:endParaRPr lang="en-US" sz="1100" dirty="0"/>
+          </a:p>
+        </p:txBody>
+      </p:sp>
+      <p:sp>
+        <p:nvSpPr>
+          <p:cNvPr id="17" name="Text 15"/>
+          <p:cNvSpPr/>
+          <p:nvPr/>
+        </p:nvSpPr>
+        <p:spPr>
+          <a:xfrm>
+            <a:off x="1143000" y="5239512"/>
+            <a:ext cx="4297680" cy="438912"/>
+          </a:xfrm>
+          <a:prstGeom prst="rect">
+            <a:avLst/>
+          </a:prstGeom>
+          <a:noFill/>
+          <a:ln/>
+        </p:spPr>
+        <p:txBody>
+          <a:bodyPr wrap="square" rtlCol="0" anchor="ctr"/>
+          <a:lstStyle/>
+          <a:p>
+            <a:pPr indent="0" marL="0">
+              <a:buNone/>
+            </a:pPr>
+            <a:r>
+              <a:rPr lang="en-US" sz="950" dirty="0">
+                <a:solidFill>
+                  <a:srgbClr val="94A3B8"/>
+                </a:solidFill>
+              </a:rPr>
+              <a:t>Quantified engineering mentorship impact (+34% team sprint velocity, zero rollback incidents).</a:t>
             </a:r>
             <a:endParaRPr lang="en-US" sz="950" dirty="0"/>
           </a:p>
@@ -7490,50 +7149,310 @@
       </p:sp>
       <p:sp>
         <p:nvSpPr>
-          <p:cNvPr id="31" name="Text 29"/>
-          <p:cNvSpPr/>
-          <p:nvPr/>
-        </p:nvSpPr>
-        <p:spPr>
-          <a:xfrm>
-            <a:off x="8229600" y="4425696"/>
-            <a:ext cx="2651760" cy="274320"/>
-          </a:xfrm>
-          <a:prstGeom prst="rect">
-            <a:avLst/>
-          </a:prstGeom>
-          <a:noFill/>
-          <a:ln/>
-        </p:spPr>
-        <p:txBody>
-          <a:bodyPr wrap="square" rtlCol="0" anchor="ctr"/>
-          <a:lstStyle/>
-          <a:p>
-            <a:pPr algn="r" indent="0" marL="0">
-              <a:buNone/>
-            </a:pPr>
-            <a:r>
-              <a:rPr lang="en-US" sz="850" dirty="0">
+          <p:cNvPr id="18" name="Shape 16"/>
+          <p:cNvSpPr/>
+          <p:nvPr/>
+        </p:nvSpPr>
+        <p:spPr>
+          <a:xfrm>
+            <a:off x="6217920" y="1645920"/>
+            <a:ext cx="5212080" cy="4206240"/>
+          </a:xfrm>
+          <a:prstGeom prst="roundRect">
+            <a:avLst/>
+          </a:prstGeom>
+          <a:solidFill>
+            <a:srgbClr val="131B2E"/>
+          </a:solidFill>
+          <a:ln w="19050">
+            <a:solidFill>
+              <a:srgbClr val="6366F1"/>
+            </a:solidFill>
+            <a:prstDash val="solid"/>
+          </a:ln>
+        </p:spPr>
+      </p:sp>
+      <p:sp>
+        <p:nvSpPr>
+          <p:cNvPr id="19" name="Text 17"/>
+          <p:cNvSpPr/>
+          <p:nvPr/>
+        </p:nvSpPr>
+        <p:spPr>
+          <a:xfrm>
+            <a:off x="6492240" y="1874520"/>
+            <a:ext cx="4663440" cy="320040"/>
+          </a:xfrm>
+          <a:prstGeom prst="rect">
+            <a:avLst/>
+          </a:prstGeom>
+          <a:noFill/>
+          <a:ln/>
+        </p:spPr>
+        <p:txBody>
+          <a:bodyPr wrap="square" rtlCol="0" anchor="ctr"/>
+          <a:lstStyle/>
+          <a:p>
+            <a:pPr indent="0" marL="0">
+              <a:buNone/>
+            </a:pPr>
+            <a:r>
+              <a:rPr lang="en-US" sz="1400" b="1" dirty="0">
+                <a:solidFill>
+                  <a:srgbClr val="6366F1"/>
+                </a:solidFill>
+              </a:rPr>
+              <a:t>Keyword Gap Analysis &amp; Alignment Matrix</a:t>
+            </a:r>
+            <a:endParaRPr lang="en-US" sz="1400" dirty="0"/>
+          </a:p>
+        </p:txBody>
+      </p:sp>
+      <p:sp>
+        <p:nvSpPr>
+          <p:cNvPr id="20" name="Text 18"/>
+          <p:cNvSpPr/>
+          <p:nvPr/>
+        </p:nvSpPr>
+        <p:spPr>
+          <a:xfrm>
+            <a:off x="6492240" y="2286000"/>
+            <a:ext cx="4663440" cy="228600"/>
+          </a:xfrm>
+          <a:prstGeom prst="rect">
+            <a:avLst/>
+          </a:prstGeom>
+          <a:noFill/>
+          <a:ln/>
+        </p:spPr>
+        <p:txBody>
+          <a:bodyPr wrap="square" rtlCol="0" anchor="ctr"/>
+          <a:lstStyle/>
+          <a:p>
+            <a:pPr indent="0" marL="0">
+              <a:buNone/>
+            </a:pPr>
+            <a:r>
+              <a:rPr lang="en-US" sz="1100" b="1" dirty="0">
                 <a:solidFill>
                   <a:srgbClr val="10B981"/>
                 </a:solidFill>
               </a:rPr>
-              <a:t>Passed (Month Year - Month Year)</a:t>
-            </a:r>
-            <a:endParaRPr lang="en-US" sz="850" dirty="0"/>
-          </a:p>
-        </p:txBody>
-      </p:sp>
-      <p:sp>
-        <p:nvSpPr>
-          <p:cNvPr id="32" name="Shape 30"/>
-          <p:cNvSpPr/>
-          <p:nvPr/>
-        </p:nvSpPr>
-        <p:spPr>
-          <a:xfrm>
-            <a:off x="5212080" y="4864608"/>
-            <a:ext cx="5760720" cy="457200"/>
+              <a:t>Matched Core Competencies (Verified in Resume):</a:t>
+            </a:r>
+            <a:endParaRPr lang="en-US" sz="1100" dirty="0"/>
+          </a:p>
+        </p:txBody>
+      </p:sp>
+      <p:sp>
+        <p:nvSpPr>
+          <p:cNvPr id="21" name="Text 19"/>
+          <p:cNvSpPr/>
+          <p:nvPr/>
+        </p:nvSpPr>
+        <p:spPr>
+          <a:xfrm>
+            <a:off x="6492240" y="2560320"/>
+            <a:ext cx="4663440" cy="822960"/>
+          </a:xfrm>
+          <a:prstGeom prst="rect">
+            <a:avLst/>
+          </a:prstGeom>
+          <a:noFill/>
+          <a:ln/>
+        </p:spPr>
+        <p:txBody>
+          <a:bodyPr wrap="square" rtlCol="0" anchor="ctr"/>
+          <a:lstStyle/>
+          <a:p>
+            <a:pPr indent="0" marL="0">
+              <a:lnSpc>
+                <a:spcPts val="1600"/>
+              </a:lnSpc>
+              <a:buNone/>
+            </a:pPr>
+            <a:r>
+              <a:rPr lang="en-US" sz="1000" dirty="0">
+                <a:solidFill>
+                  <a:srgbClr val="A7F3D0"/>
+                </a:solidFill>
+              </a:rPr>
+              <a:t>✓ Java 21 / 17 / 11          ✓ Spring Boot 3 &amp; Cloud        ✓ Apache Kafka</a:t>
+            </a:r>
+            <a:endParaRPr lang="en-US" sz="1000" dirty="0"/>
+          </a:p>
+          <a:p>
+            <a:pPr indent="0" marL="0">
+              <a:lnSpc>
+                <a:spcPts val="1600"/>
+              </a:lnSpc>
+              <a:buNone/>
+            </a:pPr>
+            <a:r>
+              <a:rPr lang="en-US" sz="1000" dirty="0">
+                <a:solidFill>
+                  <a:srgbClr val="A7F3D0"/>
+                </a:solidFill>
+              </a:rPr>
+              <a:t>✓ AWS EKS &amp; Kubernetes       ✓ PostgreSQL &amp; Redis           ✓ Microservices &amp; CQRS</a:t>
+            </a:r>
+            <a:endParaRPr lang="en-US" sz="1000" dirty="0"/>
+          </a:p>
+          <a:p>
+            <a:pPr indent="0" marL="0">
+              <a:lnSpc>
+                <a:spcPts val="1600"/>
+              </a:lnSpc>
+              <a:buNone/>
+            </a:pPr>
+            <a:r>
+              <a:rPr lang="en-US" sz="1000" dirty="0">
+                <a:solidFill>
+                  <a:srgbClr val="A7F3D0"/>
+                </a:solidFill>
+              </a:rPr>
+              <a:t>✓ Project Loom (Threads)     ✓ gRPC &amp; Netty                 ✓ JVM ZGC/G1GC Tuning</a:t>
+            </a:r>
+            <a:endParaRPr lang="en-US" sz="1000" dirty="0"/>
+          </a:p>
+        </p:txBody>
+      </p:sp>
+      <p:sp>
+        <p:nvSpPr>
+          <p:cNvPr id="22" name="Text 20"/>
+          <p:cNvSpPr/>
+          <p:nvPr/>
+        </p:nvSpPr>
+        <p:spPr>
+          <a:xfrm>
+            <a:off x="6492240" y="3520440"/>
+            <a:ext cx="4663440" cy="228600"/>
+          </a:xfrm>
+          <a:prstGeom prst="rect">
+            <a:avLst/>
+          </a:prstGeom>
+          <a:noFill/>
+          <a:ln/>
+        </p:spPr>
+        <p:txBody>
+          <a:bodyPr wrap="square" rtlCol="0" anchor="ctr"/>
+          <a:lstStyle/>
+          <a:p>
+            <a:pPr indent="0" marL="0">
+              <a:buNone/>
+            </a:pPr>
+            <a:r>
+              <a:rPr lang="en-US" sz="1100" b="1" dirty="0">
+                <a:solidFill>
+                  <a:srgbClr val="F59E0B"/>
+                </a:solidFill>
+              </a:rPr>
+              <a:t>Crucial Keywords Injected During Optimization:</a:t>
+            </a:r>
+            <a:endParaRPr lang="en-US" sz="1100" dirty="0"/>
+          </a:p>
+        </p:txBody>
+      </p:sp>
+      <p:sp>
+        <p:nvSpPr>
+          <p:cNvPr id="23" name="Text 21"/>
+          <p:cNvSpPr/>
+          <p:nvPr/>
+        </p:nvSpPr>
+        <p:spPr>
+          <a:xfrm>
+            <a:off x="6492240" y="3794760"/>
+            <a:ext cx="4663440" cy="1005840"/>
+          </a:xfrm>
+          <a:prstGeom prst="rect">
+            <a:avLst/>
+          </a:prstGeom>
+          <a:noFill/>
+          <a:ln/>
+        </p:spPr>
+        <p:txBody>
+          <a:bodyPr wrap="square" rtlCol="0" anchor="ctr"/>
+          <a:lstStyle/>
+          <a:p>
+            <a:pPr indent="0" marL="0">
+              <a:lnSpc>
+                <a:spcPts val="1800"/>
+              </a:lnSpc>
+              <a:buNone/>
+            </a:pPr>
+            <a:r>
+              <a:rPr lang="en-US" sz="1000" dirty="0">
+                <a:solidFill>
+                  <a:srgbClr val="FDE68A"/>
+                </a:solidFill>
+              </a:rPr>
+              <a:t>• FinOps Cloud Cost Governance ($ Saved per Quarter)</a:t>
+            </a:r>
+            <a:endParaRPr lang="en-US" sz="1000" dirty="0"/>
+          </a:p>
+          <a:p>
+            <a:pPr indent="0" marL="0">
+              <a:lnSpc>
+                <a:spcPts val="1800"/>
+              </a:lnSpc>
+              <a:buNone/>
+            </a:pPr>
+            <a:r>
+              <a:rPr lang="en-US" sz="1000" dirty="0">
+                <a:solidFill>
+                  <a:srgbClr val="FDE68A"/>
+                </a:solidFill>
+              </a:rPr>
+              <a:t>• Distributed Tracing with OpenTelemetry &amp; JFR</a:t>
+            </a:r>
+            <a:endParaRPr lang="en-US" sz="1000" dirty="0"/>
+          </a:p>
+          <a:p>
+            <a:pPr indent="0" marL="0">
+              <a:lnSpc>
+                <a:spcPts val="1800"/>
+              </a:lnSpc>
+              <a:buNone/>
+            </a:pPr>
+            <a:r>
+              <a:rPr lang="en-US" sz="1000" dirty="0">
+                <a:solidFill>
+                  <a:srgbClr val="FDE68A"/>
+                </a:solidFill>
+              </a:rPr>
+              <a:t>• Chaos Engineering &amp; Gatling Load Profiling</a:t>
+            </a:r>
+            <a:endParaRPr lang="en-US" sz="1000" dirty="0"/>
+          </a:p>
+          <a:p>
+            <a:pPr indent="0" marL="0">
+              <a:lnSpc>
+                <a:spcPts val="1800"/>
+              </a:lnSpc>
+              <a:buNone/>
+            </a:pPr>
+            <a:r>
+              <a:rPr lang="en-US" sz="1000" dirty="0">
+                <a:solidFill>
+                  <a:srgbClr val="FDE68A"/>
+                </a:solidFill>
+              </a:rPr>
+              <a:t>• RFC Architectural Governance &amp; Mentorship Velocity</a:t>
+            </a:r>
+            <a:endParaRPr lang="en-US" sz="1000" dirty="0"/>
+          </a:p>
+        </p:txBody>
+      </p:sp>
+      <p:sp>
+        <p:nvSpPr>
+          <p:cNvPr id="24" name="Shape 22"/>
+          <p:cNvSpPr/>
+          <p:nvPr/>
+        </p:nvSpPr>
+        <p:spPr>
+          <a:xfrm>
+            <a:off x="6492240" y="4892040"/>
+            <a:ext cx="4663440" cy="777240"/>
           </a:xfrm>
           <a:prstGeom prst="roundRect">
             <a:avLst/>
@@ -7543,7 +7462,7 @@
           </a:solidFill>
           <a:ln w="12700">
             <a:solidFill>
-              <a:srgbClr val="1E293B"/>
+              <a:srgbClr val="06B6D4"/>
             </a:solidFill>
             <a:prstDash val="solid"/>
           </a:ln>
@@ -7551,73 +7470,73 @@
       </p:sp>
       <p:sp>
         <p:nvSpPr>
-          <p:cNvPr id="33" name="Text 31"/>
-          <p:cNvSpPr/>
-          <p:nvPr/>
-        </p:nvSpPr>
-        <p:spPr>
-          <a:xfrm>
-            <a:off x="5349240" y="4956048"/>
-            <a:ext cx="2926080" cy="274320"/>
-          </a:xfrm>
-          <a:prstGeom prst="rect">
-            <a:avLst/>
-          </a:prstGeom>
-          <a:noFill/>
-          <a:ln/>
-        </p:spPr>
-        <p:txBody>
-          <a:bodyPr wrap="square" rtlCol="0" anchor="ctr"/>
-          <a:lstStyle/>
-          <a:p>
-            <a:pPr indent="0" marL="0">
-              <a:buNone/>
-            </a:pPr>
-            <a:r>
-              <a:rPr lang="en-US" sz="950" b="1" dirty="0">
-                <a:solidFill>
-                  <a:srgbClr val="FFFFFF"/>
-                </a:solidFill>
-              </a:rPr>
-              <a:t>Tables &amp; Nested Containers</a:t>
+          <p:cNvPr id="25" name="Text 23"/>
+          <p:cNvSpPr/>
+          <p:nvPr/>
+        </p:nvSpPr>
+        <p:spPr>
+          <a:xfrm>
+            <a:off x="6629400" y="5010912"/>
+            <a:ext cx="4389120" cy="228600"/>
+          </a:xfrm>
+          <a:prstGeom prst="rect">
+            <a:avLst/>
+          </a:prstGeom>
+          <a:noFill/>
+          <a:ln/>
+        </p:spPr>
+        <p:txBody>
+          <a:bodyPr wrap="square" rtlCol="0" anchor="ctr"/>
+          <a:lstStyle/>
+          <a:p>
+            <a:pPr indent="0" marL="0">
+              <a:buNone/>
+            </a:pPr>
+            <a:r>
+              <a:rPr lang="en-US" sz="1100" b="1" dirty="0">
+                <a:solidFill>
+                  <a:srgbClr val="06B6D4"/>
+                </a:solidFill>
+              </a:rPr>
+              <a:t>ATS Checklist: 5 of 5 Checks Passed (100% Compliance)</a:t>
+            </a:r>
+            <a:endParaRPr lang="en-US" sz="1100" dirty="0"/>
+          </a:p>
+        </p:txBody>
+      </p:sp>
+      <p:sp>
+        <p:nvSpPr>
+          <p:cNvPr id="26" name="Text 24"/>
+          <p:cNvSpPr/>
+          <p:nvPr/>
+        </p:nvSpPr>
+        <p:spPr>
+          <a:xfrm>
+            <a:off x="6629400" y="5257800"/>
+            <a:ext cx="4389120" cy="320040"/>
+          </a:xfrm>
+          <a:prstGeom prst="rect">
+            <a:avLst/>
+          </a:prstGeom>
+          <a:noFill/>
+          <a:ln/>
+        </p:spPr>
+        <p:txBody>
+          <a:bodyPr wrap="square" rtlCol="0" anchor="ctr"/>
+          <a:lstStyle/>
+          <a:p>
+            <a:pPr indent="0" marL="0">
+              <a:buNone/>
+            </a:pPr>
+            <a:r>
+              <a:rPr lang="en-US" sz="950" dirty="0">
+                <a:solidFill>
+                  <a:srgbClr val="94A3B8"/>
+                </a:solidFill>
+              </a:rPr>
+              <a:t>Fonts: OK  •  Headers: OK  •  Single-Column: OK  •  Dates: OK  •  Contact Info: OK</a:t>
             </a:r>
             <a:endParaRPr lang="en-US" sz="950" dirty="0"/>
-          </a:p>
-        </p:txBody>
-      </p:sp>
-      <p:sp>
-        <p:nvSpPr>
-          <p:cNvPr id="34" name="Text 32"/>
-          <p:cNvSpPr/>
-          <p:nvPr/>
-        </p:nvSpPr>
-        <p:spPr>
-          <a:xfrm>
-            <a:off x="8229600" y="4956048"/>
-            <a:ext cx="2651760" cy="274320"/>
-          </a:xfrm>
-          <a:prstGeom prst="rect">
-            <a:avLst/>
-          </a:prstGeom>
-          <a:noFill/>
-          <a:ln/>
-        </p:spPr>
-        <p:txBody>
-          <a:bodyPr wrap="square" rtlCol="0" anchor="ctr"/>
-          <a:lstStyle/>
-          <a:p>
-            <a:pPr algn="r" indent="0" marL="0">
-              <a:buNone/>
-            </a:pPr>
-            <a:r>
-              <a:rPr lang="en-US" sz="850" dirty="0">
-                <a:solidFill>
-                  <a:srgbClr val="10B981"/>
-                </a:solidFill>
-              </a:rPr>
-              <a:t>Passed (Zero obstruction barriers)</a:t>
-            </a:r>
-            <a:endParaRPr lang="en-US" sz="850" dirty="0"/>
           </a:p>
         </p:txBody>
       </p:sp>
@@ -7683,7 +7602,7 @@
                   <a:srgbClr val="06B6D4"/>
                 </a:solidFill>
               </a:rPr>
-              <a:t>07 / METHODOLOGY DEEP DIVE</a:t>
+              <a:t>07 / SYSTEM RESILIENCY</a:t>
             </a:r>
             <a:endParaRPr lang="en-US" sz="1000" dirty="0"/>
           </a:p>
@@ -7719,7 +7638,7 @@
                   <a:srgbClr val="FFFFFF"/>
                 </a:solidFill>
               </a:rPr>
-              <a:t>5-Pillar ATS Rubric &amp; Google XYZ Formula</a:t>
+              <a:t>System Architecture &amp; 3-Tier Zero-Downtime Cascade</a:t>
             </a:r>
             <a:endParaRPr lang="en-US" sz="2800" dirty="0"/>
           </a:p>
@@ -7734,17 +7653,17 @@
         <p:spPr>
           <a:xfrm>
             <a:off x="731520" y="1645920"/>
-            <a:ext cx="5120640" cy="777240"/>
+            <a:ext cx="2468880" cy="4206240"/>
           </a:xfrm>
           <a:prstGeom prst="roundRect">
             <a:avLst/>
           </a:prstGeom>
           <a:solidFill>
-            <a:srgbClr val="151E32"/>
+            <a:srgbClr val="131B2E"/>
           </a:solidFill>
-          <a:ln w="12700">
+          <a:ln w="19050">
             <a:solidFill>
-              <a:srgbClr val="22314E"/>
+              <a:srgbClr val="06B6D4"/>
             </a:solidFill>
             <a:prstDash val="solid"/>
           </a:ln>
@@ -7758,31 +7677,31 @@
         </p:nvSpPr>
         <p:spPr>
           <a:xfrm>
-            <a:off x="914400" y="1755648"/>
-            <a:ext cx="4754880" cy="274320"/>
-          </a:xfrm>
-          <a:prstGeom prst="rect">
-            <a:avLst/>
-          </a:prstGeom>
-          <a:noFill/>
-          <a:ln/>
-        </p:spPr>
-        <p:txBody>
-          <a:bodyPr wrap="square" rtlCol="0" anchor="ctr"/>
-          <a:lstStyle/>
-          <a:p>
-            <a:pPr indent="0" marL="0">
-              <a:buNone/>
-            </a:pPr>
-            <a:r>
-              <a:rPr lang="en-US" sz="1300" b="1" dirty="0">
+            <a:off x="868680" y="1874520"/>
+            <a:ext cx="2194560" cy="411480"/>
+          </a:xfrm>
+          <a:prstGeom prst="rect">
+            <a:avLst/>
+          </a:prstGeom>
+          <a:noFill/>
+          <a:ln/>
+        </p:spPr>
+        <p:txBody>
+          <a:bodyPr wrap="square" rtlCol="0" anchor="ctr"/>
+          <a:lstStyle/>
+          <a:p>
+            <a:pPr indent="0" marL="0">
+              <a:buNone/>
+            </a:pPr>
+            <a:r>
+              <a:rPr lang="en-US" sz="1400" b="1" dirty="0">
                 <a:solidFill>
                   <a:srgbClr val="06B6D4"/>
                 </a:solidFill>
               </a:rPr>
-              <a:t>ATS Parsability (25%)</a:t>
-            </a:r>
-            <a:endParaRPr lang="en-US" sz="1300" dirty="0"/>
+              <a:t>1. Ingestion Tier</a:t>
+            </a:r>
+            <a:endParaRPr lang="en-US" sz="1400" dirty="0"/>
           </a:p>
         </p:txBody>
       </p:sp>
@@ -7794,31 +7713,85 @@
         </p:nvSpPr>
         <p:spPr>
           <a:xfrm>
-            <a:off x="914400" y="2029968"/>
-            <a:ext cx="4754880" cy="320040"/>
-          </a:xfrm>
-          <a:prstGeom prst="rect">
-            <a:avLst/>
-          </a:prstGeom>
-          <a:noFill/>
-          <a:ln/>
-        </p:spPr>
-        <p:txBody>
-          <a:bodyPr wrap="square" rtlCol="0" anchor="ctr"/>
-          <a:lstStyle/>
-          <a:p>
-            <a:pPr indent="0" marL="0">
-              <a:buNone/>
-            </a:pPr>
-            <a:r>
-              <a:rPr lang="en-US" sz="1050" dirty="0">
+            <a:off x="868680" y="2423160"/>
+            <a:ext cx="2194560" cy="3108960"/>
+          </a:xfrm>
+          <a:prstGeom prst="rect">
+            <a:avLst/>
+          </a:prstGeom>
+          <a:noFill/>
+          <a:ln/>
+        </p:spPr>
+        <p:txBody>
+          <a:bodyPr wrap="square" rtlCol="0" anchor="ctr"/>
+          <a:lstStyle/>
+          <a:p>
+            <a:pPr indent="0" marL="0">
+              <a:lnSpc>
+                <a:spcPts val="1800"/>
+              </a:lnSpc>
+              <a:buNone/>
+            </a:pPr>
+            <a:r>
+              <a:rPr lang="en-US" sz="1150" dirty="0">
                 <a:solidFill>
                   <a:srgbClr val="94A3B8"/>
                 </a:solidFill>
               </a:rPr>
-              <a:t>Single-column structure, standard dates, font cleanliness, heading recognition</a:t>
-            </a:r>
-            <a:endParaRPr lang="en-US" sz="1050" dirty="0"/>
+              <a:t>• Multi-format drag-and-drop</a:t>
+            </a:r>
+            <a:endParaRPr lang="en-US" sz="1150" dirty="0"/>
+          </a:p>
+          <a:p>
+            <a:pPr indent="0" marL="0">
+              <a:lnSpc>
+                <a:spcPts val="1800"/>
+              </a:lnSpc>
+              <a:buNone/>
+            </a:pPr>
+            <a:r>
+              <a:rPr lang="en-US" sz="1150" dirty="0">
+                <a:solidFill>
+                  <a:srgbClr val="94A3B8"/>
+                </a:solidFill>
+              </a:rPr>
+              <a:t>• Canvas High-DPI photo rendering</a:t>
+            </a:r>
+            <a:endParaRPr lang="en-US" sz="1150" dirty="0"/>
+          </a:p>
+          <a:p>
+            <a:pPr indent="0" marL="0">
+              <a:lnSpc>
+                <a:spcPts val="1800"/>
+              </a:lnSpc>
+              <a:buNone/>
+            </a:pPr>
+            <a:r>
+              <a:rPr lang="en-US" sz="1150" dirty="0">
+                <a:solidFill>
+                  <a:srgbClr val="94A3B8"/>
+                </a:solidFill>
+              </a:rPr>
+              <a:t>• Mammoth AST for DOCX parsing</a:t>
+            </a:r>
+            <a:endParaRPr lang="en-US" sz="1150" dirty="0"/>
+          </a:p>
+          <a:p>
+            <a:pPr indent="0" marL="0">
+              <a:lnSpc>
+                <a:spcPts val="1800"/>
+              </a:lnSpc>
+              <a:buNone/>
+            </a:pPr>
+            <a:r>
+              <a:rPr lang="en-US" sz="1150" dirty="0">
+                <a:solidFill>
+                  <a:srgbClr val="94A3B8"/>
+                </a:solidFill>
+              </a:rPr>
+              <a:t>• Base64 inline PDF transmission</a:t>
+            </a:r>
+            <a:endParaRPr lang="en-US" sz="1150" dirty="0"/>
           </a:p>
         </p:txBody>
       </p:sp>
@@ -7830,402 +7803,14 @@
         </p:nvSpPr>
         <p:spPr>
           <a:xfrm>
-            <a:off x="731520" y="2514600"/>
-            <a:ext cx="5120640" cy="777240"/>
+            <a:off x="3474720" y="1645920"/>
+            <a:ext cx="2468880" cy="4206240"/>
           </a:xfrm>
           <a:prstGeom prst="roundRect">
             <a:avLst/>
           </a:prstGeom>
           <a:solidFill>
-            <a:srgbClr val="151E32"/>
-          </a:solidFill>
-          <a:ln w="12700">
-            <a:solidFill>
-              <a:srgbClr val="22314E"/>
-            </a:solidFill>
-            <a:prstDash val="solid"/>
-          </a:ln>
-        </p:spPr>
-      </p:sp>
-      <p:sp>
-        <p:nvSpPr>
-          <p:cNvPr id="8" name="Text 6"/>
-          <p:cNvSpPr/>
-          <p:nvPr/>
-        </p:nvSpPr>
-        <p:spPr>
-          <a:xfrm>
-            <a:off x="914400" y="2624328"/>
-            <a:ext cx="4754880" cy="274320"/>
-          </a:xfrm>
-          <a:prstGeom prst="rect">
-            <a:avLst/>
-          </a:prstGeom>
-          <a:noFill/>
-          <a:ln/>
-        </p:spPr>
-        <p:txBody>
-          <a:bodyPr wrap="square" rtlCol="0" anchor="ctr"/>
-          <a:lstStyle/>
-          <a:p>
-            <a:pPr indent="0" marL="0">
-              <a:buNone/>
-            </a:pPr>
-            <a:r>
-              <a:rPr lang="en-US" sz="1300" b="1" dirty="0">
-                <a:solidFill>
-                  <a:srgbClr val="06B6D4"/>
-                </a:solidFill>
-              </a:rPr>
-              <a:t>Quantifiable Impact (25%)</a:t>
-            </a:r>
-            <a:endParaRPr lang="en-US" sz="1300" dirty="0"/>
-          </a:p>
-        </p:txBody>
-      </p:sp>
-      <p:sp>
-        <p:nvSpPr>
-          <p:cNvPr id="9" name="Text 7"/>
-          <p:cNvSpPr/>
-          <p:nvPr/>
-        </p:nvSpPr>
-        <p:spPr>
-          <a:xfrm>
-            <a:off x="914400" y="2898648"/>
-            <a:ext cx="4754880" cy="320040"/>
-          </a:xfrm>
-          <a:prstGeom prst="rect">
-            <a:avLst/>
-          </a:prstGeom>
-          <a:noFill/>
-          <a:ln/>
-        </p:spPr>
-        <p:txBody>
-          <a:bodyPr wrap="square" rtlCol="0" anchor="ctr"/>
-          <a:lstStyle/>
-          <a:p>
-            <a:pPr indent="0" marL="0">
-              <a:buNone/>
-            </a:pPr>
-            <a:r>
-              <a:rPr lang="en-US" sz="1050" dirty="0">
-                <a:solidFill>
-                  <a:srgbClr val="94A3B8"/>
-                </a:solidFill>
-              </a:rPr>
-              <a:t>Metrics density, revenue/scale markers, p99 latency, TPS, %, and cost savings</a:t>
-            </a:r>
-            <a:endParaRPr lang="en-US" sz="1050" dirty="0"/>
-          </a:p>
-        </p:txBody>
-      </p:sp>
-      <p:sp>
-        <p:nvSpPr>
-          <p:cNvPr id="10" name="Shape 8"/>
-          <p:cNvSpPr/>
-          <p:nvPr/>
-        </p:nvSpPr>
-        <p:spPr>
-          <a:xfrm>
-            <a:off x="731520" y="3383280"/>
-            <a:ext cx="5120640" cy="777240"/>
-          </a:xfrm>
-          <a:prstGeom prst="roundRect">
-            <a:avLst/>
-          </a:prstGeom>
-          <a:solidFill>
-            <a:srgbClr val="151E32"/>
-          </a:solidFill>
-          <a:ln w="12700">
-            <a:solidFill>
-              <a:srgbClr val="22314E"/>
-            </a:solidFill>
-            <a:prstDash val="solid"/>
-          </a:ln>
-        </p:spPr>
-      </p:sp>
-      <p:sp>
-        <p:nvSpPr>
-          <p:cNvPr id="11" name="Text 9"/>
-          <p:cNvSpPr/>
-          <p:nvPr/>
-        </p:nvSpPr>
-        <p:spPr>
-          <a:xfrm>
-            <a:off x="914400" y="3493008"/>
-            <a:ext cx="4754880" cy="274320"/>
-          </a:xfrm>
-          <a:prstGeom prst="rect">
-            <a:avLst/>
-          </a:prstGeom>
-          <a:noFill/>
-          <a:ln/>
-        </p:spPr>
-        <p:txBody>
-          <a:bodyPr wrap="square" rtlCol="0" anchor="ctr"/>
-          <a:lstStyle/>
-          <a:p>
-            <a:pPr indent="0" marL="0">
-              <a:buNone/>
-            </a:pPr>
-            <a:r>
-              <a:rPr lang="en-US" sz="1300" b="1" dirty="0">
-                <a:solidFill>
-                  <a:srgbClr val="06B6D4"/>
-                </a:solidFill>
-              </a:rPr>
-              <a:t>Action Verbs (20%)</a:t>
-            </a:r>
-            <a:endParaRPr lang="en-US" sz="1300" dirty="0"/>
-          </a:p>
-        </p:txBody>
-      </p:sp>
-      <p:sp>
-        <p:nvSpPr>
-          <p:cNvPr id="12" name="Text 10"/>
-          <p:cNvSpPr/>
-          <p:nvPr/>
-        </p:nvSpPr>
-        <p:spPr>
-          <a:xfrm>
-            <a:off x="914400" y="3767328"/>
-            <a:ext cx="4754880" cy="320040"/>
-          </a:xfrm>
-          <a:prstGeom prst="rect">
-            <a:avLst/>
-          </a:prstGeom>
-          <a:noFill/>
-          <a:ln/>
-        </p:spPr>
-        <p:txBody>
-          <a:bodyPr wrap="square" rtlCol="0" anchor="ctr"/>
-          <a:lstStyle/>
-          <a:p>
-            <a:pPr indent="0" marL="0">
-              <a:buNone/>
-            </a:pPr>
-            <a:r>
-              <a:rPr lang="en-US" sz="1050" dirty="0">
-                <a:solidFill>
-                  <a:srgbClr val="94A3B8"/>
-                </a:solidFill>
-              </a:rPr>
-              <a:t>Elimination of passive phrases ("Responsible for", "Helped with") in favor of power verbs</a:t>
-            </a:r>
-            <a:endParaRPr lang="en-US" sz="1050" dirty="0"/>
-          </a:p>
-        </p:txBody>
-      </p:sp>
-      <p:sp>
-        <p:nvSpPr>
-          <p:cNvPr id="13" name="Shape 11"/>
-          <p:cNvSpPr/>
-          <p:nvPr/>
-        </p:nvSpPr>
-        <p:spPr>
-          <a:xfrm>
-            <a:off x="731520" y="4251960"/>
-            <a:ext cx="5120640" cy="777240"/>
-          </a:xfrm>
-          <a:prstGeom prst="roundRect">
-            <a:avLst/>
-          </a:prstGeom>
-          <a:solidFill>
-            <a:srgbClr val="151E32"/>
-          </a:solidFill>
-          <a:ln w="12700">
-            <a:solidFill>
-              <a:srgbClr val="22314E"/>
-            </a:solidFill>
-            <a:prstDash val="solid"/>
-          </a:ln>
-        </p:spPr>
-      </p:sp>
-      <p:sp>
-        <p:nvSpPr>
-          <p:cNvPr id="14" name="Text 12"/>
-          <p:cNvSpPr/>
-          <p:nvPr/>
-        </p:nvSpPr>
-        <p:spPr>
-          <a:xfrm>
-            <a:off x="914400" y="4361688"/>
-            <a:ext cx="4754880" cy="274320"/>
-          </a:xfrm>
-          <a:prstGeom prst="rect">
-            <a:avLst/>
-          </a:prstGeom>
-          <a:noFill/>
-          <a:ln/>
-        </p:spPr>
-        <p:txBody>
-          <a:bodyPr wrap="square" rtlCol="0" anchor="ctr"/>
-          <a:lstStyle/>
-          <a:p>
-            <a:pPr indent="0" marL="0">
-              <a:buNone/>
-            </a:pPr>
-            <a:r>
-              <a:rPr lang="en-US" sz="1300" b="1" dirty="0">
-                <a:solidFill>
-                  <a:srgbClr val="06B6D4"/>
-                </a:solidFill>
-              </a:rPr>
-              <a:t>Keyword Alignment (20%)</a:t>
-            </a:r>
-            <a:endParaRPr lang="en-US" sz="1300" dirty="0"/>
-          </a:p>
-        </p:txBody>
-      </p:sp>
-      <p:sp>
-        <p:nvSpPr>
-          <p:cNvPr id="15" name="Text 13"/>
-          <p:cNvSpPr/>
-          <p:nvPr/>
-        </p:nvSpPr>
-        <p:spPr>
-          <a:xfrm>
-            <a:off x="914400" y="4636008"/>
-            <a:ext cx="4754880" cy="320040"/>
-          </a:xfrm>
-          <a:prstGeom prst="rect">
-            <a:avLst/>
-          </a:prstGeom>
-          <a:noFill/>
-          <a:ln/>
-        </p:spPr>
-        <p:txBody>
-          <a:bodyPr wrap="square" rtlCol="0" anchor="ctr"/>
-          <a:lstStyle/>
-          <a:p>
-            <a:pPr indent="0" marL="0">
-              <a:buNone/>
-            </a:pPr>
-            <a:r>
-              <a:rPr lang="en-US" sz="1050" dirty="0">
-                <a:solidFill>
-                  <a:srgbClr val="94A3B8"/>
-                </a:solidFill>
-              </a:rPr>
-              <a:t>Direct taxonomy matching against target job description requirements</a:t>
-            </a:r>
-            <a:endParaRPr lang="en-US" sz="1050" dirty="0"/>
-          </a:p>
-        </p:txBody>
-      </p:sp>
-      <p:sp>
-        <p:nvSpPr>
-          <p:cNvPr id="16" name="Shape 14"/>
-          <p:cNvSpPr/>
-          <p:nvPr/>
-        </p:nvSpPr>
-        <p:spPr>
-          <a:xfrm>
-            <a:off x="731520" y="5120640"/>
-            <a:ext cx="5120640" cy="777240"/>
-          </a:xfrm>
-          <a:prstGeom prst="roundRect">
-            <a:avLst/>
-          </a:prstGeom>
-          <a:solidFill>
-            <a:srgbClr val="151E32"/>
-          </a:solidFill>
-          <a:ln w="12700">
-            <a:solidFill>
-              <a:srgbClr val="22314E"/>
-            </a:solidFill>
-            <a:prstDash val="solid"/>
-          </a:ln>
-        </p:spPr>
-      </p:sp>
-      <p:sp>
-        <p:nvSpPr>
-          <p:cNvPr id="17" name="Text 15"/>
-          <p:cNvSpPr/>
-          <p:nvPr/>
-        </p:nvSpPr>
-        <p:spPr>
-          <a:xfrm>
-            <a:off x="914400" y="5230368"/>
-            <a:ext cx="4754880" cy="274320"/>
-          </a:xfrm>
-          <a:prstGeom prst="rect">
-            <a:avLst/>
-          </a:prstGeom>
-          <a:noFill/>
-          <a:ln/>
-        </p:spPr>
-        <p:txBody>
-          <a:bodyPr wrap="square" rtlCol="0" anchor="ctr"/>
-          <a:lstStyle/>
-          <a:p>
-            <a:pPr indent="0" marL="0">
-              <a:buNone/>
-            </a:pPr>
-            <a:r>
-              <a:rPr lang="en-US" sz="1300" b="1" dirty="0">
-                <a:solidFill>
-                  <a:srgbClr val="06B6D4"/>
-                </a:solidFill>
-              </a:rPr>
-              <a:t>Formatting &amp; Brevity (10%)</a:t>
-            </a:r>
-            <a:endParaRPr lang="en-US" sz="1300" dirty="0"/>
-          </a:p>
-        </p:txBody>
-      </p:sp>
-      <p:sp>
-        <p:nvSpPr>
-          <p:cNvPr id="18" name="Text 16"/>
-          <p:cNvSpPr/>
-          <p:nvPr/>
-        </p:nvSpPr>
-        <p:spPr>
-          <a:xfrm>
-            <a:off x="914400" y="5504688"/>
-            <a:ext cx="4754880" cy="320040"/>
-          </a:xfrm>
-          <a:prstGeom prst="rect">
-            <a:avLst/>
-          </a:prstGeom>
-          <a:noFill/>
-          <a:ln/>
-        </p:spPr>
-        <p:txBody>
-          <a:bodyPr wrap="square" rtlCol="0" anchor="ctr"/>
-          <a:lstStyle/>
-          <a:p>
-            <a:pPr indent="0" marL="0">
-              <a:buNone/>
-            </a:pPr>
-            <a:r>
-              <a:rPr lang="en-US" sz="1050" dirty="0">
-                <a:solidFill>
-                  <a:srgbClr val="94A3B8"/>
-                </a:solidFill>
-              </a:rPr>
-              <a:t>Bullet density, executive summary framing, credentials and certifications order</a:t>
-            </a:r>
-            <a:endParaRPr lang="en-US" sz="1050" dirty="0"/>
-          </a:p>
-        </p:txBody>
-      </p:sp>
-      <p:sp>
-        <p:nvSpPr>
-          <p:cNvPr id="19" name="Shape 17"/>
-          <p:cNvSpPr/>
-          <p:nvPr/>
-        </p:nvSpPr>
-        <p:spPr>
-          <a:xfrm>
-            <a:off x="6217920" y="1645920"/>
-            <a:ext cx="5212080" cy="4206240"/>
-          </a:xfrm>
-          <a:prstGeom prst="roundRect">
-            <a:avLst/>
-          </a:prstGeom>
-          <a:solidFill>
-            <a:srgbClr val="151E32"/>
+            <a:srgbClr val="131B2E"/>
           </a:solidFill>
           <a:ln w="19050">
             <a:solidFill>
@@ -8237,96 +7822,150 @@
       </p:sp>
       <p:sp>
         <p:nvSpPr>
-          <p:cNvPr id="20" name="Text 18"/>
-          <p:cNvSpPr/>
-          <p:nvPr/>
-        </p:nvSpPr>
-        <p:spPr>
-          <a:xfrm>
-            <a:off x="6492240" y="1920240"/>
-            <a:ext cx="4663440" cy="365760"/>
-          </a:xfrm>
-          <a:prstGeom prst="rect">
-            <a:avLst/>
-          </a:prstGeom>
-          <a:noFill/>
-          <a:ln/>
-        </p:spPr>
-        <p:txBody>
-          <a:bodyPr wrap="square" rtlCol="0" anchor="ctr"/>
-          <a:lstStyle/>
-          <a:p>
-            <a:pPr indent="0" marL="0">
-              <a:buNone/>
-            </a:pPr>
-            <a:r>
-              <a:rPr lang="en-US" sz="1600" b="1" dirty="0">
+          <p:cNvPr id="8" name="Text 6"/>
+          <p:cNvSpPr/>
+          <p:nvPr/>
+        </p:nvSpPr>
+        <p:spPr>
+          <a:xfrm>
+            <a:off x="3611880" y="1874520"/>
+            <a:ext cx="2194560" cy="411480"/>
+          </a:xfrm>
+          <a:prstGeom prst="rect">
+            <a:avLst/>
+          </a:prstGeom>
+          <a:noFill/>
+          <a:ln/>
+        </p:spPr>
+        <p:txBody>
+          <a:bodyPr wrap="square" rtlCol="0" anchor="ctr"/>
+          <a:lstStyle/>
+          <a:p>
+            <a:pPr indent="0" marL="0">
+              <a:buNone/>
+            </a:pPr>
+            <a:r>
+              <a:rPr lang="en-US" sz="1400" b="1" dirty="0">
                 <a:solidFill>
                   <a:srgbClr val="6366F1"/>
                 </a:solidFill>
               </a:rPr>
-              <a:t>Google XYZ Optimization Formula</a:t>
-            </a:r>
-            <a:endParaRPr lang="en-US" sz="1600" dirty="0"/>
-          </a:p>
-        </p:txBody>
-      </p:sp>
-      <p:sp>
-        <p:nvSpPr>
-          <p:cNvPr id="21" name="Text 19"/>
-          <p:cNvSpPr/>
-          <p:nvPr/>
-        </p:nvSpPr>
-        <p:spPr>
-          <a:xfrm>
-            <a:off x="6492240" y="2377440"/>
-            <a:ext cx="4663440" cy="457200"/>
-          </a:xfrm>
-          <a:prstGeom prst="rect">
-            <a:avLst/>
-          </a:prstGeom>
-          <a:noFill/>
-          <a:ln/>
-        </p:spPr>
-        <p:txBody>
-          <a:bodyPr wrap="square" rtlCol="0" anchor="ctr"/>
-          <a:lstStyle/>
-          <a:p>
-            <a:pPr indent="0" marL="0">
-              <a:buNone/>
-            </a:pPr>
-            <a:r>
-              <a:rPr lang="en-US" sz="1300" b="1" dirty="0">
-                <a:solidFill>
-                  <a:srgbClr val="FFFFFF"/>
-                </a:solidFill>
-              </a:rPr>
-              <a:t>Accomplished [X], as measured by [Y], by doing [Z]</a:t>
-            </a:r>
-            <a:endParaRPr lang="en-US" sz="1300" dirty="0"/>
-          </a:p>
-        </p:txBody>
-      </p:sp>
-      <p:sp>
-        <p:nvSpPr>
-          <p:cNvPr id="22" name="Shape 20"/>
-          <p:cNvSpPr/>
-          <p:nvPr/>
-        </p:nvSpPr>
-        <p:spPr>
-          <a:xfrm>
-            <a:off x="6492240" y="2926080"/>
-            <a:ext cx="4663440" cy="1188720"/>
+              <a:t>2. Express Gateway</a:t>
+            </a:r>
+            <a:endParaRPr lang="en-US" sz="1400" dirty="0"/>
+          </a:p>
+        </p:txBody>
+      </p:sp>
+      <p:sp>
+        <p:nvSpPr>
+          <p:cNvPr id="9" name="Text 7"/>
+          <p:cNvSpPr/>
+          <p:nvPr/>
+        </p:nvSpPr>
+        <p:spPr>
+          <a:xfrm>
+            <a:off x="3611880" y="2423160"/>
+            <a:ext cx="2194560" cy="3108960"/>
+          </a:xfrm>
+          <a:prstGeom prst="rect">
+            <a:avLst/>
+          </a:prstGeom>
+          <a:noFill/>
+          <a:ln/>
+        </p:spPr>
+        <p:txBody>
+          <a:bodyPr wrap="square" rtlCol="0" anchor="ctr"/>
+          <a:lstStyle/>
+          <a:p>
+            <a:pPr indent="0" marL="0">
+              <a:lnSpc>
+                <a:spcPts val="1800"/>
+              </a:lnSpc>
+              <a:buNone/>
+            </a:pPr>
+            <a:r>
+              <a:rPr lang="en-US" sz="1150" dirty="0">
+                <a:solidFill>
+                  <a:srgbClr val="94A3B8"/>
+                </a:solidFill>
+              </a:rPr>
+              <a:t>• 50MB payload streaming</a:t>
+            </a:r>
+            <a:endParaRPr lang="en-US" sz="1150" dirty="0"/>
+          </a:p>
+          <a:p>
+            <a:pPr indent="0" marL="0">
+              <a:lnSpc>
+                <a:spcPts val="1800"/>
+              </a:lnSpc>
+              <a:buNone/>
+            </a:pPr>
+            <a:r>
+              <a:rPr lang="en-US" sz="1150" dirty="0">
+                <a:solidFill>
+                  <a:srgbClr val="94A3B8"/>
+                </a:solidFill>
+              </a:rPr>
+              <a:t>• SHA-256 LRU cache for repeat scans</a:t>
+            </a:r>
+            <a:endParaRPr lang="en-US" sz="1150" dirty="0"/>
+          </a:p>
+          <a:p>
+            <a:pPr indent="0" marL="0">
+              <a:lnSpc>
+                <a:spcPts val="1800"/>
+              </a:lnSpc>
+              <a:buNone/>
+            </a:pPr>
+            <a:r>
+              <a:rPr lang="en-US" sz="1150" dirty="0">
+                <a:solidFill>
+                  <a:srgbClr val="94A3B8"/>
+                </a:solidFill>
+              </a:rPr>
+              <a:t>• MIME normalization &amp; fallback</a:t>
+            </a:r>
+            <a:endParaRPr lang="en-US" sz="1150" dirty="0"/>
+          </a:p>
+          <a:p>
+            <a:pPr indent="0" marL="0">
+              <a:lnSpc>
+                <a:spcPts val="1800"/>
+              </a:lnSpc>
+              <a:buNone/>
+            </a:pPr>
+            <a:r>
+              <a:rPr lang="en-US" sz="1150" dirty="0">
+                <a:solidFill>
+                  <a:srgbClr val="94A3B8"/>
+                </a:solidFill>
+              </a:rPr>
+              <a:t>• Sub-millisecond routing layer</a:t>
+            </a:r>
+            <a:endParaRPr lang="en-US" sz="1150" dirty="0"/>
+          </a:p>
+        </p:txBody>
+      </p:sp>
+      <p:sp>
+        <p:nvSpPr>
+          <p:cNvPr id="10" name="Shape 8"/>
+          <p:cNvSpPr/>
+          <p:nvPr/>
+        </p:nvSpPr>
+        <p:spPr>
+          <a:xfrm>
+            <a:off x="6217920" y="1645920"/>
+            <a:ext cx="2468880" cy="4206240"/>
           </a:xfrm>
           <a:prstGeom prst="roundRect">
             <a:avLst/>
           </a:prstGeom>
           <a:solidFill>
-            <a:srgbClr val="181424"/>
+            <a:srgbClr val="131B2E"/>
           </a:solidFill>
-          <a:ln w="12700">
+          <a:ln w="19050">
             <a:solidFill>
-              <a:srgbClr val="F43F5E"/>
+              <a:srgbClr val="F59E0B"/>
             </a:solidFill>
             <a:prstDash val="solid"/>
           </a:ln>
@@ -8334,94 +7973,148 @@
       </p:sp>
       <p:sp>
         <p:nvSpPr>
-          <p:cNvPr id="23" name="Text 21"/>
-          <p:cNvSpPr/>
-          <p:nvPr/>
-        </p:nvSpPr>
-        <p:spPr>
-          <a:xfrm>
-            <a:off x="6629400" y="3017520"/>
-            <a:ext cx="4389120" cy="228600"/>
-          </a:xfrm>
-          <a:prstGeom prst="rect">
-            <a:avLst/>
-          </a:prstGeom>
-          <a:noFill/>
-          <a:ln/>
-        </p:spPr>
-        <p:txBody>
-          <a:bodyPr wrap="square" rtlCol="0" anchor="ctr"/>
-          <a:lstStyle/>
-          <a:p>
-            <a:pPr indent="0" marL="0">
-              <a:buNone/>
-            </a:pPr>
-            <a:r>
-              <a:rPr lang="en-US" sz="1000" b="1" dirty="0">
-                <a:solidFill>
-                  <a:srgbClr val="F43F5E"/>
-                </a:solidFill>
-              </a:rPr>
-              <a:t>WEAK ORIGINAL (Duty Statement):</a:t>
-            </a:r>
-            <a:endParaRPr lang="en-US" sz="1000" dirty="0"/>
-          </a:p>
-        </p:txBody>
-      </p:sp>
-      <p:sp>
-        <p:nvSpPr>
-          <p:cNvPr id="24" name="Text 22"/>
-          <p:cNvSpPr/>
-          <p:nvPr/>
-        </p:nvSpPr>
-        <p:spPr>
-          <a:xfrm>
-            <a:off x="6629400" y="3246120"/>
-            <a:ext cx="4389120" cy="731520"/>
-          </a:xfrm>
-          <a:prstGeom prst="rect">
-            <a:avLst/>
-          </a:prstGeom>
-          <a:noFill/>
-          <a:ln/>
-        </p:spPr>
-        <p:txBody>
-          <a:bodyPr wrap="square" rtlCol="0" anchor="ctr"/>
-          <a:lstStyle/>
-          <a:p>
-            <a:pPr indent="0" marL="0">
-              <a:buNone/>
-            </a:pPr>
-            <a:r>
-              <a:rPr lang="en-US" sz="1100" dirty="0">
+          <p:cNvPr id="11" name="Text 9"/>
+          <p:cNvSpPr/>
+          <p:nvPr/>
+        </p:nvSpPr>
+        <p:spPr>
+          <a:xfrm>
+            <a:off x="6355080" y="1874520"/>
+            <a:ext cx="2194560" cy="411480"/>
+          </a:xfrm>
+          <a:prstGeom prst="rect">
+            <a:avLst/>
+          </a:prstGeom>
+          <a:noFill/>
+          <a:ln/>
+        </p:spPr>
+        <p:txBody>
+          <a:bodyPr wrap="square" rtlCol="0" anchor="ctr"/>
+          <a:lstStyle/>
+          <a:p>
+            <a:pPr indent="0" marL="0">
+              <a:buNone/>
+            </a:pPr>
+            <a:r>
+              <a:rPr lang="en-US" sz="1400" b="1" dirty="0">
+                <a:solidFill>
+                  <a:srgbClr val="F59E0B"/>
+                </a:solidFill>
+              </a:rPr>
+              <a:t>3. Model Cascade Tier</a:t>
+            </a:r>
+            <a:endParaRPr lang="en-US" sz="1400" dirty="0"/>
+          </a:p>
+        </p:txBody>
+      </p:sp>
+      <p:sp>
+        <p:nvSpPr>
+          <p:cNvPr id="12" name="Text 10"/>
+          <p:cNvSpPr/>
+          <p:nvPr/>
+        </p:nvSpPr>
+        <p:spPr>
+          <a:xfrm>
+            <a:off x="6355080" y="2423160"/>
+            <a:ext cx="2194560" cy="3108960"/>
+          </a:xfrm>
+          <a:prstGeom prst="rect">
+            <a:avLst/>
+          </a:prstGeom>
+          <a:noFill/>
+          <a:ln/>
+        </p:spPr>
+        <p:txBody>
+          <a:bodyPr wrap="square" rtlCol="0" anchor="ctr"/>
+          <a:lstStyle/>
+          <a:p>
+            <a:pPr indent="0" marL="0">
+              <a:lnSpc>
+                <a:spcPts val="1800"/>
+              </a:lnSpc>
+              <a:buNone/>
+            </a:pPr>
+            <a:r>
+              <a:rPr lang="en-US" sz="1150" dirty="0">
                 <a:solidFill>
                   <a:srgbClr val="94A3B8"/>
                 </a:solidFill>
               </a:rPr>
-              <a:t>"Responsible for reviewing system design documents and helping engineers with backend deployments."</a:t>
-            </a:r>
-            <a:endParaRPr lang="en-US" sz="1100" dirty="0"/>
-          </a:p>
-        </p:txBody>
-      </p:sp>
-      <p:sp>
-        <p:nvSpPr>
-          <p:cNvPr id="25" name="Shape 23"/>
-          <p:cNvSpPr/>
-          <p:nvPr/>
-        </p:nvSpPr>
-        <p:spPr>
-          <a:xfrm>
-            <a:off x="6492240" y="4297680"/>
-            <a:ext cx="4663440" cy="1371600"/>
+              <a:t>• Primary: Gemini 3.8 Flash (Low)</a:t>
+            </a:r>
+            <a:endParaRPr lang="en-US" sz="1150" dirty="0"/>
+          </a:p>
+          <a:p>
+            <a:pPr indent="0" marL="0">
+              <a:lnSpc>
+                <a:spcPts val="1800"/>
+              </a:lnSpc>
+              <a:buNone/>
+            </a:pPr>
+            <a:r>
+              <a:rPr lang="en-US" sz="1150" dirty="0">
+                <a:solidFill>
+                  <a:srgbClr val="94A3B8"/>
+                </a:solidFill>
+              </a:rPr>
+              <a:t>• Tier 2: Gemini Flash Latest</a:t>
+            </a:r>
+            <a:endParaRPr lang="en-US" sz="1150" dirty="0"/>
+          </a:p>
+          <a:p>
+            <a:pPr indent="0" marL="0">
+              <a:lnSpc>
+                <a:spcPts val="1800"/>
+              </a:lnSpc>
+              <a:buNone/>
+            </a:pPr>
+            <a:r>
+              <a:rPr lang="en-US" sz="1150" dirty="0">
+                <a:solidFill>
+                  <a:srgbClr val="94A3B8"/>
+                </a:solidFill>
+              </a:rPr>
+              <a:t>• Tier 3: Gemini 3.1 Flash Lite</a:t>
+            </a:r>
+            <a:endParaRPr lang="en-US" sz="1150" dirty="0"/>
+          </a:p>
+          <a:p>
+            <a:pPr indent="0" marL="0">
+              <a:lnSpc>
+                <a:spcPts val="1800"/>
+              </a:lnSpc>
+              <a:buNone/>
+            </a:pPr>
+            <a:r>
+              <a:rPr lang="en-US" sz="1150" dirty="0">
+                <a:solidFill>
+                  <a:srgbClr val="94A3B8"/>
+                </a:solidFill>
+              </a:rPr>
+              <a:t>• Exponential backoff &amp; jitter</a:t>
+            </a:r>
+            <a:endParaRPr lang="en-US" sz="1150" dirty="0"/>
+          </a:p>
+        </p:txBody>
+      </p:sp>
+      <p:sp>
+        <p:nvSpPr>
+          <p:cNvPr id="13" name="Shape 11"/>
+          <p:cNvSpPr/>
+          <p:nvPr/>
+        </p:nvSpPr>
+        <p:spPr>
+          <a:xfrm>
+            <a:off x="8961120" y="1645920"/>
+            <a:ext cx="2468880" cy="4206240"/>
           </a:xfrm>
           <a:prstGeom prst="roundRect">
             <a:avLst/>
           </a:prstGeom>
           <a:solidFill>
-            <a:srgbClr val="0D1E18"/>
+            <a:srgbClr val="131B2E"/>
           </a:solidFill>
-          <a:ln w="12700">
+          <a:ln w="19050">
             <a:solidFill>
               <a:srgbClr val="10B981"/>
             </a:solidFill>
@@ -8431,73 +8124,127 @@
       </p:sp>
       <p:sp>
         <p:nvSpPr>
-          <p:cNvPr id="26" name="Text 24"/>
-          <p:cNvSpPr/>
-          <p:nvPr/>
-        </p:nvSpPr>
-        <p:spPr>
-          <a:xfrm>
-            <a:off x="6629400" y="4389120"/>
-            <a:ext cx="4389120" cy="228600"/>
-          </a:xfrm>
-          <a:prstGeom prst="rect">
-            <a:avLst/>
-          </a:prstGeom>
-          <a:noFill/>
-          <a:ln/>
-        </p:spPr>
-        <p:txBody>
-          <a:bodyPr wrap="square" rtlCol="0" anchor="ctr"/>
-          <a:lstStyle/>
-          <a:p>
-            <a:pPr indent="0" marL="0">
-              <a:buNone/>
-            </a:pPr>
-            <a:r>
-              <a:rPr lang="en-US" sz="1000" b="1" dirty="0">
+          <p:cNvPr id="14" name="Text 12"/>
+          <p:cNvSpPr/>
+          <p:nvPr/>
+        </p:nvSpPr>
+        <p:spPr>
+          <a:xfrm>
+            <a:off x="9098280" y="1874520"/>
+            <a:ext cx="2194560" cy="411480"/>
+          </a:xfrm>
+          <a:prstGeom prst="rect">
+            <a:avLst/>
+          </a:prstGeom>
+          <a:noFill/>
+          <a:ln/>
+        </p:spPr>
+        <p:txBody>
+          <a:bodyPr wrap="square" rtlCol="0" anchor="ctr"/>
+          <a:lstStyle/>
+          <a:p>
+            <a:pPr indent="0" marL="0">
+              <a:buNone/>
+            </a:pPr>
+            <a:r>
+              <a:rPr lang="en-US" sz="1400" b="1" dirty="0">
                 <a:solidFill>
                   <a:srgbClr val="10B981"/>
                 </a:solidFill>
               </a:rPr>
-              <a:t>OPTIMIZED XYZ BULLET (High-Impact ROI):</a:t>
-            </a:r>
-            <a:endParaRPr lang="en-US" sz="1000" dirty="0"/>
-          </a:p>
-        </p:txBody>
-      </p:sp>
-      <p:sp>
-        <p:nvSpPr>
-          <p:cNvPr id="27" name="Text 25"/>
-          <p:cNvSpPr/>
-          <p:nvPr/>
-        </p:nvSpPr>
-        <p:spPr>
-          <a:xfrm>
-            <a:off x="6629400" y="4617720"/>
-            <a:ext cx="4389120" cy="868680"/>
-          </a:xfrm>
-          <a:prstGeom prst="rect">
-            <a:avLst/>
-          </a:prstGeom>
-          <a:noFill/>
-          <a:ln/>
-        </p:spPr>
-        <p:txBody>
-          <a:bodyPr wrap="square" rtlCol="0" anchor="ctr"/>
-          <a:lstStyle/>
-          <a:p>
-            <a:pPr indent="0" marL="0">
-              <a:buNone/>
-            </a:pPr>
-            <a:r>
-              <a:rPr lang="en-US" sz="1100" dirty="0">
-                <a:solidFill>
-                  <a:srgbClr val="FFFFFF"/>
-                </a:solidFill>
-              </a:rPr>
-              <a:t>"Spearheaded 24+ RFC architectural design reviews and mentored 12 engineers, accelerating sprint velocity by 34% and cutting production rollback incidents to zero."</a:t>
-            </a:r>
-            <a:endParaRPr lang="en-US" sz="1100" dirty="0"/>
+              <a:t>4. Local CPRW Shield</a:t>
+            </a:r>
+            <a:endParaRPr lang="en-US" sz="1400" dirty="0"/>
+          </a:p>
+        </p:txBody>
+      </p:sp>
+      <p:sp>
+        <p:nvSpPr>
+          <p:cNvPr id="15" name="Text 13"/>
+          <p:cNvSpPr/>
+          <p:nvPr/>
+        </p:nvSpPr>
+        <p:spPr>
+          <a:xfrm>
+            <a:off x="9098280" y="2423160"/>
+            <a:ext cx="2194560" cy="3108960"/>
+          </a:xfrm>
+          <a:prstGeom prst="rect">
+            <a:avLst/>
+          </a:prstGeom>
+          <a:noFill/>
+          <a:ln/>
+        </p:spPr>
+        <p:txBody>
+          <a:bodyPr wrap="square" rtlCol="0" anchor="ctr"/>
+          <a:lstStyle/>
+          <a:p>
+            <a:pPr indent="0" marL="0">
+              <a:lnSpc>
+                <a:spcPts val="1800"/>
+              </a:lnSpc>
+              <a:buNone/>
+            </a:pPr>
+            <a:r>
+              <a:rPr lang="en-US" sz="1150" dirty="0">
+                <a:solidFill>
+                  <a:srgbClr val="94A3B8"/>
+                </a:solidFill>
+              </a:rPr>
+              <a:t>• Zero-downtime heuristic parser</a:t>
+            </a:r>
+            <a:endParaRPr lang="en-US" sz="1150" dirty="0"/>
+          </a:p>
+          <a:p>
+            <a:pPr indent="0" marL="0">
+              <a:lnSpc>
+                <a:spcPts val="1800"/>
+              </a:lnSpc>
+              <a:buNone/>
+            </a:pPr>
+            <a:r>
+              <a:rPr lang="en-US" sz="1150" dirty="0">
+                <a:solidFill>
+                  <a:srgbClr val="94A3B8"/>
+                </a:solidFill>
+              </a:rPr>
+              <a:t>• Regex verb &amp; metrics extraction</a:t>
+            </a:r>
+            <a:endParaRPr lang="en-US" sz="1150" dirty="0"/>
+          </a:p>
+          <a:p>
+            <a:pPr indent="0" marL="0">
+              <a:lnSpc>
+                <a:spcPts val="1800"/>
+              </a:lnSpc>
+              <a:buNone/>
+            </a:pPr>
+            <a:r>
+              <a:rPr lang="en-US" sz="1150" dirty="0">
+                <a:solidFill>
+                  <a:srgbClr val="94A3B8"/>
+                </a:solidFill>
+              </a:rPr>
+              <a:t>• Google XYZ formula synthesizer</a:t>
+            </a:r>
+            <a:endParaRPr lang="en-US" sz="1150" dirty="0"/>
+          </a:p>
+          <a:p>
+            <a:pPr indent="0" marL="0">
+              <a:lnSpc>
+                <a:spcPts val="1800"/>
+              </a:lnSpc>
+              <a:buNone/>
+            </a:pPr>
+            <a:r>
+              <a:rPr lang="en-US" sz="1150" dirty="0">
+                <a:solidFill>
+                  <a:srgbClr val="94A3B8"/>
+                </a:solidFill>
+              </a:rPr>
+              <a:t>• &lt;10ms execution on cloud spike</a:t>
+            </a:r>
+            <a:endParaRPr lang="en-US" sz="1150" dirty="0"/>
           </a:p>
         </p:txBody>
       </p:sp>
@@ -8620,7 +8367,7 @@
             <a:avLst/>
           </a:prstGeom>
           <a:solidFill>
-            <a:srgbClr val="151E32"/>
+            <a:srgbClr val="131B2E"/>
           </a:solidFill>
           <a:ln w="19050">
             <a:solidFill>
@@ -8753,7 +8500,7 @@
             <a:avLst/>
           </a:prstGeom>
           <a:solidFill>
-            <a:srgbClr val="151E32"/>
+            <a:srgbClr val="131B2E"/>
           </a:solidFill>
           <a:ln w="19050">
             <a:solidFill>
@@ -8886,7 +8633,7 @@
             <a:avLst/>
           </a:prstGeom>
           <a:solidFill>
-            <a:srgbClr val="151E32"/>
+            <a:srgbClr val="131B2E"/>
           </a:solidFill>
           <a:ln w="19050">
             <a:solidFill>
@@ -9019,7 +8766,7 @@
             <a:avLst/>
           </a:prstGeom>
           <a:solidFill>
-            <a:srgbClr val="151E32"/>
+            <a:srgbClr val="131B2E"/>
           </a:solidFill>
           <a:ln w="19050">
             <a:solidFill>
@@ -9152,11 +8899,11 @@
             <a:avLst/>
           </a:prstGeom>
           <a:solidFill>
-            <a:srgbClr val="151E32"/>
+            <a:srgbClr val="131B2E"/>
           </a:solidFill>
           <a:ln w="12700">
             <a:solidFill>
-              <a:srgbClr val="22314E"/>
+              <a:srgbClr val="23324E"/>
             </a:solidFill>
             <a:prstDash val="solid"/>
           </a:ln>
